--- a/assets/pycobytes.pptx
+++ b/assets/pycobytes.pptx
@@ -16,6 +16,9 @@
     <p:sldId id="259" r:id="rId10"/>
     <p:sldId id="264" r:id="rId11"/>
     <p:sldId id="263" r:id="rId12"/>
+    <p:sldId id="267" r:id="rId13"/>
+    <p:sldId id="268" r:id="rId14"/>
+    <p:sldId id="269" r:id="rId15"/>
   </p:sldIdLst>
   <p:sldSz cx="12192000" cy="6858000"/>
   <p:notesSz cx="6858000" cy="9144000"/>
@@ -1251,13 +1254,6 @@
   <p:clrMapOvr>
     <a:masterClrMapping/>
   </p:clrMapOvr>
-  <p:timing>
-    <p:tnLst>
-      <p:par>
-        <p:cTn id="1" dur="indefinite" restart="never" nodeType="tmRoot"/>
-      </p:par>
-    </p:tnLst>
-  </p:timing>
 </p:sld>
 </file>
 
@@ -1395,7 +1391,7 @@
               <a:tabLst/>
             </a:pPr>
             <a:r>
-              <a:rPr kumimoji="0" lang="en-US" altLang="en-US" sz="3000" b="0" i="0" u="none" strike="noStrike" cap="none" normalizeH="0" baseline="0" dirty="0" smtClean="0">
+              <a:rPr kumimoji="0" lang="en-US" altLang="en-US" sz="3000" b="0" i="0" u="none" strike="noStrike" cap="none" normalizeH="0" baseline="0" dirty="0">
                 <a:ln>
                   <a:noFill/>
                 </a:ln>
@@ -1408,7 +1404,7 @@
               <a:t>for</a:t>
             </a:r>
             <a:r>
-              <a:rPr kumimoji="0" lang="en-US" altLang="en-US" sz="3000" b="0" i="0" u="none" strike="noStrike" cap="none" normalizeH="0" baseline="0" dirty="0" smtClean="0">
+              <a:rPr kumimoji="0" lang="en-US" altLang="en-US" sz="3000" b="0" i="0" u="none" strike="noStrike" cap="none" normalizeH="0" baseline="0" dirty="0">
                 <a:ln>
                   <a:noFill/>
                 </a:ln>
@@ -1421,7 +1417,7 @@
               <a:t> x </a:t>
             </a:r>
             <a:r>
-              <a:rPr kumimoji="0" lang="en-US" altLang="en-US" sz="3000" b="0" i="0" u="none" strike="noStrike" cap="none" normalizeH="0" baseline="0" dirty="0" smtClean="0">
+              <a:rPr kumimoji="0" lang="en-US" altLang="en-US" sz="3000" b="0" i="0" u="none" strike="noStrike" cap="none" normalizeH="0" baseline="0" dirty="0">
                 <a:ln>
                   <a:noFill/>
                 </a:ln>
@@ -1434,7 +1430,7 @@
               <a:t>in</a:t>
             </a:r>
             <a:r>
-              <a:rPr kumimoji="0" lang="en-US" altLang="en-US" sz="3000" b="0" i="0" u="none" strike="noStrike" cap="none" normalizeH="0" baseline="0" dirty="0" smtClean="0">
+              <a:rPr kumimoji="0" lang="en-US" altLang="en-US" sz="3000" b="0" i="0" u="none" strike="noStrike" cap="none" normalizeH="0" baseline="0" dirty="0">
                 <a:ln>
                   <a:noFill/>
                 </a:ln>
@@ -1447,7 +1443,7 @@
               <a:t> numbers</a:t>
             </a:r>
             <a:r>
-              <a:rPr kumimoji="0" lang="en-US" altLang="en-US" sz="3000" b="0" i="0" u="none" strike="noStrike" cap="none" normalizeH="0" baseline="0" dirty="0" smtClean="0">
+              <a:rPr kumimoji="0" lang="en-US" altLang="en-US" sz="3000" b="0" i="0" u="none" strike="noStrike" cap="none" normalizeH="0" baseline="0" dirty="0">
                 <a:ln>
                   <a:noFill/>
                 </a:ln>
@@ -1486,19 +1482,10 @@
                 </a:solidFill>
                 <a:latin typeface="Consolas" panose="020B0609020204030204" pitchFamily="49" charset="0"/>
               </a:rPr>
-              <a:t> </a:t>
-            </a:r>
-            <a:r>
-              <a:rPr lang="en-US" altLang="en-US" sz="3000" dirty="0" smtClean="0">
-                <a:solidFill>
-                  <a:srgbClr val="C792EA"/>
-                </a:solidFill>
-                <a:latin typeface="Consolas" panose="020B0609020204030204" pitchFamily="49" charset="0"/>
-              </a:rPr>
-              <a:t>   </a:t>
-            </a:r>
-            <a:r>
-              <a:rPr kumimoji="0" lang="en-US" altLang="en-US" sz="3000" b="0" i="0" u="none" strike="noStrike" cap="none" normalizeH="0" baseline="0" dirty="0" err="1" smtClean="0">
+              <a:t>    </a:t>
+            </a:r>
+            <a:r>
+              <a:rPr kumimoji="0" lang="en-US" altLang="en-US" sz="3000" b="0" i="0" u="none" strike="noStrike" cap="none" normalizeH="0" baseline="0" dirty="0" err="1">
                 <a:ln>
                   <a:noFill/>
                 </a:ln>
@@ -1513,7 +1500,7 @@
               <a:t>result.append</a:t>
             </a:r>
             <a:r>
-              <a:rPr kumimoji="0" lang="en-US" altLang="en-US" sz="3000" b="0" i="0" u="none" strike="noStrike" cap="none" normalizeH="0" baseline="0" dirty="0" smtClean="0">
+              <a:rPr kumimoji="0" lang="en-US" altLang="en-US" sz="3000" b="0" i="0" u="none" strike="noStrike" cap="none" normalizeH="0" baseline="0" dirty="0">
                 <a:ln>
                   <a:noFill/>
                 </a:ln>
@@ -1528,7 +1515,7 @@
               <a:t>(</a:t>
             </a:r>
             <a:r>
-              <a:rPr kumimoji="0" lang="en-US" altLang="en-US" sz="3000" b="0" i="0" u="none" strike="noStrike" cap="none" normalizeH="0" baseline="0" dirty="0" smtClean="0">
+              <a:rPr kumimoji="0" lang="en-US" altLang="en-US" sz="3000" b="0" i="0" u="none" strike="noStrike" cap="none" normalizeH="0" baseline="0" dirty="0">
                 <a:ln>
                   <a:noFill/>
                 </a:ln>
@@ -1541,7 +1528,7 @@
               <a:t>x </a:t>
             </a:r>
             <a:r>
-              <a:rPr kumimoji="0" lang="en-US" altLang="en-US" sz="3000" b="0" i="0" u="none" strike="noStrike" cap="none" normalizeH="0" baseline="0" dirty="0" smtClean="0">
+              <a:rPr kumimoji="0" lang="en-US" altLang="en-US" sz="3000" b="0" i="0" u="none" strike="noStrike" cap="none" normalizeH="0" baseline="0" dirty="0">
                 <a:ln>
                   <a:noFill/>
                 </a:ln>
@@ -1554,7 +1541,7 @@
               <a:t>**</a:t>
             </a:r>
             <a:r>
-              <a:rPr kumimoji="0" lang="en-US" altLang="en-US" sz="3000" b="0" i="0" u="none" strike="noStrike" cap="none" normalizeH="0" baseline="0" dirty="0" smtClean="0">
+              <a:rPr kumimoji="0" lang="en-US" altLang="en-US" sz="3000" b="0" i="0" u="none" strike="noStrike" cap="none" normalizeH="0" baseline="0" dirty="0">
                 <a:ln>
                   <a:noFill/>
                 </a:ln>
@@ -1567,7 +1554,7 @@
               <a:t> </a:t>
             </a:r>
             <a:r>
-              <a:rPr kumimoji="0" lang="en-US" altLang="en-US" sz="3000" b="0" i="0" u="none" strike="noStrike" cap="none" normalizeH="0" baseline="0" dirty="0" smtClean="0">
+              <a:rPr kumimoji="0" lang="en-US" altLang="en-US" sz="3000" b="0" i="0" u="none" strike="noStrike" cap="none" normalizeH="0" baseline="0" dirty="0">
                 <a:ln>
                   <a:noFill/>
                 </a:ln>
@@ -1580,7 +1567,7 @@
               <a:t>2</a:t>
             </a:r>
             <a:r>
-              <a:rPr kumimoji="0" lang="en-US" altLang="en-US" sz="3000" b="0" i="0" u="none" strike="noStrike" cap="none" normalizeH="0" baseline="0" dirty="0" smtClean="0">
+              <a:rPr kumimoji="0" lang="en-US" altLang="en-US" sz="3000" b="0" i="0" u="none" strike="noStrike" cap="none" normalizeH="0" baseline="0" dirty="0">
                 <a:ln>
                   <a:noFill/>
                 </a:ln>
@@ -1595,7 +1582,7 @@
               <a:t>)</a:t>
             </a:r>
             <a:r>
-              <a:rPr kumimoji="0" lang="en-US" altLang="en-US" sz="3000" b="0" i="0" u="none" strike="noStrike" cap="none" normalizeH="0" baseline="0" dirty="0" smtClean="0">
+              <a:rPr kumimoji="0" lang="en-US" altLang="en-US" sz="3000" b="0" i="0" u="none" strike="noStrike" cap="none" normalizeH="0" baseline="0" dirty="0">
                 <a:ln>
                   <a:noFill/>
                 </a:ln>
@@ -1752,13 +1739,2173 @@
   <p:clrMapOvr>
     <a:masterClrMapping/>
   </p:clrMapOvr>
-  <p:timing>
-    <p:tnLst>
-      <p:par>
-        <p:cTn id="1" dur="indefinite" restart="never" nodeType="tmRoot"/>
-      </p:par>
-    </p:tnLst>
-  </p:timing>
+</p:sld>
+</file>
+
+<file path=ppt/slides/slide11.xml><?xml version="1.0" encoding="utf-8"?>
+<p:sld xmlns:a="http://schemas.openxmlformats.org/drawingml/2006/main" xmlns:r="http://schemas.openxmlformats.org/officeDocument/2006/relationships" xmlns:p="http://schemas.openxmlformats.org/presentationml/2006/main">
+  <p:cSld>
+    <p:spTree>
+      <p:nvGrpSpPr>
+        <p:cNvPr id="1" name="">
+          <a:extLst>
+            <a:ext uri="{FF2B5EF4-FFF2-40B4-BE49-F238E27FC236}">
+              <a16:creationId xmlns:a16="http://schemas.microsoft.com/office/drawing/2014/main" id="{ACD9EB40-7BD7-5EA3-6BAB-7DBDD4EB6F57}"/>
+            </a:ext>
+          </a:extLst>
+        </p:cNvPr>
+        <p:cNvGrpSpPr/>
+        <p:nvPr/>
+      </p:nvGrpSpPr>
+      <p:grpSpPr>
+        <a:xfrm>
+          <a:off x="0" y="0"/>
+          <a:ext cx="0" cy="0"/>
+          <a:chOff x="0" y="0"/>
+          <a:chExt cx="0" cy="0"/>
+        </a:xfrm>
+      </p:grpSpPr>
+      <p:sp>
+        <p:nvSpPr>
+          <p:cNvPr id="3" name="Rectangle 2">
+            <a:extLst>
+              <a:ext uri="{FF2B5EF4-FFF2-40B4-BE49-F238E27FC236}">
+                <a16:creationId xmlns:a16="http://schemas.microsoft.com/office/drawing/2014/main" id="{CA98CD78-BA73-3A58-64D0-B933FBE7AAE9}"/>
+              </a:ext>
+            </a:extLst>
+          </p:cNvPr>
+          <p:cNvSpPr/>
+          <p:nvPr/>
+        </p:nvSpPr>
+        <p:spPr>
+          <a:xfrm>
+            <a:off x="2541814" y="1660071"/>
+            <a:ext cx="7108372" cy="3537858"/>
+          </a:xfrm>
+          <a:prstGeom prst="rect">
+            <a:avLst/>
+          </a:prstGeom>
+          <a:solidFill>
+            <a:srgbClr val="011627"/>
+          </a:solidFill>
+          <a:ln>
+            <a:noFill/>
+          </a:ln>
+        </p:spPr>
+        <p:style>
+          <a:lnRef idx="2">
+            <a:schemeClr val="accent1">
+              <a:shade val="50000"/>
+            </a:schemeClr>
+          </a:lnRef>
+          <a:fillRef idx="1">
+            <a:schemeClr val="accent1"/>
+          </a:fillRef>
+          <a:effectRef idx="0">
+            <a:schemeClr val="accent1"/>
+          </a:effectRef>
+          <a:fontRef idx="minor">
+            <a:schemeClr val="lt1"/>
+          </a:fontRef>
+        </p:style>
+        <p:txBody>
+          <a:bodyPr rtlCol="0" anchor="ctr"/>
+          <a:lstStyle/>
+          <a:p>
+            <a:pPr algn="ctr"/>
+            <a:endParaRPr lang="en-GB"/>
+          </a:p>
+        </p:txBody>
+      </p:sp>
+      <p:grpSp>
+        <p:nvGrpSpPr>
+          <p:cNvPr id="47" name="Group 46">
+            <a:extLst>
+              <a:ext uri="{FF2B5EF4-FFF2-40B4-BE49-F238E27FC236}">
+                <a16:creationId xmlns:a16="http://schemas.microsoft.com/office/drawing/2014/main" id="{CDBF6DD7-AD0A-F0C9-2D57-2FC76A52DA13}"/>
+              </a:ext>
+            </a:extLst>
+          </p:cNvPr>
+          <p:cNvGrpSpPr/>
+          <p:nvPr/>
+        </p:nvGrpSpPr>
+        <p:grpSpPr>
+          <a:xfrm>
+            <a:off x="3041541" y="2000974"/>
+            <a:ext cx="6108918" cy="2856052"/>
+            <a:chOff x="3499537" y="2000975"/>
+            <a:chExt cx="6108918" cy="2856052"/>
+          </a:xfrm>
+        </p:grpSpPr>
+        <p:sp>
+          <p:nvSpPr>
+            <p:cNvPr id="31" name="Rectangle 30">
+              <a:extLst>
+                <a:ext uri="{FF2B5EF4-FFF2-40B4-BE49-F238E27FC236}">
+                  <a16:creationId xmlns:a16="http://schemas.microsoft.com/office/drawing/2014/main" id="{E5E63874-525B-6665-8B5B-4E280E2244D4}"/>
+                </a:ext>
+              </a:extLst>
+            </p:cNvPr>
+            <p:cNvSpPr/>
+            <p:nvPr/>
+          </p:nvSpPr>
+          <p:spPr>
+            <a:xfrm>
+              <a:off x="6568889" y="2911929"/>
+              <a:ext cx="937450" cy="517060"/>
+            </a:xfrm>
+            <a:prstGeom prst="rect">
+              <a:avLst/>
+            </a:prstGeom>
+            <a:solidFill>
+              <a:schemeClr val="bg1">
+                <a:alpha val="40000"/>
+              </a:schemeClr>
+            </a:solidFill>
+            <a:ln>
+              <a:noFill/>
+            </a:ln>
+          </p:spPr>
+          <p:style>
+            <a:lnRef idx="2">
+              <a:schemeClr val="accent1">
+                <a:shade val="15000"/>
+              </a:schemeClr>
+            </a:lnRef>
+            <a:fillRef idx="1">
+              <a:schemeClr val="accent1"/>
+            </a:fillRef>
+            <a:effectRef idx="0">
+              <a:schemeClr val="accent1"/>
+            </a:effectRef>
+            <a:fontRef idx="minor">
+              <a:schemeClr val="lt1"/>
+            </a:fontRef>
+          </p:style>
+          <p:txBody>
+            <a:bodyPr rtlCol="0" anchor="ctr"/>
+            <a:lstStyle/>
+            <a:p>
+              <a:pPr algn="ctr"/>
+              <a:endParaRPr lang="en-GB"/>
+            </a:p>
+          </p:txBody>
+        </p:sp>
+        <p:sp>
+          <p:nvSpPr>
+            <p:cNvPr id="2" name="Rectangle 1">
+              <a:extLst>
+                <a:ext uri="{FF2B5EF4-FFF2-40B4-BE49-F238E27FC236}">
+                  <a16:creationId xmlns:a16="http://schemas.microsoft.com/office/drawing/2014/main" id="{435FC766-5BBE-21EE-CA39-A327D4B7CFD5}"/>
+                </a:ext>
+              </a:extLst>
+            </p:cNvPr>
+            <p:cNvSpPr>
+              <a:spLocks noChangeArrowheads="1"/>
+            </p:cNvSpPr>
+            <p:nvPr/>
+          </p:nvSpPr>
+          <p:spPr bwMode="auto">
+            <a:xfrm>
+              <a:off x="4614826" y="2000975"/>
+              <a:ext cx="2962349" cy="2856052"/>
+            </a:xfrm>
+            <a:prstGeom prst="rect">
+              <a:avLst/>
+            </a:prstGeom>
+            <a:noFill/>
+            <a:ln>
+              <a:noFill/>
+            </a:ln>
+            <a:effectLst/>
+          </p:spPr>
+          <p:txBody>
+            <a:bodyPr vert="horz" wrap="none" lIns="0" tIns="79350" rIns="0" bIns="79350" numCol="1" anchor="ctr" anchorCtr="0" compatLnSpc="1">
+              <a:prstTxWarp prst="textNoShape">
+                <a:avLst/>
+              </a:prstTxWarp>
+              <a:spAutoFit/>
+            </a:bodyPr>
+            <a:lstStyle/>
+            <a:p>
+              <a:pPr marL="0" marR="0" lvl="0" indent="0" algn="l" defTabSz="914400" rtl="0" eaLnBrk="0" fontAlgn="base" latinLnBrk="0" hangingPunct="0">
+                <a:lnSpc>
+                  <a:spcPct val="150000"/>
+                </a:lnSpc>
+                <a:spcBef>
+                  <a:spcPct val="0"/>
+                </a:spcBef>
+                <a:spcAft>
+                  <a:spcPct val="0"/>
+                </a:spcAft>
+                <a:buClrTx/>
+                <a:buSzTx/>
+                <a:buFontTx/>
+                <a:buNone/>
+                <a:tabLst/>
+              </a:pPr>
+              <a:r>
+                <a:rPr kumimoji="0" lang="en-US" altLang="en-US" sz="3000" b="0" i="0" u="none" strike="noStrike" cap="none" normalizeH="0" baseline="0" dirty="0">
+                  <a:ln>
+                    <a:noFill/>
+                  </a:ln>
+                  <a:solidFill>
+                    <a:srgbClr val="7FDBCA"/>
+                  </a:solidFill>
+                  <a:effectLst/>
+                  <a:latin typeface="Consolas" panose="020B0609020204030204" pitchFamily="49" charset="0"/>
+                </a:rPr>
+                <a:t>if</a:t>
+              </a:r>
+              <a:r>
+                <a:rPr kumimoji="0" lang="en-US" altLang="en-US" sz="3000" b="0" i="0" u="none" strike="noStrike" cap="none" normalizeH="0" baseline="0" dirty="0">
+                  <a:ln>
+                    <a:noFill/>
+                  </a:ln>
+                  <a:solidFill>
+                    <a:srgbClr val="D6DEEB"/>
+                  </a:solidFill>
+                  <a:effectLst/>
+                  <a:latin typeface="Consolas" panose="020B0609020204030204" pitchFamily="49" charset="0"/>
+                </a:rPr>
+                <a:t> </a:t>
+              </a:r>
+              <a:r>
+                <a:rPr kumimoji="0" lang="en-US" altLang="en-US" sz="3000" b="0" i="0" u="none" strike="noStrike" cap="none" normalizeH="0" baseline="0" dirty="0">
+                  <a:ln>
+                    <a:noFill/>
+                  </a:ln>
+                  <a:solidFill>
+                    <a:srgbClr val="ADDB67"/>
+                  </a:solidFill>
+                  <a:effectLst/>
+                  <a:latin typeface="Consolas" panose="020B0609020204030204" pitchFamily="49" charset="0"/>
+                </a:rPr>
+                <a:t>"truthy"</a:t>
+              </a:r>
+              <a:r>
+                <a:rPr kumimoji="0" lang="en-US" altLang="en-US" sz="3000" b="0" i="0" u="none" strike="noStrike" cap="none" normalizeH="0" baseline="0" dirty="0">
+                  <a:ln>
+                    <a:noFill/>
+                  </a:ln>
+                  <a:solidFill>
+                    <a:schemeClr val="bg1">
+                      <a:alpha val="20000"/>
+                    </a:schemeClr>
+                  </a:solidFill>
+                  <a:effectLst/>
+                  <a:latin typeface="Consolas" panose="020B0609020204030204" pitchFamily="49" charset="0"/>
+                </a:rPr>
+                <a:t>:</a:t>
+              </a:r>
+            </a:p>
+            <a:p>
+              <a:pPr marL="0" marR="0" lvl="0" indent="0" algn="l" defTabSz="914400" rtl="0" eaLnBrk="0" fontAlgn="base" latinLnBrk="0" hangingPunct="0">
+                <a:lnSpc>
+                  <a:spcPct val="150000"/>
+                </a:lnSpc>
+                <a:spcBef>
+                  <a:spcPct val="0"/>
+                </a:spcBef>
+                <a:spcAft>
+                  <a:spcPct val="0"/>
+                </a:spcAft>
+                <a:buClrTx/>
+                <a:buSzTx/>
+                <a:buFontTx/>
+                <a:buNone/>
+                <a:tabLst/>
+              </a:pPr>
+              <a:r>
+                <a:rPr lang="en-US" altLang="en-US" sz="3000" dirty="0">
+                  <a:solidFill>
+                    <a:srgbClr val="C792EA"/>
+                  </a:solidFill>
+                  <a:latin typeface="Consolas" panose="020B0609020204030204" pitchFamily="49" charset="0"/>
+                </a:rPr>
+                <a:t>    </a:t>
+              </a:r>
+              <a:r>
+                <a:rPr kumimoji="0" lang="en-US" altLang="en-US" sz="3000" b="0" i="0" u="none" strike="noStrike" cap="none" normalizeH="0" baseline="0" dirty="0">
+                  <a:ln>
+                    <a:noFill/>
+                  </a:ln>
+                  <a:solidFill>
+                    <a:schemeClr val="bg1">
+                      <a:alpha val="20000"/>
+                    </a:schemeClr>
+                  </a:solidFill>
+                  <a:effectLst/>
+                  <a:latin typeface="Consolas" panose="020B0609020204030204" pitchFamily="49" charset="0"/>
+                </a:rPr>
+                <a:t>sup = </a:t>
+              </a:r>
+              <a:r>
+                <a:rPr kumimoji="0" lang="en-US" altLang="en-US" sz="3000" b="0" i="0" u="none" strike="noStrike" cap="none" normalizeH="0" baseline="0" dirty="0">
+                  <a:ln>
+                    <a:noFill/>
+                  </a:ln>
+                  <a:solidFill>
+                    <a:srgbClr val="F78C6C"/>
+                  </a:solidFill>
+                  <a:effectLst/>
+                  <a:latin typeface="Consolas" panose="020B0609020204030204" pitchFamily="49" charset="0"/>
+                </a:rPr>
+                <a:t>2.0</a:t>
+              </a:r>
+              <a:endParaRPr kumimoji="0" lang="en-US" altLang="en-US" sz="3000" b="0" i="0" u="none" strike="noStrike" cap="none" normalizeH="0" baseline="0" dirty="0">
+                <a:ln>
+                  <a:noFill/>
+                </a:ln>
+                <a:solidFill>
+                  <a:schemeClr val="tx1"/>
+                </a:solidFill>
+                <a:effectLst/>
+                <a:latin typeface="Consolas" panose="020B0609020204030204" pitchFamily="49" charset="0"/>
+              </a:endParaRPr>
+            </a:p>
+            <a:p>
+              <a:pPr marL="0" marR="0" lvl="0" indent="0" algn="l" defTabSz="914400" rtl="0" eaLnBrk="0" fontAlgn="base" latinLnBrk="0" hangingPunct="0">
+                <a:lnSpc>
+                  <a:spcPct val="150000"/>
+                </a:lnSpc>
+                <a:spcBef>
+                  <a:spcPct val="0"/>
+                </a:spcBef>
+                <a:spcAft>
+                  <a:spcPct val="0"/>
+                </a:spcAft>
+                <a:buClrTx/>
+                <a:buSzTx/>
+                <a:buFontTx/>
+                <a:buNone/>
+                <a:tabLst/>
+              </a:pPr>
+              <a:r>
+                <a:rPr lang="en-US" altLang="en-US" sz="3000" dirty="0">
+                  <a:solidFill>
+                    <a:srgbClr val="7FDBCA"/>
+                  </a:solidFill>
+                  <a:latin typeface="Consolas" panose="020B0609020204030204" pitchFamily="49" charset="0"/>
+                </a:rPr>
+                <a:t>else</a:t>
+              </a:r>
+              <a:r>
+                <a:rPr kumimoji="0" lang="en-US" altLang="en-US" sz="3000" b="0" i="0" u="none" strike="noStrike" cap="none" normalizeH="0" baseline="0" dirty="0">
+                  <a:ln>
+                    <a:noFill/>
+                  </a:ln>
+                  <a:solidFill>
+                    <a:schemeClr val="bg1"/>
+                  </a:solidFill>
+                  <a:effectLst/>
+                  <a:latin typeface="Consolas" panose="020B0609020204030204" pitchFamily="49" charset="0"/>
+                </a:rPr>
+                <a:t>:</a:t>
+              </a:r>
+            </a:p>
+            <a:p>
+              <a:pPr marL="0" marR="0" lvl="0" indent="0" algn="l" defTabSz="914400" rtl="0" eaLnBrk="0" fontAlgn="base" latinLnBrk="0" hangingPunct="0">
+                <a:lnSpc>
+                  <a:spcPct val="150000"/>
+                </a:lnSpc>
+                <a:spcBef>
+                  <a:spcPct val="0"/>
+                </a:spcBef>
+                <a:spcAft>
+                  <a:spcPct val="0"/>
+                </a:spcAft>
+                <a:buClrTx/>
+                <a:buSzTx/>
+                <a:buFontTx/>
+                <a:buNone/>
+                <a:tabLst/>
+              </a:pPr>
+              <a:r>
+                <a:rPr lang="en-US" altLang="en-US" sz="3000" dirty="0">
+                  <a:solidFill>
+                    <a:srgbClr val="C792EA"/>
+                  </a:solidFill>
+                  <a:latin typeface="Consolas" panose="020B0609020204030204" pitchFamily="49" charset="0"/>
+                </a:rPr>
+                <a:t>    </a:t>
+              </a:r>
+              <a:r>
+                <a:rPr kumimoji="0" lang="en-US" altLang="en-US" sz="3000" b="0" i="0" u="none" strike="noStrike" cap="none" normalizeH="0" baseline="0" dirty="0">
+                  <a:ln>
+                    <a:noFill/>
+                  </a:ln>
+                  <a:solidFill>
+                    <a:schemeClr val="bg1">
+                      <a:alpha val="20000"/>
+                    </a:schemeClr>
+                  </a:solidFill>
+                  <a:effectLst/>
+                  <a:latin typeface="Consolas" panose="020B0609020204030204" pitchFamily="49" charset="0"/>
+                </a:rPr>
+                <a:t>sup = </a:t>
+              </a:r>
+              <a:r>
+                <a:rPr kumimoji="0" lang="en-US" altLang="en-US" sz="3000" b="0" i="0" u="none" strike="noStrike" cap="none" normalizeH="0" baseline="0" dirty="0">
+                  <a:ln>
+                    <a:noFill/>
+                  </a:ln>
+                  <a:solidFill>
+                    <a:srgbClr val="FF5874"/>
+                  </a:solidFill>
+                  <a:effectLst/>
+                  <a:latin typeface="Consolas" panose="020B0609020204030204" pitchFamily="49" charset="0"/>
+                </a:rPr>
+                <a:t>None</a:t>
+              </a:r>
+            </a:p>
+          </p:txBody>
+        </p:sp>
+        <p:sp>
+          <p:nvSpPr>
+            <p:cNvPr id="38" name="Rectangle 37">
+              <a:extLst>
+                <a:ext uri="{FF2B5EF4-FFF2-40B4-BE49-F238E27FC236}">
+                  <a16:creationId xmlns:a16="http://schemas.microsoft.com/office/drawing/2014/main" id="{72733816-44A7-2260-6233-72C3754D69F3}"/>
+                </a:ext>
+              </a:extLst>
+            </p:cNvPr>
+            <p:cNvSpPr/>
+            <p:nvPr/>
+          </p:nvSpPr>
+          <p:spPr>
+            <a:xfrm>
+              <a:off x="4478447" y="3606273"/>
+              <a:ext cx="1265530" cy="517060"/>
+            </a:xfrm>
+            <a:prstGeom prst="rect">
+              <a:avLst/>
+            </a:prstGeom>
+            <a:solidFill>
+              <a:schemeClr val="bg1">
+                <a:alpha val="40000"/>
+              </a:schemeClr>
+            </a:solidFill>
+            <a:ln>
+              <a:noFill/>
+            </a:ln>
+          </p:spPr>
+          <p:style>
+            <a:lnRef idx="2">
+              <a:schemeClr val="accent1">
+                <a:shade val="15000"/>
+              </a:schemeClr>
+            </a:lnRef>
+            <a:fillRef idx="1">
+              <a:schemeClr val="accent1"/>
+            </a:fillRef>
+            <a:effectRef idx="0">
+              <a:schemeClr val="accent1"/>
+            </a:effectRef>
+            <a:fontRef idx="minor">
+              <a:schemeClr val="lt1"/>
+            </a:fontRef>
+          </p:style>
+          <p:txBody>
+            <a:bodyPr rtlCol="0" anchor="ctr"/>
+            <a:lstStyle/>
+            <a:p>
+              <a:pPr algn="ctr"/>
+              <a:endParaRPr lang="en-GB"/>
+            </a:p>
+          </p:txBody>
+        </p:sp>
+        <p:sp>
+          <p:nvSpPr>
+            <p:cNvPr id="40" name="Free-form: Shape 39">
+              <a:extLst>
+                <a:ext uri="{FF2B5EF4-FFF2-40B4-BE49-F238E27FC236}">
+                  <a16:creationId xmlns:a16="http://schemas.microsoft.com/office/drawing/2014/main" id="{BFEEC321-ADA5-AE19-2E57-82D95F1002E1}"/>
+                </a:ext>
+              </a:extLst>
+            </p:cNvPr>
+            <p:cNvSpPr/>
+            <p:nvPr/>
+          </p:nvSpPr>
+          <p:spPr>
+            <a:xfrm>
+              <a:off x="5763296" y="2762518"/>
+              <a:ext cx="2145817" cy="1120462"/>
+            </a:xfrm>
+            <a:custGeom>
+              <a:avLst/>
+              <a:gdLst>
+                <a:gd name="connsiteX0" fmla="*/ 0 w 2546468"/>
+                <a:gd name="connsiteY0" fmla="*/ 1770845 h 1770845"/>
+                <a:gd name="connsiteX1" fmla="*/ 2273121 w 2546468"/>
+                <a:gd name="connsiteY1" fmla="*/ 1358721 h 1770845"/>
+                <a:gd name="connsiteX2" fmla="*/ 2421228 w 2546468"/>
+                <a:gd name="connsiteY2" fmla="*/ 0 h 1770845"/>
+              </a:gdLst>
+              <a:ahLst/>
+              <a:cxnLst>
+                <a:cxn ang="0">
+                  <a:pos x="connsiteX0" y="connsiteY0"/>
+                </a:cxn>
+                <a:cxn ang="0">
+                  <a:pos x="connsiteX1" y="connsiteY1"/>
+                </a:cxn>
+                <a:cxn ang="0">
+                  <a:pos x="connsiteX2" y="connsiteY2"/>
+                </a:cxn>
+              </a:cxnLst>
+              <a:rect l="l" t="t" r="r" b="b"/>
+              <a:pathLst>
+                <a:path w="2546468" h="1770845">
+                  <a:moveTo>
+                    <a:pt x="0" y="1770845"/>
+                  </a:moveTo>
+                  <a:cubicBezTo>
+                    <a:pt x="934791" y="1712353"/>
+                    <a:pt x="1869583" y="1653862"/>
+                    <a:pt x="2273121" y="1358721"/>
+                  </a:cubicBezTo>
+                  <a:cubicBezTo>
+                    <a:pt x="2676659" y="1063580"/>
+                    <a:pt x="2548943" y="531790"/>
+                    <a:pt x="2421228" y="0"/>
+                  </a:cubicBezTo>
+                </a:path>
+              </a:pathLst>
+            </a:custGeom>
+            <a:noFill/>
+            <a:ln w="25400">
+              <a:solidFill>
+                <a:srgbClr val="FFC720"/>
+              </a:solidFill>
+              <a:tailEnd type="arrow"/>
+            </a:ln>
+          </p:spPr>
+          <p:style>
+            <a:lnRef idx="2">
+              <a:schemeClr val="accent1">
+                <a:shade val="15000"/>
+              </a:schemeClr>
+            </a:lnRef>
+            <a:fillRef idx="1">
+              <a:schemeClr val="accent1"/>
+            </a:fillRef>
+            <a:effectRef idx="0">
+              <a:schemeClr val="accent1"/>
+            </a:effectRef>
+            <a:fontRef idx="minor">
+              <a:schemeClr val="lt1"/>
+            </a:fontRef>
+          </p:style>
+          <p:txBody>
+            <a:bodyPr rtlCol="0" anchor="ctr"/>
+            <a:lstStyle/>
+            <a:p>
+              <a:pPr algn="ctr"/>
+              <a:endParaRPr lang="en-GB"/>
+            </a:p>
+          </p:txBody>
+        </p:sp>
+        <p:sp>
+          <p:nvSpPr>
+            <p:cNvPr id="41" name="Rectangle 40">
+              <a:extLst>
+                <a:ext uri="{FF2B5EF4-FFF2-40B4-BE49-F238E27FC236}">
+                  <a16:creationId xmlns:a16="http://schemas.microsoft.com/office/drawing/2014/main" id="{80802A36-CD80-BCD9-7E3C-6418BA3B78D6}"/>
+                </a:ext>
+              </a:extLst>
+            </p:cNvPr>
+            <p:cNvSpPr/>
+            <p:nvPr/>
+          </p:nvSpPr>
+          <p:spPr>
+            <a:xfrm>
+              <a:off x="6588206" y="4278027"/>
+              <a:ext cx="1071024" cy="517060"/>
+            </a:xfrm>
+            <a:prstGeom prst="rect">
+              <a:avLst/>
+            </a:prstGeom>
+            <a:solidFill>
+              <a:schemeClr val="bg1">
+                <a:alpha val="40000"/>
+              </a:schemeClr>
+            </a:solidFill>
+            <a:ln>
+              <a:noFill/>
+            </a:ln>
+          </p:spPr>
+          <p:style>
+            <a:lnRef idx="2">
+              <a:schemeClr val="accent1">
+                <a:shade val="15000"/>
+              </a:schemeClr>
+            </a:lnRef>
+            <a:fillRef idx="1">
+              <a:schemeClr val="accent1"/>
+            </a:fillRef>
+            <a:effectRef idx="0">
+              <a:schemeClr val="accent1"/>
+            </a:effectRef>
+            <a:fontRef idx="minor">
+              <a:schemeClr val="lt1"/>
+            </a:fontRef>
+          </p:style>
+          <p:txBody>
+            <a:bodyPr rtlCol="0" anchor="ctr"/>
+            <a:lstStyle/>
+            <a:p>
+              <a:pPr algn="ctr"/>
+              <a:endParaRPr lang="en-GB"/>
+            </a:p>
+          </p:txBody>
+        </p:sp>
+        <p:sp>
+          <p:nvSpPr>
+            <p:cNvPr id="42" name="Free-form: Shape 41">
+              <a:extLst>
+                <a:ext uri="{FF2B5EF4-FFF2-40B4-BE49-F238E27FC236}">
+                  <a16:creationId xmlns:a16="http://schemas.microsoft.com/office/drawing/2014/main" id="{3430CBBC-2C92-C1C1-5E73-1E62357B515C}"/>
+                </a:ext>
+              </a:extLst>
+            </p:cNvPr>
+            <p:cNvSpPr/>
+            <p:nvPr/>
+          </p:nvSpPr>
+          <p:spPr>
+            <a:xfrm>
+              <a:off x="7714445" y="2762518"/>
+              <a:ext cx="1263822" cy="1796603"/>
+            </a:xfrm>
+            <a:custGeom>
+              <a:avLst/>
+              <a:gdLst>
+                <a:gd name="connsiteX0" fmla="*/ 0 w 1263822"/>
+                <a:gd name="connsiteY0" fmla="*/ 2453425 h 2453425"/>
+                <a:gd name="connsiteX1" fmla="*/ 1062507 w 1263822"/>
+                <a:gd name="connsiteY1" fmla="*/ 1313645 h 2453425"/>
+                <a:gd name="connsiteX2" fmla="*/ 1262130 w 1263822"/>
+                <a:gd name="connsiteY2" fmla="*/ 0 h 2453425"/>
+              </a:gdLst>
+              <a:ahLst/>
+              <a:cxnLst>
+                <a:cxn ang="0">
+                  <a:pos x="connsiteX0" y="connsiteY0"/>
+                </a:cxn>
+                <a:cxn ang="0">
+                  <a:pos x="connsiteX1" y="connsiteY1"/>
+                </a:cxn>
+                <a:cxn ang="0">
+                  <a:pos x="connsiteX2" y="connsiteY2"/>
+                </a:cxn>
+              </a:cxnLst>
+              <a:rect l="l" t="t" r="r" b="b"/>
+              <a:pathLst>
+                <a:path w="1263822" h="2453425">
+                  <a:moveTo>
+                    <a:pt x="0" y="2453425"/>
+                  </a:moveTo>
+                  <a:cubicBezTo>
+                    <a:pt x="426076" y="2087987"/>
+                    <a:pt x="852152" y="1722549"/>
+                    <a:pt x="1062507" y="1313645"/>
+                  </a:cubicBezTo>
+                  <a:cubicBezTo>
+                    <a:pt x="1272862" y="904741"/>
+                    <a:pt x="1267496" y="452370"/>
+                    <a:pt x="1262130" y="0"/>
+                  </a:cubicBezTo>
+                </a:path>
+              </a:pathLst>
+            </a:custGeom>
+            <a:noFill/>
+            <a:ln w="25400">
+              <a:solidFill>
+                <a:srgbClr val="FFC720"/>
+              </a:solidFill>
+              <a:tailEnd type="arrow"/>
+            </a:ln>
+          </p:spPr>
+          <p:style>
+            <a:lnRef idx="2">
+              <a:schemeClr val="accent1">
+                <a:shade val="15000"/>
+              </a:schemeClr>
+            </a:lnRef>
+            <a:fillRef idx="1">
+              <a:schemeClr val="accent1"/>
+            </a:fillRef>
+            <a:effectRef idx="0">
+              <a:schemeClr val="accent1"/>
+            </a:effectRef>
+            <a:fontRef idx="minor">
+              <a:schemeClr val="lt1"/>
+            </a:fontRef>
+          </p:style>
+          <p:txBody>
+            <a:bodyPr rtlCol="0" anchor="ctr"/>
+            <a:lstStyle/>
+            <a:p>
+              <a:pPr algn="ctr"/>
+              <a:endParaRPr lang="en-GB"/>
+            </a:p>
+          </p:txBody>
+        </p:sp>
+        <p:sp>
+          <p:nvSpPr>
+            <p:cNvPr id="43" name="Rectangle 42">
+              <a:extLst>
+                <a:ext uri="{FF2B5EF4-FFF2-40B4-BE49-F238E27FC236}">
+                  <a16:creationId xmlns:a16="http://schemas.microsoft.com/office/drawing/2014/main" id="{E9C1E141-7A96-4E46-BEB0-18D6D9B30317}"/>
+                </a:ext>
+              </a:extLst>
+            </p:cNvPr>
+            <p:cNvSpPr/>
+            <p:nvPr/>
+          </p:nvSpPr>
+          <p:spPr>
+            <a:xfrm>
+              <a:off x="7178160" y="2247442"/>
+              <a:ext cx="1265530" cy="517060"/>
+            </a:xfrm>
+            <a:prstGeom prst="rect">
+              <a:avLst/>
+            </a:prstGeom>
+            <a:solidFill>
+              <a:srgbClr val="FFC720">
+                <a:alpha val="80000"/>
+              </a:srgbClr>
+            </a:solidFill>
+            <a:ln>
+              <a:noFill/>
+            </a:ln>
+          </p:spPr>
+          <p:style>
+            <a:lnRef idx="2">
+              <a:schemeClr val="accent1">
+                <a:shade val="15000"/>
+              </a:schemeClr>
+            </a:lnRef>
+            <a:fillRef idx="1">
+              <a:schemeClr val="accent1"/>
+            </a:fillRef>
+            <a:effectRef idx="0">
+              <a:schemeClr val="accent1"/>
+            </a:effectRef>
+            <a:fontRef idx="minor">
+              <a:schemeClr val="lt1"/>
+            </a:fontRef>
+          </p:style>
+          <p:txBody>
+            <a:bodyPr rtlCol="0" anchor="ctr"/>
+            <a:lstStyle/>
+            <a:p>
+              <a:pPr algn="ctr"/>
+              <a:endParaRPr lang="en-GB">
+                <a:solidFill>
+                  <a:srgbClr val="FFC720"/>
+                </a:solidFill>
+              </a:endParaRPr>
+            </a:p>
+          </p:txBody>
+        </p:sp>
+        <p:sp>
+          <p:nvSpPr>
+            <p:cNvPr id="44" name="Rectangle 43">
+              <a:extLst>
+                <a:ext uri="{FF2B5EF4-FFF2-40B4-BE49-F238E27FC236}">
+                  <a16:creationId xmlns:a16="http://schemas.microsoft.com/office/drawing/2014/main" id="{089474F9-D9A8-371B-16BE-0062BE51BEAC}"/>
+                </a:ext>
+              </a:extLst>
+            </p:cNvPr>
+            <p:cNvSpPr/>
+            <p:nvPr/>
+          </p:nvSpPr>
+          <p:spPr>
+            <a:xfrm>
+              <a:off x="8537431" y="2247442"/>
+              <a:ext cx="1071024" cy="517060"/>
+            </a:xfrm>
+            <a:prstGeom prst="rect">
+              <a:avLst/>
+            </a:prstGeom>
+            <a:solidFill>
+              <a:srgbClr val="FFC720">
+                <a:alpha val="80000"/>
+              </a:srgbClr>
+            </a:solidFill>
+            <a:ln>
+              <a:noFill/>
+            </a:ln>
+          </p:spPr>
+          <p:style>
+            <a:lnRef idx="2">
+              <a:schemeClr val="accent1">
+                <a:shade val="15000"/>
+              </a:schemeClr>
+            </a:lnRef>
+            <a:fillRef idx="1">
+              <a:schemeClr val="accent1"/>
+            </a:fillRef>
+            <a:effectRef idx="0">
+              <a:schemeClr val="accent1"/>
+            </a:effectRef>
+            <a:fontRef idx="minor">
+              <a:schemeClr val="lt1"/>
+            </a:fontRef>
+          </p:style>
+          <p:txBody>
+            <a:bodyPr rtlCol="0" anchor="ctr"/>
+            <a:lstStyle/>
+            <a:p>
+              <a:pPr algn="ctr"/>
+              <a:endParaRPr lang="en-GB">
+                <a:solidFill>
+                  <a:srgbClr val="FFC720"/>
+                </a:solidFill>
+              </a:endParaRPr>
+            </a:p>
+          </p:txBody>
+        </p:sp>
+        <p:sp>
+          <p:nvSpPr>
+            <p:cNvPr id="45" name="Rectangle 44">
+              <a:extLst>
+                <a:ext uri="{FF2B5EF4-FFF2-40B4-BE49-F238E27FC236}">
+                  <a16:creationId xmlns:a16="http://schemas.microsoft.com/office/drawing/2014/main" id="{86AB0D66-F8E2-9532-5161-36F09593BB95}"/>
+                </a:ext>
+              </a:extLst>
+            </p:cNvPr>
+            <p:cNvSpPr/>
+            <p:nvPr/>
+          </p:nvSpPr>
+          <p:spPr>
+            <a:xfrm>
+              <a:off x="3499537" y="2247442"/>
+              <a:ext cx="937450" cy="517060"/>
+            </a:xfrm>
+            <a:prstGeom prst="rect">
+              <a:avLst/>
+            </a:prstGeom>
+            <a:solidFill>
+              <a:srgbClr val="FFC720">
+                <a:alpha val="80000"/>
+              </a:srgbClr>
+            </a:solidFill>
+            <a:ln>
+              <a:noFill/>
+            </a:ln>
+          </p:spPr>
+          <p:style>
+            <a:lnRef idx="2">
+              <a:schemeClr val="accent1">
+                <a:shade val="15000"/>
+              </a:schemeClr>
+            </a:lnRef>
+            <a:fillRef idx="1">
+              <a:schemeClr val="accent1"/>
+            </a:fillRef>
+            <a:effectRef idx="0">
+              <a:schemeClr val="accent1"/>
+            </a:effectRef>
+            <a:fontRef idx="minor">
+              <a:schemeClr val="lt1"/>
+            </a:fontRef>
+          </p:style>
+          <p:txBody>
+            <a:bodyPr rtlCol="0" anchor="ctr"/>
+            <a:lstStyle/>
+            <a:p>
+              <a:pPr algn="ctr"/>
+              <a:endParaRPr lang="en-GB">
+                <a:solidFill>
+                  <a:srgbClr val="FFC720"/>
+                </a:solidFill>
+              </a:endParaRPr>
+            </a:p>
+          </p:txBody>
+        </p:sp>
+        <p:sp>
+          <p:nvSpPr>
+            <p:cNvPr id="46" name="Free-form: Shape 45">
+              <a:extLst>
+                <a:ext uri="{FF2B5EF4-FFF2-40B4-BE49-F238E27FC236}">
+                  <a16:creationId xmlns:a16="http://schemas.microsoft.com/office/drawing/2014/main" id="{122F5CF7-B6A6-B6C3-B860-5DF8AFB2C1B4}"/>
+                </a:ext>
+              </a:extLst>
+            </p:cNvPr>
+            <p:cNvSpPr/>
+            <p:nvPr/>
+          </p:nvSpPr>
+          <p:spPr>
+            <a:xfrm>
+              <a:off x="4076163" y="2865549"/>
+              <a:ext cx="2479183" cy="380665"/>
+            </a:xfrm>
+            <a:custGeom>
+              <a:avLst/>
+              <a:gdLst>
+                <a:gd name="connsiteX0" fmla="*/ 2479183 w 2479183"/>
+                <a:gd name="connsiteY0" fmla="*/ 302654 h 380665"/>
+                <a:gd name="connsiteX1" fmla="*/ 798491 w 2479183"/>
+                <a:gd name="connsiteY1" fmla="*/ 360609 h 380665"/>
+                <a:gd name="connsiteX2" fmla="*/ 0 w 2479183"/>
+                <a:gd name="connsiteY2" fmla="*/ 0 h 380665"/>
+              </a:gdLst>
+              <a:ahLst/>
+              <a:cxnLst>
+                <a:cxn ang="0">
+                  <a:pos x="connsiteX0" y="connsiteY0"/>
+                </a:cxn>
+                <a:cxn ang="0">
+                  <a:pos x="connsiteX1" y="connsiteY1"/>
+                </a:cxn>
+                <a:cxn ang="0">
+                  <a:pos x="connsiteX2" y="connsiteY2"/>
+                </a:cxn>
+              </a:cxnLst>
+              <a:rect l="l" t="t" r="r" b="b"/>
+              <a:pathLst>
+                <a:path w="2479183" h="380665">
+                  <a:moveTo>
+                    <a:pt x="2479183" y="302654"/>
+                  </a:moveTo>
+                  <a:cubicBezTo>
+                    <a:pt x="1845435" y="356852"/>
+                    <a:pt x="1211688" y="411051"/>
+                    <a:pt x="798491" y="360609"/>
+                  </a:cubicBezTo>
+                  <a:cubicBezTo>
+                    <a:pt x="385294" y="310167"/>
+                    <a:pt x="192647" y="155083"/>
+                    <a:pt x="0" y="0"/>
+                  </a:cubicBezTo>
+                </a:path>
+              </a:pathLst>
+            </a:custGeom>
+            <a:noFill/>
+            <a:ln w="25400">
+              <a:solidFill>
+                <a:srgbClr val="FFC720"/>
+              </a:solidFill>
+              <a:tailEnd type="arrow"/>
+            </a:ln>
+          </p:spPr>
+          <p:style>
+            <a:lnRef idx="2">
+              <a:schemeClr val="accent1">
+                <a:shade val="15000"/>
+              </a:schemeClr>
+            </a:lnRef>
+            <a:fillRef idx="1">
+              <a:schemeClr val="accent1"/>
+            </a:fillRef>
+            <a:effectRef idx="0">
+              <a:schemeClr val="accent1"/>
+            </a:effectRef>
+            <a:fontRef idx="minor">
+              <a:schemeClr val="lt1"/>
+            </a:fontRef>
+          </p:style>
+          <p:txBody>
+            <a:bodyPr rtlCol="0" anchor="ctr"/>
+            <a:lstStyle/>
+            <a:p>
+              <a:pPr algn="ctr"/>
+              <a:endParaRPr lang="en-GB"/>
+            </a:p>
+          </p:txBody>
+        </p:sp>
+      </p:grpSp>
+    </p:spTree>
+    <p:extLst>
+      <p:ext uri="{BB962C8B-B14F-4D97-AF65-F5344CB8AC3E}">
+        <p14:creationId xmlns:p14="http://schemas.microsoft.com/office/powerpoint/2010/main" val="1426967033"/>
+      </p:ext>
+    </p:extLst>
+  </p:cSld>
+  <p:clrMapOvr>
+    <a:masterClrMapping/>
+  </p:clrMapOvr>
+</p:sld>
+</file>
+
+<file path=ppt/slides/slide12.xml><?xml version="1.0" encoding="utf-8"?>
+<p:sld xmlns:a="http://schemas.openxmlformats.org/drawingml/2006/main" xmlns:r="http://schemas.openxmlformats.org/officeDocument/2006/relationships" xmlns:p="http://schemas.openxmlformats.org/presentationml/2006/main">
+  <p:cSld>
+    <p:spTree>
+      <p:nvGrpSpPr>
+        <p:cNvPr id="1" name="">
+          <a:extLst>
+            <a:ext uri="{FF2B5EF4-FFF2-40B4-BE49-F238E27FC236}">
+              <a16:creationId xmlns:a16="http://schemas.microsoft.com/office/drawing/2014/main" id="{5206576E-EF2C-5DC6-C493-2B734D523AD7}"/>
+            </a:ext>
+          </a:extLst>
+        </p:cNvPr>
+        <p:cNvGrpSpPr/>
+        <p:nvPr/>
+      </p:nvGrpSpPr>
+      <p:grpSpPr>
+        <a:xfrm>
+          <a:off x="0" y="0"/>
+          <a:ext cx="0" cy="0"/>
+          <a:chOff x="0" y="0"/>
+          <a:chExt cx="0" cy="0"/>
+        </a:xfrm>
+      </p:grpSpPr>
+      <p:sp>
+        <p:nvSpPr>
+          <p:cNvPr id="3" name="Rectangle 2">
+            <a:extLst>
+              <a:ext uri="{FF2B5EF4-FFF2-40B4-BE49-F238E27FC236}">
+                <a16:creationId xmlns:a16="http://schemas.microsoft.com/office/drawing/2014/main" id="{E46D099F-9613-C736-C6B2-796449EFF53A}"/>
+              </a:ext>
+            </a:extLst>
+          </p:cNvPr>
+          <p:cNvSpPr/>
+          <p:nvPr/>
+        </p:nvSpPr>
+        <p:spPr>
+          <a:xfrm>
+            <a:off x="1953986" y="1970315"/>
+            <a:ext cx="8284028" cy="2917372"/>
+          </a:xfrm>
+          <a:prstGeom prst="rect">
+            <a:avLst/>
+          </a:prstGeom>
+          <a:solidFill>
+            <a:srgbClr val="011627"/>
+          </a:solidFill>
+          <a:ln>
+            <a:noFill/>
+          </a:ln>
+        </p:spPr>
+        <p:style>
+          <a:lnRef idx="2">
+            <a:schemeClr val="accent1">
+              <a:shade val="50000"/>
+            </a:schemeClr>
+          </a:lnRef>
+          <a:fillRef idx="1">
+            <a:schemeClr val="accent1"/>
+          </a:fillRef>
+          <a:effectRef idx="0">
+            <a:schemeClr val="accent1"/>
+          </a:effectRef>
+          <a:fontRef idx="minor">
+            <a:schemeClr val="lt1"/>
+          </a:fontRef>
+        </p:style>
+        <p:txBody>
+          <a:bodyPr rtlCol="0" anchor="ctr"/>
+          <a:lstStyle/>
+          <a:p>
+            <a:pPr algn="ctr"/>
+            <a:endParaRPr lang="en-GB"/>
+          </a:p>
+        </p:txBody>
+      </p:sp>
+      <p:grpSp>
+        <p:nvGrpSpPr>
+          <p:cNvPr id="17" name="Group 16">
+            <a:extLst>
+              <a:ext uri="{FF2B5EF4-FFF2-40B4-BE49-F238E27FC236}">
+                <a16:creationId xmlns:a16="http://schemas.microsoft.com/office/drawing/2014/main" id="{FC43A7AA-9D8E-B1FD-97E6-08E92DEA935A}"/>
+              </a:ext>
+            </a:extLst>
+          </p:cNvPr>
+          <p:cNvGrpSpPr/>
+          <p:nvPr/>
+        </p:nvGrpSpPr>
+        <p:grpSpPr>
+          <a:xfrm>
+            <a:off x="2597276" y="2171358"/>
+            <a:ext cx="6997448" cy="2515285"/>
+            <a:chOff x="2679719" y="3118042"/>
+            <a:chExt cx="6997448" cy="2515285"/>
+          </a:xfrm>
+        </p:grpSpPr>
+        <p:sp>
+          <p:nvSpPr>
+            <p:cNvPr id="2" name="Rectangle 1">
+              <a:extLst>
+                <a:ext uri="{FF2B5EF4-FFF2-40B4-BE49-F238E27FC236}">
+                  <a16:creationId xmlns:a16="http://schemas.microsoft.com/office/drawing/2014/main" id="{BB22D764-339B-B259-27F1-C96FA5BF2B08}"/>
+                </a:ext>
+              </a:extLst>
+            </p:cNvPr>
+            <p:cNvSpPr>
+              <a:spLocks noChangeArrowheads="1"/>
+            </p:cNvSpPr>
+            <p:nvPr/>
+          </p:nvSpPr>
+          <p:spPr bwMode="auto">
+            <a:xfrm>
+              <a:off x="3133651" y="3118042"/>
+              <a:ext cx="5924699" cy="621915"/>
+            </a:xfrm>
+            <a:prstGeom prst="rect">
+              <a:avLst/>
+            </a:prstGeom>
+            <a:noFill/>
+            <a:ln>
+              <a:noFill/>
+            </a:ln>
+            <a:effectLst/>
+          </p:spPr>
+          <p:txBody>
+            <a:bodyPr vert="horz" wrap="none" lIns="0" tIns="79350" rIns="0" bIns="79350" numCol="1" anchor="ctr" anchorCtr="0" compatLnSpc="1">
+              <a:prstTxWarp prst="textNoShape">
+                <a:avLst/>
+              </a:prstTxWarp>
+              <a:spAutoFit/>
+            </a:bodyPr>
+            <a:lstStyle/>
+            <a:p>
+              <a:pPr marL="0" marR="0" lvl="0" indent="0" algn="ctr" defTabSz="914400" rtl="0" eaLnBrk="0" fontAlgn="base" latinLnBrk="0" hangingPunct="0">
+                <a:lnSpc>
+                  <a:spcPct val="100000"/>
+                </a:lnSpc>
+                <a:spcBef>
+                  <a:spcPct val="0"/>
+                </a:spcBef>
+                <a:spcAft>
+                  <a:spcPct val="0"/>
+                </a:spcAft>
+                <a:buClrTx/>
+                <a:buSzTx/>
+                <a:buFontTx/>
+                <a:buNone/>
+                <a:tabLst/>
+              </a:pPr>
+              <a:r>
+                <a:rPr kumimoji="0" lang="en-US" altLang="en-US" sz="3000" b="0" i="0" u="none" strike="noStrike" cap="none" normalizeH="0" baseline="0" dirty="0">
+                  <a:ln>
+                    <a:noFill/>
+                  </a:ln>
+                  <a:solidFill>
+                    <a:srgbClr val="D6DEEB"/>
+                  </a:solidFill>
+                  <a:effectLst/>
+                  <a:latin typeface="Consolas" panose="020B0609020204030204" pitchFamily="49" charset="0"/>
+                </a:rPr>
+                <a:t>left </a:t>
+              </a:r>
+              <a:r>
+                <a:rPr kumimoji="0" lang="en-US" altLang="en-US" sz="3000" b="0" i="0" u="none" strike="noStrike" cap="none" normalizeH="0" baseline="0" dirty="0">
+                  <a:ln>
+                    <a:noFill/>
+                  </a:ln>
+                  <a:solidFill>
+                    <a:srgbClr val="7FDBCA"/>
+                  </a:solidFill>
+                  <a:effectLst/>
+                  <a:latin typeface="Consolas" panose="020B0609020204030204" pitchFamily="49" charset="0"/>
+                </a:rPr>
+                <a:t>if</a:t>
+              </a:r>
+              <a:r>
+                <a:rPr kumimoji="0" lang="en-US" altLang="en-US" sz="3000" b="0" i="0" u="none" strike="noStrike" cap="none" normalizeH="0" baseline="0" dirty="0">
+                  <a:ln>
+                    <a:noFill/>
+                  </a:ln>
+                  <a:solidFill>
+                    <a:srgbClr val="D6DEEB"/>
+                  </a:solidFill>
+                  <a:effectLst/>
+                  <a:latin typeface="Consolas" panose="020B0609020204030204" pitchFamily="49" charset="0"/>
+                </a:rPr>
+                <a:t> condition</a:t>
+              </a:r>
+              <a:r>
+                <a:rPr kumimoji="0" lang="en-US" altLang="en-US" sz="3000" b="0" i="0" u="none" strike="noStrike" cap="none" normalizeH="0" baseline="0" dirty="0">
+                  <a:ln>
+                    <a:noFill/>
+                  </a:ln>
+                  <a:solidFill>
+                    <a:srgbClr val="7FDBCA"/>
+                  </a:solidFill>
+                  <a:effectLst/>
+                  <a:latin typeface="Consolas" panose="020B0609020204030204" pitchFamily="49" charset="0"/>
+                </a:rPr>
+                <a:t> else</a:t>
+              </a:r>
+              <a:r>
+                <a:rPr lang="en-US" altLang="en-US" sz="3000" dirty="0">
+                  <a:solidFill>
+                    <a:schemeClr val="tx2">
+                      <a:lumMod val="75000"/>
+                    </a:schemeClr>
+                  </a:solidFill>
+                  <a:latin typeface="Consolas" panose="020B0609020204030204" pitchFamily="49" charset="0"/>
+                </a:rPr>
+                <a:t> </a:t>
+              </a:r>
+              <a:r>
+                <a:rPr lang="en-US" altLang="en-US" sz="3000" dirty="0">
+                  <a:solidFill>
+                    <a:srgbClr val="D6DEEB"/>
+                  </a:solidFill>
+                  <a:latin typeface="Consolas" panose="020B0609020204030204" pitchFamily="49" charset="0"/>
+                </a:rPr>
+                <a:t>right</a:t>
+              </a:r>
+              <a:endParaRPr kumimoji="0" lang="en-US" altLang="en-US" sz="3000" b="0" i="0" u="none" strike="noStrike" cap="none" normalizeH="0" baseline="0" dirty="0">
+                <a:ln>
+                  <a:noFill/>
+                </a:ln>
+                <a:solidFill>
+                  <a:schemeClr val="tx2">
+                    <a:lumMod val="75000"/>
+                  </a:schemeClr>
+                </a:solidFill>
+                <a:effectLst/>
+                <a:latin typeface="Consolas" panose="020B0609020204030204" pitchFamily="49" charset="0"/>
+              </a:endParaRPr>
+            </a:p>
+          </p:txBody>
+        </p:sp>
+        <p:cxnSp>
+          <p:nvCxnSpPr>
+            <p:cNvPr id="6" name="Straight Arrow Connector 5">
+              <a:extLst>
+                <a:ext uri="{FF2B5EF4-FFF2-40B4-BE49-F238E27FC236}">
+                  <a16:creationId xmlns:a16="http://schemas.microsoft.com/office/drawing/2014/main" id="{B4CEA163-C854-42CC-7428-48A4C8AD0652}"/>
+                </a:ext>
+              </a:extLst>
+            </p:cNvPr>
+            <p:cNvCxnSpPr>
+              <a:cxnSpLocks/>
+            </p:cNvCxnSpPr>
+            <p:nvPr/>
+          </p:nvCxnSpPr>
+          <p:spPr>
+            <a:xfrm flipV="1">
+              <a:off x="3603171" y="4027714"/>
+              <a:ext cx="0" cy="1061328"/>
+            </a:xfrm>
+            <a:prstGeom prst="straightConnector1">
+              <a:avLst/>
+            </a:prstGeom>
+            <a:noFill/>
+            <a:ln w="25400">
+              <a:solidFill>
+                <a:srgbClr val="FFC720"/>
+              </a:solidFill>
+              <a:tailEnd type="arrow"/>
+            </a:ln>
+          </p:spPr>
+          <p:style>
+            <a:lnRef idx="2">
+              <a:schemeClr val="accent1">
+                <a:shade val="15000"/>
+              </a:schemeClr>
+            </a:lnRef>
+            <a:fillRef idx="1">
+              <a:schemeClr val="accent1"/>
+            </a:fillRef>
+            <a:effectRef idx="0">
+              <a:schemeClr val="accent1"/>
+            </a:effectRef>
+            <a:fontRef idx="minor">
+              <a:schemeClr val="lt1"/>
+            </a:fontRef>
+          </p:style>
+        </p:cxnSp>
+        <p:sp>
+          <p:nvSpPr>
+            <p:cNvPr id="8" name="Rectangle 7">
+              <a:extLst>
+                <a:ext uri="{FF2B5EF4-FFF2-40B4-BE49-F238E27FC236}">
+                  <a16:creationId xmlns:a16="http://schemas.microsoft.com/office/drawing/2014/main" id="{879C68A2-7BA5-75B7-7D04-A0F2AC2056EB}"/>
+                </a:ext>
+              </a:extLst>
+            </p:cNvPr>
+            <p:cNvSpPr>
+              <a:spLocks noChangeArrowheads="1"/>
+            </p:cNvSpPr>
+            <p:nvPr/>
+          </p:nvSpPr>
+          <p:spPr bwMode="auto">
+            <a:xfrm>
+              <a:off x="2679719" y="5165301"/>
+              <a:ext cx="3468898" cy="468026"/>
+            </a:xfrm>
+            <a:prstGeom prst="rect">
+              <a:avLst/>
+            </a:prstGeom>
+            <a:noFill/>
+            <a:ln>
+              <a:noFill/>
+            </a:ln>
+            <a:effectLst/>
+          </p:spPr>
+          <p:txBody>
+            <a:bodyPr vert="horz" wrap="none" lIns="0" tIns="79350" rIns="0" bIns="79350" numCol="1" anchor="ctr" anchorCtr="0" compatLnSpc="1">
+              <a:prstTxWarp prst="textNoShape">
+                <a:avLst/>
+              </a:prstTxWarp>
+              <a:spAutoFit/>
+            </a:bodyPr>
+            <a:lstStyle/>
+            <a:p>
+              <a:pPr marL="0" marR="0" lvl="0" indent="0" defTabSz="914400" rtl="0" eaLnBrk="0" fontAlgn="base" latinLnBrk="0" hangingPunct="0">
+                <a:lnSpc>
+                  <a:spcPct val="100000"/>
+                </a:lnSpc>
+                <a:spcBef>
+                  <a:spcPct val="0"/>
+                </a:spcBef>
+                <a:spcAft>
+                  <a:spcPct val="0"/>
+                </a:spcAft>
+                <a:buClrTx/>
+                <a:buSzTx/>
+                <a:buFontTx/>
+                <a:buNone/>
+                <a:tabLst/>
+              </a:pPr>
+              <a:r>
+                <a:rPr kumimoji="0" lang="en-US" altLang="en-US" sz="2000" b="0" i="0" u="none" strike="noStrike" cap="none" normalizeH="0" baseline="0" dirty="0">
+                  <a:ln>
+                    <a:noFill/>
+                  </a:ln>
+                  <a:solidFill>
+                    <a:srgbClr val="D6DEEB"/>
+                  </a:solidFill>
+                  <a:effectLst/>
+                  <a:latin typeface="Fira Sans" panose="020B0503050000020004" pitchFamily="34" charset="0"/>
+                  <a:ea typeface="Fira Mono" panose="020B0509050000020004" pitchFamily="49" charset="0"/>
+                </a:rPr>
+                <a:t>returned if condition is truthy</a:t>
+              </a:r>
+              <a:endParaRPr kumimoji="0" lang="en-US" altLang="en-US" sz="2000" b="0" i="0" u="none" strike="noStrike" cap="none" normalizeH="0" baseline="0" dirty="0">
+                <a:ln>
+                  <a:noFill/>
+                </a:ln>
+                <a:solidFill>
+                  <a:schemeClr val="tx2">
+                    <a:lumMod val="75000"/>
+                  </a:schemeClr>
+                </a:solidFill>
+                <a:effectLst/>
+                <a:latin typeface="Fira Sans" panose="020B0503050000020004" pitchFamily="34" charset="0"/>
+                <a:ea typeface="Fira Mono" panose="020B0509050000020004" pitchFamily="49" charset="0"/>
+              </a:endParaRPr>
+            </a:p>
+          </p:txBody>
+        </p:sp>
+        <p:cxnSp>
+          <p:nvCxnSpPr>
+            <p:cNvPr id="9" name="Straight Arrow Connector 8">
+              <a:extLst>
+                <a:ext uri="{FF2B5EF4-FFF2-40B4-BE49-F238E27FC236}">
+                  <a16:creationId xmlns:a16="http://schemas.microsoft.com/office/drawing/2014/main" id="{E0A46631-72D0-76EC-6958-94B66221D0A1}"/>
+                </a:ext>
+              </a:extLst>
+            </p:cNvPr>
+            <p:cNvCxnSpPr>
+              <a:cxnSpLocks/>
+            </p:cNvCxnSpPr>
+            <p:nvPr/>
+          </p:nvCxnSpPr>
+          <p:spPr>
+            <a:xfrm flipV="1">
+              <a:off x="8512628" y="4027714"/>
+              <a:ext cx="0" cy="560615"/>
+            </a:xfrm>
+            <a:prstGeom prst="straightConnector1">
+              <a:avLst/>
+            </a:prstGeom>
+            <a:noFill/>
+            <a:ln w="25400">
+              <a:solidFill>
+                <a:srgbClr val="FFC720"/>
+              </a:solidFill>
+              <a:tailEnd type="arrow"/>
+            </a:ln>
+          </p:spPr>
+          <p:style>
+            <a:lnRef idx="2">
+              <a:schemeClr val="accent1">
+                <a:shade val="15000"/>
+              </a:schemeClr>
+            </a:lnRef>
+            <a:fillRef idx="1">
+              <a:schemeClr val="accent1"/>
+            </a:fillRef>
+            <a:effectRef idx="0">
+              <a:schemeClr val="accent1"/>
+            </a:effectRef>
+            <a:fontRef idx="minor">
+              <a:schemeClr val="lt1"/>
+            </a:fontRef>
+          </p:style>
+        </p:cxnSp>
+        <p:cxnSp>
+          <p:nvCxnSpPr>
+            <p:cNvPr id="10" name="Straight Connector 9">
+              <a:extLst>
+                <a:ext uri="{FF2B5EF4-FFF2-40B4-BE49-F238E27FC236}">
+                  <a16:creationId xmlns:a16="http://schemas.microsoft.com/office/drawing/2014/main" id="{FEFF66B3-BFF7-D412-63A6-77FDB5D56F1F}"/>
+                </a:ext>
+              </a:extLst>
+            </p:cNvPr>
+            <p:cNvCxnSpPr>
+              <a:cxnSpLocks/>
+            </p:cNvCxnSpPr>
+            <p:nvPr/>
+          </p:nvCxnSpPr>
+          <p:spPr>
+            <a:xfrm>
+              <a:off x="3215142" y="3816575"/>
+              <a:ext cx="754285" cy="0"/>
+            </a:xfrm>
+            <a:prstGeom prst="line">
+              <a:avLst/>
+            </a:prstGeom>
+            <a:ln w="50800">
+              <a:solidFill>
+                <a:schemeClr val="accent6"/>
+              </a:solidFill>
+            </a:ln>
+          </p:spPr>
+          <p:style>
+            <a:lnRef idx="1">
+              <a:schemeClr val="accent1"/>
+            </a:lnRef>
+            <a:fillRef idx="0">
+              <a:schemeClr val="accent1"/>
+            </a:fillRef>
+            <a:effectRef idx="0">
+              <a:schemeClr val="accent1"/>
+            </a:effectRef>
+            <a:fontRef idx="minor">
+              <a:schemeClr val="tx1"/>
+            </a:fontRef>
+          </p:style>
+        </p:cxnSp>
+        <p:cxnSp>
+          <p:nvCxnSpPr>
+            <p:cNvPr id="12" name="Straight Connector 11">
+              <a:extLst>
+                <a:ext uri="{FF2B5EF4-FFF2-40B4-BE49-F238E27FC236}">
+                  <a16:creationId xmlns:a16="http://schemas.microsoft.com/office/drawing/2014/main" id="{06FD2172-2051-1365-8E2B-CBAB9F90C0D1}"/>
+                </a:ext>
+              </a:extLst>
+            </p:cNvPr>
+            <p:cNvCxnSpPr>
+              <a:cxnSpLocks/>
+            </p:cNvCxnSpPr>
+            <p:nvPr/>
+          </p:nvCxnSpPr>
+          <p:spPr>
+            <a:xfrm>
+              <a:off x="8021185" y="3816575"/>
+              <a:ext cx="937758" cy="0"/>
+            </a:xfrm>
+            <a:prstGeom prst="line">
+              <a:avLst/>
+            </a:prstGeom>
+            <a:ln w="50800">
+              <a:solidFill>
+                <a:schemeClr val="accent6"/>
+              </a:solidFill>
+            </a:ln>
+          </p:spPr>
+          <p:style>
+            <a:lnRef idx="1">
+              <a:schemeClr val="accent1"/>
+            </a:lnRef>
+            <a:fillRef idx="0">
+              <a:schemeClr val="accent1"/>
+            </a:fillRef>
+            <a:effectRef idx="0">
+              <a:schemeClr val="accent1"/>
+            </a:effectRef>
+            <a:fontRef idx="minor">
+              <a:schemeClr val="tx1"/>
+            </a:fontRef>
+          </p:style>
+        </p:cxnSp>
+        <p:sp>
+          <p:nvSpPr>
+            <p:cNvPr id="15" name="Rectangle 14">
+              <a:extLst>
+                <a:ext uri="{FF2B5EF4-FFF2-40B4-BE49-F238E27FC236}">
+                  <a16:creationId xmlns:a16="http://schemas.microsoft.com/office/drawing/2014/main" id="{6DCC9AD5-EA23-360C-D9E0-915B5FC96022}"/>
+                </a:ext>
+              </a:extLst>
+            </p:cNvPr>
+            <p:cNvSpPr>
+              <a:spLocks noChangeArrowheads="1"/>
+            </p:cNvSpPr>
+            <p:nvPr/>
+          </p:nvSpPr>
+          <p:spPr bwMode="auto">
+            <a:xfrm>
+              <a:off x="6371775" y="4621016"/>
+              <a:ext cx="3305392" cy="468026"/>
+            </a:xfrm>
+            <a:prstGeom prst="rect">
+              <a:avLst/>
+            </a:prstGeom>
+            <a:noFill/>
+            <a:ln>
+              <a:noFill/>
+            </a:ln>
+            <a:effectLst/>
+          </p:spPr>
+          <p:txBody>
+            <a:bodyPr vert="horz" wrap="none" lIns="0" tIns="79350" rIns="0" bIns="79350" numCol="1" anchor="ctr" anchorCtr="0" compatLnSpc="1">
+              <a:prstTxWarp prst="textNoShape">
+                <a:avLst/>
+              </a:prstTxWarp>
+              <a:spAutoFit/>
+            </a:bodyPr>
+            <a:lstStyle/>
+            <a:p>
+              <a:pPr marL="0" marR="0" lvl="0" indent="0" algn="r" defTabSz="914400" rtl="0" eaLnBrk="0" fontAlgn="base" latinLnBrk="0" hangingPunct="0">
+                <a:lnSpc>
+                  <a:spcPct val="100000"/>
+                </a:lnSpc>
+                <a:spcBef>
+                  <a:spcPct val="0"/>
+                </a:spcBef>
+                <a:spcAft>
+                  <a:spcPct val="0"/>
+                </a:spcAft>
+                <a:buClrTx/>
+                <a:buSzTx/>
+                <a:buFontTx/>
+                <a:buNone/>
+                <a:tabLst/>
+              </a:pPr>
+              <a:r>
+                <a:rPr kumimoji="0" lang="en-US" altLang="en-US" sz="2000" b="0" i="0" u="none" strike="noStrike" cap="none" normalizeH="0" baseline="0" dirty="0">
+                  <a:ln>
+                    <a:noFill/>
+                  </a:ln>
+                  <a:solidFill>
+                    <a:srgbClr val="D6DEEB"/>
+                  </a:solidFill>
+                  <a:effectLst/>
+                  <a:latin typeface="Fira Sans" panose="020B0503050000020004" pitchFamily="34" charset="0"/>
+                  <a:ea typeface="Fira Mono" panose="020B0509050000020004" pitchFamily="49" charset="0"/>
+                </a:rPr>
+                <a:t>returned if condition is </a:t>
+              </a:r>
+              <a:r>
+                <a:rPr kumimoji="0" lang="en-US" altLang="en-US" sz="2000" b="0" i="0" u="none" strike="noStrike" cap="none" normalizeH="0" baseline="0" dirty="0" err="1">
+                  <a:ln>
+                    <a:noFill/>
+                  </a:ln>
+                  <a:solidFill>
+                    <a:srgbClr val="D6DEEB"/>
+                  </a:solidFill>
+                  <a:effectLst/>
+                  <a:latin typeface="Fira Sans" panose="020B0503050000020004" pitchFamily="34" charset="0"/>
+                  <a:ea typeface="Fira Mono" panose="020B0509050000020004" pitchFamily="49" charset="0"/>
+                </a:rPr>
+                <a:t>falsy</a:t>
+              </a:r>
+              <a:endParaRPr kumimoji="0" lang="en-US" altLang="en-US" sz="2000" b="0" i="0" u="none" strike="noStrike" cap="none" normalizeH="0" baseline="0" dirty="0">
+                <a:ln>
+                  <a:noFill/>
+                </a:ln>
+                <a:solidFill>
+                  <a:schemeClr val="tx2">
+                    <a:lumMod val="75000"/>
+                  </a:schemeClr>
+                </a:solidFill>
+                <a:effectLst/>
+                <a:latin typeface="Fira Sans" panose="020B0503050000020004" pitchFamily="34" charset="0"/>
+                <a:ea typeface="Fira Mono" panose="020B0509050000020004" pitchFamily="49" charset="0"/>
+              </a:endParaRPr>
+            </a:p>
+          </p:txBody>
+        </p:sp>
+      </p:grpSp>
+    </p:spTree>
+    <p:extLst>
+      <p:ext uri="{BB962C8B-B14F-4D97-AF65-F5344CB8AC3E}">
+        <p14:creationId xmlns:p14="http://schemas.microsoft.com/office/powerpoint/2010/main" val="793693820"/>
+      </p:ext>
+    </p:extLst>
+  </p:cSld>
+  <p:clrMapOvr>
+    <a:masterClrMapping/>
+  </p:clrMapOvr>
+</p:sld>
+</file>
+
+<file path=ppt/slides/slide13.xml><?xml version="1.0" encoding="utf-8"?>
+<p:sld xmlns:a="http://schemas.openxmlformats.org/drawingml/2006/main" xmlns:r="http://schemas.openxmlformats.org/officeDocument/2006/relationships" xmlns:p="http://schemas.openxmlformats.org/presentationml/2006/main">
+  <p:cSld>
+    <p:spTree>
+      <p:nvGrpSpPr>
+        <p:cNvPr id="1" name="">
+          <a:extLst>
+            <a:ext uri="{FF2B5EF4-FFF2-40B4-BE49-F238E27FC236}">
+              <a16:creationId xmlns:a16="http://schemas.microsoft.com/office/drawing/2014/main" id="{7C77D6F1-CE7A-F7C6-9206-A22724C872B0}"/>
+            </a:ext>
+          </a:extLst>
+        </p:cNvPr>
+        <p:cNvGrpSpPr/>
+        <p:nvPr/>
+      </p:nvGrpSpPr>
+      <p:grpSpPr>
+        <a:xfrm>
+          <a:off x="0" y="0"/>
+          <a:ext cx="0" cy="0"/>
+          <a:chOff x="0" y="0"/>
+          <a:chExt cx="0" cy="0"/>
+        </a:xfrm>
+      </p:grpSpPr>
+      <p:sp>
+        <p:nvSpPr>
+          <p:cNvPr id="3" name="Rectangle 2">
+            <a:extLst>
+              <a:ext uri="{FF2B5EF4-FFF2-40B4-BE49-F238E27FC236}">
+                <a16:creationId xmlns:a16="http://schemas.microsoft.com/office/drawing/2014/main" id="{548689B2-FCF8-1354-A0E0-B05EB391CF9C}"/>
+              </a:ext>
+            </a:extLst>
+          </p:cNvPr>
+          <p:cNvSpPr/>
+          <p:nvPr/>
+        </p:nvSpPr>
+        <p:spPr>
+          <a:xfrm>
+            <a:off x="1953986" y="2474167"/>
+            <a:ext cx="8284028" cy="1909666"/>
+          </a:xfrm>
+          <a:prstGeom prst="rect">
+            <a:avLst/>
+          </a:prstGeom>
+          <a:solidFill>
+            <a:srgbClr val="011627"/>
+          </a:solidFill>
+          <a:ln>
+            <a:noFill/>
+          </a:ln>
+        </p:spPr>
+        <p:style>
+          <a:lnRef idx="2">
+            <a:schemeClr val="accent1">
+              <a:shade val="50000"/>
+            </a:schemeClr>
+          </a:lnRef>
+          <a:fillRef idx="1">
+            <a:schemeClr val="accent1"/>
+          </a:fillRef>
+          <a:effectRef idx="0">
+            <a:schemeClr val="accent1"/>
+          </a:effectRef>
+          <a:fontRef idx="minor">
+            <a:schemeClr val="lt1"/>
+          </a:fontRef>
+        </p:style>
+        <p:txBody>
+          <a:bodyPr rtlCol="0" anchor="ctr"/>
+          <a:lstStyle/>
+          <a:p>
+            <a:pPr algn="ctr"/>
+            <a:endParaRPr lang="en-GB"/>
+          </a:p>
+        </p:txBody>
+      </p:sp>
+      <p:sp>
+        <p:nvSpPr>
+          <p:cNvPr id="4" name="Rectangle 3">
+            <a:extLst>
+              <a:ext uri="{FF2B5EF4-FFF2-40B4-BE49-F238E27FC236}">
+                <a16:creationId xmlns:a16="http://schemas.microsoft.com/office/drawing/2014/main" id="{FC920EAE-5359-93CD-5857-CB2DC1B0A94C}"/>
+              </a:ext>
+            </a:extLst>
+          </p:cNvPr>
+          <p:cNvSpPr/>
+          <p:nvPr/>
+        </p:nvSpPr>
+        <p:spPr>
+          <a:xfrm>
+            <a:off x="2484780" y="2803849"/>
+            <a:ext cx="7238770" cy="664028"/>
+          </a:xfrm>
+          <a:prstGeom prst="rect">
+            <a:avLst/>
+          </a:prstGeom>
+          <a:solidFill>
+            <a:schemeClr val="bg1">
+              <a:alpha val="20000"/>
+            </a:schemeClr>
+          </a:solidFill>
+          <a:ln>
+            <a:noFill/>
+          </a:ln>
+        </p:spPr>
+        <p:style>
+          <a:lnRef idx="2">
+            <a:schemeClr val="accent1">
+              <a:shade val="15000"/>
+            </a:schemeClr>
+          </a:lnRef>
+          <a:fillRef idx="1">
+            <a:schemeClr val="accent1"/>
+          </a:fillRef>
+          <a:effectRef idx="0">
+            <a:schemeClr val="accent1"/>
+          </a:effectRef>
+          <a:fontRef idx="minor">
+            <a:schemeClr val="lt1"/>
+          </a:fontRef>
+        </p:style>
+        <p:txBody>
+          <a:bodyPr rtlCol="0" anchor="ctr"/>
+          <a:lstStyle/>
+          <a:p>
+            <a:pPr algn="ctr"/>
+            <a:endParaRPr lang="en-GB"/>
+          </a:p>
+        </p:txBody>
+      </p:sp>
+      <p:sp>
+        <p:nvSpPr>
+          <p:cNvPr id="5" name="Rectangle 4">
+            <a:extLst>
+              <a:ext uri="{FF2B5EF4-FFF2-40B4-BE49-F238E27FC236}">
+                <a16:creationId xmlns:a16="http://schemas.microsoft.com/office/drawing/2014/main" id="{81B6C5C4-F997-F117-77A2-40F75A344C14}"/>
+              </a:ext>
+            </a:extLst>
+          </p:cNvPr>
+          <p:cNvSpPr/>
+          <p:nvPr/>
+        </p:nvSpPr>
+        <p:spPr>
+          <a:xfrm>
+            <a:off x="4849528" y="2844068"/>
+            <a:ext cx="4770990" cy="583590"/>
+          </a:xfrm>
+          <a:prstGeom prst="rect">
+            <a:avLst/>
+          </a:prstGeom>
+          <a:solidFill>
+            <a:srgbClr val="FFC720">
+              <a:alpha val="20000"/>
+            </a:srgbClr>
+          </a:solidFill>
+          <a:ln>
+            <a:noFill/>
+          </a:ln>
+        </p:spPr>
+        <p:style>
+          <a:lnRef idx="2">
+            <a:schemeClr val="accent1">
+              <a:shade val="15000"/>
+            </a:schemeClr>
+          </a:lnRef>
+          <a:fillRef idx="1">
+            <a:schemeClr val="accent1"/>
+          </a:fillRef>
+          <a:effectRef idx="0">
+            <a:schemeClr val="accent1"/>
+          </a:effectRef>
+          <a:fontRef idx="minor">
+            <a:schemeClr val="lt1"/>
+          </a:fontRef>
+        </p:style>
+        <p:txBody>
+          <a:bodyPr rtlCol="0" anchor="ctr"/>
+          <a:lstStyle/>
+          <a:p>
+            <a:pPr algn="ctr"/>
+            <a:endParaRPr lang="en-GB"/>
+          </a:p>
+        </p:txBody>
+      </p:sp>
+      <p:sp>
+        <p:nvSpPr>
+          <p:cNvPr id="11" name="Rectangle 10">
+            <a:extLst>
+              <a:ext uri="{FF2B5EF4-FFF2-40B4-BE49-F238E27FC236}">
+                <a16:creationId xmlns:a16="http://schemas.microsoft.com/office/drawing/2014/main" id="{6B5EF742-ECA8-C50E-3E5B-C624F0EEE0F1}"/>
+              </a:ext>
+            </a:extLst>
+          </p:cNvPr>
+          <p:cNvSpPr/>
+          <p:nvPr/>
+        </p:nvSpPr>
+        <p:spPr>
+          <a:xfrm>
+            <a:off x="6959046" y="2878969"/>
+            <a:ext cx="2526243" cy="513788"/>
+          </a:xfrm>
+          <a:prstGeom prst="rect">
+            <a:avLst/>
+          </a:prstGeom>
+          <a:solidFill>
+            <a:schemeClr val="accent3">
+              <a:alpha val="20000"/>
+            </a:schemeClr>
+          </a:solidFill>
+          <a:ln>
+            <a:noFill/>
+          </a:ln>
+        </p:spPr>
+        <p:style>
+          <a:lnRef idx="2">
+            <a:schemeClr val="accent1">
+              <a:shade val="15000"/>
+            </a:schemeClr>
+          </a:lnRef>
+          <a:fillRef idx="1">
+            <a:schemeClr val="accent1"/>
+          </a:fillRef>
+          <a:effectRef idx="0">
+            <a:schemeClr val="accent1"/>
+          </a:effectRef>
+          <a:fontRef idx="minor">
+            <a:schemeClr val="lt1"/>
+          </a:fontRef>
+        </p:style>
+        <p:txBody>
+          <a:bodyPr rtlCol="0" anchor="ctr"/>
+          <a:lstStyle/>
+          <a:p>
+            <a:pPr algn="ctr"/>
+            <a:endParaRPr lang="en-GB"/>
+          </a:p>
+        </p:txBody>
+      </p:sp>
+      <p:sp>
+        <p:nvSpPr>
+          <p:cNvPr id="2" name="Rectangle 1">
+            <a:extLst>
+              <a:ext uri="{FF2B5EF4-FFF2-40B4-BE49-F238E27FC236}">
+                <a16:creationId xmlns:a16="http://schemas.microsoft.com/office/drawing/2014/main" id="{1DA04919-6AF6-65E2-D678-81918FE258C8}"/>
+              </a:ext>
+            </a:extLst>
+          </p:cNvPr>
+          <p:cNvSpPr>
+            <a:spLocks noChangeArrowheads="1"/>
+          </p:cNvSpPr>
+          <p:nvPr/>
+        </p:nvSpPr>
+        <p:spPr bwMode="auto">
+          <a:xfrm>
+            <a:off x="2782593" y="2876515"/>
+            <a:ext cx="6626815" cy="529582"/>
+          </a:xfrm>
+          <a:prstGeom prst="rect">
+            <a:avLst/>
+          </a:prstGeom>
+          <a:noFill/>
+          <a:ln>
+            <a:noFill/>
+          </a:ln>
+          <a:effectLst/>
+        </p:spPr>
+        <p:txBody>
+          <a:bodyPr vert="horz" wrap="none" lIns="0" tIns="79350" rIns="0" bIns="79350" numCol="1" anchor="ctr" anchorCtr="0" compatLnSpc="1">
+            <a:prstTxWarp prst="textNoShape">
+              <a:avLst/>
+            </a:prstTxWarp>
+            <a:spAutoFit/>
+          </a:bodyPr>
+          <a:lstStyle/>
+          <a:p>
+            <a:pPr algn="ctr" eaLnBrk="0" fontAlgn="base" hangingPunct="0">
+              <a:spcBef>
+                <a:spcPct val="0"/>
+              </a:spcBef>
+              <a:spcAft>
+                <a:spcPct val="0"/>
+              </a:spcAft>
+            </a:pPr>
+            <a:r>
+              <a:rPr kumimoji="0" lang="en-US" altLang="en-US" sz="2400" b="0" i="0" u="none" strike="noStrike" cap="none" normalizeH="0" baseline="0" dirty="0">
+                <a:ln>
+                  <a:noFill/>
+                </a:ln>
+                <a:solidFill>
+                  <a:srgbClr val="D6DEEB"/>
+                </a:solidFill>
+                <a:effectLst/>
+                <a:latin typeface="Consolas" panose="020B0609020204030204" pitchFamily="49" charset="0"/>
+              </a:rPr>
+              <a:t>1 </a:t>
+            </a:r>
+            <a:r>
+              <a:rPr kumimoji="0" lang="en-US" altLang="en-US" sz="2400" b="0" i="0" u="none" strike="noStrike" cap="none" normalizeH="0" baseline="0" dirty="0">
+                <a:ln>
+                  <a:noFill/>
+                </a:ln>
+                <a:solidFill>
+                  <a:srgbClr val="7FDBCA"/>
+                </a:solidFill>
+                <a:effectLst/>
+                <a:latin typeface="Consolas" panose="020B0609020204030204" pitchFamily="49" charset="0"/>
+              </a:rPr>
+              <a:t>if</a:t>
+            </a:r>
+            <a:r>
+              <a:rPr kumimoji="0" lang="en-US" altLang="en-US" sz="2400" b="0" i="0" u="none" strike="noStrike" cap="none" normalizeH="0" baseline="0" dirty="0">
+                <a:ln>
+                  <a:noFill/>
+                </a:ln>
+                <a:solidFill>
+                  <a:srgbClr val="D6DEEB"/>
+                </a:solidFill>
+                <a:effectLst/>
+                <a:latin typeface="Consolas" panose="020B0609020204030204" pitchFamily="49" charset="0"/>
+              </a:rPr>
+              <a:t> c</a:t>
+            </a:r>
+            <a:r>
+              <a:rPr kumimoji="0" lang="en-US" altLang="en-US" sz="2400" b="0" i="0" u="none" strike="noStrike" cap="none" normalizeH="0" baseline="0" dirty="0">
+                <a:ln>
+                  <a:noFill/>
+                </a:ln>
+                <a:solidFill>
+                  <a:srgbClr val="7FDBCA"/>
+                </a:solidFill>
+                <a:effectLst/>
+                <a:latin typeface="Consolas" panose="020B0609020204030204" pitchFamily="49" charset="0"/>
+              </a:rPr>
+              <a:t> else</a:t>
+            </a:r>
+            <a:r>
+              <a:rPr lang="en-US" altLang="en-US" sz="2400" dirty="0">
+                <a:solidFill>
+                  <a:schemeClr val="tx2">
+                    <a:lumMod val="75000"/>
+                  </a:schemeClr>
+                </a:solidFill>
+                <a:latin typeface="Consolas" panose="020B0609020204030204" pitchFamily="49" charset="0"/>
+              </a:rPr>
+              <a:t>  </a:t>
+            </a:r>
+            <a:r>
+              <a:rPr lang="en-US" altLang="en-US" sz="2400" dirty="0">
+                <a:solidFill>
+                  <a:srgbClr val="D6DEEB"/>
+                </a:solidFill>
+                <a:latin typeface="Consolas" panose="020B0609020204030204" pitchFamily="49" charset="0"/>
+              </a:rPr>
+              <a:t>2</a:t>
+            </a:r>
+            <a:r>
+              <a:rPr kumimoji="0" lang="en-US" altLang="en-US" sz="2400" b="0" i="0" u="none" strike="noStrike" cap="none" normalizeH="0" baseline="0" dirty="0">
+                <a:ln>
+                  <a:noFill/>
+                </a:ln>
+                <a:solidFill>
+                  <a:srgbClr val="D6DEEB"/>
+                </a:solidFill>
+                <a:effectLst/>
+                <a:latin typeface="Consolas" panose="020B0609020204030204" pitchFamily="49" charset="0"/>
+              </a:rPr>
+              <a:t> </a:t>
+            </a:r>
+            <a:r>
+              <a:rPr kumimoji="0" lang="en-US" altLang="en-US" sz="2400" b="0" i="0" u="none" strike="noStrike" cap="none" normalizeH="0" baseline="0" dirty="0">
+                <a:ln>
+                  <a:noFill/>
+                </a:ln>
+                <a:solidFill>
+                  <a:srgbClr val="7FDBCA"/>
+                </a:solidFill>
+                <a:effectLst/>
+                <a:latin typeface="Consolas" panose="020B0609020204030204" pitchFamily="49" charset="0"/>
+              </a:rPr>
+              <a:t>if</a:t>
+            </a:r>
+            <a:r>
+              <a:rPr kumimoji="0" lang="en-US" altLang="en-US" sz="2400" b="0" i="0" u="none" strike="noStrike" cap="none" normalizeH="0" baseline="0" dirty="0">
+                <a:ln>
+                  <a:noFill/>
+                </a:ln>
+                <a:solidFill>
+                  <a:srgbClr val="D6DEEB"/>
+                </a:solidFill>
+                <a:effectLst/>
+                <a:latin typeface="Consolas" panose="020B0609020204030204" pitchFamily="49" charset="0"/>
+              </a:rPr>
+              <a:t> p</a:t>
+            </a:r>
+            <a:r>
+              <a:rPr kumimoji="0" lang="en-US" altLang="en-US" sz="2400" b="0" i="0" u="none" strike="noStrike" cap="none" normalizeH="0" baseline="0" dirty="0">
+                <a:ln>
+                  <a:noFill/>
+                </a:ln>
+                <a:solidFill>
+                  <a:srgbClr val="7FDBCA"/>
+                </a:solidFill>
+                <a:effectLst/>
+                <a:latin typeface="Consolas" panose="020B0609020204030204" pitchFamily="49" charset="0"/>
+              </a:rPr>
+              <a:t> else  </a:t>
+            </a:r>
+            <a:r>
+              <a:rPr kumimoji="0" lang="en-US" altLang="en-US" sz="2400" b="0" i="0" u="none" strike="noStrike" cap="none" normalizeH="0" baseline="0" dirty="0">
+                <a:ln>
+                  <a:noFill/>
+                </a:ln>
+                <a:solidFill>
+                  <a:srgbClr val="D6DEEB"/>
+                </a:solidFill>
+                <a:effectLst/>
+                <a:latin typeface="Consolas" panose="020B0609020204030204" pitchFamily="49" charset="0"/>
+              </a:rPr>
+              <a:t>3 </a:t>
+            </a:r>
+            <a:r>
+              <a:rPr kumimoji="0" lang="en-US" altLang="en-US" sz="2400" b="0" i="0" u="none" strike="noStrike" cap="none" normalizeH="0" baseline="0" dirty="0">
+                <a:ln>
+                  <a:noFill/>
+                </a:ln>
+                <a:solidFill>
+                  <a:srgbClr val="7FDBCA"/>
+                </a:solidFill>
+                <a:effectLst/>
+                <a:latin typeface="Consolas" panose="020B0609020204030204" pitchFamily="49" charset="0"/>
+              </a:rPr>
+              <a:t>if</a:t>
+            </a:r>
+            <a:r>
+              <a:rPr kumimoji="0" lang="en-US" altLang="en-US" sz="2400" b="0" i="0" u="none" strike="noStrike" cap="none" normalizeH="0" baseline="0" dirty="0">
+                <a:ln>
+                  <a:noFill/>
+                </a:ln>
+                <a:solidFill>
+                  <a:srgbClr val="D6DEEB"/>
+                </a:solidFill>
+                <a:effectLst/>
+                <a:latin typeface="Consolas" panose="020B0609020204030204" pitchFamily="49" charset="0"/>
+              </a:rPr>
+              <a:t> q</a:t>
+            </a:r>
+            <a:r>
+              <a:rPr kumimoji="0" lang="en-US" altLang="en-US" sz="2400" b="0" i="0" u="none" strike="noStrike" cap="none" normalizeH="0" baseline="0" dirty="0">
+                <a:ln>
+                  <a:noFill/>
+                </a:ln>
+                <a:solidFill>
+                  <a:srgbClr val="7FDBCA"/>
+                </a:solidFill>
+                <a:effectLst/>
+                <a:latin typeface="Consolas" panose="020B0609020204030204" pitchFamily="49" charset="0"/>
+              </a:rPr>
+              <a:t> else </a:t>
+            </a:r>
+            <a:r>
+              <a:rPr kumimoji="0" lang="en-US" altLang="en-US" sz="2400" b="0" i="0" u="none" strike="noStrike" cap="none" normalizeH="0" baseline="0" dirty="0">
+                <a:ln>
+                  <a:noFill/>
+                </a:ln>
+                <a:solidFill>
+                  <a:srgbClr val="D6DEEB"/>
+                </a:solidFill>
+                <a:effectLst/>
+                <a:latin typeface="Consolas" panose="020B0609020204030204" pitchFamily="49" charset="0"/>
+              </a:rPr>
+              <a:t>4</a:t>
+            </a:r>
+          </a:p>
+        </p:txBody>
+      </p:sp>
+      <p:sp>
+        <p:nvSpPr>
+          <p:cNvPr id="7" name="Rectangle 6">
+            <a:extLst>
+              <a:ext uri="{FF2B5EF4-FFF2-40B4-BE49-F238E27FC236}">
+                <a16:creationId xmlns:a16="http://schemas.microsoft.com/office/drawing/2014/main" id="{A91BF921-3BFE-3326-8504-703464CF4376}"/>
+              </a:ext>
+            </a:extLst>
+          </p:cNvPr>
+          <p:cNvSpPr>
+            <a:spLocks noChangeArrowheads="1"/>
+          </p:cNvSpPr>
+          <p:nvPr/>
+        </p:nvSpPr>
+        <p:spPr bwMode="auto">
+          <a:xfrm>
+            <a:off x="2367415" y="3706615"/>
+            <a:ext cx="7457170" cy="468026"/>
+          </a:xfrm>
+          <a:prstGeom prst="rect">
+            <a:avLst/>
+          </a:prstGeom>
+          <a:noFill/>
+          <a:ln>
+            <a:noFill/>
+          </a:ln>
+          <a:effectLst/>
+        </p:spPr>
+        <p:txBody>
+          <a:bodyPr vert="horz" wrap="none" lIns="0" tIns="79350" rIns="0" bIns="79350" numCol="1" anchor="ctr" anchorCtr="0" compatLnSpc="1">
+            <a:prstTxWarp prst="textNoShape">
+              <a:avLst/>
+            </a:prstTxWarp>
+            <a:spAutoFit/>
+          </a:bodyPr>
+          <a:lstStyle/>
+          <a:p>
+            <a:pPr marL="0" marR="0" lvl="0" indent="0" algn="ctr" defTabSz="914400" rtl="0" eaLnBrk="0" fontAlgn="base" latinLnBrk="0" hangingPunct="0">
+              <a:lnSpc>
+                <a:spcPct val="100000"/>
+              </a:lnSpc>
+              <a:spcBef>
+                <a:spcPct val="0"/>
+              </a:spcBef>
+              <a:spcAft>
+                <a:spcPct val="0"/>
+              </a:spcAft>
+              <a:buClrTx/>
+              <a:buSzTx/>
+              <a:buFontTx/>
+              <a:buNone/>
+              <a:tabLst/>
+            </a:pPr>
+            <a:r>
+              <a:rPr kumimoji="0" lang="en-US" altLang="en-US" sz="2000" b="0" i="0" u="none" strike="noStrike" cap="none" normalizeH="0" baseline="0" dirty="0">
+                <a:ln>
+                  <a:noFill/>
+                </a:ln>
+                <a:solidFill>
+                  <a:srgbClr val="D6DEEB"/>
+                </a:solidFill>
+                <a:effectLst/>
+                <a:latin typeface="Fira Sans" panose="020B0503050000020004" pitchFamily="34" charset="0"/>
+                <a:ea typeface="Fira Mono" panose="020B0509050000020004" pitchFamily="49" charset="0"/>
+              </a:rPr>
+              <a:t>conditional nested inside conditional, nested inside conditional!</a:t>
+            </a:r>
+            <a:endParaRPr kumimoji="0" lang="en-US" altLang="en-US" sz="2000" b="0" i="0" u="none" strike="noStrike" cap="none" normalizeH="0" baseline="0" dirty="0">
+              <a:ln>
+                <a:noFill/>
+              </a:ln>
+              <a:solidFill>
+                <a:schemeClr val="tx2">
+                  <a:lumMod val="75000"/>
+                </a:schemeClr>
+              </a:solidFill>
+              <a:effectLst/>
+              <a:latin typeface="Fira Sans" panose="020B0503050000020004" pitchFamily="34" charset="0"/>
+              <a:ea typeface="Fira Mono" panose="020B0509050000020004" pitchFamily="49" charset="0"/>
+            </a:endParaRPr>
+          </a:p>
+        </p:txBody>
+      </p:sp>
+    </p:spTree>
+    <p:extLst>
+      <p:ext uri="{BB962C8B-B14F-4D97-AF65-F5344CB8AC3E}">
+        <p14:creationId xmlns:p14="http://schemas.microsoft.com/office/powerpoint/2010/main" val="2321499098"/>
+      </p:ext>
+    </p:extLst>
+  </p:cSld>
+  <p:clrMapOvr>
+    <a:masterClrMapping/>
+  </p:clrMapOvr>
 </p:sld>
 </file>
 
@@ -2193,13 +4340,6 @@
   <p:clrMapOvr>
     <a:masterClrMapping/>
   </p:clrMapOvr>
-  <p:timing>
-    <p:tnLst>
-      <p:par>
-        <p:cTn id="1" dur="indefinite" restart="never" nodeType="tmRoot"/>
-      </p:par>
-    </p:tnLst>
-  </p:timing>
 </p:sld>
 </file>
 
@@ -2702,7 +4842,7 @@
           <a:lstStyle/>
           <a:p>
             <a:r>
-              <a:rPr lang="en-GB" sz="8000" dirty="0" err="1" smtClean="0">
+              <a:rPr lang="en-GB" sz="8000" dirty="0" err="1">
                 <a:gradFill flip="none" rotWithShape="1">
                   <a:gsLst>
                     <a:gs pos="0">
@@ -2722,7 +4862,7 @@
               <a:t>pyco</a:t>
             </a:r>
             <a:r>
-              <a:rPr lang="en-GB" sz="8000" dirty="0" err="1" smtClean="0">
+              <a:rPr lang="en-GB" sz="8000" dirty="0" err="1">
                 <a:solidFill>
                   <a:schemeClr val="bg1">
                     <a:alpha val="31000"/>
@@ -2735,7 +4875,7 @@
               <a:t>:</a:t>
             </a:r>
             <a:r>
-              <a:rPr lang="en-GB" sz="8000" dirty="0" err="1" smtClean="0">
+              <a:rPr lang="en-GB" sz="8000" dirty="0" err="1">
                 <a:gradFill flip="none" rotWithShape="1">
                   <a:gsLst>
                     <a:gs pos="0">
@@ -2803,28 +4943,10 @@
                 </a:solidFill>
                 <a:latin typeface="Overpass" pitchFamily="2" charset="0"/>
               </a:rPr>
-              <a:t>e</a:t>
-            </a:r>
-            <a:r>
-              <a:rPr lang="en-GB" sz="2000" dirty="0" smtClean="0">
-                <a:solidFill>
-                  <a:schemeClr val="bg1"/>
-                </a:solidFill>
-                <a:latin typeface="Overpass" pitchFamily="2" charset="0"/>
-              </a:rPr>
-              <a:t>xploring the magic of Python, week by </a:t>
-            </a:r>
-            <a:r>
-              <a:rPr lang="en-GB" sz="2000" dirty="0" smtClean="0">
-                <a:solidFill>
-                  <a:schemeClr val="bg1"/>
-                </a:solidFill>
-                <a:latin typeface="Overpass" pitchFamily="2" charset="0"/>
-              </a:rPr>
-              <a:t>week          </a:t>
-            </a:r>
-            <a:r>
-              <a:rPr lang="en-GB" sz="2000" dirty="0" smtClean="0">
+              <a:t>exploring the magic of Python, week by week          </a:t>
+            </a:r>
+            <a:r>
+              <a:rPr lang="en-GB" sz="2000" dirty="0">
                 <a:solidFill>
                   <a:schemeClr val="accent4"/>
                 </a:solidFill>
@@ -2832,12 +4954,6 @@
               </a:rPr>
               <a:t>&gt;&gt;&gt;</a:t>
             </a:r>
-            <a:endParaRPr lang="en-GB" sz="2000" dirty="0">
-              <a:solidFill>
-                <a:schemeClr val="accent4"/>
-              </a:solidFill>
-              <a:latin typeface="Consolas" panose="020B0609020204030204" pitchFamily="49" charset="0"/>
-            </a:endParaRPr>
           </a:p>
         </p:txBody>
       </p:sp>
@@ -2851,13 +4967,6 @@
   <p:clrMapOvr>
     <a:masterClrMapping/>
   </p:clrMapOvr>
-  <p:timing>
-    <p:tnLst>
-      <p:par>
-        <p:cTn id="1" dur="indefinite" restart="never" nodeType="tmRoot"/>
-      </p:par>
-    </p:tnLst>
-  </p:timing>
 </p:sld>
 </file>
 
@@ -3352,7 +5461,7 @@
           <a:p>
             <a:pPr algn="ctr"/>
             <a:r>
-              <a:rPr lang="en-GB" sz="6900" dirty="0" err="1" smtClean="0">
+              <a:rPr lang="en-GB" sz="6900" dirty="0" err="1">
                 <a:solidFill>
                   <a:schemeClr val="accent5">
                     <a:lumMod val="60000"/>
@@ -3365,7 +5474,7 @@
               <a:t>pyco</a:t>
             </a:r>
             <a:r>
-              <a:rPr lang="en-GB" sz="6900" dirty="0" err="1" smtClean="0">
+              <a:rPr lang="en-GB" sz="6900" dirty="0" err="1">
                 <a:solidFill>
                   <a:schemeClr val="accent1">
                     <a:lumMod val="50000"/>
@@ -3377,7 +5486,7 @@
               <a:t>:</a:t>
             </a:r>
             <a:r>
-              <a:rPr lang="en-GB" sz="6900" dirty="0" err="1" smtClean="0">
+              <a:rPr lang="en-GB" sz="6900" dirty="0" err="1">
                 <a:solidFill>
                   <a:srgbClr val="9090F1"/>
                 </a:solidFill>
@@ -3426,23 +5535,8 @@
                 </a:solidFill>
                 <a:latin typeface="Sniglet" panose="04070505030100020000" pitchFamily="82" charset="0"/>
               </a:rPr>
-              <a:t>e</a:t>
-            </a:r>
-            <a:r>
-              <a:rPr lang="en-GB" sz="2000" dirty="0" smtClean="0">
-                <a:solidFill>
-                  <a:schemeClr val="bg1"/>
-                </a:solidFill>
-                <a:latin typeface="Sniglet" panose="04070505030100020000" pitchFamily="82" charset="0"/>
-              </a:rPr>
-              <a:t>xploring the magic of Python, week by week</a:t>
-            </a:r>
-            <a:endParaRPr lang="en-GB" sz="2000" dirty="0">
-              <a:solidFill>
-                <a:schemeClr val="bg1"/>
-              </a:solidFill>
-              <a:latin typeface="Sniglet" panose="04070505030100020000" pitchFamily="82" charset="0"/>
-            </a:endParaRPr>
+              <a:t>exploring the magic of Python, week by week</a:t>
+            </a:r>
           </a:p>
         </p:txBody>
       </p:sp>
@@ -3470,7 +5564,7 @@
           <a:p>
             <a:pPr algn="ctr"/>
             <a:r>
-              <a:rPr lang="en-GB" sz="2000" dirty="0" smtClean="0">
+              <a:rPr lang="en-GB" sz="2000" dirty="0">
                 <a:solidFill>
                   <a:schemeClr val="accent4"/>
                 </a:solidFill>
@@ -3478,12 +5572,6 @@
               </a:rPr>
               <a:t>&gt;&gt;&gt;</a:t>
             </a:r>
-            <a:endParaRPr lang="en-GB" sz="2000" dirty="0">
-              <a:solidFill>
-                <a:schemeClr val="accent4"/>
-              </a:solidFill>
-              <a:latin typeface="Consolas" panose="020B0609020204030204" pitchFamily="49" charset="0"/>
-            </a:endParaRPr>
           </a:p>
         </p:txBody>
       </p:sp>
@@ -3497,13 +5585,6 @@
   <p:clrMapOvr>
     <a:masterClrMapping/>
   </p:clrMapOvr>
-  <p:timing>
-    <p:tnLst>
-      <p:par>
-        <p:cTn id="1" dur="indefinite" restart="never" nodeType="tmRoot"/>
-      </p:par>
-    </p:tnLst>
-  </p:timing>
 </p:sld>
 </file>
 
@@ -3952,7 +6033,7 @@
           <a:p>
             <a:pPr algn="ctr"/>
             <a:r>
-              <a:rPr lang="en-GB" sz="6900" dirty="0" err="1" smtClean="0">
+              <a:rPr lang="en-GB" sz="6900" dirty="0" err="1">
                 <a:solidFill>
                   <a:schemeClr val="accent5">
                     <a:lumMod val="60000"/>
@@ -3965,7 +6046,7 @@
               <a:t>pyco</a:t>
             </a:r>
             <a:r>
-              <a:rPr lang="en-GB" sz="6900" dirty="0" err="1" smtClean="0">
+              <a:rPr lang="en-GB" sz="6900" dirty="0" err="1">
                 <a:solidFill>
                   <a:schemeClr val="accent1">
                     <a:lumMod val="50000"/>
@@ -3977,7 +6058,7 @@
               <a:t>:</a:t>
             </a:r>
             <a:r>
-              <a:rPr lang="en-GB" sz="6900" dirty="0" err="1" smtClean="0">
+              <a:rPr lang="en-GB" sz="6900" dirty="0" err="1">
                 <a:solidFill>
                   <a:srgbClr val="9090F1"/>
                 </a:solidFill>
@@ -4006,13 +6087,6 @@
   <p:clrMapOvr>
     <a:masterClrMapping/>
   </p:clrMapOvr>
-  <p:timing>
-    <p:tnLst>
-      <p:par>
-        <p:cTn id="1" dur="indefinite" restart="never" nodeType="tmRoot"/>
-      </p:par>
-    </p:tnLst>
-  </p:timing>
 </p:sld>
 </file>
 
@@ -4103,7 +6177,7 @@
           <a:p>
             <a:pPr algn="ctr"/>
             <a:r>
-              <a:rPr lang="en-GB" sz="6900" dirty="0" err="1" smtClean="0">
+              <a:rPr lang="en-GB" sz="6900" dirty="0" err="1">
                 <a:solidFill>
                   <a:schemeClr val="accent5">
                     <a:lumMod val="60000"/>
@@ -4116,7 +6190,7 @@
               <a:t>pyco</a:t>
             </a:r>
             <a:r>
-              <a:rPr lang="en-GB" sz="6900" dirty="0" err="1" smtClean="0">
+              <a:rPr lang="en-GB" sz="6900" dirty="0" err="1">
                 <a:solidFill>
                   <a:schemeClr val="accent1">
                     <a:lumMod val="50000"/>
@@ -4128,7 +6202,7 @@
               <a:t>:</a:t>
             </a:r>
             <a:r>
-              <a:rPr lang="en-GB" sz="6900" dirty="0" err="1" smtClean="0">
+              <a:rPr lang="en-GB" sz="6900" dirty="0" err="1">
                 <a:solidFill>
                   <a:srgbClr val="9090F1"/>
                 </a:solidFill>
@@ -4177,23 +6251,8 @@
                 </a:solidFill>
                 <a:latin typeface="Sniglet" panose="04070505030100020000" pitchFamily="82" charset="0"/>
               </a:rPr>
-              <a:t>e</a:t>
-            </a:r>
-            <a:r>
-              <a:rPr lang="en-GB" sz="2000" dirty="0" smtClean="0">
-                <a:solidFill>
-                  <a:schemeClr val="bg1"/>
-                </a:solidFill>
-                <a:latin typeface="Sniglet" panose="04070505030100020000" pitchFamily="82" charset="0"/>
-              </a:rPr>
-              <a:t>xploring the magic of Python, week by week</a:t>
-            </a:r>
-            <a:endParaRPr lang="en-GB" sz="2000" dirty="0">
-              <a:solidFill>
-                <a:schemeClr val="bg1"/>
-              </a:solidFill>
-              <a:latin typeface="Sniglet" panose="04070505030100020000" pitchFamily="82" charset="0"/>
-            </a:endParaRPr>
+              <a:t>exploring the magic of Python, week by week</a:t>
+            </a:r>
           </a:p>
         </p:txBody>
       </p:sp>
@@ -4221,7 +6280,7 @@
           <a:p>
             <a:pPr algn="ctr"/>
             <a:r>
-              <a:rPr lang="en-GB" sz="2000" dirty="0" smtClean="0">
+              <a:rPr lang="en-GB" sz="2000" dirty="0">
                 <a:solidFill>
                   <a:schemeClr val="accent4"/>
                 </a:solidFill>
@@ -4229,12 +6288,6 @@
               </a:rPr>
               <a:t>&gt;&gt;&gt;</a:t>
             </a:r>
-            <a:endParaRPr lang="en-GB" sz="2000" dirty="0">
-              <a:solidFill>
-                <a:schemeClr val="accent4"/>
-              </a:solidFill>
-              <a:latin typeface="Consolas" panose="020B0609020204030204" pitchFamily="49" charset="0"/>
-            </a:endParaRPr>
           </a:p>
         </p:txBody>
       </p:sp>
@@ -4262,7 +6315,7 @@
           <a:p>
             <a:pPr algn="ctr"/>
             <a:r>
-              <a:rPr lang="en-GB" sz="1600" dirty="0" smtClean="0">
+              <a:rPr lang="en-GB" sz="1600" dirty="0">
                 <a:solidFill>
                   <a:schemeClr val="tx2"/>
                 </a:solidFill>
@@ -4270,12 +6323,6 @@
               </a:rPr>
               <a:t>INTRODUCING</a:t>
             </a:r>
-            <a:endParaRPr lang="en-GB" sz="1600" dirty="0">
-              <a:solidFill>
-                <a:schemeClr val="tx2"/>
-              </a:solidFill>
-              <a:latin typeface="+mj-lt"/>
-            </a:endParaRPr>
           </a:p>
         </p:txBody>
       </p:sp>
@@ -4693,13 +6740,6 @@
   <p:clrMapOvr>
     <a:masterClrMapping/>
   </p:clrMapOvr>
-  <p:timing>
-    <p:tnLst>
-      <p:par>
-        <p:cTn id="1" dur="indefinite" restart="never" nodeType="tmRoot"/>
-      </p:par>
-    </p:tnLst>
-  </p:timing>
 </p:sld>
 </file>
 
@@ -4790,7 +6830,7 @@
           <a:p>
             <a:pPr algn="ctr"/>
             <a:r>
-              <a:rPr lang="en-GB" sz="6900" dirty="0" err="1" smtClean="0">
+              <a:rPr lang="en-GB" sz="6900" dirty="0" err="1">
                 <a:solidFill>
                   <a:schemeClr val="accent5">
                     <a:lumMod val="60000"/>
@@ -4803,7 +6843,7 @@
               <a:t>pyco</a:t>
             </a:r>
             <a:r>
-              <a:rPr lang="en-GB" sz="6900" dirty="0" err="1" smtClean="0">
+              <a:rPr lang="en-GB" sz="6900" dirty="0" err="1">
                 <a:solidFill>
                   <a:schemeClr val="accent1">
                     <a:lumMod val="50000"/>
@@ -4815,7 +6855,7 @@
               <a:t>:</a:t>
             </a:r>
             <a:r>
-              <a:rPr lang="en-GB" sz="6900" dirty="0" err="1" smtClean="0">
+              <a:rPr lang="en-GB" sz="6900" dirty="0" err="1">
                 <a:solidFill>
                   <a:srgbClr val="9090F1"/>
                 </a:solidFill>
@@ -4864,23 +6904,8 @@
                 </a:solidFill>
                 <a:latin typeface="Sniglet" panose="04070505030100020000" pitchFamily="82" charset="0"/>
               </a:rPr>
-              <a:t>e</a:t>
-            </a:r>
-            <a:r>
-              <a:rPr lang="en-GB" sz="2000" dirty="0" smtClean="0">
-                <a:solidFill>
-                  <a:schemeClr val="bg1"/>
-                </a:solidFill>
-                <a:latin typeface="Sniglet" panose="04070505030100020000" pitchFamily="82" charset="0"/>
-              </a:rPr>
-              <a:t>xploring the magic of Python, week by week</a:t>
-            </a:r>
-            <a:endParaRPr lang="en-GB" sz="2000" dirty="0">
-              <a:solidFill>
-                <a:schemeClr val="bg1"/>
-              </a:solidFill>
-              <a:latin typeface="Sniglet" panose="04070505030100020000" pitchFamily="82" charset="0"/>
-            </a:endParaRPr>
+              <a:t>exploring the magic of Python, week by week</a:t>
+            </a:r>
           </a:p>
         </p:txBody>
       </p:sp>
@@ -4908,7 +6933,7 @@
           <a:p>
             <a:pPr algn="ctr"/>
             <a:r>
-              <a:rPr lang="en-GB" sz="2000" dirty="0" smtClean="0">
+              <a:rPr lang="en-GB" sz="2000" dirty="0">
                 <a:solidFill>
                   <a:schemeClr val="accent4"/>
                 </a:solidFill>
@@ -4916,12 +6941,6 @@
               </a:rPr>
               <a:t>&gt;&gt;&gt;</a:t>
             </a:r>
-            <a:endParaRPr lang="en-GB" sz="2000" dirty="0">
-              <a:solidFill>
-                <a:schemeClr val="accent4"/>
-              </a:solidFill>
-              <a:latin typeface="Consolas" panose="020B0609020204030204" pitchFamily="49" charset="0"/>
-            </a:endParaRPr>
           </a:p>
         </p:txBody>
       </p:sp>
@@ -4949,7 +6968,7 @@
           <a:p>
             <a:pPr algn="ctr"/>
             <a:r>
-              <a:rPr lang="en-GB" sz="1600" dirty="0" smtClean="0">
+              <a:rPr lang="en-GB" sz="1600" dirty="0">
                 <a:solidFill>
                   <a:schemeClr val="tx2"/>
                 </a:solidFill>
@@ -4957,12 +6976,6 @@
               </a:rPr>
               <a:t>WELCOME TO</a:t>
             </a:r>
-            <a:endParaRPr lang="en-GB" sz="1600" dirty="0">
-              <a:solidFill>
-                <a:schemeClr val="tx2"/>
-              </a:solidFill>
-              <a:latin typeface="+mj-lt"/>
-            </a:endParaRPr>
           </a:p>
         </p:txBody>
       </p:sp>
@@ -5380,13 +7393,6 @@
   <p:clrMapOvr>
     <a:masterClrMapping/>
   </p:clrMapOvr>
-  <p:timing>
-    <p:tnLst>
-      <p:par>
-        <p:cTn id="1" dur="indefinite" restart="never" nodeType="tmRoot"/>
-      </p:par>
-    </p:tnLst>
-  </p:timing>
 </p:sld>
 </file>
 
@@ -5496,7 +7502,7 @@
               <a:t> </a:t>
             </a:r>
             <a:r>
-              <a:rPr lang="en-GB" sz="1600" dirty="0" err="1" smtClean="0">
+              <a:rPr lang="en-GB" sz="1600" dirty="0" err="1">
                 <a:solidFill>
                   <a:srgbClr val="9090F1"/>
                 </a:solidFill>
@@ -5506,7 +7512,7 @@
               <a:t>Pycobyte</a:t>
             </a:r>
             <a:r>
-              <a:rPr lang="en-GB" sz="1600" dirty="0" smtClean="0">
+              <a:rPr lang="en-GB" sz="1600" dirty="0">
                 <a:solidFill>
                   <a:srgbClr val="FFFFFF"/>
                 </a:solidFill>
@@ -5516,7 +7522,7 @@
               <a:t>[</a:t>
             </a:r>
             <a:r>
-              <a:rPr lang="en-GB" sz="1600" dirty="0" smtClean="0">
+              <a:rPr lang="en-GB" sz="1600" dirty="0">
                 <a:solidFill>
                   <a:srgbClr val="9090F1"/>
                 </a:solidFill>
@@ -5626,16 +7632,6 @@
             </a:r>
           </a:p>
           <a:p>
-            <a:r>
-              <a:rPr lang="en-GB" sz="1600" dirty="0">
-                <a:solidFill>
-                  <a:srgbClr val="FFFFFF"/>
-                </a:solidFill>
-                <a:latin typeface="Consolas" panose="020B0609020204030204" pitchFamily="49" charset="0"/>
-                <a:ea typeface="Roboto Mono" panose="00000009000000000000" pitchFamily="49" charset="0"/>
-              </a:rPr>
-              <a:t/>
-            </a:r>
             <a:br>
               <a:rPr lang="en-GB" sz="1600" dirty="0">
                 <a:solidFill>
@@ -5906,7 +7902,7 @@
               <a:t>"Welcome to </a:t>
             </a:r>
             <a:r>
-              <a:rPr lang="en-GB" sz="1600" dirty="0" err="1" smtClean="0">
+              <a:rPr lang="en-GB" sz="1600" dirty="0" err="1">
                 <a:solidFill>
                   <a:srgbClr val="FFC0A9"/>
                 </a:solidFill>
@@ -5916,7 +7912,7 @@
               <a:t>pycobytes</a:t>
             </a:r>
             <a:r>
-              <a:rPr lang="en-GB" sz="1600" dirty="0" smtClean="0">
+              <a:rPr lang="en-GB" sz="1600" dirty="0">
                 <a:solidFill>
                   <a:srgbClr val="FFC0A9"/>
                 </a:solidFill>
@@ -5926,7 +7922,7 @@
               <a:t>!"</a:t>
             </a:r>
             <a:r>
-              <a:rPr lang="en-GB" sz="1600" dirty="0" smtClean="0">
+              <a:rPr lang="en-GB" sz="1600" dirty="0">
                 <a:solidFill>
                   <a:srgbClr val="FFFFFF"/>
                 </a:solidFill>
@@ -6043,16 +8039,6 @@
             </a:endParaRPr>
           </a:p>
           <a:p>
-            <a:r>
-              <a:rPr lang="en-GB" sz="1600" dirty="0">
-                <a:solidFill>
-                  <a:srgbClr val="FFFFFF"/>
-                </a:solidFill>
-                <a:latin typeface="Consolas" panose="020B0609020204030204" pitchFamily="49" charset="0"/>
-                <a:ea typeface="Roboto Mono" panose="00000009000000000000" pitchFamily="49" charset="0"/>
-              </a:rPr>
-              <a:t/>
-            </a:r>
             <a:br>
               <a:rPr lang="en-GB" sz="1600" dirty="0">
                 <a:solidFill>
@@ -6433,7 +8419,7 @@
           <a:p>
             <a:pPr algn="ctr"/>
             <a:r>
-              <a:rPr lang="en-GB" sz="1200" dirty="0" smtClean="0">
+              <a:rPr lang="en-GB" sz="1200" dirty="0">
                 <a:solidFill>
                   <a:schemeClr val="tx2">
                     <a:lumMod val="60000"/>
@@ -6443,70 +8429,8 @@
                 <a:latin typeface="Sniglet" panose="04070505030100020000" pitchFamily="82" charset="0"/>
                 <a:cs typeface="Kalam" panose="02000000000000000000" pitchFamily="2" charset="0"/>
               </a:rPr>
-              <a:t>Looks </a:t>
-            </a:r>
-            <a:r>
-              <a:rPr lang="en-GB" sz="1200" dirty="0">
-                <a:solidFill>
-                  <a:schemeClr val="tx2">
-                    <a:lumMod val="60000"/>
-                    <a:lumOff val="40000"/>
-                  </a:schemeClr>
-                </a:solidFill>
-                <a:latin typeface="Sniglet" panose="04070505030100020000" pitchFamily="82" charset="0"/>
-                <a:cs typeface="Kalam" panose="02000000000000000000" pitchFamily="2" charset="0"/>
-              </a:rPr>
-              <a:t>scary, </a:t>
-            </a:r>
-            <a:r>
-              <a:rPr lang="en-GB" sz="1200" dirty="0" smtClean="0">
-                <a:solidFill>
-                  <a:schemeClr val="tx2">
-                    <a:lumMod val="60000"/>
-                    <a:lumOff val="40000"/>
-                  </a:schemeClr>
-                </a:solidFill>
-                <a:latin typeface="Sniglet" panose="04070505030100020000" pitchFamily="82" charset="0"/>
-                <a:cs typeface="Kalam" panose="02000000000000000000" pitchFamily="2" charset="0"/>
-              </a:rPr>
-              <a:t>right? </a:t>
-            </a:r>
-            <a:r>
-              <a:rPr lang="en-GB" sz="1200" dirty="0">
-                <a:solidFill>
-                  <a:schemeClr val="tx2">
-                    <a:lumMod val="60000"/>
-                    <a:lumOff val="40000"/>
-                  </a:schemeClr>
-                </a:solidFill>
-                <a:latin typeface="Sniglet" panose="04070505030100020000" pitchFamily="82" charset="0"/>
-                <a:cs typeface="Kalam" panose="02000000000000000000" pitchFamily="2" charset="0"/>
-              </a:rPr>
-              <a:t>Don’t worry, </a:t>
-            </a:r>
-            <a:r>
-              <a:rPr lang="en-GB" sz="1200" dirty="0" smtClean="0">
-                <a:solidFill>
-                  <a:schemeClr val="tx2">
-                    <a:lumMod val="60000"/>
-                    <a:lumOff val="40000"/>
-                  </a:schemeClr>
-                </a:solidFill>
-                <a:latin typeface="Sniglet" panose="04070505030100020000" pitchFamily="82" charset="0"/>
-                <a:cs typeface="Kalam" panose="02000000000000000000" pitchFamily="2" charset="0"/>
-              </a:rPr>
-              <a:t>we’ll be delving into all this deliciousness ;D</a:t>
-            </a:r>
-            <a:endParaRPr lang="en-GB" sz="1200" dirty="0">
-              <a:solidFill>
-                <a:schemeClr val="tx2">
-                  <a:lumMod val="60000"/>
-                  <a:lumOff val="40000"/>
-                </a:schemeClr>
-              </a:solidFill>
-              <a:latin typeface="Sniglet" panose="04070505030100020000" pitchFamily="82" charset="0"/>
-              <a:cs typeface="Kalam" panose="02000000000000000000" pitchFamily="2" charset="0"/>
-            </a:endParaRPr>
+              <a:t>Looks scary, right? Don’t worry, we’ll be delving into all this deliciousness ;D</a:t>
+            </a:r>
           </a:p>
         </p:txBody>
       </p:sp>
@@ -6520,13 +8444,6 @@
   <p:clrMapOvr>
     <a:masterClrMapping/>
   </p:clrMapOvr>
-  <p:timing>
-    <p:tnLst>
-      <p:par>
-        <p:cTn id="1" dur="indefinite" restart="never" nodeType="tmRoot"/>
-      </p:par>
-    </p:tnLst>
-  </p:timing>
 </p:sld>
 </file>
 
@@ -6627,13 +8544,6 @@
   <p:clrMapOvr>
     <a:masterClrMapping/>
   </p:clrMapOvr>
-  <p:timing>
-    <p:tnLst>
-      <p:par>
-        <p:cTn id="1" dur="indefinite" restart="never" nodeType="tmRoot"/>
-      </p:par>
-    </p:tnLst>
-  </p:timing>
 </p:sld>
 </file>
 

--- a/assets/pycobytes.pptx
+++ b/assets/pycobytes.pptx
@@ -3376,8 +3376,8 @@
         </p:nvSpPr>
         <p:spPr>
           <a:xfrm>
-            <a:off x="1953986" y="2474167"/>
-            <a:ext cx="8284028" cy="1909666"/>
+            <a:off x="2884039" y="2393206"/>
+            <a:ext cx="6423922" cy="2071588"/>
           </a:xfrm>
           <a:prstGeom prst="rect">
             <a:avLst/>
@@ -3428,8 +3428,8 @@
         </p:nvSpPr>
         <p:spPr>
           <a:xfrm>
-            <a:off x="2484780" y="2803849"/>
-            <a:ext cx="7238770" cy="664028"/>
+            <a:off x="3650807" y="2803849"/>
+            <a:ext cx="4906716" cy="664028"/>
           </a:xfrm>
           <a:prstGeom prst="rect">
             <a:avLst/>
@@ -3482,8 +3482,8 @@
         </p:nvSpPr>
         <p:spPr>
           <a:xfrm>
-            <a:off x="4849528" y="2844068"/>
-            <a:ext cx="4770990" cy="583590"/>
+            <a:off x="5902610" y="2844068"/>
+            <a:ext cx="2591851" cy="583590"/>
           </a:xfrm>
           <a:prstGeom prst="rect">
             <a:avLst/>
@@ -3492,60 +3492,6 @@
             <a:srgbClr val="FFC720">
               <a:alpha val="20000"/>
             </a:srgbClr>
-          </a:solidFill>
-          <a:ln>
-            <a:noFill/>
-          </a:ln>
-        </p:spPr>
-        <p:style>
-          <a:lnRef idx="2">
-            <a:schemeClr val="accent1">
-              <a:shade val="15000"/>
-            </a:schemeClr>
-          </a:lnRef>
-          <a:fillRef idx="1">
-            <a:schemeClr val="accent1"/>
-          </a:fillRef>
-          <a:effectRef idx="0">
-            <a:schemeClr val="accent1"/>
-          </a:effectRef>
-          <a:fontRef idx="minor">
-            <a:schemeClr val="lt1"/>
-          </a:fontRef>
-        </p:style>
-        <p:txBody>
-          <a:bodyPr rtlCol="0" anchor="ctr"/>
-          <a:lstStyle/>
-          <a:p>
-            <a:pPr algn="ctr"/>
-            <a:endParaRPr lang="en-GB"/>
-          </a:p>
-        </p:txBody>
-      </p:sp>
-      <p:sp>
-        <p:nvSpPr>
-          <p:cNvPr id="11" name="Rectangle 10">
-            <a:extLst>
-              <a:ext uri="{FF2B5EF4-FFF2-40B4-BE49-F238E27FC236}">
-                <a16:creationId xmlns:a16="http://schemas.microsoft.com/office/drawing/2014/main" id="{6B5EF742-ECA8-C50E-3E5B-C624F0EEE0F1}"/>
-              </a:ext>
-            </a:extLst>
-          </p:cNvPr>
-          <p:cNvSpPr/>
-          <p:nvPr/>
-        </p:nvSpPr>
-        <p:spPr>
-          <a:xfrm>
-            <a:off x="6959046" y="2878969"/>
-            <a:ext cx="2526243" cy="513788"/>
-          </a:xfrm>
-          <a:prstGeom prst="rect">
-            <a:avLst/>
-          </a:prstGeom>
-          <a:solidFill>
-            <a:schemeClr val="accent3">
-              <a:alpha val="20000"/>
-            </a:schemeClr>
           </a:solidFill>
           <a:ln>
             <a:noFill/>
@@ -3592,8 +3538,8 @@
         </p:nvSpPr>
         <p:spPr bwMode="auto">
           <a:xfrm>
-            <a:off x="2782593" y="2876515"/>
-            <a:ext cx="6626815" cy="529582"/>
+            <a:off x="3802103" y="2876515"/>
+            <a:ext cx="4587794" cy="529582"/>
           </a:xfrm>
           <a:prstGeom prst="rect">
             <a:avLst/>
@@ -3743,7 +3689,7 @@
                 <a:effectLst/>
                 <a:latin typeface="Consolas" panose="020B0609020204030204" pitchFamily="49" charset="0"/>
               </a:rPr>
-              <a:t> else  </a:t>
+              <a:t> else </a:t>
             </a:r>
             <a:r>
               <a:rPr kumimoji="0" lang="en-US" altLang="en-US" sz="2400" b="0" i="0" u="none" strike="noStrike" cap="none" normalizeH="0" baseline="0" dirty="0">
@@ -3756,59 +3702,7 @@
                 <a:effectLst/>
                 <a:latin typeface="Consolas" panose="020B0609020204030204" pitchFamily="49" charset="0"/>
               </a:rPr>
-              <a:t>3 </a:t>
-            </a:r>
-            <a:r>
-              <a:rPr kumimoji="0" lang="en-US" altLang="en-US" sz="2400" b="0" i="0" u="none" strike="noStrike" cap="none" normalizeH="0" baseline="0" dirty="0">
-                <a:ln>
-                  <a:noFill/>
-                </a:ln>
-                <a:solidFill>
-                  <a:srgbClr val="7FDBCA"/>
-                </a:solidFill>
-                <a:effectLst/>
-                <a:latin typeface="Consolas" panose="020B0609020204030204" pitchFamily="49" charset="0"/>
-              </a:rPr>
-              <a:t>if</a:t>
-            </a:r>
-            <a:r>
-              <a:rPr kumimoji="0" lang="en-US" altLang="en-US" sz="2400" b="0" i="0" u="none" strike="noStrike" cap="none" normalizeH="0" baseline="0" dirty="0">
-                <a:ln>
-                  <a:noFill/>
-                </a:ln>
-                <a:solidFill>
-                  <a:srgbClr val="D6DEEB"/>
-                </a:solidFill>
-                <a:effectLst/>
-                <a:latin typeface="Consolas" panose="020B0609020204030204" pitchFamily="49" charset="0"/>
-              </a:rPr>
-              <a:t> q</a:t>
-            </a:r>
-            <a:r>
-              <a:rPr kumimoji="0" lang="en-US" altLang="en-US" sz="2400" b="0" i="0" u="none" strike="noStrike" cap="none" normalizeH="0" baseline="0" dirty="0">
-                <a:ln>
-                  <a:noFill/>
-                </a:ln>
-                <a:solidFill>
-                  <a:srgbClr val="7FDBCA"/>
-                </a:solidFill>
-                <a:effectLst/>
-                <a:latin typeface="Consolas" panose="020B0609020204030204" pitchFamily="49" charset="0"/>
-              </a:rPr>
-              <a:t> else </a:t>
-            </a:r>
-            <a:r>
-              <a:rPr kumimoji="0" lang="en-US" altLang="en-US" sz="2400" b="0" i="0" u="none" strike="noStrike" cap="none" normalizeH="0" baseline="0" dirty="0">
-                <a:ln>
-                  <a:noFill/>
-                </a:ln>
-                <a:solidFill>
-                  <a:srgbClr val="D6DEEB"/>
-                </a:solidFill>
-                <a:effectLst/>
-                <a:latin typeface="Consolas" panose="020B0609020204030204" pitchFamily="49" charset="0"/>
-              </a:rPr>
-              <a:t>4</a:t>
+              <a:t>3</a:t>
             </a:r>
           </a:p>
         </p:txBody>
@@ -3829,8 +3723,8 @@
         </p:nvSpPr>
         <p:spPr bwMode="auto">
           <a:xfrm>
-            <a:off x="2367415" y="3706615"/>
-            <a:ext cx="7457170" cy="468026"/>
+            <a:off x="3853399" y="3706615"/>
+            <a:ext cx="4485202" cy="468026"/>
           </a:xfrm>
           <a:prstGeom prst="rect">
             <a:avLst/>
@@ -3878,7 +3772,7 @@
                 <a:latin typeface="Fira Sans" panose="020B0503050000020004" pitchFamily="34" charset="0"/>
                 <a:ea typeface="Fira Mono" panose="020B0509050000020004" pitchFamily="49" charset="0"/>
               </a:rPr>
-              <a:t>conditional nested inside conditional, nested inside conditional!</a:t>
+              <a:t>conditional nested inside conditional!</a:t>
             </a:r>
             <a:endParaRPr kumimoji="0" lang="en-US" altLang="en-US" sz="2000" b="0" i="0" u="none" strike="noStrike" cap="none" normalizeH="0" baseline="0" dirty="0">
               <a:ln>

--- a/assets/pycobytes.pptx
+++ b/assets/pycobytes.pptx
@@ -19,6 +19,9 @@
     <p:sldId id="267" r:id="rId13"/>
     <p:sldId id="268" r:id="rId14"/>
     <p:sldId id="269" r:id="rId15"/>
+    <p:sldId id="270" r:id="rId16"/>
+    <p:sldId id="271" r:id="rId17"/>
+    <p:sldId id="272" r:id="rId18"/>
   </p:sldIdLst>
   <p:sldSz cx="12192000" cy="6858000"/>
   <p:notesSz cx="6858000" cy="9144000"/>
@@ -3803,6 +3806,1805 @@
 </p:sld>
 </file>
 
+<file path=ppt/slides/slide14.xml><?xml version="1.0" encoding="utf-8"?>
+<p:sld xmlns:a="http://schemas.openxmlformats.org/drawingml/2006/main" xmlns:r="http://schemas.openxmlformats.org/officeDocument/2006/relationships" xmlns:p="http://schemas.openxmlformats.org/presentationml/2006/main">
+  <p:cSld>
+    <p:spTree>
+      <p:nvGrpSpPr>
+        <p:cNvPr id="1" name="">
+          <a:extLst>
+            <a:ext uri="{FF2B5EF4-FFF2-40B4-BE49-F238E27FC236}">
+              <a16:creationId xmlns:a16="http://schemas.microsoft.com/office/drawing/2014/main" id="{CDD972C8-B991-8D4A-BFEE-F8B96ED2A9B2}"/>
+            </a:ext>
+          </a:extLst>
+        </p:cNvPr>
+        <p:cNvGrpSpPr/>
+        <p:nvPr/>
+      </p:nvGrpSpPr>
+      <p:grpSpPr>
+        <a:xfrm>
+          <a:off x="0" y="0"/>
+          <a:ext cx="0" cy="0"/>
+          <a:chOff x="0" y="0"/>
+          <a:chExt cx="0" cy="0"/>
+        </a:xfrm>
+      </p:grpSpPr>
+      <p:sp>
+        <p:nvSpPr>
+          <p:cNvPr id="6" name="Rectangle 5">
+            <a:extLst>
+              <a:ext uri="{FF2B5EF4-FFF2-40B4-BE49-F238E27FC236}">
+                <a16:creationId xmlns:a16="http://schemas.microsoft.com/office/drawing/2014/main" id="{25232A56-72B5-F3B8-1011-9739CB695EBC}"/>
+              </a:ext>
+            </a:extLst>
+          </p:cNvPr>
+          <p:cNvSpPr/>
+          <p:nvPr/>
+        </p:nvSpPr>
+        <p:spPr>
+          <a:xfrm>
+            <a:off x="1953986" y="1970313"/>
+            <a:ext cx="8284028" cy="3026229"/>
+          </a:xfrm>
+          <a:prstGeom prst="rect">
+            <a:avLst/>
+          </a:prstGeom>
+          <a:solidFill>
+            <a:srgbClr val="011627"/>
+          </a:solidFill>
+          <a:ln>
+            <a:noFill/>
+          </a:ln>
+        </p:spPr>
+        <p:style>
+          <a:lnRef idx="2">
+            <a:schemeClr val="accent1">
+              <a:shade val="50000"/>
+            </a:schemeClr>
+          </a:lnRef>
+          <a:fillRef idx="1">
+            <a:schemeClr val="accent1"/>
+          </a:fillRef>
+          <a:effectRef idx="0">
+            <a:schemeClr val="accent1"/>
+          </a:effectRef>
+          <a:fontRef idx="minor">
+            <a:schemeClr val="lt1"/>
+          </a:fontRef>
+        </p:style>
+        <p:txBody>
+          <a:bodyPr rtlCol="0" anchor="ctr"/>
+          <a:lstStyle/>
+          <a:p>
+            <a:pPr algn="ctr"/>
+            <a:endParaRPr lang="en-GB" dirty="0"/>
+          </a:p>
+        </p:txBody>
+      </p:sp>
+      <p:grpSp>
+        <p:nvGrpSpPr>
+          <p:cNvPr id="24" name="Group 23">
+            <a:extLst>
+              <a:ext uri="{FF2B5EF4-FFF2-40B4-BE49-F238E27FC236}">
+                <a16:creationId xmlns:a16="http://schemas.microsoft.com/office/drawing/2014/main" id="{FFC0FAF3-37DF-5558-C091-0DE19413E45E}"/>
+              </a:ext>
+            </a:extLst>
+          </p:cNvPr>
+          <p:cNvGrpSpPr/>
+          <p:nvPr/>
+        </p:nvGrpSpPr>
+        <p:grpSpPr>
+          <a:xfrm>
+            <a:off x="2597276" y="2168066"/>
+            <a:ext cx="7010499" cy="2521868"/>
+            <a:chOff x="2597276" y="2168066"/>
+            <a:chExt cx="7010499" cy="2521868"/>
+          </a:xfrm>
+        </p:grpSpPr>
+        <p:sp>
+          <p:nvSpPr>
+            <p:cNvPr id="9" name="Rectangle 8">
+              <a:extLst>
+                <a:ext uri="{FF2B5EF4-FFF2-40B4-BE49-F238E27FC236}">
+                  <a16:creationId xmlns:a16="http://schemas.microsoft.com/office/drawing/2014/main" id="{4297AABA-5543-0AE6-58F1-D5BA0CF55713}"/>
+                </a:ext>
+              </a:extLst>
+            </p:cNvPr>
+            <p:cNvSpPr>
+              <a:spLocks noChangeArrowheads="1"/>
+            </p:cNvSpPr>
+            <p:nvPr/>
+          </p:nvSpPr>
+          <p:spPr bwMode="auto">
+            <a:xfrm>
+              <a:off x="3202975" y="2168066"/>
+              <a:ext cx="2115964" cy="929691"/>
+            </a:xfrm>
+            <a:prstGeom prst="rect">
+              <a:avLst/>
+            </a:prstGeom>
+            <a:noFill/>
+            <a:ln>
+              <a:noFill/>
+            </a:ln>
+            <a:effectLst/>
+          </p:spPr>
+          <p:txBody>
+            <a:bodyPr vert="horz" wrap="none" lIns="0" tIns="79350" rIns="0" bIns="79350" numCol="1" anchor="ctr" anchorCtr="0" compatLnSpc="1">
+              <a:prstTxWarp prst="textNoShape">
+                <a:avLst/>
+              </a:prstTxWarp>
+              <a:spAutoFit/>
+            </a:bodyPr>
+            <a:lstStyle/>
+            <a:p>
+              <a:pPr marL="0" marR="0" lvl="0" indent="0" algn="ctr" defTabSz="914400" rtl="0" eaLnBrk="0" fontAlgn="base" latinLnBrk="0" hangingPunct="0">
+                <a:lnSpc>
+                  <a:spcPct val="100000"/>
+                </a:lnSpc>
+                <a:spcBef>
+                  <a:spcPct val="0"/>
+                </a:spcBef>
+                <a:spcAft>
+                  <a:spcPct val="0"/>
+                </a:spcAft>
+                <a:buClrTx/>
+                <a:buSzTx/>
+                <a:buFontTx/>
+                <a:buNone/>
+                <a:tabLst/>
+              </a:pPr>
+              <a:r>
+                <a:rPr kumimoji="0" lang="en-US" altLang="en-US" sz="5000" b="0" i="0" u="none" strike="noStrike" cap="none" normalizeH="0" baseline="0" dirty="0">
+                  <a:ln>
+                    <a:noFill/>
+                  </a:ln>
+                  <a:solidFill>
+                    <a:srgbClr val="ADDB67"/>
+                  </a:solidFill>
+                  <a:effectLst/>
+                  <a:latin typeface="Consolas" panose="020B0609020204030204" pitchFamily="49" charset="0"/>
+                </a:rPr>
+                <a:t>x</a:t>
+              </a:r>
+              <a:r>
+                <a:rPr kumimoji="0" lang="en-US" altLang="en-US" sz="5000" b="0" i="0" u="none" strike="noStrike" cap="none" normalizeH="0" baseline="0" dirty="0">
+                  <a:ln>
+                    <a:noFill/>
+                  </a:ln>
+                  <a:solidFill>
+                    <a:srgbClr val="D6DEEB"/>
+                  </a:solidFill>
+                  <a:effectLst/>
+                  <a:latin typeface="Consolas" panose="020B0609020204030204" pitchFamily="49" charset="0"/>
+                </a:rPr>
+                <a:t> </a:t>
+              </a:r>
+              <a:r>
+                <a:rPr lang="en-US" altLang="en-US" sz="5000" dirty="0">
+                  <a:solidFill>
+                    <a:srgbClr val="D6DEEB"/>
+                  </a:solidFill>
+                  <a:latin typeface="Consolas" panose="020B0609020204030204" pitchFamily="49" charset="0"/>
+                </a:rPr>
+                <a:t>or</a:t>
+              </a:r>
+              <a:r>
+                <a:rPr kumimoji="0" lang="en-US" altLang="en-US" sz="5000" b="0" i="0" u="none" strike="noStrike" cap="none" normalizeH="0" baseline="0" dirty="0">
+                  <a:ln>
+                    <a:noFill/>
+                  </a:ln>
+                  <a:solidFill>
+                    <a:srgbClr val="D6DEEB"/>
+                  </a:solidFill>
+                  <a:effectLst/>
+                  <a:latin typeface="Consolas" panose="020B0609020204030204" pitchFamily="49" charset="0"/>
+                </a:rPr>
+                <a:t> </a:t>
+              </a:r>
+              <a:r>
+                <a:rPr kumimoji="0" lang="en-US" altLang="en-US" sz="5000" b="0" i="0" u="none" strike="noStrike" cap="none" normalizeH="0" baseline="0" dirty="0">
+                  <a:ln>
+                    <a:noFill/>
+                  </a:ln>
+                  <a:solidFill>
+                    <a:srgbClr val="ADDB67"/>
+                  </a:solidFill>
+                  <a:effectLst/>
+                  <a:latin typeface="Consolas" panose="020B0609020204030204" pitchFamily="49" charset="0"/>
+                </a:rPr>
+                <a:t>y</a:t>
+              </a:r>
+            </a:p>
+          </p:txBody>
+        </p:sp>
+        <p:cxnSp>
+          <p:nvCxnSpPr>
+            <p:cNvPr id="10" name="Straight Arrow Connector 9">
+              <a:extLst>
+                <a:ext uri="{FF2B5EF4-FFF2-40B4-BE49-F238E27FC236}">
+                  <a16:creationId xmlns:a16="http://schemas.microsoft.com/office/drawing/2014/main" id="{2B27E3BB-EE7A-9408-52A5-3596D8E885F1}"/>
+                </a:ext>
+              </a:extLst>
+            </p:cNvPr>
+            <p:cNvCxnSpPr>
+              <a:cxnSpLocks/>
+            </p:cNvCxnSpPr>
+            <p:nvPr/>
+          </p:nvCxnSpPr>
+          <p:spPr>
+            <a:xfrm flipV="1">
+              <a:off x="3389299" y="3150403"/>
+              <a:ext cx="0" cy="695940"/>
+            </a:xfrm>
+            <a:prstGeom prst="straightConnector1">
+              <a:avLst/>
+            </a:prstGeom>
+            <a:noFill/>
+            <a:ln w="25400">
+              <a:solidFill>
+                <a:srgbClr val="FFC720"/>
+              </a:solidFill>
+              <a:tailEnd type="arrow"/>
+            </a:ln>
+          </p:spPr>
+          <p:style>
+            <a:lnRef idx="2">
+              <a:schemeClr val="accent1">
+                <a:shade val="15000"/>
+              </a:schemeClr>
+            </a:lnRef>
+            <a:fillRef idx="1">
+              <a:schemeClr val="accent1"/>
+            </a:fillRef>
+            <a:effectRef idx="0">
+              <a:schemeClr val="accent1"/>
+            </a:effectRef>
+            <a:fontRef idx="minor">
+              <a:schemeClr val="lt1"/>
+            </a:fontRef>
+          </p:style>
+        </p:cxnSp>
+        <p:sp>
+          <p:nvSpPr>
+            <p:cNvPr id="11" name="Rectangle 10">
+              <a:extLst>
+                <a:ext uri="{FF2B5EF4-FFF2-40B4-BE49-F238E27FC236}">
+                  <a16:creationId xmlns:a16="http://schemas.microsoft.com/office/drawing/2014/main" id="{291A71F8-67BA-8161-C7AC-C4FFE8106F89}"/>
+                </a:ext>
+              </a:extLst>
+            </p:cNvPr>
+            <p:cNvSpPr>
+              <a:spLocks noChangeArrowheads="1"/>
+            </p:cNvSpPr>
+            <p:nvPr/>
+          </p:nvSpPr>
+          <p:spPr bwMode="auto">
+            <a:xfrm>
+              <a:off x="2597276" y="3914131"/>
+              <a:ext cx="2778005" cy="775803"/>
+            </a:xfrm>
+            <a:prstGeom prst="rect">
+              <a:avLst/>
+            </a:prstGeom>
+            <a:noFill/>
+            <a:ln>
+              <a:noFill/>
+            </a:ln>
+            <a:effectLst/>
+          </p:spPr>
+          <p:txBody>
+            <a:bodyPr vert="horz" wrap="none" lIns="0" tIns="79350" rIns="0" bIns="79350" numCol="1" anchor="ctr" anchorCtr="0" compatLnSpc="1">
+              <a:prstTxWarp prst="textNoShape">
+                <a:avLst/>
+              </a:prstTxWarp>
+              <a:spAutoFit/>
+            </a:bodyPr>
+            <a:lstStyle/>
+            <a:p>
+              <a:pPr marL="0" marR="0" lvl="0" indent="0" algn="ctr" defTabSz="914400" rtl="0" eaLnBrk="0" fontAlgn="base" latinLnBrk="0" hangingPunct="0">
+                <a:lnSpc>
+                  <a:spcPct val="100000"/>
+                </a:lnSpc>
+                <a:spcBef>
+                  <a:spcPct val="0"/>
+                </a:spcBef>
+                <a:spcAft>
+                  <a:spcPct val="0"/>
+                </a:spcAft>
+                <a:buClrTx/>
+                <a:buSzTx/>
+                <a:buFontTx/>
+                <a:buNone/>
+                <a:tabLst/>
+              </a:pPr>
+              <a:r>
+                <a:rPr kumimoji="0" lang="en-US" altLang="en-US" sz="2000" b="0" i="0" u="none" strike="noStrike" cap="none" normalizeH="0" baseline="0" dirty="0">
+                  <a:ln>
+                    <a:noFill/>
+                  </a:ln>
+                  <a:solidFill>
+                    <a:srgbClr val="FFC720"/>
+                  </a:solidFill>
+                  <a:effectLst/>
+                  <a:latin typeface="Fira Sans" panose="020B0503050000020004" pitchFamily="34" charset="0"/>
+                  <a:ea typeface="Fira Mono" panose="020B0509050000020004" pitchFamily="49" charset="0"/>
+                </a:rPr>
+                <a:t>x is truthy, so the whole</a:t>
+              </a:r>
+            </a:p>
+            <a:p>
+              <a:pPr marL="0" marR="0" lvl="0" indent="0" algn="ctr" defTabSz="914400" rtl="0" eaLnBrk="0" fontAlgn="base" latinLnBrk="0" hangingPunct="0">
+                <a:lnSpc>
+                  <a:spcPct val="100000"/>
+                </a:lnSpc>
+                <a:spcBef>
+                  <a:spcPct val="0"/>
+                </a:spcBef>
+                <a:spcAft>
+                  <a:spcPct val="0"/>
+                </a:spcAft>
+                <a:buClrTx/>
+                <a:buSzTx/>
+                <a:buFontTx/>
+                <a:buNone/>
+                <a:tabLst/>
+              </a:pPr>
+              <a:r>
+                <a:rPr kumimoji="0" lang="en-US" altLang="en-US" sz="2000" b="0" i="0" u="none" strike="noStrike" cap="none" normalizeH="0" baseline="0" dirty="0">
+                  <a:ln>
+                    <a:noFill/>
+                  </a:ln>
+                  <a:solidFill>
+                    <a:srgbClr val="FFC720"/>
+                  </a:solidFill>
+                  <a:effectLst/>
+                  <a:latin typeface="Fira Sans" panose="020B0503050000020004" pitchFamily="34" charset="0"/>
+                  <a:ea typeface="Fira Mono" panose="020B0509050000020004" pitchFamily="49" charset="0"/>
+                </a:rPr>
+                <a:t>expression is truthy</a:t>
+              </a:r>
+            </a:p>
+          </p:txBody>
+        </p:sp>
+        <p:sp>
+          <p:nvSpPr>
+            <p:cNvPr id="18" name="Rectangle 17">
+              <a:extLst>
+                <a:ext uri="{FF2B5EF4-FFF2-40B4-BE49-F238E27FC236}">
+                  <a16:creationId xmlns:a16="http://schemas.microsoft.com/office/drawing/2014/main" id="{9C531658-A2FD-3150-7C62-F7073F1C6C50}"/>
+                </a:ext>
+              </a:extLst>
+            </p:cNvPr>
+            <p:cNvSpPr>
+              <a:spLocks noChangeArrowheads="1"/>
+            </p:cNvSpPr>
+            <p:nvPr/>
+          </p:nvSpPr>
+          <p:spPr bwMode="auto">
+            <a:xfrm>
+              <a:off x="6082771" y="3914131"/>
+              <a:ext cx="3525004" cy="468026"/>
+            </a:xfrm>
+            <a:prstGeom prst="rect">
+              <a:avLst/>
+            </a:prstGeom>
+            <a:noFill/>
+            <a:ln>
+              <a:noFill/>
+            </a:ln>
+            <a:effectLst/>
+          </p:spPr>
+          <p:txBody>
+            <a:bodyPr vert="horz" wrap="none" lIns="0" tIns="79350" rIns="0" bIns="79350" numCol="1" anchor="ctr" anchorCtr="0" compatLnSpc="1">
+              <a:prstTxWarp prst="textNoShape">
+                <a:avLst/>
+              </a:prstTxWarp>
+              <a:spAutoFit/>
+            </a:bodyPr>
+            <a:lstStyle/>
+            <a:p>
+              <a:pPr marL="0" marR="0" lvl="0" indent="0" algn="ctr" defTabSz="914400" rtl="0" eaLnBrk="0" fontAlgn="base" latinLnBrk="0" hangingPunct="0">
+                <a:lnSpc>
+                  <a:spcPct val="100000"/>
+                </a:lnSpc>
+                <a:spcBef>
+                  <a:spcPct val="0"/>
+                </a:spcBef>
+                <a:spcAft>
+                  <a:spcPct val="0"/>
+                </a:spcAft>
+                <a:buClrTx/>
+                <a:buSzTx/>
+                <a:buFontTx/>
+                <a:buNone/>
+                <a:tabLst/>
+              </a:pPr>
+              <a:r>
+                <a:rPr kumimoji="0" lang="en-US" altLang="en-US" sz="2000" b="0" i="0" u="none" strike="noStrike" cap="none" normalizeH="0" baseline="0" dirty="0">
+                  <a:ln>
+                    <a:noFill/>
+                  </a:ln>
+                  <a:solidFill>
+                    <a:srgbClr val="D6DEEB"/>
+                  </a:solidFill>
+                  <a:effectLst/>
+                  <a:latin typeface="Fira Sans" panose="020B0503050000020004" pitchFamily="34" charset="0"/>
+                  <a:ea typeface="Fira Mono" panose="020B0509050000020004" pitchFamily="49" charset="0"/>
+                </a:rPr>
+                <a:t>what y is makes no difference!</a:t>
+              </a:r>
+              <a:endParaRPr kumimoji="0" lang="en-US" altLang="en-US" sz="2000" b="0" i="0" u="none" strike="noStrike" cap="none" normalizeH="0" baseline="0" dirty="0">
+                <a:ln>
+                  <a:noFill/>
+                </a:ln>
+                <a:solidFill>
+                  <a:schemeClr val="tx2">
+                    <a:lumMod val="75000"/>
+                  </a:schemeClr>
+                </a:solidFill>
+                <a:effectLst/>
+                <a:latin typeface="Fira Sans" panose="020B0503050000020004" pitchFamily="34" charset="0"/>
+                <a:ea typeface="Fira Mono" panose="020B0509050000020004" pitchFamily="49" charset="0"/>
+              </a:endParaRPr>
+            </a:p>
+          </p:txBody>
+        </p:sp>
+        <p:cxnSp>
+          <p:nvCxnSpPr>
+            <p:cNvPr id="19" name="Straight Arrow Connector 18">
+              <a:extLst>
+                <a:ext uri="{FF2B5EF4-FFF2-40B4-BE49-F238E27FC236}">
+                  <a16:creationId xmlns:a16="http://schemas.microsoft.com/office/drawing/2014/main" id="{C65FF70E-B363-4F88-747D-4ABA8217589D}"/>
+                </a:ext>
+              </a:extLst>
+            </p:cNvPr>
+            <p:cNvCxnSpPr>
+              <a:cxnSpLocks/>
+            </p:cNvCxnSpPr>
+            <p:nvPr/>
+          </p:nvCxnSpPr>
+          <p:spPr>
+            <a:xfrm flipV="1">
+              <a:off x="9126070" y="3150403"/>
+              <a:ext cx="0" cy="695940"/>
+            </a:xfrm>
+            <a:prstGeom prst="straightConnector1">
+              <a:avLst/>
+            </a:prstGeom>
+            <a:noFill/>
+            <a:ln w="25400">
+              <a:solidFill>
+                <a:srgbClr val="FFC720"/>
+              </a:solidFill>
+              <a:tailEnd type="arrow"/>
+            </a:ln>
+          </p:spPr>
+          <p:style>
+            <a:lnRef idx="2">
+              <a:schemeClr val="accent1">
+                <a:shade val="15000"/>
+              </a:schemeClr>
+            </a:lnRef>
+            <a:fillRef idx="1">
+              <a:schemeClr val="accent1"/>
+            </a:fillRef>
+            <a:effectRef idx="0">
+              <a:schemeClr val="accent1"/>
+            </a:effectRef>
+            <a:fontRef idx="minor">
+              <a:schemeClr val="lt1"/>
+            </a:fontRef>
+          </p:style>
+        </p:cxnSp>
+        <p:sp>
+          <p:nvSpPr>
+            <p:cNvPr id="21" name="Rectangle 20">
+              <a:extLst>
+                <a:ext uri="{FF2B5EF4-FFF2-40B4-BE49-F238E27FC236}">
+                  <a16:creationId xmlns:a16="http://schemas.microsoft.com/office/drawing/2014/main" id="{85598775-A9C1-BBDD-A97D-9ED9F0FD51AB}"/>
+                </a:ext>
+              </a:extLst>
+            </p:cNvPr>
+            <p:cNvSpPr>
+              <a:spLocks noChangeArrowheads="1"/>
+            </p:cNvSpPr>
+            <p:nvPr/>
+          </p:nvSpPr>
+          <p:spPr bwMode="auto">
+            <a:xfrm>
+              <a:off x="7192589" y="2168066"/>
+              <a:ext cx="2115964" cy="929691"/>
+            </a:xfrm>
+            <a:prstGeom prst="rect">
+              <a:avLst/>
+            </a:prstGeom>
+            <a:noFill/>
+            <a:ln>
+              <a:noFill/>
+            </a:ln>
+            <a:effectLst/>
+          </p:spPr>
+          <p:txBody>
+            <a:bodyPr vert="horz" wrap="none" lIns="0" tIns="79350" rIns="0" bIns="79350" numCol="1" anchor="ctr" anchorCtr="0" compatLnSpc="1">
+              <a:prstTxWarp prst="textNoShape">
+                <a:avLst/>
+              </a:prstTxWarp>
+              <a:spAutoFit/>
+            </a:bodyPr>
+            <a:lstStyle/>
+            <a:p>
+              <a:pPr marL="0" marR="0" lvl="0" indent="0" algn="ctr" defTabSz="914400" rtl="0" eaLnBrk="0" fontAlgn="base" latinLnBrk="0" hangingPunct="0">
+                <a:lnSpc>
+                  <a:spcPct val="100000"/>
+                </a:lnSpc>
+                <a:spcBef>
+                  <a:spcPct val="0"/>
+                </a:spcBef>
+                <a:spcAft>
+                  <a:spcPct val="0"/>
+                </a:spcAft>
+                <a:buClrTx/>
+                <a:buSzTx/>
+                <a:buFontTx/>
+                <a:buNone/>
+                <a:tabLst/>
+              </a:pPr>
+              <a:r>
+                <a:rPr kumimoji="0" lang="en-US" altLang="en-US" sz="5000" b="0" i="0" u="none" strike="noStrike" cap="none" normalizeH="0" baseline="0" dirty="0">
+                  <a:ln>
+                    <a:noFill/>
+                  </a:ln>
+                  <a:solidFill>
+                    <a:srgbClr val="ADDB67"/>
+                  </a:solidFill>
+                  <a:effectLst/>
+                  <a:latin typeface="Consolas" panose="020B0609020204030204" pitchFamily="49" charset="0"/>
+                </a:rPr>
+                <a:t>x</a:t>
+              </a:r>
+              <a:r>
+                <a:rPr kumimoji="0" lang="en-US" altLang="en-US" sz="5000" b="0" i="0" u="none" strike="noStrike" cap="none" normalizeH="0" baseline="0" dirty="0">
+                  <a:ln>
+                    <a:noFill/>
+                  </a:ln>
+                  <a:solidFill>
+                    <a:srgbClr val="D6DEEB"/>
+                  </a:solidFill>
+                  <a:effectLst/>
+                  <a:latin typeface="Consolas" panose="020B0609020204030204" pitchFamily="49" charset="0"/>
+                </a:rPr>
+                <a:t> </a:t>
+              </a:r>
+              <a:r>
+                <a:rPr lang="en-US" altLang="en-US" sz="5000" dirty="0">
+                  <a:solidFill>
+                    <a:srgbClr val="D6DEEB"/>
+                  </a:solidFill>
+                  <a:latin typeface="Consolas" panose="020B0609020204030204" pitchFamily="49" charset="0"/>
+                </a:rPr>
+                <a:t>or</a:t>
+              </a:r>
+              <a:r>
+                <a:rPr kumimoji="0" lang="en-US" altLang="en-US" sz="5000" b="0" i="0" u="none" strike="noStrike" cap="none" normalizeH="0" baseline="0" dirty="0">
+                  <a:ln>
+                    <a:noFill/>
+                  </a:ln>
+                  <a:solidFill>
+                    <a:srgbClr val="D6DEEB"/>
+                  </a:solidFill>
+                  <a:effectLst/>
+                  <a:latin typeface="Consolas" panose="020B0609020204030204" pitchFamily="49" charset="0"/>
+                </a:rPr>
+                <a:t> </a:t>
+              </a:r>
+              <a:r>
+                <a:rPr kumimoji="0" lang="en-US" altLang="en-US" sz="5000" b="0" i="0" u="none" strike="noStrike" cap="none" normalizeH="0" baseline="0" dirty="0">
+                  <a:ln>
+                    <a:noFill/>
+                  </a:ln>
+                  <a:solidFill>
+                    <a:srgbClr val="FF5874"/>
+                  </a:solidFill>
+                  <a:effectLst/>
+                  <a:latin typeface="Consolas" panose="020B0609020204030204" pitchFamily="49" charset="0"/>
+                </a:rPr>
+                <a:t>y</a:t>
+              </a:r>
+            </a:p>
+          </p:txBody>
+        </p:sp>
+      </p:grpSp>
+    </p:spTree>
+    <p:extLst>
+      <p:ext uri="{BB962C8B-B14F-4D97-AF65-F5344CB8AC3E}">
+        <p14:creationId xmlns:p14="http://schemas.microsoft.com/office/powerpoint/2010/main" val="3176367271"/>
+      </p:ext>
+    </p:extLst>
+  </p:cSld>
+  <p:clrMapOvr>
+    <a:masterClrMapping/>
+  </p:clrMapOvr>
+</p:sld>
+</file>
+
+<file path=ppt/slides/slide15.xml><?xml version="1.0" encoding="utf-8"?>
+<p:sld xmlns:a="http://schemas.openxmlformats.org/drawingml/2006/main" xmlns:r="http://schemas.openxmlformats.org/officeDocument/2006/relationships" xmlns:p="http://schemas.openxmlformats.org/presentationml/2006/main">
+  <p:cSld>
+    <p:spTree>
+      <p:nvGrpSpPr>
+        <p:cNvPr id="1" name="">
+          <a:extLst>
+            <a:ext uri="{FF2B5EF4-FFF2-40B4-BE49-F238E27FC236}">
+              <a16:creationId xmlns:a16="http://schemas.microsoft.com/office/drawing/2014/main" id="{6EB3B9FE-EFC6-7F38-E2C0-AEEBDCB3BCE0}"/>
+            </a:ext>
+          </a:extLst>
+        </p:cNvPr>
+        <p:cNvGrpSpPr/>
+        <p:nvPr/>
+      </p:nvGrpSpPr>
+      <p:grpSpPr>
+        <a:xfrm>
+          <a:off x="0" y="0"/>
+          <a:ext cx="0" cy="0"/>
+          <a:chOff x="0" y="0"/>
+          <a:chExt cx="0" cy="0"/>
+        </a:xfrm>
+      </p:grpSpPr>
+      <p:sp>
+        <p:nvSpPr>
+          <p:cNvPr id="2" name="Rectangle 1">
+            <a:extLst>
+              <a:ext uri="{FF2B5EF4-FFF2-40B4-BE49-F238E27FC236}">
+                <a16:creationId xmlns:a16="http://schemas.microsoft.com/office/drawing/2014/main" id="{C5EFD39A-37BA-56F9-C0C5-024D05CFCCAA}"/>
+              </a:ext>
+            </a:extLst>
+          </p:cNvPr>
+          <p:cNvSpPr/>
+          <p:nvPr/>
+        </p:nvSpPr>
+        <p:spPr>
+          <a:xfrm>
+            <a:off x="1953986" y="1970313"/>
+            <a:ext cx="8284028" cy="3026229"/>
+          </a:xfrm>
+          <a:prstGeom prst="rect">
+            <a:avLst/>
+          </a:prstGeom>
+          <a:solidFill>
+            <a:srgbClr val="011627"/>
+          </a:solidFill>
+          <a:ln>
+            <a:noFill/>
+          </a:ln>
+        </p:spPr>
+        <p:style>
+          <a:lnRef idx="2">
+            <a:schemeClr val="accent1">
+              <a:shade val="50000"/>
+            </a:schemeClr>
+          </a:lnRef>
+          <a:fillRef idx="1">
+            <a:schemeClr val="accent1"/>
+          </a:fillRef>
+          <a:effectRef idx="0">
+            <a:schemeClr val="accent1"/>
+          </a:effectRef>
+          <a:fontRef idx="minor">
+            <a:schemeClr val="lt1"/>
+          </a:fontRef>
+        </p:style>
+        <p:txBody>
+          <a:bodyPr rtlCol="0" anchor="ctr"/>
+          <a:lstStyle/>
+          <a:p>
+            <a:pPr algn="ctr"/>
+            <a:endParaRPr lang="en-GB" dirty="0"/>
+          </a:p>
+        </p:txBody>
+      </p:sp>
+      <p:grpSp>
+        <p:nvGrpSpPr>
+          <p:cNvPr id="24" name="Group 23">
+            <a:extLst>
+              <a:ext uri="{FF2B5EF4-FFF2-40B4-BE49-F238E27FC236}">
+                <a16:creationId xmlns:a16="http://schemas.microsoft.com/office/drawing/2014/main" id="{CF6B7372-AB78-FB4C-9C58-7661A566907B}"/>
+              </a:ext>
+            </a:extLst>
+          </p:cNvPr>
+          <p:cNvGrpSpPr/>
+          <p:nvPr/>
+        </p:nvGrpSpPr>
+        <p:grpSpPr>
+          <a:xfrm>
+            <a:off x="2789118" y="2168066"/>
+            <a:ext cx="6613764" cy="2521868"/>
+            <a:chOff x="2926457" y="2168066"/>
+            <a:chExt cx="6613764" cy="2521868"/>
+          </a:xfrm>
+        </p:grpSpPr>
+        <p:sp>
+          <p:nvSpPr>
+            <p:cNvPr id="9" name="Rectangle 8">
+              <a:extLst>
+                <a:ext uri="{FF2B5EF4-FFF2-40B4-BE49-F238E27FC236}">
+                  <a16:creationId xmlns:a16="http://schemas.microsoft.com/office/drawing/2014/main" id="{31D9488A-2CB0-5A21-8A43-A2AD54294747}"/>
+                </a:ext>
+              </a:extLst>
+            </p:cNvPr>
+            <p:cNvSpPr>
+              <a:spLocks noChangeArrowheads="1"/>
+            </p:cNvSpPr>
+            <p:nvPr/>
+          </p:nvSpPr>
+          <p:spPr bwMode="auto">
+            <a:xfrm>
+              <a:off x="3202975" y="2168066"/>
+              <a:ext cx="2115964" cy="929691"/>
+            </a:xfrm>
+            <a:prstGeom prst="rect">
+              <a:avLst/>
+            </a:prstGeom>
+            <a:noFill/>
+            <a:ln>
+              <a:noFill/>
+            </a:ln>
+            <a:effectLst/>
+          </p:spPr>
+          <p:txBody>
+            <a:bodyPr vert="horz" wrap="none" lIns="0" tIns="79350" rIns="0" bIns="79350" numCol="1" anchor="ctr" anchorCtr="0" compatLnSpc="1">
+              <a:prstTxWarp prst="textNoShape">
+                <a:avLst/>
+              </a:prstTxWarp>
+              <a:spAutoFit/>
+            </a:bodyPr>
+            <a:lstStyle/>
+            <a:p>
+              <a:pPr marL="0" marR="0" lvl="0" indent="0" algn="ctr" defTabSz="914400" rtl="0" eaLnBrk="0" fontAlgn="base" latinLnBrk="0" hangingPunct="0">
+                <a:lnSpc>
+                  <a:spcPct val="100000"/>
+                </a:lnSpc>
+                <a:spcBef>
+                  <a:spcPct val="0"/>
+                </a:spcBef>
+                <a:spcAft>
+                  <a:spcPct val="0"/>
+                </a:spcAft>
+                <a:buClrTx/>
+                <a:buSzTx/>
+                <a:buFontTx/>
+                <a:buNone/>
+                <a:tabLst/>
+              </a:pPr>
+              <a:r>
+                <a:rPr kumimoji="0" lang="en-US" altLang="en-US" sz="5000" b="0" i="0" u="none" strike="noStrike" cap="none" normalizeH="0" baseline="0" dirty="0">
+                  <a:ln>
+                    <a:noFill/>
+                  </a:ln>
+                  <a:solidFill>
+                    <a:srgbClr val="FF5874"/>
+                  </a:solidFill>
+                  <a:effectLst/>
+                  <a:latin typeface="Consolas" panose="020B0609020204030204" pitchFamily="49" charset="0"/>
+                </a:rPr>
+                <a:t>x</a:t>
+              </a:r>
+              <a:r>
+                <a:rPr kumimoji="0" lang="en-US" altLang="en-US" sz="5000" b="0" i="0" u="none" strike="noStrike" cap="none" normalizeH="0" baseline="0" dirty="0">
+                  <a:ln>
+                    <a:noFill/>
+                  </a:ln>
+                  <a:solidFill>
+                    <a:srgbClr val="D6DEEB"/>
+                  </a:solidFill>
+                  <a:effectLst/>
+                  <a:latin typeface="Consolas" panose="020B0609020204030204" pitchFamily="49" charset="0"/>
+                </a:rPr>
+                <a:t> </a:t>
+              </a:r>
+              <a:r>
+                <a:rPr lang="en-US" altLang="en-US" sz="5000" dirty="0">
+                  <a:solidFill>
+                    <a:srgbClr val="D6DEEB"/>
+                  </a:solidFill>
+                  <a:latin typeface="Consolas" panose="020B0609020204030204" pitchFamily="49" charset="0"/>
+                </a:rPr>
+                <a:t>or</a:t>
+              </a:r>
+              <a:r>
+                <a:rPr kumimoji="0" lang="en-US" altLang="en-US" sz="5000" b="0" i="0" u="none" strike="noStrike" cap="none" normalizeH="0" baseline="0" dirty="0">
+                  <a:ln>
+                    <a:noFill/>
+                  </a:ln>
+                  <a:solidFill>
+                    <a:srgbClr val="D6DEEB"/>
+                  </a:solidFill>
+                  <a:effectLst/>
+                  <a:latin typeface="Consolas" panose="020B0609020204030204" pitchFamily="49" charset="0"/>
+                </a:rPr>
+                <a:t> </a:t>
+              </a:r>
+              <a:r>
+                <a:rPr kumimoji="0" lang="en-US" altLang="en-US" sz="5000" b="0" i="0" u="none" strike="noStrike" cap="none" normalizeH="0" baseline="0" dirty="0">
+                  <a:ln>
+                    <a:noFill/>
+                  </a:ln>
+                  <a:solidFill>
+                    <a:srgbClr val="ADDB67"/>
+                  </a:solidFill>
+                  <a:effectLst/>
+                  <a:latin typeface="Consolas" panose="020B0609020204030204" pitchFamily="49" charset="0"/>
+                </a:rPr>
+                <a:t>y</a:t>
+              </a:r>
+            </a:p>
+          </p:txBody>
+        </p:sp>
+        <p:cxnSp>
+          <p:nvCxnSpPr>
+            <p:cNvPr id="10" name="Straight Arrow Connector 9">
+              <a:extLst>
+                <a:ext uri="{FF2B5EF4-FFF2-40B4-BE49-F238E27FC236}">
+                  <a16:creationId xmlns:a16="http://schemas.microsoft.com/office/drawing/2014/main" id="{53497053-D709-20C4-0986-C32F6CF87CFE}"/>
+                </a:ext>
+              </a:extLst>
+            </p:cNvPr>
+            <p:cNvCxnSpPr>
+              <a:cxnSpLocks/>
+            </p:cNvCxnSpPr>
+            <p:nvPr/>
+          </p:nvCxnSpPr>
+          <p:spPr>
+            <a:xfrm flipV="1">
+              <a:off x="5147342" y="3150403"/>
+              <a:ext cx="0" cy="695940"/>
+            </a:xfrm>
+            <a:prstGeom prst="straightConnector1">
+              <a:avLst/>
+            </a:prstGeom>
+            <a:noFill/>
+            <a:ln w="25400">
+              <a:solidFill>
+                <a:srgbClr val="FFC720"/>
+              </a:solidFill>
+              <a:tailEnd type="arrow"/>
+            </a:ln>
+          </p:spPr>
+          <p:style>
+            <a:lnRef idx="2">
+              <a:schemeClr val="accent1">
+                <a:shade val="15000"/>
+              </a:schemeClr>
+            </a:lnRef>
+            <a:fillRef idx="1">
+              <a:schemeClr val="accent1"/>
+            </a:fillRef>
+            <a:effectRef idx="0">
+              <a:schemeClr val="accent1"/>
+            </a:effectRef>
+            <a:fontRef idx="minor">
+              <a:schemeClr val="lt1"/>
+            </a:fontRef>
+          </p:style>
+        </p:cxnSp>
+        <p:sp>
+          <p:nvSpPr>
+            <p:cNvPr id="11" name="Rectangle 10">
+              <a:extLst>
+                <a:ext uri="{FF2B5EF4-FFF2-40B4-BE49-F238E27FC236}">
+                  <a16:creationId xmlns:a16="http://schemas.microsoft.com/office/drawing/2014/main" id="{342A2765-D319-204B-E410-BE399B190159}"/>
+                </a:ext>
+              </a:extLst>
+            </p:cNvPr>
+            <p:cNvSpPr>
+              <a:spLocks noChangeArrowheads="1"/>
+            </p:cNvSpPr>
+            <p:nvPr/>
+          </p:nvSpPr>
+          <p:spPr bwMode="auto">
+            <a:xfrm>
+              <a:off x="2926457" y="3914131"/>
+              <a:ext cx="2669000" cy="775803"/>
+            </a:xfrm>
+            <a:prstGeom prst="rect">
+              <a:avLst/>
+            </a:prstGeom>
+            <a:noFill/>
+            <a:ln>
+              <a:noFill/>
+            </a:ln>
+            <a:effectLst/>
+          </p:spPr>
+          <p:txBody>
+            <a:bodyPr vert="horz" wrap="none" lIns="0" tIns="79350" rIns="0" bIns="79350" numCol="1" anchor="ctr" anchorCtr="0" compatLnSpc="1">
+              <a:prstTxWarp prst="textNoShape">
+                <a:avLst/>
+              </a:prstTxWarp>
+              <a:spAutoFit/>
+            </a:bodyPr>
+            <a:lstStyle/>
+            <a:p>
+              <a:pPr marL="0" marR="0" lvl="0" indent="0" algn="ctr" defTabSz="914400" rtl="0" eaLnBrk="0" fontAlgn="base" latinLnBrk="0" hangingPunct="0">
+                <a:lnSpc>
+                  <a:spcPct val="100000"/>
+                </a:lnSpc>
+                <a:spcBef>
+                  <a:spcPct val="0"/>
+                </a:spcBef>
+                <a:spcAft>
+                  <a:spcPct val="0"/>
+                </a:spcAft>
+                <a:buClrTx/>
+                <a:buSzTx/>
+                <a:buFontTx/>
+                <a:buNone/>
+                <a:tabLst/>
+              </a:pPr>
+              <a:r>
+                <a:rPr lang="en-US" altLang="en-US" sz="2000" dirty="0">
+                  <a:solidFill>
+                    <a:srgbClr val="D6DEEB"/>
+                  </a:solidFill>
+                  <a:latin typeface="Fira Sans" panose="020B0503050000020004" pitchFamily="34" charset="0"/>
+                  <a:ea typeface="Fira Mono" panose="020B0509050000020004" pitchFamily="49" charset="0"/>
+                </a:rPr>
+                <a:t>if y is truthy, </a:t>
+              </a:r>
+              <a:r>
+                <a:rPr kumimoji="0" lang="en-US" altLang="en-US" sz="2000" b="0" i="0" u="none" strike="noStrike" cap="none" normalizeH="0" baseline="0" dirty="0">
+                  <a:ln>
+                    <a:noFill/>
+                  </a:ln>
+                  <a:solidFill>
+                    <a:srgbClr val="D6DEEB"/>
+                  </a:solidFill>
+                  <a:effectLst/>
+                  <a:latin typeface="Fira Sans" panose="020B0503050000020004" pitchFamily="34" charset="0"/>
+                  <a:ea typeface="Fira Mono" panose="020B0509050000020004" pitchFamily="49" charset="0"/>
+                </a:rPr>
+                <a:t>the whole</a:t>
+              </a:r>
+            </a:p>
+            <a:p>
+              <a:pPr marL="0" marR="0" lvl="0" indent="0" algn="ctr" defTabSz="914400" rtl="0" eaLnBrk="0" fontAlgn="base" latinLnBrk="0" hangingPunct="0">
+                <a:lnSpc>
+                  <a:spcPct val="100000"/>
+                </a:lnSpc>
+                <a:spcBef>
+                  <a:spcPct val="0"/>
+                </a:spcBef>
+                <a:spcAft>
+                  <a:spcPct val="0"/>
+                </a:spcAft>
+                <a:buClrTx/>
+                <a:buSzTx/>
+                <a:buFontTx/>
+                <a:buNone/>
+                <a:tabLst/>
+              </a:pPr>
+              <a:r>
+                <a:rPr kumimoji="0" lang="en-US" altLang="en-US" sz="2000" b="0" i="0" u="none" strike="noStrike" cap="none" normalizeH="0" baseline="0" dirty="0">
+                  <a:ln>
+                    <a:noFill/>
+                  </a:ln>
+                  <a:solidFill>
+                    <a:srgbClr val="D6DEEB"/>
+                  </a:solidFill>
+                  <a:effectLst/>
+                  <a:latin typeface="Fira Sans" panose="020B0503050000020004" pitchFamily="34" charset="0"/>
+                  <a:ea typeface="Fira Mono" panose="020B0509050000020004" pitchFamily="49" charset="0"/>
+                </a:rPr>
+                <a:t>expression is truthy</a:t>
+              </a:r>
+            </a:p>
+          </p:txBody>
+        </p:sp>
+        <p:sp>
+          <p:nvSpPr>
+            <p:cNvPr id="18" name="Rectangle 17">
+              <a:extLst>
+                <a:ext uri="{FF2B5EF4-FFF2-40B4-BE49-F238E27FC236}">
+                  <a16:creationId xmlns:a16="http://schemas.microsoft.com/office/drawing/2014/main" id="{1087113C-F05E-741E-7C9D-3079B5417EDC}"/>
+                </a:ext>
+              </a:extLst>
+            </p:cNvPr>
+            <p:cNvSpPr>
+              <a:spLocks noChangeArrowheads="1"/>
+            </p:cNvSpPr>
+            <p:nvPr/>
+          </p:nvSpPr>
+          <p:spPr bwMode="auto">
+            <a:xfrm>
+              <a:off x="7034728" y="3914130"/>
+              <a:ext cx="2505493" cy="775803"/>
+            </a:xfrm>
+            <a:prstGeom prst="rect">
+              <a:avLst/>
+            </a:prstGeom>
+            <a:noFill/>
+            <a:ln>
+              <a:noFill/>
+            </a:ln>
+            <a:effectLst/>
+          </p:spPr>
+          <p:txBody>
+            <a:bodyPr vert="horz" wrap="none" lIns="0" tIns="79350" rIns="0" bIns="79350" numCol="1" anchor="ctr" anchorCtr="0" compatLnSpc="1">
+              <a:prstTxWarp prst="textNoShape">
+                <a:avLst/>
+              </a:prstTxWarp>
+              <a:spAutoFit/>
+            </a:bodyPr>
+            <a:lstStyle/>
+            <a:p>
+              <a:pPr marL="0" marR="0" lvl="0" indent="0" algn="ctr" defTabSz="914400" rtl="0" eaLnBrk="0" fontAlgn="base" latinLnBrk="0" hangingPunct="0">
+                <a:lnSpc>
+                  <a:spcPct val="100000"/>
+                </a:lnSpc>
+                <a:spcBef>
+                  <a:spcPct val="0"/>
+                </a:spcBef>
+                <a:spcAft>
+                  <a:spcPct val="0"/>
+                </a:spcAft>
+                <a:buClrTx/>
+                <a:buSzTx/>
+                <a:buFontTx/>
+                <a:buNone/>
+                <a:tabLst/>
+              </a:pPr>
+              <a:r>
+                <a:rPr kumimoji="0" lang="en-US" altLang="en-US" sz="2000" b="0" i="0" u="none" strike="noStrike" cap="none" normalizeH="0" baseline="0" dirty="0">
+                  <a:ln>
+                    <a:noFill/>
+                  </a:ln>
+                  <a:solidFill>
+                    <a:srgbClr val="D6DEEB"/>
+                  </a:solidFill>
+                  <a:effectLst/>
+                  <a:latin typeface="Fira Sans" panose="020B0503050000020004" pitchFamily="34" charset="0"/>
+                  <a:ea typeface="Fira Mono" panose="020B0509050000020004" pitchFamily="49" charset="0"/>
+                </a:rPr>
+                <a:t>if y is </a:t>
+              </a:r>
+              <a:r>
+                <a:rPr kumimoji="0" lang="en-US" altLang="en-US" sz="2000" b="0" i="0" u="none" strike="noStrike" cap="none" normalizeH="0" baseline="0" dirty="0" err="1">
+                  <a:ln>
+                    <a:noFill/>
+                  </a:ln>
+                  <a:solidFill>
+                    <a:srgbClr val="D6DEEB"/>
+                  </a:solidFill>
+                  <a:effectLst/>
+                  <a:latin typeface="Fira Sans" panose="020B0503050000020004" pitchFamily="34" charset="0"/>
+                  <a:ea typeface="Fira Mono" panose="020B0509050000020004" pitchFamily="49" charset="0"/>
+                </a:rPr>
+                <a:t>falsy</a:t>
+              </a:r>
+              <a:r>
+                <a:rPr kumimoji="0" lang="en-US" altLang="en-US" sz="2000" b="0" i="0" u="none" strike="noStrike" cap="none" normalizeH="0" baseline="0" dirty="0">
+                  <a:ln>
+                    <a:noFill/>
+                  </a:ln>
+                  <a:solidFill>
+                    <a:srgbClr val="D6DEEB"/>
+                  </a:solidFill>
+                  <a:effectLst/>
+                  <a:latin typeface="Fira Sans" panose="020B0503050000020004" pitchFamily="34" charset="0"/>
+                  <a:ea typeface="Fira Mono" panose="020B0509050000020004" pitchFamily="49" charset="0"/>
+                </a:rPr>
+                <a:t>, the whole</a:t>
+              </a:r>
+            </a:p>
+            <a:p>
+              <a:pPr marL="0" marR="0" lvl="0" indent="0" algn="ctr" defTabSz="914400" rtl="0" eaLnBrk="0" fontAlgn="base" latinLnBrk="0" hangingPunct="0">
+                <a:lnSpc>
+                  <a:spcPct val="100000"/>
+                </a:lnSpc>
+                <a:spcBef>
+                  <a:spcPct val="0"/>
+                </a:spcBef>
+                <a:spcAft>
+                  <a:spcPct val="0"/>
+                </a:spcAft>
+                <a:buClrTx/>
+                <a:buSzTx/>
+                <a:buFontTx/>
+                <a:buNone/>
+                <a:tabLst/>
+              </a:pPr>
+              <a:r>
+                <a:rPr kumimoji="0" lang="en-US" altLang="en-US" sz="2000" b="0" i="0" u="none" strike="noStrike" cap="none" normalizeH="0" baseline="0" dirty="0">
+                  <a:ln>
+                    <a:noFill/>
+                  </a:ln>
+                  <a:solidFill>
+                    <a:srgbClr val="D6DEEB"/>
+                  </a:solidFill>
+                  <a:effectLst/>
+                  <a:latin typeface="Fira Sans" panose="020B0503050000020004" pitchFamily="34" charset="0"/>
+                  <a:ea typeface="Fira Mono" panose="020B0509050000020004" pitchFamily="49" charset="0"/>
+                </a:rPr>
+                <a:t>expression is </a:t>
+              </a:r>
+              <a:r>
+                <a:rPr kumimoji="0" lang="en-US" altLang="en-US" sz="2000" b="0" i="0" u="none" strike="noStrike" cap="none" normalizeH="0" baseline="0" dirty="0" err="1">
+                  <a:ln>
+                    <a:noFill/>
+                  </a:ln>
+                  <a:solidFill>
+                    <a:srgbClr val="D6DEEB"/>
+                  </a:solidFill>
+                  <a:effectLst/>
+                  <a:latin typeface="Fira Sans" panose="020B0503050000020004" pitchFamily="34" charset="0"/>
+                  <a:ea typeface="Fira Mono" panose="020B0509050000020004" pitchFamily="49" charset="0"/>
+                </a:rPr>
+                <a:t>falsy</a:t>
+              </a:r>
+              <a:endParaRPr kumimoji="0" lang="en-US" altLang="en-US" sz="2000" b="0" i="0" u="none" strike="noStrike" cap="none" normalizeH="0" baseline="0" dirty="0">
+                <a:ln>
+                  <a:noFill/>
+                </a:ln>
+                <a:solidFill>
+                  <a:schemeClr val="tx2">
+                    <a:lumMod val="75000"/>
+                  </a:schemeClr>
+                </a:solidFill>
+                <a:effectLst/>
+                <a:latin typeface="Fira Sans" panose="020B0503050000020004" pitchFamily="34" charset="0"/>
+                <a:ea typeface="Fira Mono" panose="020B0509050000020004" pitchFamily="49" charset="0"/>
+              </a:endParaRPr>
+            </a:p>
+          </p:txBody>
+        </p:sp>
+        <p:cxnSp>
+          <p:nvCxnSpPr>
+            <p:cNvPr id="19" name="Straight Arrow Connector 18">
+              <a:extLst>
+                <a:ext uri="{FF2B5EF4-FFF2-40B4-BE49-F238E27FC236}">
+                  <a16:creationId xmlns:a16="http://schemas.microsoft.com/office/drawing/2014/main" id="{53CC74C3-4C75-02D2-DFA0-776288E76D5D}"/>
+                </a:ext>
+              </a:extLst>
+            </p:cNvPr>
+            <p:cNvCxnSpPr>
+              <a:cxnSpLocks/>
+            </p:cNvCxnSpPr>
+            <p:nvPr/>
+          </p:nvCxnSpPr>
+          <p:spPr>
+            <a:xfrm flipV="1">
+              <a:off x="9126070" y="3150403"/>
+              <a:ext cx="0" cy="695940"/>
+            </a:xfrm>
+            <a:prstGeom prst="straightConnector1">
+              <a:avLst/>
+            </a:prstGeom>
+            <a:noFill/>
+            <a:ln w="25400">
+              <a:solidFill>
+                <a:srgbClr val="FFC720"/>
+              </a:solidFill>
+              <a:tailEnd type="arrow"/>
+            </a:ln>
+          </p:spPr>
+          <p:style>
+            <a:lnRef idx="2">
+              <a:schemeClr val="accent1">
+                <a:shade val="15000"/>
+              </a:schemeClr>
+            </a:lnRef>
+            <a:fillRef idx="1">
+              <a:schemeClr val="accent1"/>
+            </a:fillRef>
+            <a:effectRef idx="0">
+              <a:schemeClr val="accent1"/>
+            </a:effectRef>
+            <a:fontRef idx="minor">
+              <a:schemeClr val="lt1"/>
+            </a:fontRef>
+          </p:style>
+        </p:cxnSp>
+        <p:sp>
+          <p:nvSpPr>
+            <p:cNvPr id="21" name="Rectangle 20">
+              <a:extLst>
+                <a:ext uri="{FF2B5EF4-FFF2-40B4-BE49-F238E27FC236}">
+                  <a16:creationId xmlns:a16="http://schemas.microsoft.com/office/drawing/2014/main" id="{CE93A6E5-E4F7-F7D6-D79C-57897B0D0DC9}"/>
+                </a:ext>
+              </a:extLst>
+            </p:cNvPr>
+            <p:cNvSpPr>
+              <a:spLocks noChangeArrowheads="1"/>
+            </p:cNvSpPr>
+            <p:nvPr/>
+          </p:nvSpPr>
+          <p:spPr bwMode="auto">
+            <a:xfrm>
+              <a:off x="7192589" y="2168066"/>
+              <a:ext cx="2115964" cy="929691"/>
+            </a:xfrm>
+            <a:prstGeom prst="rect">
+              <a:avLst/>
+            </a:prstGeom>
+            <a:noFill/>
+            <a:ln>
+              <a:noFill/>
+            </a:ln>
+            <a:effectLst/>
+          </p:spPr>
+          <p:txBody>
+            <a:bodyPr vert="horz" wrap="none" lIns="0" tIns="79350" rIns="0" bIns="79350" numCol="1" anchor="ctr" anchorCtr="0" compatLnSpc="1">
+              <a:prstTxWarp prst="textNoShape">
+                <a:avLst/>
+              </a:prstTxWarp>
+              <a:spAutoFit/>
+            </a:bodyPr>
+            <a:lstStyle/>
+            <a:p>
+              <a:pPr marL="0" marR="0" lvl="0" indent="0" algn="ctr" defTabSz="914400" rtl="0" eaLnBrk="0" fontAlgn="base" latinLnBrk="0" hangingPunct="0">
+                <a:lnSpc>
+                  <a:spcPct val="100000"/>
+                </a:lnSpc>
+                <a:spcBef>
+                  <a:spcPct val="0"/>
+                </a:spcBef>
+                <a:spcAft>
+                  <a:spcPct val="0"/>
+                </a:spcAft>
+                <a:buClrTx/>
+                <a:buSzTx/>
+                <a:buFontTx/>
+                <a:buNone/>
+                <a:tabLst/>
+              </a:pPr>
+              <a:r>
+                <a:rPr kumimoji="0" lang="en-US" altLang="en-US" sz="5000" b="0" i="0" u="none" strike="noStrike" cap="none" normalizeH="0" baseline="0" dirty="0">
+                  <a:ln>
+                    <a:noFill/>
+                  </a:ln>
+                  <a:solidFill>
+                    <a:srgbClr val="FF5874"/>
+                  </a:solidFill>
+                  <a:effectLst/>
+                  <a:latin typeface="Consolas" panose="020B0609020204030204" pitchFamily="49" charset="0"/>
+                </a:rPr>
+                <a:t>x</a:t>
+              </a:r>
+              <a:r>
+                <a:rPr kumimoji="0" lang="en-US" altLang="en-US" sz="5000" b="0" i="0" u="none" strike="noStrike" cap="none" normalizeH="0" baseline="0" dirty="0">
+                  <a:ln>
+                    <a:noFill/>
+                  </a:ln>
+                  <a:solidFill>
+                    <a:srgbClr val="D6DEEB"/>
+                  </a:solidFill>
+                  <a:effectLst/>
+                  <a:latin typeface="Consolas" panose="020B0609020204030204" pitchFamily="49" charset="0"/>
+                </a:rPr>
+                <a:t> </a:t>
+              </a:r>
+              <a:r>
+                <a:rPr lang="en-US" altLang="en-US" sz="5000" dirty="0">
+                  <a:solidFill>
+                    <a:srgbClr val="D6DEEB"/>
+                  </a:solidFill>
+                  <a:latin typeface="Consolas" panose="020B0609020204030204" pitchFamily="49" charset="0"/>
+                </a:rPr>
+                <a:t>or</a:t>
+              </a:r>
+              <a:r>
+                <a:rPr kumimoji="0" lang="en-US" altLang="en-US" sz="5000" b="0" i="0" u="none" strike="noStrike" cap="none" normalizeH="0" baseline="0" dirty="0">
+                  <a:ln>
+                    <a:noFill/>
+                  </a:ln>
+                  <a:solidFill>
+                    <a:srgbClr val="D6DEEB"/>
+                  </a:solidFill>
+                  <a:effectLst/>
+                  <a:latin typeface="Consolas" panose="020B0609020204030204" pitchFamily="49" charset="0"/>
+                </a:rPr>
+                <a:t> </a:t>
+              </a:r>
+              <a:r>
+                <a:rPr kumimoji="0" lang="en-US" altLang="en-US" sz="5000" b="0" i="0" u="none" strike="noStrike" cap="none" normalizeH="0" baseline="0" dirty="0">
+                  <a:ln>
+                    <a:noFill/>
+                  </a:ln>
+                  <a:solidFill>
+                    <a:srgbClr val="FF5874"/>
+                  </a:solidFill>
+                  <a:effectLst/>
+                  <a:latin typeface="Consolas" panose="020B0609020204030204" pitchFamily="49" charset="0"/>
+                </a:rPr>
+                <a:t>y</a:t>
+              </a:r>
+            </a:p>
+          </p:txBody>
+        </p:sp>
+      </p:grpSp>
+    </p:spTree>
+    <p:extLst>
+      <p:ext uri="{BB962C8B-B14F-4D97-AF65-F5344CB8AC3E}">
+        <p14:creationId xmlns:p14="http://schemas.microsoft.com/office/powerpoint/2010/main" val="2951011437"/>
+      </p:ext>
+    </p:extLst>
+  </p:cSld>
+  <p:clrMapOvr>
+    <a:masterClrMapping/>
+  </p:clrMapOvr>
+</p:sld>
+</file>
+
+<file path=ppt/slides/slide16.xml><?xml version="1.0" encoding="utf-8"?>
+<p:sld xmlns:a="http://schemas.openxmlformats.org/drawingml/2006/main" xmlns:r="http://schemas.openxmlformats.org/officeDocument/2006/relationships" xmlns:p="http://schemas.openxmlformats.org/presentationml/2006/main">
+  <p:cSld>
+    <p:spTree>
+      <p:nvGrpSpPr>
+        <p:cNvPr id="1" name="">
+          <a:extLst>
+            <a:ext uri="{FF2B5EF4-FFF2-40B4-BE49-F238E27FC236}">
+              <a16:creationId xmlns:a16="http://schemas.microsoft.com/office/drawing/2014/main" id="{0A6F1C9B-3E47-4006-4866-51A692588FF8}"/>
+            </a:ext>
+          </a:extLst>
+        </p:cNvPr>
+        <p:cNvGrpSpPr/>
+        <p:nvPr/>
+      </p:nvGrpSpPr>
+      <p:grpSpPr>
+        <a:xfrm>
+          <a:off x="0" y="0"/>
+          <a:ext cx="0" cy="0"/>
+          <a:chOff x="0" y="0"/>
+          <a:chExt cx="0" cy="0"/>
+        </a:xfrm>
+      </p:grpSpPr>
+      <p:sp>
+        <p:nvSpPr>
+          <p:cNvPr id="2" name="Rectangle 1">
+            <a:extLst>
+              <a:ext uri="{FF2B5EF4-FFF2-40B4-BE49-F238E27FC236}">
+                <a16:creationId xmlns:a16="http://schemas.microsoft.com/office/drawing/2014/main" id="{E5344137-8A80-E122-41B1-E87FAF0785B9}"/>
+              </a:ext>
+            </a:extLst>
+          </p:cNvPr>
+          <p:cNvSpPr/>
+          <p:nvPr/>
+        </p:nvSpPr>
+        <p:spPr>
+          <a:xfrm>
+            <a:off x="1953986" y="1970313"/>
+            <a:ext cx="8284028" cy="3026229"/>
+          </a:xfrm>
+          <a:prstGeom prst="rect">
+            <a:avLst/>
+          </a:prstGeom>
+          <a:solidFill>
+            <a:srgbClr val="011627"/>
+          </a:solidFill>
+          <a:ln>
+            <a:noFill/>
+          </a:ln>
+        </p:spPr>
+        <p:style>
+          <a:lnRef idx="2">
+            <a:schemeClr val="accent1">
+              <a:shade val="50000"/>
+            </a:schemeClr>
+          </a:lnRef>
+          <a:fillRef idx="1">
+            <a:schemeClr val="accent1"/>
+          </a:fillRef>
+          <a:effectRef idx="0">
+            <a:schemeClr val="accent1"/>
+          </a:effectRef>
+          <a:fontRef idx="minor">
+            <a:schemeClr val="lt1"/>
+          </a:fontRef>
+        </p:style>
+        <p:txBody>
+          <a:bodyPr rtlCol="0" anchor="ctr"/>
+          <a:lstStyle/>
+          <a:p>
+            <a:pPr algn="ctr"/>
+            <a:endParaRPr lang="en-GB" dirty="0"/>
+          </a:p>
+        </p:txBody>
+      </p:sp>
+      <p:sp>
+        <p:nvSpPr>
+          <p:cNvPr id="18" name="Rectangle 17">
+            <a:extLst>
+              <a:ext uri="{FF2B5EF4-FFF2-40B4-BE49-F238E27FC236}">
+                <a16:creationId xmlns:a16="http://schemas.microsoft.com/office/drawing/2014/main" id="{4C559D9D-E01C-D1E9-9D66-50C5307CA764}"/>
+              </a:ext>
+            </a:extLst>
+          </p:cNvPr>
+          <p:cNvSpPr>
+            <a:spLocks noChangeArrowheads="1"/>
+          </p:cNvSpPr>
+          <p:nvPr/>
+        </p:nvSpPr>
+        <p:spPr bwMode="auto">
+          <a:xfrm>
+            <a:off x="6061228" y="3095525"/>
+            <a:ext cx="3359894" cy="775803"/>
+          </a:xfrm>
+          <a:prstGeom prst="rect">
+            <a:avLst/>
+          </a:prstGeom>
+          <a:noFill/>
+          <a:ln>
+            <a:noFill/>
+          </a:ln>
+          <a:effectLst/>
+        </p:spPr>
+        <p:txBody>
+          <a:bodyPr vert="horz" wrap="none" lIns="0" tIns="79350" rIns="0" bIns="79350" numCol="1" anchor="ctr" anchorCtr="0" compatLnSpc="1">
+            <a:prstTxWarp prst="textNoShape">
+              <a:avLst/>
+            </a:prstTxWarp>
+            <a:spAutoFit/>
+          </a:bodyPr>
+          <a:lstStyle/>
+          <a:p>
+            <a:pPr marL="0" marR="0" lvl="0" indent="0" algn="ctr" defTabSz="914400" rtl="0" eaLnBrk="0" fontAlgn="base" latinLnBrk="0" hangingPunct="0">
+              <a:lnSpc>
+                <a:spcPct val="100000"/>
+              </a:lnSpc>
+              <a:spcBef>
+                <a:spcPct val="0"/>
+              </a:spcBef>
+              <a:spcAft>
+                <a:spcPct val="0"/>
+              </a:spcAft>
+              <a:buClrTx/>
+              <a:buSzTx/>
+              <a:buFontTx/>
+              <a:buNone/>
+              <a:tabLst/>
+            </a:pPr>
+            <a:r>
+              <a:rPr kumimoji="0" lang="en-US" altLang="en-US" sz="2000" b="0" i="0" u="none" strike="noStrike" cap="none" normalizeH="0" baseline="0" dirty="0">
+                <a:ln>
+                  <a:noFill/>
+                </a:ln>
+                <a:solidFill>
+                  <a:srgbClr val="D6DEEB"/>
+                </a:solidFill>
+                <a:effectLst/>
+                <a:latin typeface="Fira Sans" panose="020B0503050000020004" pitchFamily="34" charset="0"/>
+                <a:ea typeface="Fira Mono" panose="020B0509050000020004" pitchFamily="49" charset="0"/>
+              </a:rPr>
+              <a:t>if either expression is </a:t>
+            </a:r>
+            <a:r>
+              <a:rPr kumimoji="0" lang="en-US" altLang="en-US" sz="2000" b="0" i="0" u="none" strike="noStrike" cap="none" normalizeH="0" baseline="0" dirty="0" err="1">
+                <a:ln>
+                  <a:noFill/>
+                </a:ln>
+                <a:solidFill>
+                  <a:srgbClr val="D6DEEB"/>
+                </a:solidFill>
+                <a:effectLst/>
+                <a:latin typeface="Fira Sans" panose="020B0503050000020004" pitchFamily="34" charset="0"/>
+                <a:ea typeface="Fira Mono" panose="020B0509050000020004" pitchFamily="49" charset="0"/>
+              </a:rPr>
+              <a:t>falsy</a:t>
+            </a:r>
+            <a:r>
+              <a:rPr kumimoji="0" lang="en-US" altLang="en-US" sz="2000" b="0" i="0" u="none" strike="noStrike" cap="none" normalizeH="0" baseline="0" dirty="0">
+                <a:ln>
+                  <a:noFill/>
+                </a:ln>
+                <a:solidFill>
+                  <a:srgbClr val="D6DEEB"/>
+                </a:solidFill>
+                <a:effectLst/>
+                <a:latin typeface="Fira Sans" panose="020B0503050000020004" pitchFamily="34" charset="0"/>
+                <a:ea typeface="Fira Mono" panose="020B0509050000020004" pitchFamily="49" charset="0"/>
+              </a:rPr>
+              <a:t>,</a:t>
+            </a:r>
+          </a:p>
+          <a:p>
+            <a:pPr marL="0" marR="0" lvl="0" indent="0" algn="ctr" defTabSz="914400" rtl="0" eaLnBrk="0" fontAlgn="base" latinLnBrk="0" hangingPunct="0">
+              <a:lnSpc>
+                <a:spcPct val="100000"/>
+              </a:lnSpc>
+              <a:spcBef>
+                <a:spcPct val="0"/>
+              </a:spcBef>
+              <a:spcAft>
+                <a:spcPct val="0"/>
+              </a:spcAft>
+              <a:buClrTx/>
+              <a:buSzTx/>
+              <a:buFontTx/>
+              <a:buNone/>
+              <a:tabLst/>
+            </a:pPr>
+            <a:r>
+              <a:rPr lang="en-US" altLang="en-US" sz="2000" dirty="0">
+                <a:solidFill>
+                  <a:srgbClr val="D6DEEB"/>
+                </a:solidFill>
+                <a:latin typeface="Fira Sans" panose="020B0503050000020004" pitchFamily="34" charset="0"/>
+                <a:ea typeface="Fira Mono" panose="020B0509050000020004" pitchFamily="49" charset="0"/>
+              </a:rPr>
+              <a:t>the whole expression is </a:t>
+            </a:r>
+            <a:r>
+              <a:rPr lang="en-US" altLang="en-US" sz="2000" dirty="0" err="1">
+                <a:solidFill>
+                  <a:srgbClr val="D6DEEB"/>
+                </a:solidFill>
+                <a:latin typeface="Fira Sans" panose="020B0503050000020004" pitchFamily="34" charset="0"/>
+                <a:ea typeface="Fira Mono" panose="020B0509050000020004" pitchFamily="49" charset="0"/>
+              </a:rPr>
+              <a:t>falsy</a:t>
+            </a:r>
+            <a:endParaRPr kumimoji="0" lang="en-US" altLang="en-US" sz="2000" b="0" i="0" u="none" strike="noStrike" cap="none" normalizeH="0" baseline="0" dirty="0">
+              <a:ln>
+                <a:noFill/>
+              </a:ln>
+              <a:solidFill>
+                <a:schemeClr val="tx2">
+                  <a:lumMod val="75000"/>
+                </a:schemeClr>
+              </a:solidFill>
+              <a:effectLst/>
+              <a:latin typeface="Fira Sans" panose="020B0503050000020004" pitchFamily="34" charset="0"/>
+              <a:ea typeface="Fira Mono" panose="020B0509050000020004" pitchFamily="49" charset="0"/>
+            </a:endParaRPr>
+          </a:p>
+        </p:txBody>
+      </p:sp>
+      <p:sp>
+        <p:nvSpPr>
+          <p:cNvPr id="9" name="Rectangle 8">
+            <a:extLst>
+              <a:ext uri="{FF2B5EF4-FFF2-40B4-BE49-F238E27FC236}">
+                <a16:creationId xmlns:a16="http://schemas.microsoft.com/office/drawing/2014/main" id="{B2B9346E-0C1A-3B88-E42A-1281C97F3510}"/>
+              </a:ext>
+            </a:extLst>
+          </p:cNvPr>
+          <p:cNvSpPr>
+            <a:spLocks noChangeArrowheads="1"/>
+          </p:cNvSpPr>
+          <p:nvPr/>
+        </p:nvSpPr>
+        <p:spPr bwMode="auto">
+          <a:xfrm>
+            <a:off x="2857966" y="2428033"/>
+            <a:ext cx="2468625" cy="929691"/>
+          </a:xfrm>
+          <a:prstGeom prst="rect">
+            <a:avLst/>
+          </a:prstGeom>
+          <a:noFill/>
+          <a:ln>
+            <a:noFill/>
+          </a:ln>
+          <a:effectLst/>
+        </p:spPr>
+        <p:txBody>
+          <a:bodyPr vert="horz" wrap="none" lIns="0" tIns="79350" rIns="0" bIns="79350" numCol="1" anchor="ctr" anchorCtr="0" compatLnSpc="1">
+            <a:prstTxWarp prst="textNoShape">
+              <a:avLst/>
+            </a:prstTxWarp>
+            <a:spAutoFit/>
+          </a:bodyPr>
+          <a:lstStyle/>
+          <a:p>
+            <a:pPr marL="0" marR="0" lvl="0" indent="0" algn="ctr" defTabSz="914400" rtl="0" eaLnBrk="0" fontAlgn="base" latinLnBrk="0" hangingPunct="0">
+              <a:lnSpc>
+                <a:spcPct val="100000"/>
+              </a:lnSpc>
+              <a:spcBef>
+                <a:spcPct val="0"/>
+              </a:spcBef>
+              <a:spcAft>
+                <a:spcPct val="0"/>
+              </a:spcAft>
+              <a:buClrTx/>
+              <a:buSzTx/>
+              <a:buFontTx/>
+              <a:buNone/>
+              <a:tabLst/>
+            </a:pPr>
+            <a:r>
+              <a:rPr kumimoji="0" lang="en-US" altLang="en-US" sz="5000" b="0" i="0" u="none" strike="noStrike" cap="none" normalizeH="0" baseline="0" dirty="0">
+                <a:ln>
+                  <a:noFill/>
+                </a:ln>
+                <a:solidFill>
+                  <a:srgbClr val="FF5874"/>
+                </a:solidFill>
+                <a:effectLst/>
+                <a:latin typeface="Consolas" panose="020B0609020204030204" pitchFamily="49" charset="0"/>
+              </a:rPr>
+              <a:t>x</a:t>
+            </a:r>
+            <a:r>
+              <a:rPr kumimoji="0" lang="en-US" altLang="en-US" sz="5000" b="0" i="0" u="none" strike="noStrike" cap="none" normalizeH="0" baseline="0" dirty="0">
+                <a:ln>
+                  <a:noFill/>
+                </a:ln>
+                <a:solidFill>
+                  <a:srgbClr val="D6DEEB"/>
+                </a:solidFill>
+                <a:effectLst/>
+                <a:latin typeface="Consolas" panose="020B0609020204030204" pitchFamily="49" charset="0"/>
+              </a:rPr>
+              <a:t> </a:t>
+            </a:r>
+            <a:r>
+              <a:rPr lang="en-US" altLang="en-US" sz="5000" dirty="0">
+                <a:solidFill>
+                  <a:srgbClr val="D6DEEB"/>
+                </a:solidFill>
+                <a:latin typeface="Consolas" panose="020B0609020204030204" pitchFamily="49" charset="0"/>
+              </a:rPr>
+              <a:t>and</a:t>
+            </a:r>
+            <a:r>
+              <a:rPr kumimoji="0" lang="en-US" altLang="en-US" sz="5000" b="0" i="0" u="none" strike="noStrike" cap="none" normalizeH="0" baseline="0" dirty="0">
+                <a:ln>
+                  <a:noFill/>
+                </a:ln>
+                <a:solidFill>
+                  <a:srgbClr val="D6DEEB"/>
+                </a:solidFill>
+                <a:effectLst/>
+                <a:latin typeface="Consolas" panose="020B0609020204030204" pitchFamily="49" charset="0"/>
+              </a:rPr>
+              <a:t> </a:t>
+            </a:r>
+            <a:r>
+              <a:rPr kumimoji="0" lang="en-US" altLang="en-US" sz="5000" b="0" i="0" u="none" strike="noStrike" cap="none" normalizeH="0" baseline="0" dirty="0">
+                <a:ln>
+                  <a:noFill/>
+                </a:ln>
+                <a:solidFill>
+                  <a:srgbClr val="ADDB67"/>
+                </a:solidFill>
+                <a:effectLst/>
+                <a:latin typeface="Consolas" panose="020B0609020204030204" pitchFamily="49" charset="0"/>
+              </a:rPr>
+              <a:t>y</a:t>
+            </a:r>
+          </a:p>
+        </p:txBody>
+      </p:sp>
+      <p:sp>
+        <p:nvSpPr>
+          <p:cNvPr id="21" name="Rectangle 20">
+            <a:extLst>
+              <a:ext uri="{FF2B5EF4-FFF2-40B4-BE49-F238E27FC236}">
+                <a16:creationId xmlns:a16="http://schemas.microsoft.com/office/drawing/2014/main" id="{B78BBE4F-C735-860E-9529-DF4413BE577F}"/>
+              </a:ext>
+            </a:extLst>
+          </p:cNvPr>
+          <p:cNvSpPr>
+            <a:spLocks noChangeArrowheads="1"/>
+          </p:cNvSpPr>
+          <p:nvPr/>
+        </p:nvSpPr>
+        <p:spPr bwMode="auto">
+          <a:xfrm>
+            <a:off x="2857966" y="3500276"/>
+            <a:ext cx="2468625" cy="929691"/>
+          </a:xfrm>
+          <a:prstGeom prst="rect">
+            <a:avLst/>
+          </a:prstGeom>
+          <a:noFill/>
+          <a:ln>
+            <a:noFill/>
+          </a:ln>
+          <a:effectLst/>
+        </p:spPr>
+        <p:txBody>
+          <a:bodyPr vert="horz" wrap="none" lIns="0" tIns="79350" rIns="0" bIns="79350" numCol="1" anchor="ctr" anchorCtr="0" compatLnSpc="1">
+            <a:prstTxWarp prst="textNoShape">
+              <a:avLst/>
+            </a:prstTxWarp>
+            <a:spAutoFit/>
+          </a:bodyPr>
+          <a:lstStyle/>
+          <a:p>
+            <a:pPr marL="0" marR="0" lvl="0" indent="0" algn="ctr" defTabSz="914400" rtl="0" eaLnBrk="0" fontAlgn="base" latinLnBrk="0" hangingPunct="0">
+              <a:lnSpc>
+                <a:spcPct val="100000"/>
+              </a:lnSpc>
+              <a:spcBef>
+                <a:spcPct val="0"/>
+              </a:spcBef>
+              <a:spcAft>
+                <a:spcPct val="0"/>
+              </a:spcAft>
+              <a:buClrTx/>
+              <a:buSzTx/>
+              <a:buFontTx/>
+              <a:buNone/>
+              <a:tabLst/>
+            </a:pPr>
+            <a:r>
+              <a:rPr kumimoji="0" lang="en-US" altLang="en-US" sz="5000" b="0" i="0" u="none" strike="noStrike" cap="none" normalizeH="0" baseline="0" dirty="0">
+                <a:ln>
+                  <a:noFill/>
+                </a:ln>
+                <a:solidFill>
+                  <a:srgbClr val="ADDB67"/>
+                </a:solidFill>
+                <a:effectLst/>
+                <a:latin typeface="Consolas" panose="020B0609020204030204" pitchFamily="49" charset="0"/>
+              </a:rPr>
+              <a:t>x</a:t>
+            </a:r>
+            <a:r>
+              <a:rPr kumimoji="0" lang="en-US" altLang="en-US" sz="5000" b="0" i="0" u="none" strike="noStrike" cap="none" normalizeH="0" baseline="0" dirty="0">
+                <a:ln>
+                  <a:noFill/>
+                </a:ln>
+                <a:solidFill>
+                  <a:srgbClr val="D6DEEB"/>
+                </a:solidFill>
+                <a:effectLst/>
+                <a:latin typeface="Consolas" panose="020B0609020204030204" pitchFamily="49" charset="0"/>
+              </a:rPr>
+              <a:t> </a:t>
+            </a:r>
+            <a:r>
+              <a:rPr lang="en-US" altLang="en-US" sz="5000" dirty="0">
+                <a:solidFill>
+                  <a:srgbClr val="D6DEEB"/>
+                </a:solidFill>
+                <a:latin typeface="Consolas" panose="020B0609020204030204" pitchFamily="49" charset="0"/>
+              </a:rPr>
+              <a:t>and</a:t>
+            </a:r>
+            <a:r>
+              <a:rPr kumimoji="0" lang="en-US" altLang="en-US" sz="5000" b="0" i="0" u="none" strike="noStrike" cap="none" normalizeH="0" baseline="0" dirty="0">
+                <a:ln>
+                  <a:noFill/>
+                </a:ln>
+                <a:solidFill>
+                  <a:srgbClr val="D6DEEB"/>
+                </a:solidFill>
+                <a:effectLst/>
+                <a:latin typeface="Consolas" panose="020B0609020204030204" pitchFamily="49" charset="0"/>
+              </a:rPr>
+              <a:t> </a:t>
+            </a:r>
+            <a:r>
+              <a:rPr kumimoji="0" lang="en-US" altLang="en-US" sz="5000" b="0" i="0" u="none" strike="noStrike" cap="none" normalizeH="0" baseline="0" dirty="0">
+                <a:ln>
+                  <a:noFill/>
+                </a:ln>
+                <a:solidFill>
+                  <a:srgbClr val="FF5874"/>
+                </a:solidFill>
+                <a:effectLst/>
+                <a:latin typeface="Consolas" panose="020B0609020204030204" pitchFamily="49" charset="0"/>
+              </a:rPr>
+              <a:t>y</a:t>
+            </a:r>
+          </a:p>
+        </p:txBody>
+      </p:sp>
+    </p:spTree>
+    <p:extLst>
+      <p:ext uri="{BB962C8B-B14F-4D97-AF65-F5344CB8AC3E}">
+        <p14:creationId xmlns:p14="http://schemas.microsoft.com/office/powerpoint/2010/main" val="98507127"/>
+      </p:ext>
+    </p:extLst>
+  </p:cSld>
+  <p:clrMapOvr>
+    <a:masterClrMapping/>
+  </p:clrMapOvr>
+</p:sld>
+</file>
+
 <file path=ppt/slides/slide2.xml><?xml version="1.0" encoding="utf-8"?>
 <p:sld xmlns:a="http://schemas.openxmlformats.org/drawingml/2006/main" xmlns:r="http://schemas.openxmlformats.org/officeDocument/2006/relationships" xmlns:p="http://schemas.openxmlformats.org/presentationml/2006/main">
   <p:cSld>

--- a/assets/pycobytes.pptx
+++ b/assets/pycobytes.pptx
@@ -15,13 +15,14 @@
     <p:sldId id="262" r:id="rId9"/>
     <p:sldId id="259" r:id="rId10"/>
     <p:sldId id="264" r:id="rId11"/>
-    <p:sldId id="263" r:id="rId12"/>
-    <p:sldId id="267" r:id="rId13"/>
-    <p:sldId id="268" r:id="rId14"/>
-    <p:sldId id="269" r:id="rId15"/>
-    <p:sldId id="270" r:id="rId16"/>
-    <p:sldId id="271" r:id="rId17"/>
-    <p:sldId id="272" r:id="rId18"/>
+    <p:sldId id="273" r:id="rId12"/>
+    <p:sldId id="263" r:id="rId13"/>
+    <p:sldId id="267" r:id="rId14"/>
+    <p:sldId id="268" r:id="rId15"/>
+    <p:sldId id="269" r:id="rId16"/>
+    <p:sldId id="270" r:id="rId17"/>
+    <p:sldId id="271" r:id="rId18"/>
+    <p:sldId id="272" r:id="rId19"/>
   </p:sldIdLst>
   <p:sldSz cx="12192000" cy="6858000"/>
   <p:notesSz cx="6858000" cy="9144000"/>
@@ -1279,6 +1280,118 @@
       </p:grpSpPr>
       <p:sp>
         <p:nvSpPr>
+          <p:cNvPr id="4" name="Rectangle 3">
+            <a:extLst>
+              <a:ext uri="{FF2B5EF4-FFF2-40B4-BE49-F238E27FC236}">
+                <a16:creationId xmlns:a16="http://schemas.microsoft.com/office/drawing/2014/main" id="{EE3C3978-36E4-7FDA-EF59-3713893F8BFB}"/>
+              </a:ext>
+            </a:extLst>
+          </p:cNvPr>
+          <p:cNvSpPr/>
+          <p:nvPr/>
+        </p:nvSpPr>
+        <p:spPr>
+          <a:xfrm>
+            <a:off x="0" y="1055985"/>
+            <a:ext cx="12192000" cy="4746030"/>
+          </a:xfrm>
+          <a:prstGeom prst="rect">
+            <a:avLst/>
+          </a:prstGeom>
+          <a:solidFill>
+            <a:schemeClr val="tx1"/>
+          </a:solidFill>
+          <a:ln>
+            <a:noFill/>
+          </a:ln>
+        </p:spPr>
+        <p:style>
+          <a:lnRef idx="2">
+            <a:schemeClr val="accent1">
+              <a:shade val="50000"/>
+            </a:schemeClr>
+          </a:lnRef>
+          <a:fillRef idx="1">
+            <a:schemeClr val="accent1"/>
+          </a:fillRef>
+          <a:effectRef idx="0">
+            <a:schemeClr val="accent1"/>
+          </a:effectRef>
+          <a:fontRef idx="minor">
+            <a:schemeClr val="lt1"/>
+          </a:fontRef>
+        </p:style>
+        <p:txBody>
+          <a:bodyPr rtlCol="0" anchor="ctr"/>
+          <a:lstStyle/>
+          <a:p>
+            <a:pPr algn="ctr"/>
+            <a:endParaRPr lang="en-GB"/>
+          </a:p>
+        </p:txBody>
+      </p:sp>
+      <p:pic>
+        <p:nvPicPr>
+          <p:cNvPr id="3" name="Picture 2">
+            <a:extLst>
+              <a:ext uri="{FF2B5EF4-FFF2-40B4-BE49-F238E27FC236}">
+                <a16:creationId xmlns:a16="http://schemas.microsoft.com/office/drawing/2014/main" id="{5C11045B-8590-D897-D5C1-035FE4973874}"/>
+              </a:ext>
+            </a:extLst>
+          </p:cNvPr>
+          <p:cNvPicPr>
+            <a:picLocks noChangeAspect="1"/>
+          </p:cNvPicPr>
+          <p:nvPr/>
+        </p:nvPicPr>
+        <p:blipFill>
+          <a:blip r:embed="rId2"/>
+          <a:stretch>
+            <a:fillRect/>
+          </a:stretch>
+        </p:blipFill>
+        <p:spPr>
+          <a:xfrm>
+            <a:off x="894857" y="1575128"/>
+            <a:ext cx="10402286" cy="3707744"/>
+          </a:xfrm>
+          <a:prstGeom prst="rect">
+            <a:avLst/>
+          </a:prstGeom>
+        </p:spPr>
+      </p:pic>
+    </p:spTree>
+    <p:extLst>
+      <p:ext uri="{BB962C8B-B14F-4D97-AF65-F5344CB8AC3E}">
+        <p14:creationId xmlns:p14="http://schemas.microsoft.com/office/powerpoint/2010/main" val="1598073012"/>
+      </p:ext>
+    </p:extLst>
+  </p:cSld>
+  <p:clrMapOvr>
+    <a:masterClrMapping/>
+  </p:clrMapOvr>
+</p:sld>
+</file>
+
+<file path=ppt/slides/slide11.xml><?xml version="1.0" encoding="utf-8"?>
+<p:sld xmlns:a="http://schemas.openxmlformats.org/drawingml/2006/main" xmlns:r="http://schemas.openxmlformats.org/officeDocument/2006/relationships" xmlns:p="http://schemas.openxmlformats.org/presentationml/2006/main">
+  <p:cSld>
+    <p:spTree>
+      <p:nvGrpSpPr>
+        <p:cNvPr id="1" name=""/>
+        <p:cNvGrpSpPr/>
+        <p:nvPr/>
+      </p:nvGrpSpPr>
+      <p:grpSpPr>
+        <a:xfrm>
+          <a:off x="0" y="0"/>
+          <a:ext cx="0" cy="0"/>
+          <a:chOff x="0" y="0"/>
+          <a:chExt cx="0" cy="0"/>
+        </a:xfrm>
+      </p:grpSpPr>
+      <p:sp>
+        <p:nvSpPr>
           <p:cNvPr id="3" name="Rectangle 2"/>
           <p:cNvSpPr/>
           <p:nvPr/>
@@ -1745,7 +1858,7 @@
 </p:sld>
 </file>
 
-<file path=ppt/slides/slide11.xml><?xml version="1.0" encoding="utf-8"?>
+<file path=ppt/slides/slide12.xml><?xml version="1.0" encoding="utf-8"?>
 <p:sld xmlns:a="http://schemas.openxmlformats.org/drawingml/2006/main" xmlns:r="http://schemas.openxmlformats.org/officeDocument/2006/relationships" xmlns:p="http://schemas.openxmlformats.org/presentationml/2006/main">
   <p:cSld>
     <p:spTree>
@@ -2733,7 +2846,7 @@
 </p:sld>
 </file>
 
-<file path=ppt/slides/slide12.xml><?xml version="1.0" encoding="utf-8"?>
+<file path=ppt/slides/slide13.xml><?xml version="1.0" encoding="utf-8"?>
 <p:sld xmlns:a="http://schemas.openxmlformats.org/drawingml/2006/main" xmlns:r="http://schemas.openxmlformats.org/officeDocument/2006/relationships" xmlns:p="http://schemas.openxmlformats.org/presentationml/2006/main">
   <p:cSld>
     <p:spTree>
@@ -3342,7 +3455,7 @@
 </p:sld>
 </file>
 
-<file path=ppt/slides/slide13.xml><?xml version="1.0" encoding="utf-8"?>
+<file path=ppt/slides/slide14.xml><?xml version="1.0" encoding="utf-8"?>
 <p:sld xmlns:a="http://schemas.openxmlformats.org/drawingml/2006/main" xmlns:r="http://schemas.openxmlformats.org/officeDocument/2006/relationships" xmlns:p="http://schemas.openxmlformats.org/presentationml/2006/main">
   <p:cSld>
     <p:spTree>
@@ -3806,7 +3919,7 @@
 </p:sld>
 </file>
 
-<file path=ppt/slides/slide14.xml><?xml version="1.0" encoding="utf-8"?>
+<file path=ppt/slides/slide15.xml><?xml version="1.0" encoding="utf-8"?>
 <p:sld xmlns:a="http://schemas.openxmlformats.org/drawingml/2006/main" xmlns:r="http://schemas.openxmlformats.org/officeDocument/2006/relationships" xmlns:p="http://schemas.openxmlformats.org/presentationml/2006/main">
   <p:cSld>
     <p:spTree>
@@ -4428,7 +4541,7 @@
 </p:sld>
 </file>
 
-<file path=ppt/slides/slide15.xml><?xml version="1.0" encoding="utf-8"?>
+<file path=ppt/slides/slide16.xml><?xml version="1.0" encoding="utf-8"?>
 <p:sld xmlns:a="http://schemas.openxmlformats.org/drawingml/2006/main" xmlns:r="http://schemas.openxmlformats.org/officeDocument/2006/relationships" xmlns:p="http://schemas.openxmlformats.org/presentationml/2006/main">
   <p:cSld>
     <p:spTree>
@@ -5134,7 +5247,7 @@
 </p:sld>
 </file>
 
-<file path=ppt/slides/slide16.xml><?xml version="1.0" encoding="utf-8"?>
+<file path=ppt/slides/slide17.xml><?xml version="1.0" encoding="utf-8"?>
 <p:sld xmlns:a="http://schemas.openxmlformats.org/drawingml/2006/main" xmlns:r="http://schemas.openxmlformats.org/officeDocument/2006/relationships" xmlns:p="http://schemas.openxmlformats.org/presentationml/2006/main">
   <p:cSld>
     <p:spTree>

--- a/assets/pycobytes.pptx
+++ b/assets/pycobytes.pptx
@@ -23,6 +23,7 @@
     <p:sldId id="270" r:id="rId17"/>
     <p:sldId id="271" r:id="rId18"/>
     <p:sldId id="272" r:id="rId19"/>
+    <p:sldId id="274" r:id="rId20"/>
   </p:sldIdLst>
   <p:sldSz cx="12192000" cy="6858000"/>
   <p:notesSz cx="6858000" cy="9144000"/>
@@ -5718,6 +5719,1129 @@
 </p:sld>
 </file>
 
+<file path=ppt/slides/slide18.xml><?xml version="1.0" encoding="utf-8"?>
+<p:sld xmlns:a="http://schemas.openxmlformats.org/drawingml/2006/main" xmlns:r="http://schemas.openxmlformats.org/officeDocument/2006/relationships" xmlns:p="http://schemas.openxmlformats.org/presentationml/2006/main">
+  <p:cSld>
+    <p:spTree>
+      <p:nvGrpSpPr>
+        <p:cNvPr id="1" name="">
+          <a:extLst>
+            <a:ext uri="{FF2B5EF4-FFF2-40B4-BE49-F238E27FC236}">
+              <a16:creationId xmlns:a16="http://schemas.microsoft.com/office/drawing/2014/main" id="{5EC5482E-7207-8FBC-A43E-84BDBDE3D91E}"/>
+            </a:ext>
+          </a:extLst>
+        </p:cNvPr>
+        <p:cNvGrpSpPr/>
+        <p:nvPr/>
+      </p:nvGrpSpPr>
+      <p:grpSpPr>
+        <a:xfrm>
+          <a:off x="0" y="0"/>
+          <a:ext cx="0" cy="0"/>
+          <a:chOff x="0" y="0"/>
+          <a:chExt cx="0" cy="0"/>
+        </a:xfrm>
+      </p:grpSpPr>
+      <p:sp>
+        <p:nvSpPr>
+          <p:cNvPr id="2" name="Rectangle 1">
+            <a:extLst>
+              <a:ext uri="{FF2B5EF4-FFF2-40B4-BE49-F238E27FC236}">
+                <a16:creationId xmlns:a16="http://schemas.microsoft.com/office/drawing/2014/main" id="{7955BB52-B8CB-07AF-7A16-DD808874841A}"/>
+              </a:ext>
+            </a:extLst>
+          </p:cNvPr>
+          <p:cNvSpPr/>
+          <p:nvPr/>
+        </p:nvSpPr>
+        <p:spPr>
+          <a:xfrm>
+            <a:off x="2459115" y="2035628"/>
+            <a:ext cx="7273770" cy="2786744"/>
+          </a:xfrm>
+          <a:prstGeom prst="rect">
+            <a:avLst/>
+          </a:prstGeom>
+          <a:solidFill>
+            <a:srgbClr val="011627"/>
+          </a:solidFill>
+          <a:ln>
+            <a:noFill/>
+          </a:ln>
+        </p:spPr>
+        <p:style>
+          <a:lnRef idx="2">
+            <a:schemeClr val="accent1">
+              <a:shade val="50000"/>
+            </a:schemeClr>
+          </a:lnRef>
+          <a:fillRef idx="1">
+            <a:schemeClr val="accent1"/>
+          </a:fillRef>
+          <a:effectRef idx="0">
+            <a:schemeClr val="accent1"/>
+          </a:effectRef>
+          <a:fontRef idx="minor">
+            <a:schemeClr val="lt1"/>
+          </a:fontRef>
+        </p:style>
+        <p:txBody>
+          <a:bodyPr rtlCol="0" anchor="ctr"/>
+          <a:lstStyle/>
+          <a:p>
+            <a:pPr algn="ctr"/>
+            <a:endParaRPr lang="en-GB" dirty="0"/>
+          </a:p>
+        </p:txBody>
+      </p:sp>
+      <p:sp>
+        <p:nvSpPr>
+          <p:cNvPr id="9" name="Rectangle 8">
+            <a:extLst>
+              <a:ext uri="{FF2B5EF4-FFF2-40B4-BE49-F238E27FC236}">
+                <a16:creationId xmlns:a16="http://schemas.microsoft.com/office/drawing/2014/main" id="{DF46636B-FF46-F9BB-DB0C-189010801940}"/>
+              </a:ext>
+            </a:extLst>
+          </p:cNvPr>
+          <p:cNvSpPr>
+            <a:spLocks noChangeArrowheads="1"/>
+          </p:cNvSpPr>
+          <p:nvPr/>
+        </p:nvSpPr>
+        <p:spPr bwMode="auto">
+          <a:xfrm>
+            <a:off x="3130445" y="2664797"/>
+            <a:ext cx="5931111" cy="929691"/>
+          </a:xfrm>
+          <a:prstGeom prst="rect">
+            <a:avLst/>
+          </a:prstGeom>
+          <a:noFill/>
+          <a:ln>
+            <a:noFill/>
+          </a:ln>
+          <a:effectLst/>
+        </p:spPr>
+        <p:txBody>
+          <a:bodyPr vert="horz" wrap="none" lIns="0" tIns="79350" rIns="0" bIns="79350" numCol="1" anchor="ctr" anchorCtr="0" compatLnSpc="1">
+            <a:prstTxWarp prst="textNoShape">
+              <a:avLst/>
+            </a:prstTxWarp>
+            <a:spAutoFit/>
+          </a:bodyPr>
+          <a:lstStyle/>
+          <a:p>
+            <a:pPr marL="0" marR="0" lvl="0" indent="0" algn="ctr" defTabSz="914400" rtl="0" eaLnBrk="0" fontAlgn="base" latinLnBrk="0" hangingPunct="0">
+              <a:lnSpc>
+                <a:spcPct val="100000"/>
+              </a:lnSpc>
+              <a:spcBef>
+                <a:spcPct val="0"/>
+              </a:spcBef>
+              <a:spcAft>
+                <a:spcPct val="0"/>
+              </a:spcAft>
+              <a:buClrTx/>
+              <a:buSzTx/>
+              <a:buFontTx/>
+              <a:buNone/>
+              <a:tabLst/>
+            </a:pPr>
+            <a:r>
+              <a:rPr lang="en-US" altLang="en-US" sz="5000" dirty="0">
+                <a:solidFill>
+                  <a:srgbClr val="D6DEEB"/>
+                </a:solidFill>
+                <a:latin typeface="Consolas" panose="020B0609020204030204" pitchFamily="49" charset="0"/>
+              </a:rPr>
+              <a:t>[</a:t>
+            </a:r>
+            <a:r>
+              <a:rPr lang="en-US" altLang="en-US" sz="5000" dirty="0">
+                <a:solidFill>
+                  <a:srgbClr val="FF5874"/>
+                </a:solidFill>
+                <a:latin typeface="Consolas" panose="020B0609020204030204" pitchFamily="49" charset="0"/>
+              </a:rPr>
+              <a:t>▯</a:t>
+            </a:r>
+            <a:r>
+              <a:rPr lang="en-US" altLang="en-US" sz="5000" dirty="0">
+                <a:solidFill>
+                  <a:srgbClr val="D6DEEB"/>
+                </a:solidFill>
+                <a:latin typeface="Consolas" panose="020B0609020204030204" pitchFamily="49" charset="0"/>
+              </a:rPr>
+              <a:t>,</a:t>
+            </a:r>
+            <a:r>
+              <a:rPr lang="en-US" altLang="en-US" sz="2500" dirty="0">
+                <a:solidFill>
+                  <a:srgbClr val="D6DEEB"/>
+                </a:solidFill>
+                <a:latin typeface="Consolas" panose="020B0609020204030204" pitchFamily="49" charset="0"/>
+              </a:rPr>
+              <a:t> </a:t>
+            </a:r>
+            <a:r>
+              <a:rPr lang="en-US" altLang="en-US" sz="5000" dirty="0">
+                <a:solidFill>
+                  <a:srgbClr val="FF5874"/>
+                </a:solidFill>
+                <a:latin typeface="Consolas" panose="020B0609020204030204" pitchFamily="49" charset="0"/>
+              </a:rPr>
+              <a:t>▯</a:t>
+            </a:r>
+            <a:r>
+              <a:rPr lang="en-US" altLang="en-US" sz="5000" dirty="0">
+                <a:solidFill>
+                  <a:srgbClr val="D6DEEB"/>
+                </a:solidFill>
+                <a:latin typeface="Consolas" panose="020B0609020204030204" pitchFamily="49" charset="0"/>
+              </a:rPr>
+              <a:t>,</a:t>
+            </a:r>
+            <a:r>
+              <a:rPr lang="en-US" altLang="en-US" sz="2500" dirty="0">
+                <a:solidFill>
+                  <a:srgbClr val="D6DEEB"/>
+                </a:solidFill>
+                <a:latin typeface="Consolas" panose="020B0609020204030204" pitchFamily="49" charset="0"/>
+              </a:rPr>
+              <a:t> </a:t>
+            </a:r>
+            <a:r>
+              <a:rPr lang="en-US" altLang="en-US" sz="5000" dirty="0">
+                <a:solidFill>
+                  <a:srgbClr val="FF5874"/>
+                </a:solidFill>
+                <a:latin typeface="Consolas" panose="020B0609020204030204" pitchFamily="49" charset="0"/>
+              </a:rPr>
+              <a:t>▯</a:t>
+            </a:r>
+            <a:r>
+              <a:rPr lang="en-US" altLang="en-US" sz="5000" dirty="0">
+                <a:solidFill>
+                  <a:srgbClr val="D6DEEB"/>
+                </a:solidFill>
+                <a:latin typeface="Consolas" panose="020B0609020204030204" pitchFamily="49" charset="0"/>
+              </a:rPr>
+              <a:t>,</a:t>
+            </a:r>
+            <a:r>
+              <a:rPr lang="en-US" altLang="en-US" sz="2500" dirty="0">
+                <a:solidFill>
+                  <a:srgbClr val="D6DEEB"/>
+                </a:solidFill>
+                <a:latin typeface="Consolas" panose="020B0609020204030204" pitchFamily="49" charset="0"/>
+              </a:rPr>
+              <a:t> </a:t>
+            </a:r>
+            <a:r>
+              <a:rPr lang="en-US" altLang="en-US" sz="5000" dirty="0">
+                <a:solidFill>
+                  <a:srgbClr val="FF5874"/>
+                </a:solidFill>
+                <a:latin typeface="Consolas" panose="020B0609020204030204" pitchFamily="49" charset="0"/>
+              </a:rPr>
+              <a:t>▯</a:t>
+            </a:r>
+            <a:r>
+              <a:rPr lang="en-US" altLang="en-US" sz="5000" dirty="0">
+                <a:solidFill>
+                  <a:srgbClr val="D6DEEB"/>
+                </a:solidFill>
+                <a:latin typeface="Consolas" panose="020B0609020204030204" pitchFamily="49" charset="0"/>
+              </a:rPr>
+              <a:t>,</a:t>
+            </a:r>
+            <a:r>
+              <a:rPr lang="en-US" altLang="en-US" sz="2500" dirty="0">
+                <a:solidFill>
+                  <a:srgbClr val="D6DEEB"/>
+                </a:solidFill>
+                <a:latin typeface="Consolas" panose="020B0609020204030204" pitchFamily="49" charset="0"/>
+              </a:rPr>
+              <a:t> </a:t>
+            </a:r>
+            <a:r>
+              <a:rPr lang="en-US" altLang="en-US" sz="5000" dirty="0">
+                <a:solidFill>
+                  <a:srgbClr val="FF5874"/>
+                </a:solidFill>
+                <a:latin typeface="Consolas" panose="020B0609020204030204" pitchFamily="49" charset="0"/>
+              </a:rPr>
+              <a:t>▯</a:t>
+            </a:r>
+            <a:r>
+              <a:rPr lang="en-US" altLang="en-US" sz="5000" dirty="0">
+                <a:solidFill>
+                  <a:srgbClr val="D6DEEB"/>
+                </a:solidFill>
+                <a:latin typeface="Consolas" panose="020B0609020204030204" pitchFamily="49" charset="0"/>
+              </a:rPr>
+              <a:t>]</a:t>
+            </a:r>
+            <a:endParaRPr kumimoji="0" lang="en-US" altLang="en-US" sz="5000" b="0" i="0" u="none" strike="noStrike" cap="none" normalizeH="0" baseline="0" dirty="0">
+              <a:ln>
+                <a:noFill/>
+              </a:ln>
+              <a:solidFill>
+                <a:srgbClr val="ADDB67"/>
+              </a:solidFill>
+              <a:effectLst/>
+              <a:latin typeface="Consolas" panose="020B0609020204030204" pitchFamily="49" charset="0"/>
+            </a:endParaRPr>
+          </a:p>
+        </p:txBody>
+      </p:sp>
+      <p:grpSp>
+        <p:nvGrpSpPr>
+          <p:cNvPr id="20" name="Group 19">
+            <a:extLst>
+              <a:ext uri="{FF2B5EF4-FFF2-40B4-BE49-F238E27FC236}">
+                <a16:creationId xmlns:a16="http://schemas.microsoft.com/office/drawing/2014/main" id="{8DFDB463-EB12-7235-1162-8FB0518D89F8}"/>
+              </a:ext>
+            </a:extLst>
+          </p:cNvPr>
+          <p:cNvGrpSpPr/>
+          <p:nvPr/>
+        </p:nvGrpSpPr>
+        <p:grpSpPr>
+          <a:xfrm>
+            <a:off x="3729220" y="2301581"/>
+            <a:ext cx="4739056" cy="544971"/>
+            <a:chOff x="3729220" y="2446925"/>
+            <a:chExt cx="4739056" cy="544971"/>
+          </a:xfrm>
+        </p:grpSpPr>
+        <p:sp>
+          <p:nvSpPr>
+            <p:cNvPr id="8" name="Rectangle 7">
+              <a:extLst>
+                <a:ext uri="{FF2B5EF4-FFF2-40B4-BE49-F238E27FC236}">
+                  <a16:creationId xmlns:a16="http://schemas.microsoft.com/office/drawing/2014/main" id="{15299A68-A424-65B9-A042-247E074F632B}"/>
+                </a:ext>
+              </a:extLst>
+            </p:cNvPr>
+            <p:cNvSpPr>
+              <a:spLocks noChangeArrowheads="1"/>
+            </p:cNvSpPr>
+            <p:nvPr/>
+          </p:nvSpPr>
+          <p:spPr bwMode="auto">
+            <a:xfrm>
+              <a:off x="3729220" y="2446925"/>
+              <a:ext cx="176330" cy="544971"/>
+            </a:xfrm>
+            <a:prstGeom prst="rect">
+              <a:avLst/>
+            </a:prstGeom>
+            <a:noFill/>
+            <a:ln>
+              <a:noFill/>
+            </a:ln>
+            <a:effectLst/>
+          </p:spPr>
+          <p:txBody>
+            <a:bodyPr vert="horz" wrap="none" lIns="0" tIns="79350" rIns="0" bIns="79350" numCol="1" anchor="ctr" anchorCtr="0" compatLnSpc="1">
+              <a:prstTxWarp prst="textNoShape">
+                <a:avLst/>
+              </a:prstTxWarp>
+              <a:spAutoFit/>
+            </a:bodyPr>
+            <a:lstStyle/>
+            <a:p>
+              <a:pPr marL="0" marR="0" lvl="0" indent="0" algn="ctr" defTabSz="914400" rtl="0" eaLnBrk="0" fontAlgn="base" latinLnBrk="0" hangingPunct="0">
+                <a:lnSpc>
+                  <a:spcPct val="100000"/>
+                </a:lnSpc>
+                <a:spcBef>
+                  <a:spcPct val="0"/>
+                </a:spcBef>
+                <a:spcAft>
+                  <a:spcPct val="0"/>
+                </a:spcAft>
+                <a:buClrTx/>
+                <a:buSzTx/>
+                <a:buFontTx/>
+                <a:buNone/>
+                <a:tabLst/>
+              </a:pPr>
+              <a:r>
+                <a:rPr kumimoji="0" lang="en-US" altLang="en-US" sz="2500" b="0" i="0" u="none" strike="noStrike" cap="none" normalizeH="0" baseline="0" dirty="0">
+                  <a:ln>
+                    <a:noFill/>
+                  </a:ln>
+                  <a:solidFill>
+                    <a:srgbClr val="D6DEEB">
+                      <a:alpha val="50000"/>
+                    </a:srgbClr>
+                  </a:solidFill>
+                  <a:effectLst/>
+                  <a:latin typeface="Consolas" panose="020B0609020204030204" pitchFamily="49" charset="0"/>
+                </a:rPr>
+                <a:t>0</a:t>
+              </a:r>
+            </a:p>
+          </p:txBody>
+        </p:sp>
+        <p:sp>
+          <p:nvSpPr>
+            <p:cNvPr id="10" name="Rectangle 9">
+              <a:extLst>
+                <a:ext uri="{FF2B5EF4-FFF2-40B4-BE49-F238E27FC236}">
+                  <a16:creationId xmlns:a16="http://schemas.microsoft.com/office/drawing/2014/main" id="{20EDCAF8-211D-53B6-48C3-F3DC768A8EE4}"/>
+                </a:ext>
+              </a:extLst>
+            </p:cNvPr>
+            <p:cNvSpPr>
+              <a:spLocks noChangeArrowheads="1"/>
+            </p:cNvSpPr>
+            <p:nvPr/>
+          </p:nvSpPr>
+          <p:spPr bwMode="auto">
+            <a:xfrm>
+              <a:off x="4876343" y="2446925"/>
+              <a:ext cx="176330" cy="544971"/>
+            </a:xfrm>
+            <a:prstGeom prst="rect">
+              <a:avLst/>
+            </a:prstGeom>
+            <a:noFill/>
+            <a:ln>
+              <a:noFill/>
+            </a:ln>
+            <a:effectLst/>
+          </p:spPr>
+          <p:txBody>
+            <a:bodyPr vert="horz" wrap="none" lIns="0" tIns="79350" rIns="0" bIns="79350" numCol="1" anchor="ctr" anchorCtr="0" compatLnSpc="1">
+              <a:prstTxWarp prst="textNoShape">
+                <a:avLst/>
+              </a:prstTxWarp>
+              <a:spAutoFit/>
+            </a:bodyPr>
+            <a:lstStyle/>
+            <a:p>
+              <a:pPr marL="0" marR="0" lvl="0" indent="0" algn="ctr" defTabSz="914400" rtl="0" eaLnBrk="0" fontAlgn="base" latinLnBrk="0" hangingPunct="0">
+                <a:lnSpc>
+                  <a:spcPct val="100000"/>
+                </a:lnSpc>
+                <a:spcBef>
+                  <a:spcPct val="0"/>
+                </a:spcBef>
+                <a:spcAft>
+                  <a:spcPct val="0"/>
+                </a:spcAft>
+                <a:buClrTx/>
+                <a:buSzTx/>
+                <a:buFontTx/>
+                <a:buNone/>
+                <a:tabLst/>
+              </a:pPr>
+              <a:r>
+                <a:rPr lang="en-US" altLang="en-US" sz="2500" dirty="0">
+                  <a:solidFill>
+                    <a:srgbClr val="D6DEEB">
+                      <a:alpha val="50000"/>
+                    </a:srgbClr>
+                  </a:solidFill>
+                  <a:latin typeface="Consolas" panose="020B0609020204030204" pitchFamily="49" charset="0"/>
+                </a:rPr>
+                <a:t>1</a:t>
+              </a:r>
+              <a:endParaRPr kumimoji="0" lang="en-US" altLang="en-US" sz="2500" b="0" i="0" u="none" strike="noStrike" cap="none" normalizeH="0" baseline="0" dirty="0">
+                <a:ln>
+                  <a:noFill/>
+                </a:ln>
+                <a:solidFill>
+                  <a:srgbClr val="D6DEEB">
+                    <a:alpha val="50000"/>
+                  </a:srgbClr>
+                </a:solidFill>
+                <a:effectLst/>
+                <a:latin typeface="Consolas" panose="020B0609020204030204" pitchFamily="49" charset="0"/>
+              </a:endParaRPr>
+            </a:p>
+          </p:txBody>
+        </p:sp>
+        <p:sp>
+          <p:nvSpPr>
+            <p:cNvPr id="11" name="Rectangle 10">
+              <a:extLst>
+                <a:ext uri="{FF2B5EF4-FFF2-40B4-BE49-F238E27FC236}">
+                  <a16:creationId xmlns:a16="http://schemas.microsoft.com/office/drawing/2014/main" id="{511D153A-E0DB-6CEC-3E48-A171F148445F}"/>
+                </a:ext>
+              </a:extLst>
+            </p:cNvPr>
+            <p:cNvSpPr>
+              <a:spLocks noChangeArrowheads="1"/>
+            </p:cNvSpPr>
+            <p:nvPr/>
+          </p:nvSpPr>
+          <p:spPr bwMode="auto">
+            <a:xfrm>
+              <a:off x="6007834" y="2446925"/>
+              <a:ext cx="176330" cy="544971"/>
+            </a:xfrm>
+            <a:prstGeom prst="rect">
+              <a:avLst/>
+            </a:prstGeom>
+            <a:noFill/>
+            <a:ln>
+              <a:noFill/>
+            </a:ln>
+            <a:effectLst/>
+          </p:spPr>
+          <p:txBody>
+            <a:bodyPr vert="horz" wrap="none" lIns="0" tIns="79350" rIns="0" bIns="79350" numCol="1" anchor="ctr" anchorCtr="0" compatLnSpc="1">
+              <a:prstTxWarp prst="textNoShape">
+                <a:avLst/>
+              </a:prstTxWarp>
+              <a:spAutoFit/>
+            </a:bodyPr>
+            <a:lstStyle/>
+            <a:p>
+              <a:pPr marL="0" marR="0" lvl="0" indent="0" algn="ctr" defTabSz="914400" rtl="0" eaLnBrk="0" fontAlgn="base" latinLnBrk="0" hangingPunct="0">
+                <a:lnSpc>
+                  <a:spcPct val="100000"/>
+                </a:lnSpc>
+                <a:spcBef>
+                  <a:spcPct val="0"/>
+                </a:spcBef>
+                <a:spcAft>
+                  <a:spcPct val="0"/>
+                </a:spcAft>
+                <a:buClrTx/>
+                <a:buSzTx/>
+                <a:buFontTx/>
+                <a:buNone/>
+                <a:tabLst/>
+              </a:pPr>
+              <a:r>
+                <a:rPr kumimoji="0" lang="en-US" altLang="en-US" sz="2500" b="0" i="0" u="none" strike="noStrike" cap="none" normalizeH="0" baseline="0" dirty="0">
+                  <a:ln>
+                    <a:noFill/>
+                  </a:ln>
+                  <a:solidFill>
+                    <a:srgbClr val="D6DEEB">
+                      <a:alpha val="50000"/>
+                    </a:srgbClr>
+                  </a:solidFill>
+                  <a:effectLst/>
+                  <a:latin typeface="Consolas" panose="020B0609020204030204" pitchFamily="49" charset="0"/>
+                </a:rPr>
+                <a:t>2</a:t>
+              </a:r>
+            </a:p>
+          </p:txBody>
+        </p:sp>
+        <p:sp>
+          <p:nvSpPr>
+            <p:cNvPr id="12" name="Rectangle 11">
+              <a:extLst>
+                <a:ext uri="{FF2B5EF4-FFF2-40B4-BE49-F238E27FC236}">
+                  <a16:creationId xmlns:a16="http://schemas.microsoft.com/office/drawing/2014/main" id="{112FB688-7585-EAC4-D573-ACACF5E706F7}"/>
+                </a:ext>
+              </a:extLst>
+            </p:cNvPr>
+            <p:cNvSpPr>
+              <a:spLocks noChangeArrowheads="1"/>
+            </p:cNvSpPr>
+            <p:nvPr/>
+          </p:nvSpPr>
+          <p:spPr bwMode="auto">
+            <a:xfrm>
+              <a:off x="7146653" y="2446925"/>
+              <a:ext cx="176330" cy="544971"/>
+            </a:xfrm>
+            <a:prstGeom prst="rect">
+              <a:avLst/>
+            </a:prstGeom>
+            <a:noFill/>
+            <a:ln>
+              <a:noFill/>
+            </a:ln>
+            <a:effectLst/>
+          </p:spPr>
+          <p:txBody>
+            <a:bodyPr vert="horz" wrap="none" lIns="0" tIns="79350" rIns="0" bIns="79350" numCol="1" anchor="ctr" anchorCtr="0" compatLnSpc="1">
+              <a:prstTxWarp prst="textNoShape">
+                <a:avLst/>
+              </a:prstTxWarp>
+              <a:spAutoFit/>
+            </a:bodyPr>
+            <a:lstStyle/>
+            <a:p>
+              <a:pPr marL="0" marR="0" lvl="0" indent="0" algn="ctr" defTabSz="914400" rtl="0" eaLnBrk="0" fontAlgn="base" latinLnBrk="0" hangingPunct="0">
+                <a:lnSpc>
+                  <a:spcPct val="100000"/>
+                </a:lnSpc>
+                <a:spcBef>
+                  <a:spcPct val="0"/>
+                </a:spcBef>
+                <a:spcAft>
+                  <a:spcPct val="0"/>
+                </a:spcAft>
+                <a:buClrTx/>
+                <a:buSzTx/>
+                <a:buFontTx/>
+                <a:buNone/>
+                <a:tabLst/>
+              </a:pPr>
+              <a:r>
+                <a:rPr lang="en-US" altLang="en-US" sz="2500" dirty="0">
+                  <a:solidFill>
+                    <a:srgbClr val="D6DEEB">
+                      <a:alpha val="50000"/>
+                    </a:srgbClr>
+                  </a:solidFill>
+                  <a:latin typeface="Consolas" panose="020B0609020204030204" pitchFamily="49" charset="0"/>
+                </a:rPr>
+                <a:t>3</a:t>
+              </a:r>
+              <a:endParaRPr kumimoji="0" lang="en-US" altLang="en-US" sz="2500" b="0" i="0" u="none" strike="noStrike" cap="none" normalizeH="0" baseline="0" dirty="0">
+                <a:ln>
+                  <a:noFill/>
+                </a:ln>
+                <a:solidFill>
+                  <a:srgbClr val="D6DEEB">
+                    <a:alpha val="50000"/>
+                  </a:srgbClr>
+                </a:solidFill>
+                <a:effectLst/>
+                <a:latin typeface="Consolas" panose="020B0609020204030204" pitchFamily="49" charset="0"/>
+              </a:endParaRPr>
+            </a:p>
+          </p:txBody>
+        </p:sp>
+        <p:sp>
+          <p:nvSpPr>
+            <p:cNvPr id="13" name="Rectangle 12">
+              <a:extLst>
+                <a:ext uri="{FF2B5EF4-FFF2-40B4-BE49-F238E27FC236}">
+                  <a16:creationId xmlns:a16="http://schemas.microsoft.com/office/drawing/2014/main" id="{9626DD76-0B15-4C75-BD32-F3ADA7836850}"/>
+                </a:ext>
+              </a:extLst>
+            </p:cNvPr>
+            <p:cNvSpPr>
+              <a:spLocks noChangeArrowheads="1"/>
+            </p:cNvSpPr>
+            <p:nvPr/>
+          </p:nvSpPr>
+          <p:spPr bwMode="auto">
+            <a:xfrm>
+              <a:off x="8291946" y="2446925"/>
+              <a:ext cx="176330" cy="544971"/>
+            </a:xfrm>
+            <a:prstGeom prst="rect">
+              <a:avLst/>
+            </a:prstGeom>
+            <a:noFill/>
+            <a:ln>
+              <a:noFill/>
+            </a:ln>
+            <a:effectLst/>
+          </p:spPr>
+          <p:txBody>
+            <a:bodyPr vert="horz" wrap="none" lIns="0" tIns="79350" rIns="0" bIns="79350" numCol="1" anchor="ctr" anchorCtr="0" compatLnSpc="1">
+              <a:prstTxWarp prst="textNoShape">
+                <a:avLst/>
+              </a:prstTxWarp>
+              <a:spAutoFit/>
+            </a:bodyPr>
+            <a:lstStyle/>
+            <a:p>
+              <a:pPr marL="0" marR="0" lvl="0" indent="0" algn="ctr" defTabSz="914400" rtl="0" eaLnBrk="0" fontAlgn="base" latinLnBrk="0" hangingPunct="0">
+                <a:lnSpc>
+                  <a:spcPct val="100000"/>
+                </a:lnSpc>
+                <a:spcBef>
+                  <a:spcPct val="0"/>
+                </a:spcBef>
+                <a:spcAft>
+                  <a:spcPct val="0"/>
+                </a:spcAft>
+                <a:buClrTx/>
+                <a:buSzTx/>
+                <a:buFontTx/>
+                <a:buNone/>
+                <a:tabLst/>
+              </a:pPr>
+              <a:r>
+                <a:rPr kumimoji="0" lang="en-US" altLang="en-US" sz="2500" b="0" i="0" u="none" strike="noStrike" cap="none" normalizeH="0" baseline="0" dirty="0">
+                  <a:ln>
+                    <a:noFill/>
+                  </a:ln>
+                  <a:solidFill>
+                    <a:srgbClr val="D6DEEB">
+                      <a:alpha val="50000"/>
+                    </a:srgbClr>
+                  </a:solidFill>
+                  <a:effectLst/>
+                  <a:latin typeface="Consolas" panose="020B0609020204030204" pitchFamily="49" charset="0"/>
+                </a:rPr>
+                <a:t>4</a:t>
+              </a:r>
+            </a:p>
+          </p:txBody>
+        </p:sp>
+      </p:grpSp>
+      <p:grpSp>
+        <p:nvGrpSpPr>
+          <p:cNvPr id="22" name="Group 21">
+            <a:extLst>
+              <a:ext uri="{FF2B5EF4-FFF2-40B4-BE49-F238E27FC236}">
+                <a16:creationId xmlns:a16="http://schemas.microsoft.com/office/drawing/2014/main" id="{B80D2C04-74E5-34EB-9B3D-D269D3587A06}"/>
+              </a:ext>
+            </a:extLst>
+          </p:cNvPr>
+          <p:cNvGrpSpPr/>
+          <p:nvPr/>
+        </p:nvGrpSpPr>
+        <p:grpSpPr>
+          <a:xfrm>
+            <a:off x="3641055" y="3512159"/>
+            <a:ext cx="4915387" cy="544971"/>
+            <a:chOff x="3641055" y="4009262"/>
+            <a:chExt cx="4915387" cy="544971"/>
+          </a:xfrm>
+        </p:grpSpPr>
+        <p:sp>
+          <p:nvSpPr>
+            <p:cNvPr id="14" name="Rectangle 13">
+              <a:extLst>
+                <a:ext uri="{FF2B5EF4-FFF2-40B4-BE49-F238E27FC236}">
+                  <a16:creationId xmlns:a16="http://schemas.microsoft.com/office/drawing/2014/main" id="{0E5D8236-BD76-E420-BBCC-EF52B682ADD7}"/>
+                </a:ext>
+              </a:extLst>
+            </p:cNvPr>
+            <p:cNvSpPr>
+              <a:spLocks noChangeArrowheads="1"/>
+            </p:cNvSpPr>
+            <p:nvPr/>
+          </p:nvSpPr>
+          <p:spPr bwMode="auto">
+            <a:xfrm>
+              <a:off x="3641055" y="4009262"/>
+              <a:ext cx="352661" cy="544971"/>
+            </a:xfrm>
+            <a:prstGeom prst="rect">
+              <a:avLst/>
+            </a:prstGeom>
+            <a:noFill/>
+            <a:ln>
+              <a:noFill/>
+            </a:ln>
+            <a:effectLst/>
+          </p:spPr>
+          <p:txBody>
+            <a:bodyPr vert="horz" wrap="none" lIns="0" tIns="79350" rIns="0" bIns="79350" numCol="1" anchor="ctr" anchorCtr="0" compatLnSpc="1">
+              <a:prstTxWarp prst="textNoShape">
+                <a:avLst/>
+              </a:prstTxWarp>
+              <a:spAutoFit/>
+            </a:bodyPr>
+            <a:lstStyle/>
+            <a:p>
+              <a:pPr marL="0" marR="0" lvl="0" indent="0" algn="ctr" defTabSz="914400" rtl="0" eaLnBrk="0" fontAlgn="base" latinLnBrk="0" hangingPunct="0">
+                <a:lnSpc>
+                  <a:spcPct val="100000"/>
+                </a:lnSpc>
+                <a:spcBef>
+                  <a:spcPct val="0"/>
+                </a:spcBef>
+                <a:spcAft>
+                  <a:spcPct val="0"/>
+                </a:spcAft>
+                <a:buClrTx/>
+                <a:buSzTx/>
+                <a:buFontTx/>
+                <a:buNone/>
+                <a:tabLst/>
+              </a:pPr>
+              <a:r>
+                <a:rPr kumimoji="0" lang="en-US" altLang="en-US" sz="2500" b="0" i="0" u="none" strike="noStrike" cap="none" normalizeH="0" baseline="0" dirty="0">
+                  <a:ln>
+                    <a:noFill/>
+                  </a:ln>
+                  <a:solidFill>
+                    <a:srgbClr val="FFC720"/>
+                  </a:solidFill>
+                  <a:effectLst/>
+                  <a:latin typeface="Consolas" panose="020B0609020204030204" pitchFamily="49" charset="0"/>
+                </a:rPr>
+                <a:t>-5</a:t>
+              </a:r>
+            </a:p>
+          </p:txBody>
+        </p:sp>
+        <p:sp>
+          <p:nvSpPr>
+            <p:cNvPr id="15" name="Rectangle 14">
+              <a:extLst>
+                <a:ext uri="{FF2B5EF4-FFF2-40B4-BE49-F238E27FC236}">
+                  <a16:creationId xmlns:a16="http://schemas.microsoft.com/office/drawing/2014/main" id="{AFE036C0-C5E4-D351-01B1-941E2911014C}"/>
+                </a:ext>
+              </a:extLst>
+            </p:cNvPr>
+            <p:cNvSpPr>
+              <a:spLocks noChangeArrowheads="1"/>
+            </p:cNvSpPr>
+            <p:nvPr/>
+          </p:nvSpPr>
+          <p:spPr bwMode="auto">
+            <a:xfrm>
+              <a:off x="4788178" y="4009262"/>
+              <a:ext cx="352661" cy="544971"/>
+            </a:xfrm>
+            <a:prstGeom prst="rect">
+              <a:avLst/>
+            </a:prstGeom>
+            <a:noFill/>
+            <a:ln>
+              <a:noFill/>
+            </a:ln>
+            <a:effectLst/>
+          </p:spPr>
+          <p:txBody>
+            <a:bodyPr vert="horz" wrap="none" lIns="0" tIns="79350" rIns="0" bIns="79350" numCol="1" anchor="ctr" anchorCtr="0" compatLnSpc="1">
+              <a:prstTxWarp prst="textNoShape">
+                <a:avLst/>
+              </a:prstTxWarp>
+              <a:spAutoFit/>
+            </a:bodyPr>
+            <a:lstStyle/>
+            <a:p>
+              <a:pPr marL="0" marR="0" lvl="0" indent="0" algn="ctr" defTabSz="914400" rtl="0" eaLnBrk="0" fontAlgn="base" latinLnBrk="0" hangingPunct="0">
+                <a:lnSpc>
+                  <a:spcPct val="100000"/>
+                </a:lnSpc>
+                <a:spcBef>
+                  <a:spcPct val="0"/>
+                </a:spcBef>
+                <a:spcAft>
+                  <a:spcPct val="0"/>
+                </a:spcAft>
+                <a:buClrTx/>
+                <a:buSzTx/>
+                <a:buFontTx/>
+                <a:buNone/>
+                <a:tabLst/>
+              </a:pPr>
+              <a:r>
+                <a:rPr kumimoji="0" lang="en-US" altLang="en-US" sz="2500" b="0" i="0" u="none" strike="noStrike" cap="none" normalizeH="0" baseline="0" dirty="0">
+                  <a:ln>
+                    <a:noFill/>
+                  </a:ln>
+                  <a:solidFill>
+                    <a:srgbClr val="FFC720"/>
+                  </a:solidFill>
+                  <a:effectLst/>
+                  <a:latin typeface="Consolas" panose="020B0609020204030204" pitchFamily="49" charset="0"/>
+                </a:rPr>
+                <a:t>-4</a:t>
+              </a:r>
+            </a:p>
+          </p:txBody>
+        </p:sp>
+        <p:sp>
+          <p:nvSpPr>
+            <p:cNvPr id="16" name="Rectangle 15">
+              <a:extLst>
+                <a:ext uri="{FF2B5EF4-FFF2-40B4-BE49-F238E27FC236}">
+                  <a16:creationId xmlns:a16="http://schemas.microsoft.com/office/drawing/2014/main" id="{C77A00C3-72DC-C03E-1B77-B61FAB6E10A6}"/>
+                </a:ext>
+              </a:extLst>
+            </p:cNvPr>
+            <p:cNvSpPr>
+              <a:spLocks noChangeArrowheads="1"/>
+            </p:cNvSpPr>
+            <p:nvPr/>
+          </p:nvSpPr>
+          <p:spPr bwMode="auto">
+            <a:xfrm>
+              <a:off x="5919669" y="4009262"/>
+              <a:ext cx="352661" cy="544971"/>
+            </a:xfrm>
+            <a:prstGeom prst="rect">
+              <a:avLst/>
+            </a:prstGeom>
+            <a:noFill/>
+            <a:ln>
+              <a:noFill/>
+            </a:ln>
+            <a:effectLst/>
+          </p:spPr>
+          <p:txBody>
+            <a:bodyPr vert="horz" wrap="none" lIns="0" tIns="79350" rIns="0" bIns="79350" numCol="1" anchor="ctr" anchorCtr="0" compatLnSpc="1">
+              <a:prstTxWarp prst="textNoShape">
+                <a:avLst/>
+              </a:prstTxWarp>
+              <a:spAutoFit/>
+            </a:bodyPr>
+            <a:lstStyle/>
+            <a:p>
+              <a:pPr marL="0" marR="0" lvl="0" indent="0" algn="ctr" defTabSz="914400" rtl="0" eaLnBrk="0" fontAlgn="base" latinLnBrk="0" hangingPunct="0">
+                <a:lnSpc>
+                  <a:spcPct val="100000"/>
+                </a:lnSpc>
+                <a:spcBef>
+                  <a:spcPct val="0"/>
+                </a:spcBef>
+                <a:spcAft>
+                  <a:spcPct val="0"/>
+                </a:spcAft>
+                <a:buClrTx/>
+                <a:buSzTx/>
+                <a:buFontTx/>
+                <a:buNone/>
+                <a:tabLst/>
+              </a:pPr>
+              <a:r>
+                <a:rPr kumimoji="0" lang="en-US" altLang="en-US" sz="2500" b="0" i="0" u="none" strike="noStrike" cap="none" normalizeH="0" baseline="0" dirty="0">
+                  <a:ln>
+                    <a:noFill/>
+                  </a:ln>
+                  <a:solidFill>
+                    <a:srgbClr val="FFC720"/>
+                  </a:solidFill>
+                  <a:effectLst/>
+                  <a:latin typeface="Consolas" panose="020B0609020204030204" pitchFamily="49" charset="0"/>
+                </a:rPr>
+                <a:t>-3</a:t>
+              </a:r>
+            </a:p>
+          </p:txBody>
+        </p:sp>
+        <p:sp>
+          <p:nvSpPr>
+            <p:cNvPr id="17" name="Rectangle 16">
+              <a:extLst>
+                <a:ext uri="{FF2B5EF4-FFF2-40B4-BE49-F238E27FC236}">
+                  <a16:creationId xmlns:a16="http://schemas.microsoft.com/office/drawing/2014/main" id="{0C2A104F-A461-9F82-1588-AC7CB529194A}"/>
+                </a:ext>
+              </a:extLst>
+            </p:cNvPr>
+            <p:cNvSpPr>
+              <a:spLocks noChangeArrowheads="1"/>
+            </p:cNvSpPr>
+            <p:nvPr/>
+          </p:nvSpPr>
+          <p:spPr bwMode="auto">
+            <a:xfrm>
+              <a:off x="7058488" y="4009262"/>
+              <a:ext cx="352661" cy="544971"/>
+            </a:xfrm>
+            <a:prstGeom prst="rect">
+              <a:avLst/>
+            </a:prstGeom>
+            <a:noFill/>
+            <a:ln>
+              <a:noFill/>
+            </a:ln>
+            <a:effectLst/>
+          </p:spPr>
+          <p:txBody>
+            <a:bodyPr vert="horz" wrap="none" lIns="0" tIns="79350" rIns="0" bIns="79350" numCol="1" anchor="ctr" anchorCtr="0" compatLnSpc="1">
+              <a:prstTxWarp prst="textNoShape">
+                <a:avLst/>
+              </a:prstTxWarp>
+              <a:spAutoFit/>
+            </a:bodyPr>
+            <a:lstStyle/>
+            <a:p>
+              <a:pPr marL="0" marR="0" lvl="0" indent="0" algn="ctr" defTabSz="914400" rtl="0" eaLnBrk="0" fontAlgn="base" latinLnBrk="0" hangingPunct="0">
+                <a:lnSpc>
+                  <a:spcPct val="100000"/>
+                </a:lnSpc>
+                <a:spcBef>
+                  <a:spcPct val="0"/>
+                </a:spcBef>
+                <a:spcAft>
+                  <a:spcPct val="0"/>
+                </a:spcAft>
+                <a:buClrTx/>
+                <a:buSzTx/>
+                <a:buFontTx/>
+                <a:buNone/>
+                <a:tabLst/>
+              </a:pPr>
+              <a:r>
+                <a:rPr lang="en-US" altLang="en-US" sz="2500" dirty="0">
+                  <a:solidFill>
+                    <a:srgbClr val="FFC720"/>
+                  </a:solidFill>
+                  <a:latin typeface="Consolas" panose="020B0609020204030204" pitchFamily="49" charset="0"/>
+                </a:rPr>
+                <a:t>-2</a:t>
+              </a:r>
+              <a:endParaRPr kumimoji="0" lang="en-US" altLang="en-US" sz="2500" b="0" i="0" u="none" strike="noStrike" cap="none" normalizeH="0" baseline="0" dirty="0">
+                <a:ln>
+                  <a:noFill/>
+                </a:ln>
+                <a:solidFill>
+                  <a:srgbClr val="FFC720"/>
+                </a:solidFill>
+                <a:effectLst/>
+                <a:latin typeface="Consolas" panose="020B0609020204030204" pitchFamily="49" charset="0"/>
+              </a:endParaRPr>
+            </a:p>
+          </p:txBody>
+        </p:sp>
+        <p:sp>
+          <p:nvSpPr>
+            <p:cNvPr id="19" name="Rectangle 18">
+              <a:extLst>
+                <a:ext uri="{FF2B5EF4-FFF2-40B4-BE49-F238E27FC236}">
+                  <a16:creationId xmlns:a16="http://schemas.microsoft.com/office/drawing/2014/main" id="{20850F76-99FA-EA56-6F0E-58D899DED251}"/>
+                </a:ext>
+              </a:extLst>
+            </p:cNvPr>
+            <p:cNvSpPr>
+              <a:spLocks noChangeArrowheads="1"/>
+            </p:cNvSpPr>
+            <p:nvPr/>
+          </p:nvSpPr>
+          <p:spPr bwMode="auto">
+            <a:xfrm>
+              <a:off x="8203781" y="4009262"/>
+              <a:ext cx="352661" cy="544971"/>
+            </a:xfrm>
+            <a:prstGeom prst="rect">
+              <a:avLst/>
+            </a:prstGeom>
+            <a:noFill/>
+            <a:ln>
+              <a:noFill/>
+            </a:ln>
+            <a:effectLst/>
+          </p:spPr>
+          <p:txBody>
+            <a:bodyPr vert="horz" wrap="none" lIns="0" tIns="79350" rIns="0" bIns="79350" numCol="1" anchor="ctr" anchorCtr="0" compatLnSpc="1">
+              <a:prstTxWarp prst="textNoShape">
+                <a:avLst/>
+              </a:prstTxWarp>
+              <a:spAutoFit/>
+            </a:bodyPr>
+            <a:lstStyle/>
+            <a:p>
+              <a:pPr marL="0" marR="0" lvl="0" indent="0" algn="ctr" defTabSz="914400" rtl="0" eaLnBrk="0" fontAlgn="base" latinLnBrk="0" hangingPunct="0">
+                <a:lnSpc>
+                  <a:spcPct val="100000"/>
+                </a:lnSpc>
+                <a:spcBef>
+                  <a:spcPct val="0"/>
+                </a:spcBef>
+                <a:spcAft>
+                  <a:spcPct val="0"/>
+                </a:spcAft>
+                <a:buClrTx/>
+                <a:buSzTx/>
+                <a:buFontTx/>
+                <a:buNone/>
+                <a:tabLst/>
+              </a:pPr>
+              <a:r>
+                <a:rPr kumimoji="0" lang="en-US" altLang="en-US" sz="2500" b="0" i="0" u="none" strike="noStrike" cap="none" normalizeH="0" baseline="0" dirty="0">
+                  <a:ln>
+                    <a:noFill/>
+                  </a:ln>
+                  <a:solidFill>
+                    <a:srgbClr val="FFC720"/>
+                  </a:solidFill>
+                  <a:effectLst/>
+                  <a:latin typeface="Consolas" panose="020B0609020204030204" pitchFamily="49" charset="0"/>
+                </a:rPr>
+                <a:t>-1</a:t>
+              </a:r>
+            </a:p>
+          </p:txBody>
+        </p:sp>
+      </p:grpSp>
+      <p:sp>
+        <p:nvSpPr>
+          <p:cNvPr id="25" name="Rectangle 24">
+            <a:extLst>
+              <a:ext uri="{FF2B5EF4-FFF2-40B4-BE49-F238E27FC236}">
+                <a16:creationId xmlns:a16="http://schemas.microsoft.com/office/drawing/2014/main" id="{630A12DC-04E5-7328-3E4A-233ACF9BADC4}"/>
+              </a:ext>
+            </a:extLst>
+          </p:cNvPr>
+          <p:cNvSpPr>
+            <a:spLocks noChangeArrowheads="1"/>
+          </p:cNvSpPr>
+          <p:nvPr/>
+        </p:nvSpPr>
+        <p:spPr bwMode="auto">
+          <a:xfrm>
+            <a:off x="6717966" y="4155285"/>
+            <a:ext cx="2343590" cy="468026"/>
+          </a:xfrm>
+          <a:prstGeom prst="rect">
+            <a:avLst/>
+          </a:prstGeom>
+          <a:noFill/>
+          <a:ln>
+            <a:noFill/>
+          </a:ln>
+          <a:effectLst/>
+        </p:spPr>
+        <p:txBody>
+          <a:bodyPr vert="horz" wrap="none" lIns="0" tIns="79350" rIns="0" bIns="79350" numCol="1" anchor="ctr" anchorCtr="0" compatLnSpc="1">
+            <a:prstTxWarp prst="textNoShape">
+              <a:avLst/>
+            </a:prstTxWarp>
+            <a:spAutoFit/>
+          </a:bodyPr>
+          <a:lstStyle/>
+          <a:p>
+            <a:pPr marL="0" marR="0" lvl="0" indent="0" algn="ctr" defTabSz="914400" rtl="0" eaLnBrk="0" fontAlgn="base" latinLnBrk="0" hangingPunct="0">
+              <a:lnSpc>
+                <a:spcPct val="100000"/>
+              </a:lnSpc>
+              <a:spcBef>
+                <a:spcPct val="0"/>
+              </a:spcBef>
+              <a:spcAft>
+                <a:spcPct val="0"/>
+              </a:spcAft>
+              <a:buClrTx/>
+              <a:buSzTx/>
+              <a:buFontTx/>
+              <a:buNone/>
+              <a:tabLst/>
+            </a:pPr>
+            <a:r>
+              <a:rPr kumimoji="0" lang="en-US" altLang="en-US" sz="2000" b="0" i="0" u="none" strike="noStrike" cap="none" normalizeH="0" baseline="0" dirty="0">
+                <a:ln>
+                  <a:noFill/>
+                </a:ln>
+                <a:solidFill>
+                  <a:srgbClr val="D6DEEB"/>
+                </a:solidFill>
+                <a:effectLst/>
+                <a:latin typeface="Fira Sans" panose="020B0503050000020004" pitchFamily="34" charset="0"/>
+                <a:ea typeface="Fira Mono" panose="020B0509050000020004" pitchFamily="49" charset="0"/>
+              </a:rPr>
+              <a:t>← count backwards</a:t>
+            </a:r>
+          </a:p>
+        </p:txBody>
+      </p:sp>
+    </p:spTree>
+    <p:extLst>
+      <p:ext uri="{BB962C8B-B14F-4D97-AF65-F5344CB8AC3E}">
+        <p14:creationId xmlns:p14="http://schemas.microsoft.com/office/powerpoint/2010/main" val="1408358572"/>
+      </p:ext>
+    </p:extLst>
+  </p:cSld>
+  <p:clrMapOvr>
+    <a:masterClrMapping/>
+  </p:clrMapOvr>
+</p:sld>
+</file>
+
 <file path=ppt/slides/slide2.xml><?xml version="1.0" encoding="utf-8"?>
 <p:sld xmlns:a="http://schemas.openxmlformats.org/drawingml/2006/main" xmlns:r="http://schemas.openxmlformats.org/officeDocument/2006/relationships" xmlns:p="http://schemas.openxmlformats.org/presentationml/2006/main">
   <p:cSld>

--- a/assets/pycobytes.pptx
+++ b/assets/pycobytes.pptx
@@ -24,6 +24,7 @@
     <p:sldId id="271" r:id="rId18"/>
     <p:sldId id="272" r:id="rId19"/>
     <p:sldId id="274" r:id="rId20"/>
+    <p:sldId id="275" r:id="rId21"/>
   </p:sldIdLst>
   <p:sldSz cx="12192000" cy="6858000"/>
   <p:notesSz cx="6858000" cy="9144000"/>
@@ -6842,6 +6843,1632 @@
 </p:sld>
 </file>
 
+<file path=ppt/slides/slide19.xml><?xml version="1.0" encoding="utf-8"?>
+<p:sld xmlns:a="http://schemas.openxmlformats.org/drawingml/2006/main" xmlns:r="http://schemas.openxmlformats.org/officeDocument/2006/relationships" xmlns:p="http://schemas.openxmlformats.org/presentationml/2006/main">
+  <p:cSld>
+    <p:spTree>
+      <p:nvGrpSpPr>
+        <p:cNvPr id="1" name=""/>
+        <p:cNvGrpSpPr/>
+        <p:nvPr/>
+      </p:nvGrpSpPr>
+      <p:grpSpPr>
+        <a:xfrm>
+          <a:off x="0" y="0"/>
+          <a:ext cx="0" cy="0"/>
+          <a:chOff x="0" y="0"/>
+          <a:chExt cx="0" cy="0"/>
+        </a:xfrm>
+      </p:grpSpPr>
+      <p:sp>
+        <p:nvSpPr>
+          <p:cNvPr id="2" name="Rectangle 1">
+            <a:extLst>
+              <a:ext uri="{FF2B5EF4-FFF2-40B4-BE49-F238E27FC236}">
+                <a16:creationId xmlns:a16="http://schemas.microsoft.com/office/drawing/2014/main" id="{C2407FB7-4EEA-B5F9-BB81-2DE19BD22762}"/>
+              </a:ext>
+            </a:extLst>
+          </p:cNvPr>
+          <p:cNvSpPr/>
+          <p:nvPr/>
+        </p:nvSpPr>
+        <p:spPr>
+          <a:xfrm>
+            <a:off x="2268637" y="64394"/>
+            <a:ext cx="7654727" cy="6597663"/>
+          </a:xfrm>
+          <a:prstGeom prst="rect">
+            <a:avLst/>
+          </a:prstGeom>
+          <a:solidFill>
+            <a:srgbClr val="011627"/>
+          </a:solidFill>
+          <a:ln>
+            <a:noFill/>
+          </a:ln>
+        </p:spPr>
+        <p:style>
+          <a:lnRef idx="2">
+            <a:schemeClr val="accent1">
+              <a:shade val="50000"/>
+            </a:schemeClr>
+          </a:lnRef>
+          <a:fillRef idx="1">
+            <a:schemeClr val="accent1"/>
+          </a:fillRef>
+          <a:effectRef idx="0">
+            <a:schemeClr val="accent1"/>
+          </a:effectRef>
+          <a:fontRef idx="minor">
+            <a:schemeClr val="lt1"/>
+          </a:fontRef>
+        </p:style>
+        <p:txBody>
+          <a:bodyPr rtlCol="0" anchor="ctr"/>
+          <a:lstStyle/>
+          <a:p>
+            <a:pPr algn="ctr"/>
+            <a:endParaRPr lang="en-GB" dirty="0"/>
+          </a:p>
+        </p:txBody>
+      </p:sp>
+      <p:grpSp>
+        <p:nvGrpSpPr>
+          <p:cNvPr id="42" name="Group 41">
+            <a:extLst>
+              <a:ext uri="{FF2B5EF4-FFF2-40B4-BE49-F238E27FC236}">
+                <a16:creationId xmlns:a16="http://schemas.microsoft.com/office/drawing/2014/main" id="{AA1EBB66-D87D-6A7D-02B7-179CF3AD61D2}"/>
+              </a:ext>
+            </a:extLst>
+          </p:cNvPr>
+          <p:cNvGrpSpPr/>
+          <p:nvPr/>
+        </p:nvGrpSpPr>
+        <p:grpSpPr>
+          <a:xfrm>
+            <a:off x="2794197" y="412124"/>
+            <a:ext cx="6603606" cy="5756856"/>
+            <a:chOff x="4401391" y="412124"/>
+            <a:chExt cx="6603606" cy="5756856"/>
+          </a:xfrm>
+        </p:grpSpPr>
+        <p:grpSp>
+          <p:nvGrpSpPr>
+            <p:cNvPr id="39" name="Group 38">
+              <a:extLst>
+                <a:ext uri="{FF2B5EF4-FFF2-40B4-BE49-F238E27FC236}">
+                  <a16:creationId xmlns:a16="http://schemas.microsoft.com/office/drawing/2014/main" id="{3CA9BFE8-312C-1971-373A-F1E1E4DB5EA1}"/>
+                </a:ext>
+              </a:extLst>
+            </p:cNvPr>
+            <p:cNvGrpSpPr/>
+            <p:nvPr/>
+          </p:nvGrpSpPr>
+          <p:grpSpPr>
+            <a:xfrm>
+              <a:off x="4401391" y="412124"/>
+              <a:ext cx="1451955" cy="5756856"/>
+              <a:chOff x="4276748" y="412124"/>
+              <a:chExt cx="1451955" cy="5756856"/>
+            </a:xfrm>
+          </p:grpSpPr>
+          <p:sp>
+            <p:nvSpPr>
+              <p:cNvPr id="11" name="Rectangle 10">
+                <a:extLst>
+                  <a:ext uri="{FF2B5EF4-FFF2-40B4-BE49-F238E27FC236}">
+                    <a16:creationId xmlns:a16="http://schemas.microsoft.com/office/drawing/2014/main" id="{287FD350-0D92-8C87-645D-0214AD4D3F34}"/>
+                  </a:ext>
+                </a:extLst>
+              </p:cNvPr>
+              <p:cNvSpPr/>
+              <p:nvPr/>
+            </p:nvSpPr>
+            <p:spPr>
+              <a:xfrm>
+                <a:off x="4282226" y="412124"/>
+                <a:ext cx="1441000" cy="5756856"/>
+              </a:xfrm>
+              <a:prstGeom prst="rect">
+                <a:avLst/>
+              </a:prstGeom>
+              <a:solidFill>
+                <a:schemeClr val="bg1">
+                  <a:alpha val="20000"/>
+                </a:schemeClr>
+              </a:solidFill>
+              <a:ln>
+                <a:noFill/>
+              </a:ln>
+            </p:spPr>
+            <p:style>
+              <a:lnRef idx="2">
+                <a:schemeClr val="accent1">
+                  <a:shade val="15000"/>
+                </a:schemeClr>
+              </a:lnRef>
+              <a:fillRef idx="1">
+                <a:schemeClr val="accent1"/>
+              </a:fillRef>
+              <a:effectRef idx="0">
+                <a:schemeClr val="accent1"/>
+              </a:effectRef>
+              <a:fontRef idx="minor">
+                <a:schemeClr val="lt1"/>
+              </a:fontRef>
+            </p:style>
+            <p:txBody>
+              <a:bodyPr rtlCol="0" anchor="ctr"/>
+              <a:lstStyle/>
+              <a:p>
+                <a:pPr algn="ctr"/>
+                <a:endParaRPr lang="en-GB"/>
+              </a:p>
+            </p:txBody>
+          </p:sp>
+          <p:sp>
+            <p:nvSpPr>
+              <p:cNvPr id="3" name="Rectangle 2">
+                <a:extLst>
+                  <a:ext uri="{FF2B5EF4-FFF2-40B4-BE49-F238E27FC236}">
+                    <a16:creationId xmlns:a16="http://schemas.microsoft.com/office/drawing/2014/main" id="{E61B11CA-778C-D978-E925-8E388F1491DC}"/>
+                  </a:ext>
+                </a:extLst>
+              </p:cNvPr>
+              <p:cNvSpPr>
+                <a:spLocks noChangeArrowheads="1"/>
+              </p:cNvSpPr>
+              <p:nvPr/>
+            </p:nvSpPr>
+            <p:spPr bwMode="auto">
+              <a:xfrm>
+                <a:off x="4644637" y="1073272"/>
+                <a:ext cx="716176" cy="4878882"/>
+              </a:xfrm>
+              <a:prstGeom prst="rect">
+                <a:avLst/>
+              </a:prstGeom>
+              <a:noFill/>
+              <a:ln>
+                <a:noFill/>
+              </a:ln>
+              <a:effectLst/>
+            </p:spPr>
+            <p:txBody>
+              <a:bodyPr vert="horz" wrap="none" lIns="180000" tIns="72000" rIns="180000" bIns="72000" numCol="1" anchor="t" anchorCtr="0" compatLnSpc="1">
+                <a:prstTxWarp prst="textNoShape">
+                  <a:avLst/>
+                </a:prstTxWarp>
+                <a:spAutoFit/>
+              </a:bodyPr>
+              <a:lstStyle/>
+              <a:p>
+                <a:pPr marL="0" marR="0" lvl="0" indent="0" algn="ctr" defTabSz="914400" rtl="0" eaLnBrk="0" fontAlgn="base" latinLnBrk="0" hangingPunct="0">
+                  <a:lnSpc>
+                    <a:spcPct val="125000"/>
+                  </a:lnSpc>
+                  <a:spcBef>
+                    <a:spcPct val="0"/>
+                  </a:spcBef>
+                  <a:spcAft>
+                    <a:spcPct val="0"/>
+                  </a:spcAft>
+                  <a:buClrTx/>
+                  <a:buSzTx/>
+                  <a:buFontTx/>
+                  <a:buNone/>
+                  <a:tabLst/>
+                </a:pPr>
+                <a:r>
+                  <a:rPr kumimoji="0" lang="en-US" altLang="en-US" sz="5000" b="0" i="0" u="none" strike="noStrike" cap="none" normalizeH="0" baseline="0" dirty="0">
+                    <a:ln>
+                      <a:noFill/>
+                    </a:ln>
+                    <a:solidFill>
+                      <a:srgbClr val="D6DEEB"/>
+                    </a:solidFill>
+                    <a:effectLst/>
+                    <a:latin typeface="Consolas" panose="020B0609020204030204" pitchFamily="49" charset="0"/>
+                  </a:rPr>
+                  <a:t>a</a:t>
+                </a:r>
+              </a:p>
+              <a:p>
+                <a:pPr marL="0" marR="0" lvl="0" indent="0" algn="ctr" defTabSz="914400" rtl="0" eaLnBrk="0" fontAlgn="base" latinLnBrk="0" hangingPunct="0">
+                  <a:lnSpc>
+                    <a:spcPct val="125000"/>
+                  </a:lnSpc>
+                  <a:spcBef>
+                    <a:spcPct val="0"/>
+                  </a:spcBef>
+                  <a:spcAft>
+                    <a:spcPct val="0"/>
+                  </a:spcAft>
+                  <a:buClrTx/>
+                  <a:buSzTx/>
+                  <a:buFontTx/>
+                  <a:buNone/>
+                  <a:tabLst/>
+                </a:pPr>
+                <a:r>
+                  <a:rPr lang="en-US" altLang="en-US" sz="5000" dirty="0">
+                    <a:solidFill>
+                      <a:srgbClr val="D6DEEB"/>
+                    </a:solidFill>
+                    <a:latin typeface="Consolas" panose="020B0609020204030204" pitchFamily="49" charset="0"/>
+                  </a:rPr>
+                  <a:t>b</a:t>
+                </a:r>
+              </a:p>
+              <a:p>
+                <a:pPr marL="0" marR="0" lvl="0" indent="0" algn="ctr" defTabSz="914400" rtl="0" eaLnBrk="0" fontAlgn="base" latinLnBrk="0" hangingPunct="0">
+                  <a:lnSpc>
+                    <a:spcPct val="125000"/>
+                  </a:lnSpc>
+                  <a:spcBef>
+                    <a:spcPct val="0"/>
+                  </a:spcBef>
+                  <a:spcAft>
+                    <a:spcPct val="0"/>
+                  </a:spcAft>
+                  <a:buClrTx/>
+                  <a:buSzTx/>
+                  <a:buFontTx/>
+                  <a:buNone/>
+                  <a:tabLst/>
+                </a:pPr>
+                <a:r>
+                  <a:rPr kumimoji="0" lang="en-US" altLang="en-US" sz="5000" b="0" i="0" u="none" strike="noStrike" cap="none" normalizeH="0" baseline="0" dirty="0">
+                    <a:ln>
+                      <a:noFill/>
+                    </a:ln>
+                    <a:solidFill>
+                      <a:srgbClr val="D6DEEB"/>
+                    </a:solidFill>
+                    <a:effectLst/>
+                    <a:latin typeface="Consolas" panose="020B0609020204030204" pitchFamily="49" charset="0"/>
+                  </a:rPr>
+                  <a:t>c</a:t>
+                </a:r>
+              </a:p>
+              <a:p>
+                <a:pPr marL="0" marR="0" lvl="0" indent="0" algn="ctr" defTabSz="914400" rtl="0" eaLnBrk="0" fontAlgn="base" latinLnBrk="0" hangingPunct="0">
+                  <a:lnSpc>
+                    <a:spcPct val="125000"/>
+                  </a:lnSpc>
+                  <a:spcBef>
+                    <a:spcPct val="0"/>
+                  </a:spcBef>
+                  <a:spcAft>
+                    <a:spcPct val="0"/>
+                  </a:spcAft>
+                  <a:buClrTx/>
+                  <a:buSzTx/>
+                  <a:buFontTx/>
+                  <a:buNone/>
+                  <a:tabLst/>
+                </a:pPr>
+                <a:r>
+                  <a:rPr lang="en-US" altLang="en-US" sz="5000" dirty="0">
+                    <a:solidFill>
+                      <a:srgbClr val="D6DEEB"/>
+                    </a:solidFill>
+                    <a:latin typeface="Consolas" panose="020B0609020204030204" pitchFamily="49" charset="0"/>
+                  </a:rPr>
+                  <a:t>d</a:t>
+                </a:r>
+              </a:p>
+              <a:p>
+                <a:pPr marL="0" marR="0" lvl="0" indent="0" algn="ctr" defTabSz="914400" rtl="0" eaLnBrk="0" fontAlgn="base" latinLnBrk="0" hangingPunct="0">
+                  <a:lnSpc>
+                    <a:spcPct val="125000"/>
+                  </a:lnSpc>
+                  <a:spcBef>
+                    <a:spcPct val="0"/>
+                  </a:spcBef>
+                  <a:spcAft>
+                    <a:spcPct val="0"/>
+                  </a:spcAft>
+                  <a:buClrTx/>
+                  <a:buSzTx/>
+                  <a:buFontTx/>
+                  <a:buNone/>
+                  <a:tabLst/>
+                </a:pPr>
+                <a:r>
+                  <a:rPr kumimoji="0" lang="en-US" altLang="en-US" sz="5000" b="0" i="0" u="none" strike="noStrike" cap="none" normalizeH="0" baseline="0" dirty="0">
+                    <a:ln>
+                      <a:noFill/>
+                    </a:ln>
+                    <a:solidFill>
+                      <a:srgbClr val="D6DEEB"/>
+                    </a:solidFill>
+                    <a:effectLst/>
+                    <a:latin typeface="Consolas" panose="020B0609020204030204" pitchFamily="49" charset="0"/>
+                  </a:rPr>
+                  <a:t>e</a:t>
+                </a:r>
+                <a:endParaRPr kumimoji="0" lang="en-US" altLang="en-US" sz="5000" b="0" i="0" u="none" strike="noStrike" cap="none" normalizeH="0" baseline="0" dirty="0">
+                  <a:ln>
+                    <a:noFill/>
+                  </a:ln>
+                  <a:solidFill>
+                    <a:srgbClr val="ADDB67"/>
+                  </a:solidFill>
+                  <a:effectLst/>
+                  <a:latin typeface="Consolas" panose="020B0609020204030204" pitchFamily="49" charset="0"/>
+                </a:endParaRPr>
+              </a:p>
+            </p:txBody>
+          </p:sp>
+          <p:sp>
+            <p:nvSpPr>
+              <p:cNvPr id="8" name="Rectangle 7">
+                <a:extLst>
+                  <a:ext uri="{FF2B5EF4-FFF2-40B4-BE49-F238E27FC236}">
+                    <a16:creationId xmlns:a16="http://schemas.microsoft.com/office/drawing/2014/main" id="{5408DA5E-43C6-956E-F829-C9240E7B3C52}"/>
+                  </a:ext>
+                </a:extLst>
+              </p:cNvPr>
+              <p:cNvSpPr>
+                <a:spLocks noChangeArrowheads="1"/>
+              </p:cNvSpPr>
+              <p:nvPr/>
+            </p:nvSpPr>
+            <p:spPr bwMode="auto">
+              <a:xfrm>
+                <a:off x="4276748" y="538736"/>
+                <a:ext cx="1451955" cy="453183"/>
+              </a:xfrm>
+              <a:prstGeom prst="rect">
+                <a:avLst/>
+              </a:prstGeom>
+              <a:noFill/>
+              <a:ln>
+                <a:noFill/>
+              </a:ln>
+              <a:effectLst/>
+            </p:spPr>
+            <p:txBody>
+              <a:bodyPr vert="horz" wrap="none" lIns="180000" tIns="72000" rIns="180000" bIns="72000" numCol="1" anchor="ctr" anchorCtr="0" compatLnSpc="1">
+                <a:prstTxWarp prst="textNoShape">
+                  <a:avLst/>
+                </a:prstTxWarp>
+                <a:spAutoFit/>
+              </a:bodyPr>
+              <a:lstStyle/>
+              <a:p>
+                <a:pPr marL="0" marR="0" lvl="0" indent="0" algn="ctr" defTabSz="914400" rtl="0" eaLnBrk="0" fontAlgn="base" latinLnBrk="0" hangingPunct="0">
+                  <a:lnSpc>
+                    <a:spcPct val="100000"/>
+                  </a:lnSpc>
+                  <a:spcBef>
+                    <a:spcPct val="0"/>
+                  </a:spcBef>
+                  <a:spcAft>
+                    <a:spcPct val="0"/>
+                  </a:spcAft>
+                  <a:buClrTx/>
+                  <a:buSzTx/>
+                  <a:buFontTx/>
+                  <a:buNone/>
+                  <a:tabLst/>
+                </a:pPr>
+                <a:r>
+                  <a:rPr kumimoji="0" lang="en-US" altLang="en-US" sz="2000" b="0" i="0" u="none" strike="noStrike" cap="none" normalizeH="0" baseline="0" dirty="0" err="1">
+                    <a:ln>
+                      <a:noFill/>
+                    </a:ln>
+                    <a:solidFill>
+                      <a:srgbClr val="FFC720"/>
+                    </a:solidFill>
+                    <a:effectLst/>
+                    <a:latin typeface="Fira Sans" panose="020B0503050000020004" pitchFamily="34" charset="0"/>
+                    <a:ea typeface="Fira Mono" panose="020B0509050000020004" pitchFamily="49" charset="0"/>
+                  </a:rPr>
+                  <a:t>iterable</a:t>
+                </a:r>
+                <a:r>
+                  <a:rPr kumimoji="0" lang="en-US" altLang="en-US" sz="2000" b="0" i="0" u="none" strike="noStrike" cap="none" normalizeH="0" baseline="0" dirty="0">
+                    <a:ln>
+                      <a:noFill/>
+                    </a:ln>
+                    <a:solidFill>
+                      <a:srgbClr val="FFC720"/>
+                    </a:solidFill>
+                    <a:effectLst/>
+                    <a:latin typeface="Fira Sans" panose="020B0503050000020004" pitchFamily="34" charset="0"/>
+                    <a:ea typeface="Fira Mono" panose="020B0509050000020004" pitchFamily="49" charset="0"/>
+                  </a:rPr>
+                  <a:t> 1</a:t>
+                </a:r>
+              </a:p>
+            </p:txBody>
+          </p:sp>
+        </p:grpSp>
+        <p:grpSp>
+          <p:nvGrpSpPr>
+            <p:cNvPr id="40" name="Group 39">
+              <a:extLst>
+                <a:ext uri="{FF2B5EF4-FFF2-40B4-BE49-F238E27FC236}">
+                  <a16:creationId xmlns:a16="http://schemas.microsoft.com/office/drawing/2014/main" id="{00E1C5A4-AAF1-E12A-5483-C8B6BB666B35}"/>
+                </a:ext>
+              </a:extLst>
+            </p:cNvPr>
+            <p:cNvGrpSpPr/>
+            <p:nvPr/>
+          </p:nvGrpSpPr>
+          <p:grpSpPr>
+            <a:xfrm>
+              <a:off x="6011925" y="412124"/>
+              <a:ext cx="1467985" cy="5756856"/>
+              <a:chOff x="6011925" y="412124"/>
+              <a:chExt cx="1467985" cy="5756856"/>
+            </a:xfrm>
+          </p:grpSpPr>
+          <p:sp>
+            <p:nvSpPr>
+              <p:cNvPr id="12" name="Rectangle 11">
+                <a:extLst>
+                  <a:ext uri="{FF2B5EF4-FFF2-40B4-BE49-F238E27FC236}">
+                    <a16:creationId xmlns:a16="http://schemas.microsoft.com/office/drawing/2014/main" id="{58E4C8D6-74F8-0695-58A6-2C1849C186C4}"/>
+                  </a:ext>
+                </a:extLst>
+              </p:cNvPr>
+              <p:cNvSpPr/>
+              <p:nvPr/>
+            </p:nvSpPr>
+            <p:spPr>
+              <a:xfrm>
+                <a:off x="6025418" y="412124"/>
+                <a:ext cx="1441000" cy="5756856"/>
+              </a:xfrm>
+              <a:prstGeom prst="rect">
+                <a:avLst/>
+              </a:prstGeom>
+              <a:solidFill>
+                <a:schemeClr val="bg1">
+                  <a:alpha val="20000"/>
+                </a:schemeClr>
+              </a:solidFill>
+              <a:ln>
+                <a:noFill/>
+              </a:ln>
+            </p:spPr>
+            <p:style>
+              <a:lnRef idx="2">
+                <a:schemeClr val="accent1">
+                  <a:shade val="15000"/>
+                </a:schemeClr>
+              </a:lnRef>
+              <a:fillRef idx="1">
+                <a:schemeClr val="accent1"/>
+              </a:fillRef>
+              <a:effectRef idx="0">
+                <a:schemeClr val="accent1"/>
+              </a:effectRef>
+              <a:fontRef idx="minor">
+                <a:schemeClr val="lt1"/>
+              </a:fontRef>
+            </p:style>
+            <p:txBody>
+              <a:bodyPr rtlCol="0" anchor="ctr"/>
+              <a:lstStyle/>
+              <a:p>
+                <a:pPr algn="ctr"/>
+                <a:endParaRPr lang="en-GB"/>
+              </a:p>
+            </p:txBody>
+          </p:sp>
+          <p:sp>
+            <p:nvSpPr>
+              <p:cNvPr id="13" name="Rectangle 12">
+                <a:extLst>
+                  <a:ext uri="{FF2B5EF4-FFF2-40B4-BE49-F238E27FC236}">
+                    <a16:creationId xmlns:a16="http://schemas.microsoft.com/office/drawing/2014/main" id="{08682641-1D7F-3EF9-AB48-673D2FDF6DB1}"/>
+                  </a:ext>
+                </a:extLst>
+              </p:cNvPr>
+              <p:cNvSpPr>
+                <a:spLocks noChangeArrowheads="1"/>
+              </p:cNvSpPr>
+              <p:nvPr/>
+            </p:nvSpPr>
+            <p:spPr bwMode="auto">
+              <a:xfrm>
+                <a:off x="6387829" y="1073272"/>
+                <a:ext cx="716176" cy="4878882"/>
+              </a:xfrm>
+              <a:prstGeom prst="rect">
+                <a:avLst/>
+              </a:prstGeom>
+              <a:noFill/>
+              <a:ln>
+                <a:noFill/>
+              </a:ln>
+              <a:effectLst/>
+            </p:spPr>
+            <p:txBody>
+              <a:bodyPr vert="horz" wrap="none" lIns="180000" tIns="72000" rIns="180000" bIns="72000" numCol="1" anchor="t" anchorCtr="0" compatLnSpc="1">
+                <a:prstTxWarp prst="textNoShape">
+                  <a:avLst/>
+                </a:prstTxWarp>
+                <a:spAutoFit/>
+              </a:bodyPr>
+              <a:lstStyle/>
+              <a:p>
+                <a:pPr marL="0" marR="0" lvl="0" indent="0" algn="ctr" defTabSz="914400" rtl="0" eaLnBrk="0" fontAlgn="base" latinLnBrk="0" hangingPunct="0">
+                  <a:lnSpc>
+                    <a:spcPct val="125000"/>
+                  </a:lnSpc>
+                  <a:spcBef>
+                    <a:spcPct val="0"/>
+                  </a:spcBef>
+                  <a:spcAft>
+                    <a:spcPct val="0"/>
+                  </a:spcAft>
+                  <a:buClrTx/>
+                  <a:buSzTx/>
+                  <a:buFontTx/>
+                  <a:buNone/>
+                  <a:tabLst/>
+                </a:pPr>
+                <a:r>
+                  <a:rPr lang="en-US" altLang="en-US" sz="5000" dirty="0">
+                    <a:solidFill>
+                      <a:srgbClr val="D6DEEB"/>
+                    </a:solidFill>
+                    <a:latin typeface="Consolas" panose="020B0609020204030204" pitchFamily="49" charset="0"/>
+                  </a:rPr>
+                  <a:t>p</a:t>
+                </a:r>
+                <a:endParaRPr kumimoji="0" lang="en-US" altLang="en-US" sz="5000" b="0" i="0" u="none" strike="noStrike" cap="none" normalizeH="0" baseline="0" dirty="0">
+                  <a:ln>
+                    <a:noFill/>
+                  </a:ln>
+                  <a:solidFill>
+                    <a:srgbClr val="D6DEEB"/>
+                  </a:solidFill>
+                  <a:effectLst/>
+                  <a:latin typeface="Consolas" panose="020B0609020204030204" pitchFamily="49" charset="0"/>
+                </a:endParaRPr>
+              </a:p>
+              <a:p>
+                <a:pPr marL="0" marR="0" lvl="0" indent="0" algn="ctr" defTabSz="914400" rtl="0" eaLnBrk="0" fontAlgn="base" latinLnBrk="0" hangingPunct="0">
+                  <a:lnSpc>
+                    <a:spcPct val="125000"/>
+                  </a:lnSpc>
+                  <a:spcBef>
+                    <a:spcPct val="0"/>
+                  </a:spcBef>
+                  <a:spcAft>
+                    <a:spcPct val="0"/>
+                  </a:spcAft>
+                  <a:buClrTx/>
+                  <a:buSzTx/>
+                  <a:buFontTx/>
+                  <a:buNone/>
+                  <a:tabLst/>
+                </a:pPr>
+                <a:r>
+                  <a:rPr lang="en-US" altLang="en-US" sz="5000" dirty="0">
+                    <a:solidFill>
+                      <a:srgbClr val="D6DEEB"/>
+                    </a:solidFill>
+                    <a:latin typeface="Consolas" panose="020B0609020204030204" pitchFamily="49" charset="0"/>
+                  </a:rPr>
+                  <a:t>q</a:t>
+                </a:r>
+              </a:p>
+              <a:p>
+                <a:pPr marL="0" marR="0" lvl="0" indent="0" algn="ctr" defTabSz="914400" rtl="0" eaLnBrk="0" fontAlgn="base" latinLnBrk="0" hangingPunct="0">
+                  <a:lnSpc>
+                    <a:spcPct val="125000"/>
+                  </a:lnSpc>
+                  <a:spcBef>
+                    <a:spcPct val="0"/>
+                  </a:spcBef>
+                  <a:spcAft>
+                    <a:spcPct val="0"/>
+                  </a:spcAft>
+                  <a:buClrTx/>
+                  <a:buSzTx/>
+                  <a:buFontTx/>
+                  <a:buNone/>
+                  <a:tabLst/>
+                </a:pPr>
+                <a:r>
+                  <a:rPr lang="en-US" altLang="en-US" sz="5000" dirty="0">
+                    <a:solidFill>
+                      <a:srgbClr val="D6DEEB"/>
+                    </a:solidFill>
+                    <a:latin typeface="Consolas" panose="020B0609020204030204" pitchFamily="49" charset="0"/>
+                  </a:rPr>
+                  <a:t>r</a:t>
+                </a:r>
+                <a:endParaRPr kumimoji="0" lang="en-US" altLang="en-US" sz="5000" b="0" i="0" u="none" strike="noStrike" cap="none" normalizeH="0" baseline="0" dirty="0">
+                  <a:ln>
+                    <a:noFill/>
+                  </a:ln>
+                  <a:solidFill>
+                    <a:srgbClr val="D6DEEB"/>
+                  </a:solidFill>
+                  <a:effectLst/>
+                  <a:latin typeface="Consolas" panose="020B0609020204030204" pitchFamily="49" charset="0"/>
+                </a:endParaRPr>
+              </a:p>
+              <a:p>
+                <a:pPr marL="0" marR="0" lvl="0" indent="0" algn="ctr" defTabSz="914400" rtl="0" eaLnBrk="0" fontAlgn="base" latinLnBrk="0" hangingPunct="0">
+                  <a:lnSpc>
+                    <a:spcPct val="125000"/>
+                  </a:lnSpc>
+                  <a:spcBef>
+                    <a:spcPct val="0"/>
+                  </a:spcBef>
+                  <a:spcAft>
+                    <a:spcPct val="0"/>
+                  </a:spcAft>
+                  <a:buClrTx/>
+                  <a:buSzTx/>
+                  <a:buFontTx/>
+                  <a:buNone/>
+                  <a:tabLst/>
+                </a:pPr>
+                <a:r>
+                  <a:rPr lang="en-US" altLang="en-US" sz="5000" dirty="0">
+                    <a:solidFill>
+                      <a:srgbClr val="D6DEEB"/>
+                    </a:solidFill>
+                    <a:latin typeface="Consolas" panose="020B0609020204030204" pitchFamily="49" charset="0"/>
+                  </a:rPr>
+                  <a:t>s</a:t>
+                </a:r>
+              </a:p>
+              <a:p>
+                <a:pPr marL="0" marR="0" lvl="0" indent="0" algn="ctr" defTabSz="914400" rtl="0" eaLnBrk="0" fontAlgn="base" latinLnBrk="0" hangingPunct="0">
+                  <a:lnSpc>
+                    <a:spcPct val="125000"/>
+                  </a:lnSpc>
+                  <a:spcBef>
+                    <a:spcPct val="0"/>
+                  </a:spcBef>
+                  <a:spcAft>
+                    <a:spcPct val="0"/>
+                  </a:spcAft>
+                  <a:buClrTx/>
+                  <a:buSzTx/>
+                  <a:buFontTx/>
+                  <a:buNone/>
+                  <a:tabLst/>
+                </a:pPr>
+                <a:r>
+                  <a:rPr lang="en-US" altLang="en-US" sz="5000" dirty="0">
+                    <a:solidFill>
+                      <a:srgbClr val="D6DEEB"/>
+                    </a:solidFill>
+                    <a:latin typeface="Consolas" panose="020B0609020204030204" pitchFamily="49" charset="0"/>
+                  </a:rPr>
+                  <a:t>t</a:t>
+                </a:r>
+                <a:endParaRPr kumimoji="0" lang="en-US" altLang="en-US" sz="5000" b="0" i="0" u="none" strike="noStrike" cap="none" normalizeH="0" baseline="0" dirty="0">
+                  <a:ln>
+                    <a:noFill/>
+                  </a:ln>
+                  <a:solidFill>
+                    <a:srgbClr val="ADDB67"/>
+                  </a:solidFill>
+                  <a:effectLst/>
+                  <a:latin typeface="Consolas" panose="020B0609020204030204" pitchFamily="49" charset="0"/>
+                </a:endParaRPr>
+              </a:p>
+            </p:txBody>
+          </p:sp>
+          <p:sp>
+            <p:nvSpPr>
+              <p:cNvPr id="14" name="Rectangle 13">
+                <a:extLst>
+                  <a:ext uri="{FF2B5EF4-FFF2-40B4-BE49-F238E27FC236}">
+                    <a16:creationId xmlns:a16="http://schemas.microsoft.com/office/drawing/2014/main" id="{FD8C8E98-4F95-6854-1508-F790F2AEF654}"/>
+                  </a:ext>
+                </a:extLst>
+              </p:cNvPr>
+              <p:cNvSpPr>
+                <a:spLocks noChangeArrowheads="1"/>
+              </p:cNvSpPr>
+              <p:nvPr/>
+            </p:nvSpPr>
+            <p:spPr bwMode="auto">
+              <a:xfrm>
+                <a:off x="6011925" y="538736"/>
+                <a:ext cx="1467985" cy="453183"/>
+              </a:xfrm>
+              <a:prstGeom prst="rect">
+                <a:avLst/>
+              </a:prstGeom>
+              <a:noFill/>
+              <a:ln>
+                <a:noFill/>
+              </a:ln>
+              <a:effectLst/>
+            </p:spPr>
+            <p:txBody>
+              <a:bodyPr vert="horz" wrap="none" lIns="180000" tIns="72000" rIns="180000" bIns="72000" numCol="1" anchor="ctr" anchorCtr="0" compatLnSpc="1">
+                <a:prstTxWarp prst="textNoShape">
+                  <a:avLst/>
+                </a:prstTxWarp>
+                <a:spAutoFit/>
+              </a:bodyPr>
+              <a:lstStyle/>
+              <a:p>
+                <a:pPr marL="0" marR="0" lvl="0" indent="0" algn="ctr" defTabSz="914400" rtl="0" eaLnBrk="0" fontAlgn="base" latinLnBrk="0" hangingPunct="0">
+                  <a:lnSpc>
+                    <a:spcPct val="100000"/>
+                  </a:lnSpc>
+                  <a:spcBef>
+                    <a:spcPct val="0"/>
+                  </a:spcBef>
+                  <a:spcAft>
+                    <a:spcPct val="0"/>
+                  </a:spcAft>
+                  <a:buClrTx/>
+                  <a:buSzTx/>
+                  <a:buFontTx/>
+                  <a:buNone/>
+                  <a:tabLst/>
+                </a:pPr>
+                <a:r>
+                  <a:rPr kumimoji="0" lang="en-US" altLang="en-US" sz="2000" b="0" i="0" u="none" strike="noStrike" cap="none" normalizeH="0" baseline="0" dirty="0" err="1">
+                    <a:ln>
+                      <a:noFill/>
+                    </a:ln>
+                    <a:solidFill>
+                      <a:srgbClr val="C792EA"/>
+                    </a:solidFill>
+                    <a:effectLst/>
+                    <a:latin typeface="Fira Sans" panose="020B0503050000020004" pitchFamily="34" charset="0"/>
+                    <a:ea typeface="Fira Mono" panose="020B0509050000020004" pitchFamily="49" charset="0"/>
+                  </a:rPr>
+                  <a:t>iterable</a:t>
+                </a:r>
+                <a:r>
+                  <a:rPr kumimoji="0" lang="en-US" altLang="en-US" sz="2000" b="0" i="0" u="none" strike="noStrike" cap="none" normalizeH="0" baseline="0" dirty="0">
+                    <a:ln>
+                      <a:noFill/>
+                    </a:ln>
+                    <a:solidFill>
+                      <a:srgbClr val="C792EA"/>
+                    </a:solidFill>
+                    <a:effectLst/>
+                    <a:latin typeface="Fira Sans" panose="020B0503050000020004" pitchFamily="34" charset="0"/>
+                    <a:ea typeface="Fira Mono" panose="020B0509050000020004" pitchFamily="49" charset="0"/>
+                  </a:rPr>
+                  <a:t> 2</a:t>
+                </a:r>
+              </a:p>
+            </p:txBody>
+          </p:sp>
+        </p:grpSp>
+        <p:sp>
+          <p:nvSpPr>
+            <p:cNvPr id="16" name="Rectangle 15">
+              <a:extLst>
+                <a:ext uri="{FF2B5EF4-FFF2-40B4-BE49-F238E27FC236}">
+                  <a16:creationId xmlns:a16="http://schemas.microsoft.com/office/drawing/2014/main" id="{D6FC598A-2A44-7AA0-6746-A6DA447D70AD}"/>
+                </a:ext>
+              </a:extLst>
+            </p:cNvPr>
+            <p:cNvSpPr/>
+            <p:nvPr/>
+          </p:nvSpPr>
+          <p:spPr>
+            <a:xfrm>
+              <a:off x="7934601" y="412124"/>
+              <a:ext cx="3070396" cy="5756856"/>
+            </a:xfrm>
+            <a:prstGeom prst="rect">
+              <a:avLst/>
+            </a:prstGeom>
+            <a:solidFill>
+              <a:schemeClr val="bg1">
+                <a:alpha val="20000"/>
+              </a:schemeClr>
+            </a:solidFill>
+            <a:ln>
+              <a:noFill/>
+            </a:ln>
+          </p:spPr>
+          <p:style>
+            <a:lnRef idx="2">
+              <a:schemeClr val="accent1">
+                <a:shade val="15000"/>
+              </a:schemeClr>
+            </a:lnRef>
+            <a:fillRef idx="1">
+              <a:schemeClr val="accent1"/>
+            </a:fillRef>
+            <a:effectRef idx="0">
+              <a:schemeClr val="accent1"/>
+            </a:effectRef>
+            <a:fontRef idx="minor">
+              <a:schemeClr val="lt1"/>
+            </a:fontRef>
+          </p:style>
+          <p:txBody>
+            <a:bodyPr rtlCol="0" anchor="ctr"/>
+            <a:lstStyle/>
+            <a:p>
+              <a:pPr algn="ctr"/>
+              <a:endParaRPr lang="en-GB"/>
+            </a:p>
+          </p:txBody>
+        </p:sp>
+        <p:sp>
+          <p:nvSpPr>
+            <p:cNvPr id="17" name="Rectangle 16">
+              <a:extLst>
+                <a:ext uri="{FF2B5EF4-FFF2-40B4-BE49-F238E27FC236}">
+                  <a16:creationId xmlns:a16="http://schemas.microsoft.com/office/drawing/2014/main" id="{E31ABF70-3A5E-4784-D29A-7F644C65111E}"/>
+                </a:ext>
+              </a:extLst>
+            </p:cNvPr>
+            <p:cNvSpPr>
+              <a:spLocks noChangeArrowheads="1"/>
+            </p:cNvSpPr>
+            <p:nvPr/>
+          </p:nvSpPr>
+          <p:spPr bwMode="auto">
+            <a:xfrm>
+              <a:off x="8278745" y="1073272"/>
+              <a:ext cx="2479479" cy="4878882"/>
+            </a:xfrm>
+            <a:prstGeom prst="rect">
+              <a:avLst/>
+            </a:prstGeom>
+            <a:noFill/>
+            <a:ln>
+              <a:noFill/>
+            </a:ln>
+            <a:effectLst/>
+          </p:spPr>
+          <p:txBody>
+            <a:bodyPr vert="horz" wrap="none" lIns="180000" tIns="72000" rIns="180000" bIns="72000" numCol="1" anchor="t" anchorCtr="0" compatLnSpc="1">
+              <a:prstTxWarp prst="textNoShape">
+                <a:avLst/>
+              </a:prstTxWarp>
+              <a:spAutoFit/>
+            </a:bodyPr>
+            <a:lstStyle/>
+            <a:p>
+              <a:pPr marL="0" marR="0" lvl="0" indent="0" algn="ctr" defTabSz="914400" rtl="0" eaLnBrk="0" fontAlgn="base" latinLnBrk="0" hangingPunct="0">
+                <a:lnSpc>
+                  <a:spcPct val="125000"/>
+                </a:lnSpc>
+                <a:spcBef>
+                  <a:spcPct val="0"/>
+                </a:spcBef>
+                <a:spcAft>
+                  <a:spcPct val="0"/>
+                </a:spcAft>
+                <a:buClrTx/>
+                <a:buSzTx/>
+                <a:buFontTx/>
+                <a:buNone/>
+                <a:tabLst/>
+              </a:pPr>
+              <a:r>
+                <a:rPr kumimoji="0" lang="en-US" altLang="en-US" sz="5000" b="0" i="0" u="none" strike="noStrike" cap="none" normalizeH="0" baseline="0" dirty="0">
+                  <a:ln>
+                    <a:noFill/>
+                  </a:ln>
+                  <a:solidFill>
+                    <a:srgbClr val="D6DEEB">
+                      <a:alpha val="20000"/>
+                    </a:srgbClr>
+                  </a:solidFill>
+                  <a:effectLst/>
+                  <a:latin typeface="Consolas" panose="020B0609020204030204" pitchFamily="49" charset="0"/>
+                </a:rPr>
+                <a:t>(</a:t>
+              </a:r>
+              <a:r>
+                <a:rPr kumimoji="0" lang="en-US" altLang="en-US" sz="5000" b="0" i="0" u="none" strike="noStrike" cap="none" normalizeH="0" baseline="0" dirty="0">
+                  <a:ln>
+                    <a:noFill/>
+                  </a:ln>
+                  <a:solidFill>
+                    <a:srgbClr val="D6DEEB"/>
+                  </a:solidFill>
+                  <a:effectLst/>
+                  <a:latin typeface="Consolas" panose="020B0609020204030204" pitchFamily="49" charset="0"/>
+                </a:rPr>
+                <a:t>a</a:t>
+              </a:r>
+              <a:r>
+                <a:rPr kumimoji="0" lang="en-US" altLang="en-US" sz="5000" b="0" i="0" u="none" strike="noStrike" cap="none" normalizeH="0" baseline="0" dirty="0">
+                  <a:ln>
+                    <a:noFill/>
+                  </a:ln>
+                  <a:solidFill>
+                    <a:srgbClr val="D6DEEB">
+                      <a:alpha val="20000"/>
+                    </a:srgbClr>
+                  </a:solidFill>
+                  <a:effectLst/>
+                  <a:latin typeface="Consolas" panose="020B0609020204030204" pitchFamily="49" charset="0"/>
+                </a:rPr>
+                <a:t>,</a:t>
+              </a:r>
+              <a:r>
+                <a:rPr kumimoji="0" lang="en-US" altLang="en-US" sz="5000" b="0" i="0" u="none" strike="noStrike" cap="none" normalizeH="0" baseline="0" dirty="0">
+                  <a:ln>
+                    <a:noFill/>
+                  </a:ln>
+                  <a:solidFill>
+                    <a:srgbClr val="D6DEEB"/>
+                  </a:solidFill>
+                  <a:effectLst/>
+                  <a:latin typeface="Consolas" panose="020B0609020204030204" pitchFamily="49" charset="0"/>
+                </a:rPr>
+                <a:t> p</a:t>
+              </a:r>
+              <a:r>
+                <a:rPr kumimoji="0" lang="en-US" altLang="en-US" sz="5000" b="0" i="0" u="none" strike="noStrike" cap="none" normalizeH="0" baseline="0" dirty="0">
+                  <a:ln>
+                    <a:noFill/>
+                  </a:ln>
+                  <a:solidFill>
+                    <a:srgbClr val="D6DEEB">
+                      <a:alpha val="20000"/>
+                    </a:srgbClr>
+                  </a:solidFill>
+                  <a:effectLst/>
+                  <a:latin typeface="Consolas" panose="020B0609020204030204" pitchFamily="49" charset="0"/>
+                </a:rPr>
+                <a:t>)</a:t>
+              </a:r>
+            </a:p>
+            <a:p>
+              <a:pPr marL="0" marR="0" lvl="0" indent="0" algn="ctr" defTabSz="914400" rtl="0" eaLnBrk="0" fontAlgn="base" latinLnBrk="0" hangingPunct="0">
+                <a:lnSpc>
+                  <a:spcPct val="125000"/>
+                </a:lnSpc>
+                <a:spcBef>
+                  <a:spcPct val="0"/>
+                </a:spcBef>
+                <a:spcAft>
+                  <a:spcPct val="0"/>
+                </a:spcAft>
+                <a:buClrTx/>
+                <a:buSzTx/>
+                <a:buFontTx/>
+                <a:buNone/>
+                <a:tabLst/>
+              </a:pPr>
+              <a:r>
+                <a:rPr lang="en-US" altLang="en-US" sz="5000" dirty="0">
+                  <a:solidFill>
+                    <a:srgbClr val="D6DEEB">
+                      <a:alpha val="20000"/>
+                    </a:srgbClr>
+                  </a:solidFill>
+                  <a:latin typeface="Consolas" panose="020B0609020204030204" pitchFamily="49" charset="0"/>
+                </a:rPr>
+                <a:t>(</a:t>
+              </a:r>
+              <a:r>
+                <a:rPr lang="en-US" altLang="en-US" sz="5000" dirty="0">
+                  <a:solidFill>
+                    <a:srgbClr val="D6DEEB"/>
+                  </a:solidFill>
+                  <a:latin typeface="Consolas" panose="020B0609020204030204" pitchFamily="49" charset="0"/>
+                </a:rPr>
+                <a:t>b</a:t>
+              </a:r>
+              <a:r>
+                <a:rPr lang="en-US" altLang="en-US" sz="5000" dirty="0">
+                  <a:solidFill>
+                    <a:srgbClr val="D6DEEB">
+                      <a:alpha val="20000"/>
+                    </a:srgbClr>
+                  </a:solidFill>
+                  <a:latin typeface="Consolas" panose="020B0609020204030204" pitchFamily="49" charset="0"/>
+                </a:rPr>
+                <a:t>,</a:t>
+              </a:r>
+              <a:r>
+                <a:rPr lang="en-US" altLang="en-US" sz="5000" dirty="0">
+                  <a:solidFill>
+                    <a:srgbClr val="D6DEEB"/>
+                  </a:solidFill>
+                  <a:latin typeface="Consolas" panose="020B0609020204030204" pitchFamily="49" charset="0"/>
+                </a:rPr>
+                <a:t> q</a:t>
+              </a:r>
+              <a:r>
+                <a:rPr lang="en-US" altLang="en-US" sz="5000" dirty="0">
+                  <a:solidFill>
+                    <a:srgbClr val="D6DEEB">
+                      <a:alpha val="20000"/>
+                    </a:srgbClr>
+                  </a:solidFill>
+                  <a:latin typeface="Consolas" panose="020B0609020204030204" pitchFamily="49" charset="0"/>
+                </a:rPr>
+                <a:t>)</a:t>
+              </a:r>
+            </a:p>
+            <a:p>
+              <a:pPr marL="0" marR="0" lvl="0" indent="0" algn="ctr" defTabSz="914400" rtl="0" eaLnBrk="0" fontAlgn="base" latinLnBrk="0" hangingPunct="0">
+                <a:lnSpc>
+                  <a:spcPct val="125000"/>
+                </a:lnSpc>
+                <a:spcBef>
+                  <a:spcPct val="0"/>
+                </a:spcBef>
+                <a:spcAft>
+                  <a:spcPct val="0"/>
+                </a:spcAft>
+                <a:buClrTx/>
+                <a:buSzTx/>
+                <a:buFontTx/>
+                <a:buNone/>
+                <a:tabLst/>
+              </a:pPr>
+              <a:r>
+                <a:rPr lang="en-US" altLang="en-US" sz="5000" dirty="0">
+                  <a:solidFill>
+                    <a:srgbClr val="D6DEEB">
+                      <a:alpha val="20000"/>
+                    </a:srgbClr>
+                  </a:solidFill>
+                  <a:latin typeface="Consolas" panose="020B0609020204030204" pitchFamily="49" charset="0"/>
+                </a:rPr>
+                <a:t>(</a:t>
+              </a:r>
+              <a:r>
+                <a:rPr lang="en-US" altLang="en-US" sz="5000" dirty="0">
+                  <a:solidFill>
+                    <a:srgbClr val="D6DEEB"/>
+                  </a:solidFill>
+                  <a:latin typeface="Consolas" panose="020B0609020204030204" pitchFamily="49" charset="0"/>
+                </a:rPr>
+                <a:t>c</a:t>
+              </a:r>
+              <a:r>
+                <a:rPr lang="en-US" altLang="en-US" sz="5000" dirty="0">
+                  <a:solidFill>
+                    <a:srgbClr val="D6DEEB">
+                      <a:alpha val="20000"/>
+                    </a:srgbClr>
+                  </a:solidFill>
+                  <a:latin typeface="Consolas" panose="020B0609020204030204" pitchFamily="49" charset="0"/>
+                </a:rPr>
+                <a:t>,</a:t>
+              </a:r>
+              <a:r>
+                <a:rPr lang="en-US" altLang="en-US" sz="5000" dirty="0">
+                  <a:solidFill>
+                    <a:srgbClr val="D6DEEB"/>
+                  </a:solidFill>
+                  <a:latin typeface="Consolas" panose="020B0609020204030204" pitchFamily="49" charset="0"/>
+                </a:rPr>
+                <a:t> r</a:t>
+              </a:r>
+              <a:r>
+                <a:rPr lang="en-US" altLang="en-US" sz="5000" dirty="0">
+                  <a:solidFill>
+                    <a:srgbClr val="D6DEEB">
+                      <a:alpha val="20000"/>
+                    </a:srgbClr>
+                  </a:solidFill>
+                  <a:latin typeface="Consolas" panose="020B0609020204030204" pitchFamily="49" charset="0"/>
+                </a:rPr>
+                <a:t>)</a:t>
+              </a:r>
+              <a:endParaRPr kumimoji="0" lang="en-US" altLang="en-US" sz="5000" b="0" i="0" u="none" strike="noStrike" cap="none" normalizeH="0" baseline="0" dirty="0">
+                <a:ln>
+                  <a:noFill/>
+                </a:ln>
+                <a:solidFill>
+                  <a:srgbClr val="D6DEEB">
+                    <a:alpha val="20000"/>
+                  </a:srgbClr>
+                </a:solidFill>
+                <a:effectLst/>
+                <a:latin typeface="Consolas" panose="020B0609020204030204" pitchFamily="49" charset="0"/>
+              </a:endParaRPr>
+            </a:p>
+            <a:p>
+              <a:pPr marL="0" marR="0" lvl="0" indent="0" algn="ctr" defTabSz="914400" rtl="0" eaLnBrk="0" fontAlgn="base" latinLnBrk="0" hangingPunct="0">
+                <a:lnSpc>
+                  <a:spcPct val="125000"/>
+                </a:lnSpc>
+                <a:spcBef>
+                  <a:spcPct val="0"/>
+                </a:spcBef>
+                <a:spcAft>
+                  <a:spcPct val="0"/>
+                </a:spcAft>
+                <a:buClrTx/>
+                <a:buSzTx/>
+                <a:buFontTx/>
+                <a:buNone/>
+                <a:tabLst/>
+              </a:pPr>
+              <a:r>
+                <a:rPr lang="en-US" altLang="en-US" sz="5000" dirty="0">
+                  <a:solidFill>
+                    <a:srgbClr val="D6DEEB">
+                      <a:alpha val="20000"/>
+                    </a:srgbClr>
+                  </a:solidFill>
+                  <a:latin typeface="Consolas" panose="020B0609020204030204" pitchFamily="49" charset="0"/>
+                </a:rPr>
+                <a:t>(</a:t>
+              </a:r>
+              <a:r>
+                <a:rPr lang="en-US" altLang="en-US" sz="5000" dirty="0">
+                  <a:solidFill>
+                    <a:srgbClr val="D6DEEB"/>
+                  </a:solidFill>
+                  <a:latin typeface="Consolas" panose="020B0609020204030204" pitchFamily="49" charset="0"/>
+                </a:rPr>
+                <a:t>d</a:t>
+              </a:r>
+              <a:r>
+                <a:rPr lang="en-US" altLang="en-US" sz="5000" dirty="0">
+                  <a:solidFill>
+                    <a:srgbClr val="D6DEEB">
+                      <a:alpha val="20000"/>
+                    </a:srgbClr>
+                  </a:solidFill>
+                  <a:latin typeface="Consolas" panose="020B0609020204030204" pitchFamily="49" charset="0"/>
+                </a:rPr>
+                <a:t>,</a:t>
+              </a:r>
+              <a:r>
+                <a:rPr lang="en-US" altLang="en-US" sz="5000" dirty="0">
+                  <a:solidFill>
+                    <a:srgbClr val="D6DEEB"/>
+                  </a:solidFill>
+                  <a:latin typeface="Consolas" panose="020B0609020204030204" pitchFamily="49" charset="0"/>
+                </a:rPr>
+                <a:t> s</a:t>
+              </a:r>
+              <a:r>
+                <a:rPr lang="en-US" altLang="en-US" sz="5000" dirty="0">
+                  <a:solidFill>
+                    <a:srgbClr val="D6DEEB">
+                      <a:alpha val="20000"/>
+                    </a:srgbClr>
+                  </a:solidFill>
+                  <a:latin typeface="Consolas" panose="020B0609020204030204" pitchFamily="49" charset="0"/>
+                </a:rPr>
+                <a:t>)</a:t>
+              </a:r>
+            </a:p>
+            <a:p>
+              <a:pPr marL="0" marR="0" lvl="0" indent="0" algn="ctr" defTabSz="914400" rtl="0" eaLnBrk="0" fontAlgn="base" latinLnBrk="0" hangingPunct="0">
+                <a:lnSpc>
+                  <a:spcPct val="125000"/>
+                </a:lnSpc>
+                <a:spcBef>
+                  <a:spcPct val="0"/>
+                </a:spcBef>
+                <a:spcAft>
+                  <a:spcPct val="0"/>
+                </a:spcAft>
+                <a:buClrTx/>
+                <a:buSzTx/>
+                <a:buFontTx/>
+                <a:buNone/>
+                <a:tabLst/>
+              </a:pPr>
+              <a:r>
+                <a:rPr lang="en-US" altLang="en-US" sz="5000" dirty="0">
+                  <a:solidFill>
+                    <a:srgbClr val="D6DEEB">
+                      <a:alpha val="20000"/>
+                    </a:srgbClr>
+                  </a:solidFill>
+                  <a:latin typeface="Consolas" panose="020B0609020204030204" pitchFamily="49" charset="0"/>
+                </a:rPr>
+                <a:t>(</a:t>
+              </a:r>
+              <a:r>
+                <a:rPr lang="en-US" altLang="en-US" sz="5000" dirty="0">
+                  <a:solidFill>
+                    <a:srgbClr val="D6DEEB"/>
+                  </a:solidFill>
+                  <a:latin typeface="Consolas" panose="020B0609020204030204" pitchFamily="49" charset="0"/>
+                </a:rPr>
+                <a:t>e</a:t>
+              </a:r>
+              <a:r>
+                <a:rPr lang="en-US" altLang="en-US" sz="5000" dirty="0">
+                  <a:solidFill>
+                    <a:srgbClr val="D6DEEB">
+                      <a:alpha val="20000"/>
+                    </a:srgbClr>
+                  </a:solidFill>
+                  <a:latin typeface="Consolas" panose="020B0609020204030204" pitchFamily="49" charset="0"/>
+                </a:rPr>
+                <a:t>,</a:t>
+              </a:r>
+              <a:r>
+                <a:rPr lang="en-US" altLang="en-US" sz="5000" dirty="0">
+                  <a:solidFill>
+                    <a:srgbClr val="D6DEEB"/>
+                  </a:solidFill>
+                  <a:latin typeface="Consolas" panose="020B0609020204030204" pitchFamily="49" charset="0"/>
+                </a:rPr>
+                <a:t> t</a:t>
+              </a:r>
+              <a:r>
+                <a:rPr lang="en-US" altLang="en-US" sz="5000" dirty="0">
+                  <a:solidFill>
+                    <a:srgbClr val="D6DEEB">
+                      <a:alpha val="20000"/>
+                    </a:srgbClr>
+                  </a:solidFill>
+                  <a:latin typeface="Consolas" panose="020B0609020204030204" pitchFamily="49" charset="0"/>
+                </a:rPr>
+                <a:t>)</a:t>
+              </a:r>
+              <a:endParaRPr kumimoji="0" lang="en-US" altLang="en-US" sz="5000" b="0" i="0" u="none" strike="noStrike" cap="none" normalizeH="0" baseline="0" dirty="0">
+                <a:ln>
+                  <a:noFill/>
+                </a:ln>
+                <a:solidFill>
+                  <a:srgbClr val="D6DEEB">
+                    <a:alpha val="20000"/>
+                  </a:srgbClr>
+                </a:solidFill>
+                <a:effectLst/>
+                <a:latin typeface="Consolas" panose="020B0609020204030204" pitchFamily="49" charset="0"/>
+              </a:endParaRPr>
+            </a:p>
+          </p:txBody>
+        </p:sp>
+        <p:sp>
+          <p:nvSpPr>
+            <p:cNvPr id="18" name="Rectangle 17">
+              <a:extLst>
+                <a:ext uri="{FF2B5EF4-FFF2-40B4-BE49-F238E27FC236}">
+                  <a16:creationId xmlns:a16="http://schemas.microsoft.com/office/drawing/2014/main" id="{10C1CCA8-0793-6FE3-1556-894C56E206FC}"/>
+                </a:ext>
+              </a:extLst>
+            </p:cNvPr>
+            <p:cNvSpPr>
+              <a:spLocks noChangeArrowheads="1"/>
+            </p:cNvSpPr>
+            <p:nvPr/>
+          </p:nvSpPr>
+          <p:spPr bwMode="auto">
+            <a:xfrm>
+              <a:off x="8945593" y="538736"/>
+              <a:ext cx="1145782" cy="453183"/>
+            </a:xfrm>
+            <a:prstGeom prst="rect">
+              <a:avLst/>
+            </a:prstGeom>
+            <a:noFill/>
+            <a:ln>
+              <a:noFill/>
+            </a:ln>
+            <a:effectLst/>
+          </p:spPr>
+          <p:txBody>
+            <a:bodyPr vert="horz" wrap="none" lIns="180000" tIns="72000" rIns="180000" bIns="72000" numCol="1" anchor="ctr" anchorCtr="0" compatLnSpc="1">
+              <a:prstTxWarp prst="textNoShape">
+                <a:avLst/>
+              </a:prstTxWarp>
+              <a:spAutoFit/>
+            </a:bodyPr>
+            <a:lstStyle/>
+            <a:p>
+              <a:pPr marL="0" marR="0" lvl="0" indent="0" algn="ctr" defTabSz="914400" rtl="0" eaLnBrk="0" fontAlgn="base" latinLnBrk="0" hangingPunct="0">
+                <a:lnSpc>
+                  <a:spcPct val="100000"/>
+                </a:lnSpc>
+                <a:spcBef>
+                  <a:spcPct val="0"/>
+                </a:spcBef>
+                <a:spcAft>
+                  <a:spcPct val="0"/>
+                </a:spcAft>
+                <a:buClrTx/>
+                <a:buSzTx/>
+                <a:buFontTx/>
+                <a:buNone/>
+                <a:tabLst/>
+              </a:pPr>
+              <a:r>
+                <a:rPr kumimoji="0" lang="en-US" altLang="en-US" sz="2000" b="0" i="0" u="none" strike="noStrike" cap="none" normalizeH="0" baseline="0" dirty="0">
+                  <a:ln>
+                    <a:noFill/>
+                  </a:ln>
+                  <a:solidFill>
+                    <a:srgbClr val="ADDB67"/>
+                  </a:solidFill>
+                  <a:effectLst/>
+                  <a:latin typeface="Fira Sans" panose="020B0503050000020004" pitchFamily="34" charset="0"/>
+                  <a:ea typeface="Fira Mono" panose="020B0509050000020004" pitchFamily="49" charset="0"/>
+                </a:rPr>
+                <a:t>zipped</a:t>
+              </a:r>
+            </a:p>
+          </p:txBody>
+        </p:sp>
+        <p:grpSp>
+          <p:nvGrpSpPr>
+            <p:cNvPr id="33" name="Group 32">
+              <a:extLst>
+                <a:ext uri="{FF2B5EF4-FFF2-40B4-BE49-F238E27FC236}">
+                  <a16:creationId xmlns:a16="http://schemas.microsoft.com/office/drawing/2014/main" id="{6CCCDDFA-E135-5EFB-BF22-B228E414C790}"/>
+                </a:ext>
+              </a:extLst>
+            </p:cNvPr>
+            <p:cNvGrpSpPr/>
+            <p:nvPr/>
+          </p:nvGrpSpPr>
+          <p:grpSpPr>
+            <a:xfrm>
+              <a:off x="7322976" y="1707969"/>
+              <a:ext cx="867988" cy="3805707"/>
+              <a:chOff x="5277726" y="1707969"/>
+              <a:chExt cx="901642" cy="3805707"/>
+            </a:xfrm>
+          </p:grpSpPr>
+          <p:cxnSp>
+            <p:nvCxnSpPr>
+              <p:cNvPr id="34" name="Straight Arrow Connector 33">
+                <a:extLst>
+                  <a:ext uri="{FF2B5EF4-FFF2-40B4-BE49-F238E27FC236}">
+                    <a16:creationId xmlns:a16="http://schemas.microsoft.com/office/drawing/2014/main" id="{39821751-7A53-78D0-1AC0-AC2777425361}"/>
+                  </a:ext>
+                </a:extLst>
+              </p:cNvPr>
+              <p:cNvCxnSpPr>
+                <a:cxnSpLocks/>
+              </p:cNvCxnSpPr>
+              <p:nvPr/>
+            </p:nvCxnSpPr>
+            <p:spPr>
+              <a:xfrm>
+                <a:off x="5277726" y="1707969"/>
+                <a:ext cx="901642" cy="0"/>
+              </a:xfrm>
+              <a:prstGeom prst="straightConnector1">
+                <a:avLst/>
+              </a:prstGeom>
+              <a:noFill/>
+              <a:ln w="25400">
+                <a:solidFill>
+                  <a:srgbClr val="ADDB67"/>
+                </a:solidFill>
+                <a:tailEnd type="arrow"/>
+              </a:ln>
+            </p:spPr>
+            <p:style>
+              <a:lnRef idx="2">
+                <a:schemeClr val="accent1">
+                  <a:shade val="15000"/>
+                </a:schemeClr>
+              </a:lnRef>
+              <a:fillRef idx="1">
+                <a:schemeClr val="accent1"/>
+              </a:fillRef>
+              <a:effectRef idx="0">
+                <a:schemeClr val="accent1"/>
+              </a:effectRef>
+              <a:fontRef idx="minor">
+                <a:schemeClr val="lt1"/>
+              </a:fontRef>
+            </p:style>
+          </p:cxnSp>
+          <p:cxnSp>
+            <p:nvCxnSpPr>
+              <p:cNvPr id="35" name="Straight Arrow Connector 34">
+                <a:extLst>
+                  <a:ext uri="{FF2B5EF4-FFF2-40B4-BE49-F238E27FC236}">
+                    <a16:creationId xmlns:a16="http://schemas.microsoft.com/office/drawing/2014/main" id="{B0EFD5D1-CEAC-DC44-47F5-B05398950C36}"/>
+                  </a:ext>
+                </a:extLst>
+              </p:cNvPr>
+              <p:cNvCxnSpPr>
+                <a:cxnSpLocks/>
+              </p:cNvCxnSpPr>
+              <p:nvPr/>
+            </p:nvCxnSpPr>
+            <p:spPr>
+              <a:xfrm>
+                <a:off x="5277726" y="2659396"/>
+                <a:ext cx="901642" cy="0"/>
+              </a:xfrm>
+              <a:prstGeom prst="straightConnector1">
+                <a:avLst/>
+              </a:prstGeom>
+              <a:noFill/>
+              <a:ln w="25400">
+                <a:solidFill>
+                  <a:srgbClr val="ADDB67"/>
+                </a:solidFill>
+                <a:tailEnd type="arrow"/>
+              </a:ln>
+            </p:spPr>
+            <p:style>
+              <a:lnRef idx="2">
+                <a:schemeClr val="accent1">
+                  <a:shade val="15000"/>
+                </a:schemeClr>
+              </a:lnRef>
+              <a:fillRef idx="1">
+                <a:schemeClr val="accent1"/>
+              </a:fillRef>
+              <a:effectRef idx="0">
+                <a:schemeClr val="accent1"/>
+              </a:effectRef>
+              <a:fontRef idx="minor">
+                <a:schemeClr val="lt1"/>
+              </a:fontRef>
+            </p:style>
+          </p:cxnSp>
+          <p:cxnSp>
+            <p:nvCxnSpPr>
+              <p:cNvPr id="36" name="Straight Arrow Connector 35">
+                <a:extLst>
+                  <a:ext uri="{FF2B5EF4-FFF2-40B4-BE49-F238E27FC236}">
+                    <a16:creationId xmlns:a16="http://schemas.microsoft.com/office/drawing/2014/main" id="{BECF4BC2-B193-868A-4687-9187D34CA90A}"/>
+                  </a:ext>
+                </a:extLst>
+              </p:cNvPr>
+              <p:cNvCxnSpPr>
+                <a:cxnSpLocks/>
+              </p:cNvCxnSpPr>
+              <p:nvPr/>
+            </p:nvCxnSpPr>
+            <p:spPr>
+              <a:xfrm>
+                <a:off x="5277726" y="3610823"/>
+                <a:ext cx="901642" cy="0"/>
+              </a:xfrm>
+              <a:prstGeom prst="straightConnector1">
+                <a:avLst/>
+              </a:prstGeom>
+              <a:noFill/>
+              <a:ln w="25400">
+                <a:solidFill>
+                  <a:srgbClr val="ADDB67"/>
+                </a:solidFill>
+                <a:tailEnd type="arrow"/>
+              </a:ln>
+            </p:spPr>
+            <p:style>
+              <a:lnRef idx="2">
+                <a:schemeClr val="accent1">
+                  <a:shade val="15000"/>
+                </a:schemeClr>
+              </a:lnRef>
+              <a:fillRef idx="1">
+                <a:schemeClr val="accent1"/>
+              </a:fillRef>
+              <a:effectRef idx="0">
+                <a:schemeClr val="accent1"/>
+              </a:effectRef>
+              <a:fontRef idx="minor">
+                <a:schemeClr val="lt1"/>
+              </a:fontRef>
+            </p:style>
+          </p:cxnSp>
+          <p:cxnSp>
+            <p:nvCxnSpPr>
+              <p:cNvPr id="37" name="Straight Arrow Connector 36">
+                <a:extLst>
+                  <a:ext uri="{FF2B5EF4-FFF2-40B4-BE49-F238E27FC236}">
+                    <a16:creationId xmlns:a16="http://schemas.microsoft.com/office/drawing/2014/main" id="{1561A4A9-FDCA-7C40-6803-8AFB7B97FC82}"/>
+                  </a:ext>
+                </a:extLst>
+              </p:cNvPr>
+              <p:cNvCxnSpPr>
+                <a:cxnSpLocks/>
+              </p:cNvCxnSpPr>
+              <p:nvPr/>
+            </p:nvCxnSpPr>
+            <p:spPr>
+              <a:xfrm>
+                <a:off x="5277726" y="4562250"/>
+                <a:ext cx="901642" cy="0"/>
+              </a:xfrm>
+              <a:prstGeom prst="straightConnector1">
+                <a:avLst/>
+              </a:prstGeom>
+              <a:noFill/>
+              <a:ln w="25400">
+                <a:solidFill>
+                  <a:srgbClr val="ADDB67"/>
+                </a:solidFill>
+                <a:tailEnd type="arrow"/>
+              </a:ln>
+            </p:spPr>
+            <p:style>
+              <a:lnRef idx="2">
+                <a:schemeClr val="accent1">
+                  <a:shade val="15000"/>
+                </a:schemeClr>
+              </a:lnRef>
+              <a:fillRef idx="1">
+                <a:schemeClr val="accent1"/>
+              </a:fillRef>
+              <a:effectRef idx="0">
+                <a:schemeClr val="accent1"/>
+              </a:effectRef>
+              <a:fontRef idx="minor">
+                <a:schemeClr val="lt1"/>
+              </a:fontRef>
+            </p:style>
+          </p:cxnSp>
+          <p:cxnSp>
+            <p:nvCxnSpPr>
+              <p:cNvPr id="38" name="Straight Arrow Connector 37">
+                <a:extLst>
+                  <a:ext uri="{FF2B5EF4-FFF2-40B4-BE49-F238E27FC236}">
+                    <a16:creationId xmlns:a16="http://schemas.microsoft.com/office/drawing/2014/main" id="{6468C00C-2B68-C06B-0B51-720C33FC4A0E}"/>
+                  </a:ext>
+                </a:extLst>
+              </p:cNvPr>
+              <p:cNvCxnSpPr>
+                <a:cxnSpLocks/>
+              </p:cNvCxnSpPr>
+              <p:nvPr/>
+            </p:nvCxnSpPr>
+            <p:spPr>
+              <a:xfrm>
+                <a:off x="5277726" y="5513676"/>
+                <a:ext cx="901642" cy="0"/>
+              </a:xfrm>
+              <a:prstGeom prst="straightConnector1">
+                <a:avLst/>
+              </a:prstGeom>
+              <a:noFill/>
+              <a:ln w="25400">
+                <a:solidFill>
+                  <a:srgbClr val="ADDB67"/>
+                </a:solidFill>
+                <a:tailEnd type="arrow"/>
+              </a:ln>
+            </p:spPr>
+            <p:style>
+              <a:lnRef idx="2">
+                <a:schemeClr val="accent1">
+                  <a:shade val="15000"/>
+                </a:schemeClr>
+              </a:lnRef>
+              <a:fillRef idx="1">
+                <a:schemeClr val="accent1"/>
+              </a:fillRef>
+              <a:effectRef idx="0">
+                <a:schemeClr val="accent1"/>
+              </a:effectRef>
+              <a:fontRef idx="minor">
+                <a:schemeClr val="lt1"/>
+              </a:fontRef>
+            </p:style>
+          </p:cxnSp>
+        </p:grpSp>
+      </p:grpSp>
+    </p:spTree>
+    <p:extLst>
+      <p:ext uri="{BB962C8B-B14F-4D97-AF65-F5344CB8AC3E}">
+        <p14:creationId xmlns:p14="http://schemas.microsoft.com/office/powerpoint/2010/main" val="2935706507"/>
+      </p:ext>
+    </p:extLst>
+  </p:cSld>
+  <p:clrMapOvr>
+    <a:masterClrMapping/>
+  </p:clrMapOvr>
+</p:sld>
+</file>
+
 <file path=ppt/slides/slide2.xml><?xml version="1.0" encoding="utf-8"?>
 <p:sld xmlns:a="http://schemas.openxmlformats.org/drawingml/2006/main" xmlns:r="http://schemas.openxmlformats.org/officeDocument/2006/relationships" xmlns:p="http://schemas.openxmlformats.org/presentationml/2006/main">
   <p:cSld>

--- a/assets/pycobytes.pptx
+++ b/assets/pycobytes.pptx
@@ -25,6 +25,7 @@
     <p:sldId id="272" r:id="rId19"/>
     <p:sldId id="274" r:id="rId20"/>
     <p:sldId id="275" r:id="rId21"/>
+    <p:sldId id="276" r:id="rId22"/>
   </p:sldIdLst>
   <p:sldSz cx="12192000" cy="6858000"/>
   <p:notesSz cx="6858000" cy="9144000"/>
@@ -8903,6 +8904,734 @@
 </p:sld>
 </file>
 
+<file path=ppt/slides/slide20.xml><?xml version="1.0" encoding="utf-8"?>
+<p:sld xmlns:a="http://schemas.openxmlformats.org/drawingml/2006/main" xmlns:r="http://schemas.openxmlformats.org/officeDocument/2006/relationships" xmlns:p="http://schemas.openxmlformats.org/presentationml/2006/main">
+  <p:cSld>
+    <p:spTree>
+      <p:nvGrpSpPr>
+        <p:cNvPr id="1" name=""/>
+        <p:cNvGrpSpPr/>
+        <p:nvPr/>
+      </p:nvGrpSpPr>
+      <p:grpSpPr>
+        <a:xfrm>
+          <a:off x="0" y="0"/>
+          <a:ext cx="0" cy="0"/>
+          <a:chOff x="0" y="0"/>
+          <a:chExt cx="0" cy="0"/>
+        </a:xfrm>
+      </p:grpSpPr>
+      <p:sp>
+        <p:nvSpPr>
+          <p:cNvPr id="3" name="Rectangle 2">
+            <a:extLst>
+              <a:ext uri="{FF2B5EF4-FFF2-40B4-BE49-F238E27FC236}">
+                <a16:creationId xmlns:a16="http://schemas.microsoft.com/office/drawing/2014/main" id="{B3D66869-0911-27B8-0480-27728D3FF76F}"/>
+              </a:ext>
+            </a:extLst>
+          </p:cNvPr>
+          <p:cNvSpPr/>
+          <p:nvPr/>
+        </p:nvSpPr>
+        <p:spPr>
+          <a:xfrm>
+            <a:off x="1953986" y="1466850"/>
+            <a:ext cx="8284028" cy="3924301"/>
+          </a:xfrm>
+          <a:prstGeom prst="rect">
+            <a:avLst/>
+          </a:prstGeom>
+          <a:solidFill>
+            <a:srgbClr val="011627"/>
+          </a:solidFill>
+          <a:ln>
+            <a:noFill/>
+          </a:ln>
+        </p:spPr>
+        <p:style>
+          <a:lnRef idx="2">
+            <a:schemeClr val="accent1">
+              <a:shade val="50000"/>
+            </a:schemeClr>
+          </a:lnRef>
+          <a:fillRef idx="1">
+            <a:schemeClr val="accent1"/>
+          </a:fillRef>
+          <a:effectRef idx="0">
+            <a:schemeClr val="accent1"/>
+          </a:effectRef>
+          <a:fontRef idx="minor">
+            <a:schemeClr val="lt1"/>
+          </a:fontRef>
+        </p:style>
+        <p:txBody>
+          <a:bodyPr rtlCol="0" anchor="ctr"/>
+          <a:lstStyle/>
+          <a:p>
+            <a:pPr algn="ctr"/>
+            <a:endParaRPr lang="en-GB" dirty="0"/>
+          </a:p>
+        </p:txBody>
+      </p:sp>
+      <p:sp>
+        <p:nvSpPr>
+          <p:cNvPr id="2" name="Rectangle 1">
+            <a:extLst>
+              <a:ext uri="{FF2B5EF4-FFF2-40B4-BE49-F238E27FC236}">
+                <a16:creationId xmlns:a16="http://schemas.microsoft.com/office/drawing/2014/main" id="{65E21C98-61D9-513E-6010-622672A01BFF}"/>
+              </a:ext>
+            </a:extLst>
+          </p:cNvPr>
+          <p:cNvSpPr>
+            <a:spLocks noChangeArrowheads="1"/>
+          </p:cNvSpPr>
+          <p:nvPr/>
+        </p:nvSpPr>
+        <p:spPr bwMode="auto">
+          <a:xfrm>
+            <a:off x="2393063" y="1771309"/>
+            <a:ext cx="7405874" cy="621915"/>
+          </a:xfrm>
+          <a:prstGeom prst="rect">
+            <a:avLst/>
+          </a:prstGeom>
+          <a:noFill/>
+          <a:ln>
+            <a:noFill/>
+          </a:ln>
+          <a:effectLst/>
+        </p:spPr>
+        <p:txBody>
+          <a:bodyPr vert="horz" wrap="none" lIns="0" tIns="79350" rIns="0" bIns="79350" numCol="1" anchor="ctr" anchorCtr="0" compatLnSpc="1">
+            <a:prstTxWarp prst="textNoShape">
+              <a:avLst/>
+            </a:prstTxWarp>
+            <a:spAutoFit/>
+          </a:bodyPr>
+          <a:lstStyle/>
+          <a:p>
+            <a:pPr marL="0" marR="0" lvl="0" indent="0" algn="ctr" defTabSz="914400" rtl="0" eaLnBrk="0" fontAlgn="base" latinLnBrk="0" hangingPunct="0">
+              <a:lnSpc>
+                <a:spcPct val="100000"/>
+              </a:lnSpc>
+              <a:spcBef>
+                <a:spcPct val="0"/>
+              </a:spcBef>
+              <a:spcAft>
+                <a:spcPct val="0"/>
+              </a:spcAft>
+              <a:buClrTx/>
+              <a:buSzTx/>
+              <a:buFontTx/>
+              <a:buNone/>
+              <a:tabLst/>
+            </a:pPr>
+            <a:r>
+              <a:rPr lang="en-US" altLang="en-US" sz="3000" dirty="0">
+                <a:solidFill>
+                  <a:srgbClr val="D6DEEB"/>
+                </a:solidFill>
+                <a:latin typeface="Consolas" panose="020B0609020204030204" pitchFamily="49" charset="0"/>
+              </a:rPr>
+              <a:t>{ </a:t>
+            </a:r>
+            <a:r>
+              <a:rPr kumimoji="0" lang="en-US" altLang="en-US" sz="3000" b="0" i="0" u="none" strike="noStrike" cap="none" normalizeH="0" baseline="0" dirty="0">
+                <a:ln>
+                  <a:noFill/>
+                </a:ln>
+                <a:solidFill>
+                  <a:srgbClr val="FFC720"/>
+                </a:solidFill>
+                <a:effectLst/>
+                <a:latin typeface="Consolas" panose="020B0609020204030204" pitchFamily="49" charset="0"/>
+              </a:rPr>
+              <a:t>key</a:t>
+            </a:r>
+            <a:r>
+              <a:rPr kumimoji="0" lang="en-US" altLang="en-US" sz="3000" b="0" i="0" u="none" strike="noStrike" cap="none" normalizeH="0" baseline="0" dirty="0">
+                <a:ln>
+                  <a:noFill/>
+                </a:ln>
+                <a:solidFill>
+                  <a:srgbClr val="D6DEEB"/>
+                </a:solidFill>
+                <a:effectLst/>
+                <a:latin typeface="Consolas" panose="020B0609020204030204" pitchFamily="49" charset="0"/>
+              </a:rPr>
+              <a:t>: </a:t>
+            </a:r>
+            <a:r>
+              <a:rPr kumimoji="0" lang="en-US" altLang="en-US" sz="3000" b="0" i="0" u="none" strike="noStrike" cap="none" normalizeH="0" baseline="0" dirty="0">
+                <a:ln>
+                  <a:noFill/>
+                </a:ln>
+                <a:solidFill>
+                  <a:srgbClr val="FF5874"/>
+                </a:solidFill>
+                <a:effectLst/>
+                <a:latin typeface="Consolas" panose="020B0609020204030204" pitchFamily="49" charset="0"/>
+              </a:rPr>
+              <a:t>value</a:t>
+            </a:r>
+            <a:r>
+              <a:rPr kumimoji="0" lang="en-US" altLang="en-US" sz="3000" b="0" i="0" u="none" strike="noStrike" cap="none" normalizeH="0" baseline="0" dirty="0">
+                <a:ln>
+                  <a:noFill/>
+                </a:ln>
+                <a:solidFill>
+                  <a:srgbClr val="D6DEEB"/>
+                </a:solidFill>
+                <a:effectLst/>
+                <a:latin typeface="Consolas" panose="020B0609020204030204" pitchFamily="49" charset="0"/>
+              </a:rPr>
+              <a:t> </a:t>
+            </a:r>
+            <a:r>
+              <a:rPr kumimoji="0" lang="en-US" altLang="en-US" sz="3000" b="0" i="0" u="none" strike="noStrike" cap="none" normalizeH="0" baseline="0" dirty="0">
+                <a:ln>
+                  <a:noFill/>
+                </a:ln>
+                <a:solidFill>
+                  <a:srgbClr val="7FDBCA"/>
+                </a:solidFill>
+                <a:effectLst/>
+                <a:latin typeface="Consolas" panose="020B0609020204030204" pitchFamily="49" charset="0"/>
+              </a:rPr>
+              <a:t>for</a:t>
+            </a:r>
+            <a:r>
+              <a:rPr kumimoji="0" lang="en-US" altLang="en-US" sz="3000" b="0" i="0" u="none" strike="noStrike" cap="none" normalizeH="0" baseline="0" dirty="0">
+                <a:ln>
+                  <a:noFill/>
+                </a:ln>
+                <a:solidFill>
+                  <a:srgbClr val="D6DEEB"/>
+                </a:solidFill>
+                <a:effectLst/>
+                <a:latin typeface="Consolas" panose="020B0609020204030204" pitchFamily="49" charset="0"/>
+              </a:rPr>
+              <a:t> each</a:t>
+            </a:r>
+            <a:r>
+              <a:rPr kumimoji="0" lang="en-US" altLang="en-US" sz="3000" b="0" i="0" u="none" strike="noStrike" cap="none" normalizeH="0" baseline="0" dirty="0">
+                <a:ln>
+                  <a:noFill/>
+                </a:ln>
+                <a:solidFill>
+                  <a:srgbClr val="7FDBCA"/>
+                </a:solidFill>
+                <a:effectLst/>
+                <a:latin typeface="Consolas" panose="020B0609020204030204" pitchFamily="49" charset="0"/>
+              </a:rPr>
+              <a:t> </a:t>
+            </a:r>
+            <a:r>
+              <a:rPr lang="en-US" altLang="en-US" sz="3000" dirty="0">
+                <a:solidFill>
+                  <a:srgbClr val="7FDBCA"/>
+                </a:solidFill>
+                <a:latin typeface="Consolas" panose="020B0609020204030204" pitchFamily="49" charset="0"/>
+              </a:rPr>
+              <a:t>in</a:t>
+            </a:r>
+            <a:r>
+              <a:rPr lang="en-US" altLang="en-US" sz="3000" dirty="0">
+                <a:solidFill>
+                  <a:schemeClr val="tx2">
+                    <a:lumMod val="75000"/>
+                  </a:schemeClr>
+                </a:solidFill>
+                <a:latin typeface="Consolas" panose="020B0609020204030204" pitchFamily="49" charset="0"/>
+              </a:rPr>
+              <a:t> </a:t>
+            </a:r>
+            <a:r>
+              <a:rPr lang="en-US" altLang="en-US" sz="3000" dirty="0" err="1">
+                <a:solidFill>
+                  <a:srgbClr val="D6DEEB"/>
+                </a:solidFill>
+                <a:latin typeface="Consolas" panose="020B0609020204030204" pitchFamily="49" charset="0"/>
+              </a:rPr>
+              <a:t>iterable</a:t>
+            </a:r>
+            <a:r>
+              <a:rPr lang="en-US" altLang="en-US" sz="3000" dirty="0">
+                <a:solidFill>
+                  <a:srgbClr val="D6DEEB"/>
+                </a:solidFill>
+                <a:latin typeface="Consolas" panose="020B0609020204030204" pitchFamily="49" charset="0"/>
+              </a:rPr>
+              <a:t> }</a:t>
+            </a:r>
+            <a:endParaRPr kumimoji="0" lang="en-US" altLang="en-US" sz="3000" b="0" i="0" u="none" strike="noStrike" cap="none" normalizeH="0" baseline="0" dirty="0">
+              <a:ln>
+                <a:noFill/>
+              </a:ln>
+              <a:solidFill>
+                <a:schemeClr val="tx2">
+                  <a:lumMod val="75000"/>
+                </a:schemeClr>
+              </a:solidFill>
+              <a:effectLst/>
+              <a:latin typeface="Consolas" panose="020B0609020204030204" pitchFamily="49" charset="0"/>
+            </a:endParaRPr>
+          </a:p>
+        </p:txBody>
+      </p:sp>
+      <p:sp>
+        <p:nvSpPr>
+          <p:cNvPr id="4" name="Rectangle 3">
+            <a:extLst>
+              <a:ext uri="{FF2B5EF4-FFF2-40B4-BE49-F238E27FC236}">
+                <a16:creationId xmlns:a16="http://schemas.microsoft.com/office/drawing/2014/main" id="{7B62C105-07DA-075F-45A4-40AB1A2E7368}"/>
+              </a:ext>
+            </a:extLst>
+          </p:cNvPr>
+          <p:cNvSpPr>
+            <a:spLocks noChangeArrowheads="1"/>
+          </p:cNvSpPr>
+          <p:nvPr/>
+        </p:nvSpPr>
+        <p:spPr bwMode="auto">
+          <a:xfrm>
+            <a:off x="2393063" y="3427087"/>
+            <a:ext cx="3385542" cy="1545244"/>
+          </a:xfrm>
+          <a:prstGeom prst="rect">
+            <a:avLst/>
+          </a:prstGeom>
+          <a:noFill/>
+          <a:ln>
+            <a:noFill/>
+          </a:ln>
+          <a:effectLst/>
+        </p:spPr>
+        <p:txBody>
+          <a:bodyPr vert="horz" wrap="none" lIns="0" tIns="79350" rIns="0" bIns="79350" numCol="1" anchor="t" anchorCtr="0" compatLnSpc="1">
+            <a:prstTxWarp prst="textNoShape">
+              <a:avLst/>
+            </a:prstTxWarp>
+            <a:spAutoFit/>
+          </a:bodyPr>
+          <a:lstStyle/>
+          <a:p>
+            <a:pPr marL="0" marR="0" lvl="0" indent="0" defTabSz="914400" rtl="0" eaLnBrk="0" fontAlgn="base" latinLnBrk="0" hangingPunct="0">
+              <a:lnSpc>
+                <a:spcPct val="100000"/>
+              </a:lnSpc>
+              <a:spcBef>
+                <a:spcPct val="0"/>
+              </a:spcBef>
+              <a:spcAft>
+                <a:spcPct val="0"/>
+              </a:spcAft>
+              <a:buClrTx/>
+              <a:buSzTx/>
+              <a:buFontTx/>
+              <a:buNone/>
+              <a:tabLst/>
+            </a:pPr>
+            <a:r>
+              <a:rPr lang="en-US" altLang="en-US" sz="3000" dirty="0">
+                <a:solidFill>
+                  <a:srgbClr val="D6DEEB">
+                    <a:alpha val="50000"/>
+                  </a:srgbClr>
+                </a:solidFill>
+                <a:latin typeface="Consolas" panose="020B0609020204030204" pitchFamily="49" charset="0"/>
+              </a:rPr>
+              <a:t>{ </a:t>
+            </a:r>
+            <a:r>
+              <a:rPr kumimoji="0" lang="en-US" altLang="en-US" sz="3000" b="0" i="0" u="none" strike="noStrike" cap="none" normalizeH="0" baseline="0" dirty="0">
+                <a:ln>
+                  <a:noFill/>
+                </a:ln>
+                <a:solidFill>
+                  <a:srgbClr val="D6DEEB">
+                    <a:alpha val="50000"/>
+                  </a:srgbClr>
+                </a:solidFill>
+                <a:effectLst/>
+                <a:latin typeface="Consolas" panose="020B0609020204030204" pitchFamily="49" charset="0"/>
+              </a:rPr>
+              <a:t>key1: value1</a:t>
+            </a:r>
+          </a:p>
+          <a:p>
+            <a:pPr marL="0" marR="0" lvl="0" indent="0" defTabSz="914400" rtl="0" eaLnBrk="0" fontAlgn="base" latinLnBrk="0" hangingPunct="0">
+              <a:lnSpc>
+                <a:spcPct val="100000"/>
+              </a:lnSpc>
+              <a:spcBef>
+                <a:spcPct val="0"/>
+              </a:spcBef>
+              <a:spcAft>
+                <a:spcPct val="0"/>
+              </a:spcAft>
+              <a:buClrTx/>
+              <a:buSzTx/>
+              <a:buFontTx/>
+              <a:buNone/>
+              <a:tabLst/>
+            </a:pPr>
+            <a:r>
+              <a:rPr lang="en-US" altLang="en-US" sz="3000" dirty="0">
+                <a:solidFill>
+                  <a:srgbClr val="D6DEEB">
+                    <a:alpha val="50000"/>
+                  </a:srgbClr>
+                </a:solidFill>
+                <a:latin typeface="Consolas" panose="020B0609020204030204" pitchFamily="49" charset="0"/>
+              </a:rPr>
+              <a:t>  </a:t>
+            </a:r>
+            <a:r>
+              <a:rPr kumimoji="0" lang="en-US" altLang="en-US" sz="3000" b="0" i="0" u="none" strike="noStrike" cap="none" normalizeH="0" baseline="0" dirty="0">
+                <a:ln>
+                  <a:noFill/>
+                </a:ln>
+                <a:solidFill>
+                  <a:srgbClr val="D6DEEB">
+                    <a:alpha val="50000"/>
+                  </a:srgbClr>
+                </a:solidFill>
+                <a:effectLst/>
+                <a:latin typeface="Consolas" panose="020B0609020204030204" pitchFamily="49" charset="0"/>
+              </a:rPr>
+              <a:t>key2: value2</a:t>
+            </a:r>
+          </a:p>
+          <a:p>
+            <a:pPr marL="0" marR="0" lvl="0" indent="0" defTabSz="914400" rtl="0" eaLnBrk="0" fontAlgn="base" latinLnBrk="0" hangingPunct="0">
+              <a:lnSpc>
+                <a:spcPct val="100000"/>
+              </a:lnSpc>
+              <a:spcBef>
+                <a:spcPct val="0"/>
+              </a:spcBef>
+              <a:spcAft>
+                <a:spcPct val="0"/>
+              </a:spcAft>
+              <a:buClrTx/>
+              <a:buSzTx/>
+              <a:buFontTx/>
+              <a:buNone/>
+              <a:tabLst/>
+            </a:pPr>
+            <a:r>
+              <a:rPr lang="en-US" altLang="en-US" sz="3000" dirty="0">
+                <a:solidFill>
+                  <a:srgbClr val="D6DEEB">
+                    <a:alpha val="50000"/>
+                  </a:srgbClr>
+                </a:solidFill>
+                <a:latin typeface="Consolas" panose="020B0609020204030204" pitchFamily="49" charset="0"/>
+              </a:rPr>
+              <a:t>  </a:t>
+            </a:r>
+            <a:r>
+              <a:rPr kumimoji="0" lang="en-US" altLang="en-US" sz="3000" b="0" i="0" u="none" strike="noStrike" cap="none" normalizeH="0" baseline="0" dirty="0">
+                <a:ln>
+                  <a:noFill/>
+                </a:ln>
+                <a:solidFill>
+                  <a:srgbClr val="D6DEEB">
+                    <a:alpha val="50000"/>
+                  </a:srgbClr>
+                </a:solidFill>
+                <a:effectLst/>
+                <a:latin typeface="Consolas" panose="020B0609020204030204" pitchFamily="49" charset="0"/>
+              </a:rPr>
+              <a:t>key3: value3 }</a:t>
+            </a:r>
+          </a:p>
+        </p:txBody>
+      </p:sp>
+      <p:cxnSp>
+        <p:nvCxnSpPr>
+          <p:cNvPr id="5" name="Straight Arrow Connector 4">
+            <a:extLst>
+              <a:ext uri="{FF2B5EF4-FFF2-40B4-BE49-F238E27FC236}">
+                <a16:creationId xmlns:a16="http://schemas.microsoft.com/office/drawing/2014/main" id="{9C2C3FF2-B5C5-2443-7C4E-4542C29EB6DD}"/>
+              </a:ext>
+            </a:extLst>
+          </p:cNvPr>
+          <p:cNvCxnSpPr>
+            <a:cxnSpLocks/>
+          </p:cNvCxnSpPr>
+          <p:nvPr/>
+        </p:nvCxnSpPr>
+        <p:spPr>
+          <a:xfrm>
+            <a:off x="3220571" y="2555764"/>
+            <a:ext cx="0" cy="712673"/>
+          </a:xfrm>
+          <a:prstGeom prst="straightConnector1">
+            <a:avLst/>
+          </a:prstGeom>
+          <a:noFill/>
+          <a:ln w="25400">
+            <a:solidFill>
+              <a:srgbClr val="FFC720"/>
+            </a:solidFill>
+            <a:tailEnd type="arrow"/>
+          </a:ln>
+        </p:spPr>
+        <p:style>
+          <a:lnRef idx="2">
+            <a:schemeClr val="accent1">
+              <a:shade val="15000"/>
+            </a:schemeClr>
+          </a:lnRef>
+          <a:fillRef idx="1">
+            <a:schemeClr val="accent1"/>
+          </a:fillRef>
+          <a:effectRef idx="0">
+            <a:schemeClr val="accent1"/>
+          </a:effectRef>
+          <a:fontRef idx="minor">
+            <a:schemeClr val="lt1"/>
+          </a:fontRef>
+        </p:style>
+      </p:cxnSp>
+      <p:cxnSp>
+        <p:nvCxnSpPr>
+          <p:cNvPr id="8" name="Straight Arrow Connector 7">
+            <a:extLst>
+              <a:ext uri="{FF2B5EF4-FFF2-40B4-BE49-F238E27FC236}">
+                <a16:creationId xmlns:a16="http://schemas.microsoft.com/office/drawing/2014/main" id="{C735C9C0-A461-C10C-511E-3EF1B0A4F331}"/>
+              </a:ext>
+            </a:extLst>
+          </p:cNvPr>
+          <p:cNvCxnSpPr>
+            <a:cxnSpLocks/>
+          </p:cNvCxnSpPr>
+          <p:nvPr/>
+        </p:nvCxnSpPr>
+        <p:spPr>
+          <a:xfrm>
+            <a:off x="4428884" y="2555764"/>
+            <a:ext cx="0" cy="712673"/>
+          </a:xfrm>
+          <a:prstGeom prst="straightConnector1">
+            <a:avLst/>
+          </a:prstGeom>
+          <a:noFill/>
+          <a:ln w="25400">
+            <a:solidFill>
+              <a:srgbClr val="FF5874"/>
+            </a:solidFill>
+            <a:tailEnd type="arrow"/>
+          </a:ln>
+        </p:spPr>
+        <p:style>
+          <a:lnRef idx="2">
+            <a:schemeClr val="accent1">
+              <a:shade val="15000"/>
+            </a:schemeClr>
+          </a:lnRef>
+          <a:fillRef idx="1">
+            <a:schemeClr val="accent1"/>
+          </a:fillRef>
+          <a:effectRef idx="0">
+            <a:schemeClr val="accent1"/>
+          </a:effectRef>
+          <a:fontRef idx="minor">
+            <a:schemeClr val="lt1"/>
+          </a:fontRef>
+        </p:style>
+      </p:cxnSp>
+      <p:cxnSp>
+        <p:nvCxnSpPr>
+          <p:cNvPr id="9" name="Straight Arrow Connector 8">
+            <a:extLst>
+              <a:ext uri="{FF2B5EF4-FFF2-40B4-BE49-F238E27FC236}">
+                <a16:creationId xmlns:a16="http://schemas.microsoft.com/office/drawing/2014/main" id="{8800D0C8-40C1-057E-B137-DA49163C03D6}"/>
+              </a:ext>
+            </a:extLst>
+          </p:cNvPr>
+          <p:cNvCxnSpPr>
+            <a:cxnSpLocks/>
+          </p:cNvCxnSpPr>
+          <p:nvPr/>
+        </p:nvCxnSpPr>
+        <p:spPr>
+          <a:xfrm>
+            <a:off x="8549127" y="2555764"/>
+            <a:ext cx="0" cy="712673"/>
+          </a:xfrm>
+          <a:prstGeom prst="straightConnector1">
+            <a:avLst/>
+          </a:prstGeom>
+          <a:noFill/>
+          <a:ln w="25400">
+            <a:solidFill>
+              <a:srgbClr val="D6DEEB"/>
+            </a:solidFill>
+            <a:tailEnd type="arrow"/>
+          </a:ln>
+        </p:spPr>
+        <p:style>
+          <a:lnRef idx="2">
+            <a:schemeClr val="accent1">
+              <a:shade val="15000"/>
+            </a:schemeClr>
+          </a:lnRef>
+          <a:fillRef idx="1">
+            <a:schemeClr val="accent1"/>
+          </a:fillRef>
+          <a:effectRef idx="0">
+            <a:schemeClr val="accent1"/>
+          </a:effectRef>
+          <a:fontRef idx="minor">
+            <a:schemeClr val="lt1"/>
+          </a:fontRef>
+        </p:style>
+      </p:cxnSp>
+      <p:sp>
+        <p:nvSpPr>
+          <p:cNvPr id="11" name="Rectangle 10">
+            <a:extLst>
+              <a:ext uri="{FF2B5EF4-FFF2-40B4-BE49-F238E27FC236}">
+                <a16:creationId xmlns:a16="http://schemas.microsoft.com/office/drawing/2014/main" id="{506C43F0-98B7-DA95-0323-C0FE383AE9A1}"/>
+              </a:ext>
+            </a:extLst>
+          </p:cNvPr>
+          <p:cNvSpPr>
+            <a:spLocks noChangeArrowheads="1"/>
+          </p:cNvSpPr>
+          <p:nvPr/>
+        </p:nvSpPr>
+        <p:spPr bwMode="auto">
+          <a:xfrm>
+            <a:off x="7596943" y="3427087"/>
+            <a:ext cx="1904367" cy="1545244"/>
+          </a:xfrm>
+          <a:prstGeom prst="rect">
+            <a:avLst/>
+          </a:prstGeom>
+          <a:noFill/>
+          <a:ln>
+            <a:noFill/>
+          </a:ln>
+          <a:effectLst/>
+        </p:spPr>
+        <p:txBody>
+          <a:bodyPr vert="horz" wrap="none" lIns="0" tIns="79350" rIns="0" bIns="79350" numCol="1" anchor="t" anchorCtr="0" compatLnSpc="1">
+            <a:prstTxWarp prst="textNoShape">
+              <a:avLst/>
+            </a:prstTxWarp>
+            <a:spAutoFit/>
+          </a:bodyPr>
+          <a:lstStyle/>
+          <a:p>
+            <a:pPr marL="0" marR="0" lvl="0" indent="0" defTabSz="914400" rtl="0" eaLnBrk="0" fontAlgn="base" latinLnBrk="0" hangingPunct="0">
+              <a:lnSpc>
+                <a:spcPct val="100000"/>
+              </a:lnSpc>
+              <a:spcBef>
+                <a:spcPct val="0"/>
+              </a:spcBef>
+              <a:spcAft>
+                <a:spcPct val="0"/>
+              </a:spcAft>
+              <a:buClrTx/>
+              <a:buSzTx/>
+              <a:buFontTx/>
+              <a:buNone/>
+              <a:tabLst/>
+            </a:pPr>
+            <a:r>
+              <a:rPr lang="en-US" altLang="en-US" sz="3000" dirty="0">
+                <a:solidFill>
+                  <a:srgbClr val="D6DEEB">
+                    <a:alpha val="50000"/>
+                  </a:srgbClr>
+                </a:solidFill>
+                <a:latin typeface="Consolas" panose="020B0609020204030204" pitchFamily="49" charset="0"/>
+              </a:rPr>
+              <a:t>[ each1,</a:t>
+            </a:r>
+          </a:p>
+          <a:p>
+            <a:pPr marL="0" marR="0" lvl="0" indent="0" defTabSz="914400" rtl="0" eaLnBrk="0" fontAlgn="base" latinLnBrk="0" hangingPunct="0">
+              <a:lnSpc>
+                <a:spcPct val="100000"/>
+              </a:lnSpc>
+              <a:spcBef>
+                <a:spcPct val="0"/>
+              </a:spcBef>
+              <a:spcAft>
+                <a:spcPct val="0"/>
+              </a:spcAft>
+              <a:buClrTx/>
+              <a:buSzTx/>
+              <a:buFontTx/>
+              <a:buNone/>
+              <a:tabLst/>
+            </a:pPr>
+            <a:r>
+              <a:rPr kumimoji="0" lang="en-US" altLang="en-US" sz="3000" b="0" i="0" u="none" strike="noStrike" cap="none" normalizeH="0" baseline="0" dirty="0">
+                <a:ln>
+                  <a:noFill/>
+                </a:ln>
+                <a:solidFill>
+                  <a:srgbClr val="D6DEEB">
+                    <a:alpha val="50000"/>
+                  </a:srgbClr>
+                </a:solidFill>
+                <a:effectLst/>
+                <a:latin typeface="Consolas" panose="020B0609020204030204" pitchFamily="49" charset="0"/>
+              </a:rPr>
+              <a:t>  each2,</a:t>
+            </a:r>
+          </a:p>
+          <a:p>
+            <a:pPr marL="0" marR="0" lvl="0" indent="0" defTabSz="914400" rtl="0" eaLnBrk="0" fontAlgn="base" latinLnBrk="0" hangingPunct="0">
+              <a:lnSpc>
+                <a:spcPct val="100000"/>
+              </a:lnSpc>
+              <a:spcBef>
+                <a:spcPct val="0"/>
+              </a:spcBef>
+              <a:spcAft>
+                <a:spcPct val="0"/>
+              </a:spcAft>
+              <a:buClrTx/>
+              <a:buSzTx/>
+              <a:buFontTx/>
+              <a:buNone/>
+              <a:tabLst/>
+            </a:pPr>
+            <a:r>
+              <a:rPr lang="en-US" altLang="en-US" sz="3000" dirty="0">
+                <a:solidFill>
+                  <a:srgbClr val="D6DEEB">
+                    <a:alpha val="50000"/>
+                  </a:srgbClr>
+                </a:solidFill>
+                <a:latin typeface="Consolas" panose="020B0609020204030204" pitchFamily="49" charset="0"/>
+              </a:rPr>
+              <a:t>  each3 ]</a:t>
+            </a:r>
+          </a:p>
+        </p:txBody>
+      </p:sp>
+    </p:spTree>
+    <p:extLst>
+      <p:ext uri="{BB962C8B-B14F-4D97-AF65-F5344CB8AC3E}">
+        <p14:creationId xmlns:p14="http://schemas.microsoft.com/office/powerpoint/2010/main" val="2173943145"/>
+      </p:ext>
+    </p:extLst>
+  </p:cSld>
+  <p:clrMapOvr>
+    <a:masterClrMapping/>
+  </p:clrMapOvr>
+</p:sld>
+</file>
+
 <file path=ppt/slides/slide3.xml><?xml version="1.0" encoding="utf-8"?>
 <p:sld xmlns:a="http://schemas.openxmlformats.org/drawingml/2006/main" xmlns:r="http://schemas.openxmlformats.org/officeDocument/2006/relationships" xmlns:p="http://schemas.openxmlformats.org/presentationml/2006/main">
   <p:cSld>

--- a/assets/pycobytes.pptx
+++ b/assets/pycobytes.pptx
@@ -26,6 +26,8 @@
     <p:sldId id="274" r:id="rId20"/>
     <p:sldId id="275" r:id="rId21"/>
     <p:sldId id="276" r:id="rId22"/>
+    <p:sldId id="278" r:id="rId23"/>
+    <p:sldId id="277" r:id="rId24"/>
   </p:sldIdLst>
   <p:sldSz cx="12192000" cy="6858000"/>
   <p:notesSz cx="6858000" cy="9144000"/>
@@ -9632,6 +9634,904 @@
 </p:sld>
 </file>
 
+<file path=ppt/slides/slide21.xml><?xml version="1.0" encoding="utf-8"?>
+<p:sld xmlns:a="http://schemas.openxmlformats.org/drawingml/2006/main" xmlns:r="http://schemas.openxmlformats.org/officeDocument/2006/relationships" xmlns:p="http://schemas.openxmlformats.org/presentationml/2006/main">
+  <p:cSld>
+    <p:spTree>
+      <p:nvGrpSpPr>
+        <p:cNvPr id="1" name=""/>
+        <p:cNvGrpSpPr/>
+        <p:nvPr/>
+      </p:nvGrpSpPr>
+      <p:grpSpPr>
+        <a:xfrm>
+          <a:off x="0" y="0"/>
+          <a:ext cx="0" cy="0"/>
+          <a:chOff x="0" y="0"/>
+          <a:chExt cx="0" cy="0"/>
+        </a:xfrm>
+      </p:grpSpPr>
+      <p:sp>
+        <p:nvSpPr>
+          <p:cNvPr id="2" name="Rectangle 1">
+            <a:extLst>
+              <a:ext uri="{FF2B5EF4-FFF2-40B4-BE49-F238E27FC236}">
+                <a16:creationId xmlns:a16="http://schemas.microsoft.com/office/drawing/2014/main" id="{4CF0A3B0-725D-F3BD-3F32-667A4611A7AE}"/>
+              </a:ext>
+            </a:extLst>
+          </p:cNvPr>
+          <p:cNvSpPr/>
+          <p:nvPr/>
+        </p:nvSpPr>
+        <p:spPr>
+          <a:xfrm>
+            <a:off x="1953986" y="1665514"/>
+            <a:ext cx="8284028" cy="3526972"/>
+          </a:xfrm>
+          <a:prstGeom prst="rect">
+            <a:avLst/>
+          </a:prstGeom>
+          <a:solidFill>
+            <a:srgbClr val="011627"/>
+          </a:solidFill>
+          <a:ln>
+            <a:noFill/>
+          </a:ln>
+        </p:spPr>
+        <p:style>
+          <a:lnRef idx="2">
+            <a:schemeClr val="accent1">
+              <a:shade val="50000"/>
+            </a:schemeClr>
+          </a:lnRef>
+          <a:fillRef idx="1">
+            <a:schemeClr val="accent1"/>
+          </a:fillRef>
+          <a:effectRef idx="0">
+            <a:schemeClr val="accent1"/>
+          </a:effectRef>
+          <a:fontRef idx="minor">
+            <a:schemeClr val="lt1"/>
+          </a:fontRef>
+        </p:style>
+        <p:txBody>
+          <a:bodyPr rtlCol="0" anchor="ctr"/>
+          <a:lstStyle/>
+          <a:p>
+            <a:pPr algn="ctr"/>
+            <a:endParaRPr lang="en-GB" dirty="0"/>
+          </a:p>
+        </p:txBody>
+      </p:sp>
+      <p:sp>
+        <p:nvSpPr>
+          <p:cNvPr id="3" name="Rectangle 2">
+            <a:extLst>
+              <a:ext uri="{FF2B5EF4-FFF2-40B4-BE49-F238E27FC236}">
+                <a16:creationId xmlns:a16="http://schemas.microsoft.com/office/drawing/2014/main" id="{B885D692-392D-8581-FBDE-03E58FCF4098}"/>
+              </a:ext>
+            </a:extLst>
+          </p:cNvPr>
+          <p:cNvSpPr>
+            <a:spLocks noChangeArrowheads="1"/>
+          </p:cNvSpPr>
+          <p:nvPr/>
+        </p:nvSpPr>
+        <p:spPr bwMode="auto">
+          <a:xfrm>
+            <a:off x="3099988" y="2194713"/>
+            <a:ext cx="5992025" cy="2468574"/>
+          </a:xfrm>
+          <a:prstGeom prst="rect">
+            <a:avLst/>
+          </a:prstGeom>
+          <a:noFill/>
+          <a:ln>
+            <a:noFill/>
+          </a:ln>
+          <a:effectLst/>
+        </p:spPr>
+        <p:txBody>
+          <a:bodyPr vert="horz" wrap="none" lIns="0" tIns="79350" rIns="0" bIns="79350" numCol="1" anchor="ctr" anchorCtr="0" compatLnSpc="1">
+            <a:prstTxWarp prst="textNoShape">
+              <a:avLst/>
+            </a:prstTxWarp>
+            <a:spAutoFit/>
+          </a:bodyPr>
+          <a:lstStyle/>
+          <a:p>
+            <a:pPr marL="0" marR="0" lvl="0" indent="0" defTabSz="914400" rtl="0" eaLnBrk="0" fontAlgn="base" latinLnBrk="0" hangingPunct="0">
+              <a:lnSpc>
+                <a:spcPct val="100000"/>
+              </a:lnSpc>
+              <a:spcBef>
+                <a:spcPct val="0"/>
+              </a:spcBef>
+              <a:spcAft>
+                <a:spcPct val="0"/>
+              </a:spcAft>
+              <a:buClrTx/>
+              <a:buSzTx/>
+              <a:buFontTx/>
+              <a:buNone/>
+              <a:tabLst/>
+            </a:pPr>
+            <a:r>
+              <a:rPr lang="en-US" altLang="en-US" sz="5000" dirty="0">
+                <a:solidFill>
+                  <a:srgbClr val="D6DEEB"/>
+                </a:solidFill>
+                <a:latin typeface="Consolas" panose="020B0609020204030204" pitchFamily="49" charset="0"/>
+              </a:rPr>
+              <a:t>x = </a:t>
+            </a:r>
+            <a:r>
+              <a:rPr lang="en-GB" altLang="en-US" sz="5000" dirty="0">
+                <a:solidFill>
+                  <a:srgbClr val="D6DEEB"/>
+                </a:solidFill>
+                <a:latin typeface="Consolas" panose="020B0609020204030204" pitchFamily="49" charset="0"/>
+              </a:rPr>
+              <a:t>🥕        </a:t>
+            </a:r>
+            <a:r>
+              <a:rPr kumimoji="0" lang="en-GB" altLang="en-US" sz="5000" b="0" u="none" strike="noStrike" cap="none" normalizeH="0" baseline="0" dirty="0">
+                <a:ln>
+                  <a:noFill/>
+                </a:ln>
+                <a:solidFill>
+                  <a:srgbClr val="D6DEEB"/>
+                </a:solidFill>
+                <a:effectLst/>
+                <a:latin typeface="Consolas" panose="020B0609020204030204" pitchFamily="49" charset="0"/>
+              </a:rPr>
+              <a:t>🫧</a:t>
+            </a:r>
+            <a:endParaRPr lang="en-US" altLang="en-US" sz="5000" dirty="0">
+              <a:solidFill>
+                <a:srgbClr val="D6DEEB"/>
+              </a:solidFill>
+              <a:latin typeface="Consolas" panose="020B0609020204030204" pitchFamily="49" charset="0"/>
+            </a:endParaRPr>
+          </a:p>
+          <a:p>
+            <a:pPr marL="0" marR="0" lvl="0" indent="0" defTabSz="914400" rtl="0" eaLnBrk="0" fontAlgn="base" latinLnBrk="0" hangingPunct="0">
+              <a:lnSpc>
+                <a:spcPct val="100000"/>
+              </a:lnSpc>
+              <a:spcBef>
+                <a:spcPct val="0"/>
+              </a:spcBef>
+              <a:spcAft>
+                <a:spcPct val="0"/>
+              </a:spcAft>
+              <a:buClrTx/>
+              <a:buSzTx/>
+              <a:buFontTx/>
+              <a:buNone/>
+              <a:tabLst/>
+            </a:pPr>
+            <a:endParaRPr lang="en-US" altLang="en-US" sz="5000" dirty="0">
+              <a:solidFill>
+                <a:srgbClr val="D6DEEB"/>
+              </a:solidFill>
+              <a:latin typeface="Consolas" panose="020B0609020204030204" pitchFamily="49" charset="0"/>
+            </a:endParaRPr>
+          </a:p>
+          <a:p>
+            <a:pPr marL="0" marR="0" lvl="0" indent="0" defTabSz="914400" rtl="0" eaLnBrk="0" fontAlgn="base" latinLnBrk="0" hangingPunct="0">
+              <a:lnSpc>
+                <a:spcPct val="100000"/>
+              </a:lnSpc>
+              <a:spcBef>
+                <a:spcPct val="0"/>
+              </a:spcBef>
+              <a:spcAft>
+                <a:spcPct val="0"/>
+              </a:spcAft>
+              <a:buClrTx/>
+              <a:buSzTx/>
+              <a:buFontTx/>
+              <a:buNone/>
+              <a:tabLst/>
+            </a:pPr>
+            <a:r>
+              <a:rPr kumimoji="0" lang="en-US" altLang="en-US" sz="5000" b="0" u="none" strike="noStrike" cap="none" normalizeH="0" baseline="0" dirty="0">
+                <a:ln>
+                  <a:noFill/>
+                </a:ln>
+                <a:solidFill>
+                  <a:srgbClr val="D6DEEB"/>
+                </a:solidFill>
+                <a:effectLst/>
+                <a:latin typeface="Consolas" panose="020B0609020204030204" pitchFamily="49" charset="0"/>
+              </a:rPr>
+              <a:t>y = </a:t>
+            </a:r>
+            <a:r>
+              <a:rPr kumimoji="0" lang="en-GB" altLang="en-US" sz="5000" b="0" u="none" strike="noStrike" cap="none" normalizeH="0" baseline="0" dirty="0">
+                <a:ln>
+                  <a:noFill/>
+                </a:ln>
+                <a:solidFill>
+                  <a:srgbClr val="D6DEEB"/>
+                </a:solidFill>
+                <a:effectLst/>
+                <a:latin typeface="Consolas" panose="020B0609020204030204" pitchFamily="49" charset="0"/>
+              </a:rPr>
+              <a:t>🫧        </a:t>
+            </a:r>
+            <a:r>
+              <a:rPr lang="en-GB" altLang="en-US" sz="5000" dirty="0">
+                <a:solidFill>
+                  <a:srgbClr val="D6DEEB"/>
+                </a:solidFill>
+                <a:latin typeface="Consolas" panose="020B0609020204030204" pitchFamily="49" charset="0"/>
+              </a:rPr>
+              <a:t>🥕</a:t>
+            </a:r>
+            <a:endParaRPr kumimoji="0" lang="en-US" altLang="en-US" sz="5000" b="0" u="none" strike="noStrike" cap="none" normalizeH="0" baseline="0" dirty="0">
+              <a:ln>
+                <a:noFill/>
+              </a:ln>
+              <a:solidFill>
+                <a:srgbClr val="D6DEEB"/>
+              </a:solidFill>
+              <a:effectLst/>
+              <a:latin typeface="Consolas" panose="020B0609020204030204" pitchFamily="49" charset="0"/>
+            </a:endParaRPr>
+          </a:p>
+        </p:txBody>
+      </p:sp>
+      <p:cxnSp>
+        <p:nvCxnSpPr>
+          <p:cNvPr id="17" name="Straight Arrow Connector 16">
+            <a:extLst>
+              <a:ext uri="{FF2B5EF4-FFF2-40B4-BE49-F238E27FC236}">
+                <a16:creationId xmlns:a16="http://schemas.microsoft.com/office/drawing/2014/main" id="{7E564E78-B1C6-21C5-807F-D0C594C1CFCD}"/>
+              </a:ext>
+            </a:extLst>
+          </p:cNvPr>
+          <p:cNvCxnSpPr>
+            <a:cxnSpLocks/>
+          </p:cNvCxnSpPr>
+          <p:nvPr/>
+        </p:nvCxnSpPr>
+        <p:spPr>
+          <a:xfrm>
+            <a:off x="5573487" y="2999013"/>
+            <a:ext cx="2449286" cy="1137557"/>
+          </a:xfrm>
+          <a:prstGeom prst="straightConnector1">
+            <a:avLst/>
+          </a:prstGeom>
+          <a:noFill/>
+          <a:ln w="25400">
+            <a:solidFill>
+              <a:srgbClr val="FFC720"/>
+            </a:solidFill>
+            <a:tailEnd type="arrow"/>
+          </a:ln>
+        </p:spPr>
+        <p:style>
+          <a:lnRef idx="2">
+            <a:schemeClr val="accent1">
+              <a:shade val="15000"/>
+            </a:schemeClr>
+          </a:lnRef>
+          <a:fillRef idx="1">
+            <a:schemeClr val="accent1"/>
+          </a:fillRef>
+          <a:effectRef idx="0">
+            <a:schemeClr val="accent1"/>
+          </a:effectRef>
+          <a:fontRef idx="minor">
+            <a:schemeClr val="lt1"/>
+          </a:fontRef>
+        </p:style>
+      </p:cxnSp>
+      <p:cxnSp>
+        <p:nvCxnSpPr>
+          <p:cNvPr id="22" name="Straight Arrow Connector 21">
+            <a:extLst>
+              <a:ext uri="{FF2B5EF4-FFF2-40B4-BE49-F238E27FC236}">
+                <a16:creationId xmlns:a16="http://schemas.microsoft.com/office/drawing/2014/main" id="{DEB75E09-29F3-E1F3-BFFA-8255D147F8EB}"/>
+              </a:ext>
+            </a:extLst>
+          </p:cNvPr>
+          <p:cNvCxnSpPr>
+            <a:cxnSpLocks/>
+          </p:cNvCxnSpPr>
+          <p:nvPr/>
+        </p:nvCxnSpPr>
+        <p:spPr>
+          <a:xfrm flipV="1">
+            <a:off x="5573487" y="2999013"/>
+            <a:ext cx="2449286" cy="1137557"/>
+          </a:xfrm>
+          <a:prstGeom prst="straightConnector1">
+            <a:avLst/>
+          </a:prstGeom>
+          <a:noFill/>
+          <a:ln w="25400">
+            <a:solidFill>
+              <a:srgbClr val="C792EA"/>
+            </a:solidFill>
+            <a:tailEnd type="arrow"/>
+          </a:ln>
+        </p:spPr>
+        <p:style>
+          <a:lnRef idx="2">
+            <a:schemeClr val="accent1">
+              <a:shade val="15000"/>
+            </a:schemeClr>
+          </a:lnRef>
+          <a:fillRef idx="1">
+            <a:schemeClr val="accent1"/>
+          </a:fillRef>
+          <a:effectRef idx="0">
+            <a:schemeClr val="accent1"/>
+          </a:effectRef>
+          <a:fontRef idx="minor">
+            <a:schemeClr val="lt1"/>
+          </a:fontRef>
+        </p:style>
+      </p:cxnSp>
+    </p:spTree>
+    <p:extLst>
+      <p:ext uri="{BB962C8B-B14F-4D97-AF65-F5344CB8AC3E}">
+        <p14:creationId xmlns:p14="http://schemas.microsoft.com/office/powerpoint/2010/main" val="702885929"/>
+      </p:ext>
+    </p:extLst>
+  </p:cSld>
+  <p:clrMapOvr>
+    <a:masterClrMapping/>
+  </p:clrMapOvr>
+</p:sld>
+</file>
+
+<file path=ppt/slides/slide22.xml><?xml version="1.0" encoding="utf-8"?>
+<p:sld xmlns:a="http://schemas.openxmlformats.org/drawingml/2006/main" xmlns:r="http://schemas.openxmlformats.org/officeDocument/2006/relationships" xmlns:p="http://schemas.openxmlformats.org/presentationml/2006/main">
+  <p:cSld>
+    <p:spTree>
+      <p:nvGrpSpPr>
+        <p:cNvPr id="1" name=""/>
+        <p:cNvGrpSpPr/>
+        <p:nvPr/>
+      </p:nvGrpSpPr>
+      <p:grpSpPr>
+        <a:xfrm>
+          <a:off x="0" y="0"/>
+          <a:ext cx="0" cy="0"/>
+          <a:chOff x="0" y="0"/>
+          <a:chExt cx="0" cy="0"/>
+        </a:xfrm>
+      </p:grpSpPr>
+      <p:pic>
+        <p:nvPicPr>
+          <p:cNvPr id="1028" name="Picture 4" descr="R.I.P. Dennis Ritchie, half of the K&amp;R Bible for C Programming |  Code.DanYork.Com">
+            <a:extLst>
+              <a:ext uri="{FF2B5EF4-FFF2-40B4-BE49-F238E27FC236}">
+                <a16:creationId xmlns:a16="http://schemas.microsoft.com/office/drawing/2014/main" id="{4F618E1B-FB45-AED6-D333-5683F546F41C}"/>
+              </a:ext>
+            </a:extLst>
+          </p:cNvPr>
+          <p:cNvPicPr>
+            <a:picLocks noChangeAspect="1" noChangeArrowheads="1"/>
+          </p:cNvPicPr>
+          <p:nvPr/>
+        </p:nvPicPr>
+        <p:blipFill>
+          <a:blip r:embed="rId2">
+            <a:extLst>
+              <a:ext uri="{28A0092B-C50C-407E-A947-70E740481C1C}">
+                <a14:useLocalDpi xmlns:a14="http://schemas.microsoft.com/office/drawing/2010/main" val="0"/>
+              </a:ext>
+            </a:extLst>
+          </a:blip>
+          <a:srcRect/>
+          <a:stretch>
+            <a:fillRect/>
+          </a:stretch>
+        </p:blipFill>
+        <p:spPr bwMode="auto">
+          <a:xfrm>
+            <a:off x="2744510" y="3541690"/>
+            <a:ext cx="1749014" cy="2197928"/>
+          </a:xfrm>
+          <a:prstGeom prst="rect">
+            <a:avLst/>
+          </a:prstGeom>
+          <a:noFill/>
+          <a:extLst>
+            <a:ext uri="{909E8E84-426E-40DD-AFC4-6F175D3DCCD1}">
+              <a14:hiddenFill xmlns:a14="http://schemas.microsoft.com/office/drawing/2010/main">
+                <a:solidFill>
+                  <a:srgbClr val="FFFFFF"/>
+                </a:solidFill>
+              </a14:hiddenFill>
+            </a:ext>
+          </a:extLst>
+        </p:spPr>
+      </p:pic>
+      <p:pic>
+        <p:nvPicPr>
+          <p:cNvPr id="1030" name="Picture 6" descr="The pragmatic programmer book tips (Part 1) - DEV Community">
+            <a:extLst>
+              <a:ext uri="{FF2B5EF4-FFF2-40B4-BE49-F238E27FC236}">
+                <a16:creationId xmlns:a16="http://schemas.microsoft.com/office/drawing/2014/main" id="{21CC373A-FCCE-5CB4-910E-621E22C7C39E}"/>
+              </a:ext>
+            </a:extLst>
+          </p:cNvPr>
+          <p:cNvPicPr>
+            <a:picLocks noChangeAspect="1" noChangeArrowheads="1"/>
+          </p:cNvPicPr>
+          <p:nvPr/>
+        </p:nvPicPr>
+        <p:blipFill rotWithShape="1">
+          <a:blip r:embed="rId3" cstate="print">
+            <a:extLst>
+              <a:ext uri="{28A0092B-C50C-407E-A947-70E740481C1C}">
+                <a14:useLocalDpi xmlns:a14="http://schemas.microsoft.com/office/drawing/2010/main" val="0"/>
+              </a:ext>
+            </a:extLst>
+          </a:blip>
+          <a:srcRect l="4543" t="15300" r="7229"/>
+          <a:stretch/>
+        </p:blipFill>
+        <p:spPr bwMode="auto">
+          <a:xfrm>
+            <a:off x="7700677" y="3540148"/>
+            <a:ext cx="2291099" cy="2199469"/>
+          </a:xfrm>
+          <a:prstGeom prst="rect">
+            <a:avLst/>
+          </a:prstGeom>
+          <a:noFill/>
+          <a:extLst>
+            <a:ext uri="{909E8E84-426E-40DD-AFC4-6F175D3DCCD1}">
+              <a14:hiddenFill xmlns:a14="http://schemas.microsoft.com/office/drawing/2010/main">
+                <a:solidFill>
+                  <a:srgbClr val="FFFFFF"/>
+                </a:solidFill>
+              </a14:hiddenFill>
+            </a:ext>
+          </a:extLst>
+        </p:spPr>
+      </p:pic>
+      <p:sp>
+        <p:nvSpPr>
+          <p:cNvPr id="8" name="Rectangle 7">
+            <a:extLst>
+              <a:ext uri="{FF2B5EF4-FFF2-40B4-BE49-F238E27FC236}">
+                <a16:creationId xmlns:a16="http://schemas.microsoft.com/office/drawing/2014/main" id="{D2D4133B-817A-AC8B-DA30-E2773CFC79F5}"/>
+              </a:ext>
+            </a:extLst>
+          </p:cNvPr>
+          <p:cNvSpPr/>
+          <p:nvPr/>
+        </p:nvSpPr>
+        <p:spPr>
+          <a:xfrm>
+            <a:off x="5081789" y="920839"/>
+            <a:ext cx="2028423" cy="2028423"/>
+          </a:xfrm>
+          <a:prstGeom prst="rect">
+            <a:avLst/>
+          </a:prstGeom>
+          <a:noFill/>
+          <a:ln w="50800">
+            <a:solidFill>
+              <a:schemeClr val="bg1">
+                <a:lumMod val="95000"/>
+              </a:schemeClr>
+            </a:solidFill>
+            <a:prstDash val="sysDash"/>
+          </a:ln>
+        </p:spPr>
+        <p:style>
+          <a:lnRef idx="2">
+            <a:schemeClr val="accent1">
+              <a:shade val="15000"/>
+            </a:schemeClr>
+          </a:lnRef>
+          <a:fillRef idx="1">
+            <a:schemeClr val="accent1"/>
+          </a:fillRef>
+          <a:effectRef idx="0">
+            <a:schemeClr val="accent1"/>
+          </a:effectRef>
+          <a:fontRef idx="minor">
+            <a:schemeClr val="lt1"/>
+          </a:fontRef>
+        </p:style>
+        <p:txBody>
+          <a:bodyPr rtlCol="0" anchor="ctr"/>
+          <a:lstStyle/>
+          <a:p>
+            <a:pPr algn="ctr"/>
+            <a:endParaRPr lang="en-GB"/>
+          </a:p>
+        </p:txBody>
+      </p:sp>
+      <p:cxnSp>
+        <p:nvCxnSpPr>
+          <p:cNvPr id="19" name="Straight Arrow Connector 18">
+            <a:extLst>
+              <a:ext uri="{FF2B5EF4-FFF2-40B4-BE49-F238E27FC236}">
+                <a16:creationId xmlns:a16="http://schemas.microsoft.com/office/drawing/2014/main" id="{EEC800D0-3506-1B81-EE52-78B4F30D53A1}"/>
+              </a:ext>
+            </a:extLst>
+          </p:cNvPr>
+          <p:cNvCxnSpPr>
+            <a:cxnSpLocks/>
+          </p:cNvCxnSpPr>
+          <p:nvPr/>
+        </p:nvCxnSpPr>
+        <p:spPr>
+          <a:xfrm flipV="1">
+            <a:off x="3656451" y="1935050"/>
+            <a:ext cx="1198884" cy="1381260"/>
+          </a:xfrm>
+          <a:prstGeom prst="straightConnector1">
+            <a:avLst/>
+          </a:prstGeom>
+          <a:noFill/>
+          <a:ln w="50800">
+            <a:solidFill>
+              <a:srgbClr val="FFC720"/>
+            </a:solidFill>
+            <a:tailEnd type="arrow"/>
+          </a:ln>
+        </p:spPr>
+        <p:style>
+          <a:lnRef idx="2">
+            <a:schemeClr val="accent1">
+              <a:shade val="15000"/>
+            </a:schemeClr>
+          </a:lnRef>
+          <a:fillRef idx="1">
+            <a:schemeClr val="accent1"/>
+          </a:fillRef>
+          <a:effectRef idx="0">
+            <a:schemeClr val="accent1"/>
+          </a:effectRef>
+          <a:fontRef idx="minor">
+            <a:schemeClr val="lt1"/>
+          </a:fontRef>
+        </p:style>
+      </p:cxnSp>
+      <p:cxnSp>
+        <p:nvCxnSpPr>
+          <p:cNvPr id="23" name="Straight Arrow Connector 22">
+            <a:extLst>
+              <a:ext uri="{FF2B5EF4-FFF2-40B4-BE49-F238E27FC236}">
+                <a16:creationId xmlns:a16="http://schemas.microsoft.com/office/drawing/2014/main" id="{8923C5C4-FCDA-6839-5189-0D5858884BC6}"/>
+              </a:ext>
+            </a:extLst>
+          </p:cNvPr>
+          <p:cNvCxnSpPr>
+            <a:cxnSpLocks/>
+          </p:cNvCxnSpPr>
+          <p:nvPr/>
+        </p:nvCxnSpPr>
+        <p:spPr>
+          <a:xfrm flipH="1">
+            <a:off x="4855335" y="4639882"/>
+            <a:ext cx="2575775" cy="0"/>
+          </a:xfrm>
+          <a:prstGeom prst="straightConnector1">
+            <a:avLst/>
+          </a:prstGeom>
+          <a:noFill/>
+          <a:ln w="50800">
+            <a:solidFill>
+              <a:srgbClr val="FFC720"/>
+            </a:solidFill>
+            <a:tailEnd type="arrow"/>
+          </a:ln>
+        </p:spPr>
+        <p:style>
+          <a:lnRef idx="2">
+            <a:schemeClr val="accent1">
+              <a:shade val="15000"/>
+            </a:schemeClr>
+          </a:lnRef>
+          <a:fillRef idx="1">
+            <a:schemeClr val="accent1"/>
+          </a:fillRef>
+          <a:effectRef idx="0">
+            <a:schemeClr val="accent1"/>
+          </a:effectRef>
+          <a:fontRef idx="minor">
+            <a:schemeClr val="lt1"/>
+          </a:fontRef>
+        </p:style>
+      </p:cxnSp>
+      <p:cxnSp>
+        <p:nvCxnSpPr>
+          <p:cNvPr id="26" name="Straight Arrow Connector 25">
+            <a:extLst>
+              <a:ext uri="{FF2B5EF4-FFF2-40B4-BE49-F238E27FC236}">
+                <a16:creationId xmlns:a16="http://schemas.microsoft.com/office/drawing/2014/main" id="{68CCAC00-416D-DFB3-3951-057CE1CE1D86}"/>
+              </a:ext>
+            </a:extLst>
+          </p:cNvPr>
+          <p:cNvCxnSpPr>
+            <a:cxnSpLocks/>
+          </p:cNvCxnSpPr>
+          <p:nvPr/>
+        </p:nvCxnSpPr>
+        <p:spPr>
+          <a:xfrm>
+            <a:off x="7480533" y="1935050"/>
+            <a:ext cx="1198884" cy="1381260"/>
+          </a:xfrm>
+          <a:prstGeom prst="straightConnector1">
+            <a:avLst/>
+          </a:prstGeom>
+          <a:noFill/>
+          <a:ln w="50800">
+            <a:solidFill>
+              <a:srgbClr val="FFC720"/>
+            </a:solidFill>
+            <a:tailEnd type="arrow"/>
+          </a:ln>
+        </p:spPr>
+        <p:style>
+          <a:lnRef idx="2">
+            <a:schemeClr val="accent1">
+              <a:shade val="15000"/>
+            </a:schemeClr>
+          </a:lnRef>
+          <a:fillRef idx="1">
+            <a:schemeClr val="accent1"/>
+          </a:fillRef>
+          <a:effectRef idx="0">
+            <a:schemeClr val="accent1"/>
+          </a:effectRef>
+          <a:fontRef idx="minor">
+            <a:schemeClr val="lt1"/>
+          </a:fontRef>
+        </p:style>
+      </p:cxnSp>
+      <p:sp>
+        <p:nvSpPr>
+          <p:cNvPr id="27" name="Rectangle 26">
+            <a:extLst>
+              <a:ext uri="{FF2B5EF4-FFF2-40B4-BE49-F238E27FC236}">
+                <a16:creationId xmlns:a16="http://schemas.microsoft.com/office/drawing/2014/main" id="{AA663124-AFB2-5702-7041-4AF3D9077419}"/>
+              </a:ext>
+            </a:extLst>
+          </p:cNvPr>
+          <p:cNvSpPr>
+            <a:spLocks noChangeArrowheads="1"/>
+          </p:cNvSpPr>
+          <p:nvPr/>
+        </p:nvSpPr>
+        <p:spPr bwMode="auto">
+          <a:xfrm>
+            <a:off x="3763183" y="2080709"/>
+            <a:ext cx="139462" cy="544971"/>
+          </a:xfrm>
+          <a:prstGeom prst="rect">
+            <a:avLst/>
+          </a:prstGeom>
+          <a:noFill/>
+          <a:ln>
+            <a:noFill/>
+          </a:ln>
+          <a:effectLst/>
+        </p:spPr>
+        <p:txBody>
+          <a:bodyPr vert="horz" wrap="none" lIns="0" tIns="79350" rIns="0" bIns="79350" numCol="1" anchor="ctr" anchorCtr="0" compatLnSpc="1">
+            <a:prstTxWarp prst="textNoShape">
+              <a:avLst/>
+            </a:prstTxWarp>
+            <a:spAutoFit/>
+          </a:bodyPr>
+          <a:lstStyle/>
+          <a:p>
+            <a:pPr marL="0" marR="0" lvl="0" indent="0" algn="ctr" defTabSz="914400" rtl="0" eaLnBrk="0" fontAlgn="base" latinLnBrk="0" hangingPunct="0">
+              <a:lnSpc>
+                <a:spcPct val="100000"/>
+              </a:lnSpc>
+              <a:spcBef>
+                <a:spcPct val="0"/>
+              </a:spcBef>
+              <a:spcAft>
+                <a:spcPct val="0"/>
+              </a:spcAft>
+              <a:buClrTx/>
+              <a:buSzTx/>
+              <a:buFontTx/>
+              <a:buNone/>
+              <a:tabLst/>
+            </a:pPr>
+            <a:r>
+              <a:rPr lang="en-US" altLang="en-US" sz="2500" dirty="0">
+                <a:solidFill>
+                  <a:srgbClr val="C792EA"/>
+                </a:solidFill>
+                <a:latin typeface="Fira Sans" panose="020B0503050000020004" pitchFamily="34" charset="0"/>
+                <a:ea typeface="Fira Mono" panose="020B0509050000020004" pitchFamily="49" charset="0"/>
+              </a:rPr>
+              <a:t>1</a:t>
+            </a:r>
+            <a:endParaRPr kumimoji="0" lang="en-US" altLang="en-US" sz="2500" b="0" i="0" u="none" strike="noStrike" cap="none" normalizeH="0" baseline="0" dirty="0">
+              <a:ln>
+                <a:noFill/>
+              </a:ln>
+              <a:solidFill>
+                <a:srgbClr val="C792EA"/>
+              </a:solidFill>
+              <a:effectLst/>
+              <a:latin typeface="Fira Sans" panose="020B0503050000020004" pitchFamily="34" charset="0"/>
+              <a:ea typeface="Fira Mono" panose="020B0509050000020004" pitchFamily="49" charset="0"/>
+            </a:endParaRPr>
+          </a:p>
+        </p:txBody>
+      </p:sp>
+      <p:sp>
+        <p:nvSpPr>
+          <p:cNvPr id="28" name="Rectangle 27">
+            <a:extLst>
+              <a:ext uri="{FF2B5EF4-FFF2-40B4-BE49-F238E27FC236}">
+                <a16:creationId xmlns:a16="http://schemas.microsoft.com/office/drawing/2014/main" id="{840E1831-FA17-C198-7579-680F7B8B899F}"/>
+              </a:ext>
+            </a:extLst>
+          </p:cNvPr>
+          <p:cNvSpPr>
+            <a:spLocks noChangeArrowheads="1"/>
+          </p:cNvSpPr>
+          <p:nvPr/>
+        </p:nvSpPr>
+        <p:spPr bwMode="auto">
+          <a:xfrm>
+            <a:off x="6063873" y="4894743"/>
+            <a:ext cx="158698" cy="544971"/>
+          </a:xfrm>
+          <a:prstGeom prst="rect">
+            <a:avLst/>
+          </a:prstGeom>
+          <a:noFill/>
+          <a:ln>
+            <a:noFill/>
+          </a:ln>
+          <a:effectLst/>
+        </p:spPr>
+        <p:txBody>
+          <a:bodyPr vert="horz" wrap="none" lIns="0" tIns="79350" rIns="0" bIns="79350" numCol="1" anchor="ctr" anchorCtr="0" compatLnSpc="1">
+            <a:prstTxWarp prst="textNoShape">
+              <a:avLst/>
+            </a:prstTxWarp>
+            <a:spAutoFit/>
+          </a:bodyPr>
+          <a:lstStyle/>
+          <a:p>
+            <a:pPr marL="0" marR="0" lvl="0" indent="0" algn="ctr" defTabSz="914400" rtl="0" eaLnBrk="0" fontAlgn="base" latinLnBrk="0" hangingPunct="0">
+              <a:lnSpc>
+                <a:spcPct val="100000"/>
+              </a:lnSpc>
+              <a:spcBef>
+                <a:spcPct val="0"/>
+              </a:spcBef>
+              <a:spcAft>
+                <a:spcPct val="0"/>
+              </a:spcAft>
+              <a:buClrTx/>
+              <a:buSzTx/>
+              <a:buFontTx/>
+              <a:buNone/>
+              <a:tabLst/>
+            </a:pPr>
+            <a:r>
+              <a:rPr kumimoji="0" lang="en-US" altLang="en-US" sz="2500" b="0" i="0" u="none" strike="noStrike" cap="none" normalizeH="0" baseline="0" dirty="0">
+                <a:ln>
+                  <a:noFill/>
+                </a:ln>
+                <a:solidFill>
+                  <a:srgbClr val="C792EA"/>
+                </a:solidFill>
+                <a:effectLst/>
+                <a:latin typeface="Fira Sans" panose="020B0503050000020004" pitchFamily="34" charset="0"/>
+                <a:ea typeface="Fira Mono" panose="020B0509050000020004" pitchFamily="49" charset="0"/>
+              </a:rPr>
+              <a:t>2</a:t>
+            </a:r>
+          </a:p>
+        </p:txBody>
+      </p:sp>
+      <p:sp>
+        <p:nvSpPr>
+          <p:cNvPr id="29" name="Rectangle 28">
+            <a:extLst>
+              <a:ext uri="{FF2B5EF4-FFF2-40B4-BE49-F238E27FC236}">
+                <a16:creationId xmlns:a16="http://schemas.microsoft.com/office/drawing/2014/main" id="{2268F696-1F62-490F-2162-8A6AC7B805E0}"/>
+              </a:ext>
+            </a:extLst>
+          </p:cNvPr>
+          <p:cNvSpPr>
+            <a:spLocks noChangeArrowheads="1"/>
+          </p:cNvSpPr>
+          <p:nvPr/>
+        </p:nvSpPr>
+        <p:spPr bwMode="auto">
+          <a:xfrm>
+            <a:off x="8394148" y="2080709"/>
+            <a:ext cx="160300" cy="544971"/>
+          </a:xfrm>
+          <a:prstGeom prst="rect">
+            <a:avLst/>
+          </a:prstGeom>
+          <a:noFill/>
+          <a:ln>
+            <a:noFill/>
+          </a:ln>
+          <a:effectLst/>
+        </p:spPr>
+        <p:txBody>
+          <a:bodyPr vert="horz" wrap="none" lIns="0" tIns="79350" rIns="0" bIns="79350" numCol="1" anchor="ctr" anchorCtr="0" compatLnSpc="1">
+            <a:prstTxWarp prst="textNoShape">
+              <a:avLst/>
+            </a:prstTxWarp>
+            <a:spAutoFit/>
+          </a:bodyPr>
+          <a:lstStyle/>
+          <a:p>
+            <a:pPr marL="0" marR="0" lvl="0" indent="0" algn="ctr" defTabSz="914400" rtl="0" eaLnBrk="0" fontAlgn="base" latinLnBrk="0" hangingPunct="0">
+              <a:lnSpc>
+                <a:spcPct val="100000"/>
+              </a:lnSpc>
+              <a:spcBef>
+                <a:spcPct val="0"/>
+              </a:spcBef>
+              <a:spcAft>
+                <a:spcPct val="0"/>
+              </a:spcAft>
+              <a:buClrTx/>
+              <a:buSzTx/>
+              <a:buFontTx/>
+              <a:buNone/>
+              <a:tabLst/>
+            </a:pPr>
+            <a:r>
+              <a:rPr lang="en-US" altLang="en-US" sz="2500" dirty="0">
+                <a:solidFill>
+                  <a:srgbClr val="C792EA"/>
+                </a:solidFill>
+                <a:latin typeface="Fira Sans" panose="020B0503050000020004" pitchFamily="34" charset="0"/>
+                <a:ea typeface="Fira Mono" panose="020B0509050000020004" pitchFamily="49" charset="0"/>
+              </a:rPr>
+              <a:t>3</a:t>
+            </a:r>
+            <a:endParaRPr kumimoji="0" lang="en-US" altLang="en-US" sz="2500" b="0" i="0" u="none" strike="noStrike" cap="none" normalizeH="0" baseline="0" dirty="0">
+              <a:ln>
+                <a:noFill/>
+              </a:ln>
+              <a:solidFill>
+                <a:srgbClr val="C792EA"/>
+              </a:solidFill>
+              <a:effectLst/>
+              <a:latin typeface="Fira Sans" panose="020B0503050000020004" pitchFamily="34" charset="0"/>
+              <a:ea typeface="Fira Mono" panose="020B0509050000020004" pitchFamily="49" charset="0"/>
+            </a:endParaRPr>
+          </a:p>
+        </p:txBody>
+      </p:sp>
+    </p:spTree>
+    <p:extLst>
+      <p:ext uri="{BB962C8B-B14F-4D97-AF65-F5344CB8AC3E}">
+        <p14:creationId xmlns:p14="http://schemas.microsoft.com/office/powerpoint/2010/main" val="1342392795"/>
+      </p:ext>
+    </p:extLst>
+  </p:cSld>
+  <p:clrMapOvr>
+    <a:masterClrMapping/>
+  </p:clrMapOvr>
+</p:sld>
+</file>
+
 <file path=ppt/slides/slide3.xml><?xml version="1.0" encoding="utf-8"?>
 <p:sld xmlns:a="http://schemas.openxmlformats.org/drawingml/2006/main" xmlns:r="http://schemas.openxmlformats.org/officeDocument/2006/relationships" xmlns:p="http://schemas.openxmlformats.org/presentationml/2006/main">
   <p:cSld>

--- a/assets/pycobytes.pptx
+++ b/assets/pycobytes.pptx
@@ -1,6 +1,6 @@
 
 <file path=ppt/presentation.xml><?xml version="1.0" encoding="utf-8"?>
-<p:presentation xmlns:a="http://schemas.openxmlformats.org/drawingml/2006/main" xmlns:r="http://schemas.openxmlformats.org/officeDocument/2006/relationships" xmlns:p="http://schemas.openxmlformats.org/presentationml/2006/main" saveSubsetFonts="1">
+<p:presentation xmlns:a="http://schemas.openxmlformats.org/drawingml/2006/main" xmlns:r="http://schemas.openxmlformats.org/officeDocument/2006/relationships" xmlns:p="http://schemas.openxmlformats.org/presentationml/2006/main" removePersonalInfoOnSave="1" saveSubsetFonts="1">
   <p:sldMasterIdLst>
     <p:sldMasterId id="2147483664" r:id="rId1"/>
     <p:sldMasterId id="2147483666" r:id="rId2"/>
@@ -28,6 +28,7 @@
     <p:sldId id="276" r:id="rId22"/>
     <p:sldId id="278" r:id="rId23"/>
     <p:sldId id="277" r:id="rId24"/>
+    <p:sldId id="279" r:id="rId25"/>
   </p:sldIdLst>
   <p:sldSz cx="12192000" cy="6858000"/>
   <p:notesSz cx="6858000" cy="9144000"/>
@@ -10076,7 +10077,7 @@
               </a:ext>
             </a:extLst>
           </a:blip>
-          <a:srcRect l="4543" t="15300" r="7229"/>
+          <a:srcRect/>
           <a:stretch/>
         </p:blipFill>
         <p:spPr bwMode="auto">
@@ -10523,6 +10524,943 @@
     <p:extLst>
       <p:ext uri="{BB962C8B-B14F-4D97-AF65-F5344CB8AC3E}">
         <p14:creationId xmlns:p14="http://schemas.microsoft.com/office/powerpoint/2010/main" val="1342392795"/>
+      </p:ext>
+    </p:extLst>
+  </p:cSld>
+  <p:clrMapOvr>
+    <a:masterClrMapping/>
+  </p:clrMapOvr>
+</p:sld>
+</file>
+
+<file path=ppt/slides/slide23.xml><?xml version="1.0" encoding="utf-8"?>
+<p:sld xmlns:a="http://schemas.openxmlformats.org/drawingml/2006/main" xmlns:r="http://schemas.openxmlformats.org/officeDocument/2006/relationships" xmlns:p="http://schemas.openxmlformats.org/presentationml/2006/main">
+  <p:cSld>
+    <p:spTree>
+      <p:nvGrpSpPr>
+        <p:cNvPr id="1" name=""/>
+        <p:cNvGrpSpPr/>
+        <p:nvPr/>
+      </p:nvGrpSpPr>
+      <p:grpSpPr>
+        <a:xfrm>
+          <a:off x="0" y="0"/>
+          <a:ext cx="0" cy="0"/>
+          <a:chOff x="0" y="0"/>
+          <a:chExt cx="0" cy="0"/>
+        </a:xfrm>
+      </p:grpSpPr>
+      <p:sp>
+        <p:nvSpPr>
+          <p:cNvPr id="2" name="Rectangle 1">
+            <a:extLst>
+              <a:ext uri="{FF2B5EF4-FFF2-40B4-BE49-F238E27FC236}">
+                <a16:creationId xmlns:a16="http://schemas.microsoft.com/office/drawing/2014/main" id="{F102BA45-2475-5BF5-CF63-FC2E44F38B75}"/>
+              </a:ext>
+            </a:extLst>
+          </p:cNvPr>
+          <p:cNvSpPr/>
+          <p:nvPr/>
+        </p:nvSpPr>
+        <p:spPr>
+          <a:xfrm>
+            <a:off x="571500" y="1153887"/>
+            <a:ext cx="11049000" cy="4550228"/>
+          </a:xfrm>
+          <a:prstGeom prst="rect">
+            <a:avLst/>
+          </a:prstGeom>
+          <a:solidFill>
+            <a:srgbClr val="011627"/>
+          </a:solidFill>
+          <a:ln>
+            <a:noFill/>
+          </a:ln>
+        </p:spPr>
+        <p:style>
+          <a:lnRef idx="2">
+            <a:schemeClr val="accent1">
+              <a:shade val="50000"/>
+            </a:schemeClr>
+          </a:lnRef>
+          <a:fillRef idx="1">
+            <a:schemeClr val="accent1"/>
+          </a:fillRef>
+          <a:effectRef idx="0">
+            <a:schemeClr val="accent1"/>
+          </a:effectRef>
+          <a:fontRef idx="minor">
+            <a:schemeClr val="lt1"/>
+          </a:fontRef>
+        </p:style>
+        <p:txBody>
+          <a:bodyPr rtlCol="0" anchor="ctr"/>
+          <a:lstStyle/>
+          <a:p>
+            <a:pPr algn="ctr"/>
+            <a:endParaRPr lang="en-GB" dirty="0"/>
+          </a:p>
+        </p:txBody>
+      </p:sp>
+      <p:sp>
+        <p:nvSpPr>
+          <p:cNvPr id="3" name="Rectangle 2">
+            <a:extLst>
+              <a:ext uri="{FF2B5EF4-FFF2-40B4-BE49-F238E27FC236}">
+                <a16:creationId xmlns:a16="http://schemas.microsoft.com/office/drawing/2014/main" id="{A3019760-9C40-184F-F50D-ADB704F86065}"/>
+              </a:ext>
+            </a:extLst>
+          </p:cNvPr>
+          <p:cNvSpPr>
+            <a:spLocks noChangeArrowheads="1"/>
+          </p:cNvSpPr>
+          <p:nvPr/>
+        </p:nvSpPr>
+        <p:spPr bwMode="auto">
+          <a:xfrm>
+            <a:off x="1615325" y="4315978"/>
+            <a:ext cx="8966264" cy="534368"/>
+          </a:xfrm>
+          <a:prstGeom prst="rect">
+            <a:avLst/>
+          </a:prstGeom>
+          <a:noFill/>
+          <a:ln>
+            <a:noFill/>
+          </a:ln>
+          <a:effectLst/>
+        </p:spPr>
+        <p:txBody>
+          <a:bodyPr vert="horz" wrap="none" lIns="144000" tIns="36000" rIns="144000" bIns="36000" numCol="1" anchor="t" anchorCtr="0" compatLnSpc="1">
+            <a:prstTxWarp prst="textNoShape">
+              <a:avLst/>
+            </a:prstTxWarp>
+            <a:spAutoFit/>
+          </a:bodyPr>
+          <a:lstStyle/>
+          <a:p>
+            <a:pPr eaLnBrk="0" fontAlgn="base" hangingPunct="0">
+              <a:spcBef>
+                <a:spcPct val="0"/>
+              </a:spcBef>
+              <a:spcAft>
+                <a:spcPct val="0"/>
+              </a:spcAft>
+            </a:pPr>
+            <a:r>
+              <a:rPr lang="en-US" altLang="en-US" sz="3000" dirty="0" err="1">
+                <a:solidFill>
+                  <a:srgbClr val="82AAFF"/>
+                </a:solidFill>
+                <a:latin typeface="Consolas" panose="020B0609020204030204" pitchFamily="49" charset="0"/>
+              </a:rPr>
+              <a:t>create_student</a:t>
+            </a:r>
+            <a:r>
+              <a:rPr lang="en-US" altLang="en-US" sz="3000" dirty="0">
+                <a:solidFill>
+                  <a:srgbClr val="C792EA"/>
+                </a:solidFill>
+                <a:latin typeface="Consolas" panose="020B0609020204030204" pitchFamily="49" charset="0"/>
+              </a:rPr>
+              <a:t>(</a:t>
+            </a:r>
+            <a:r>
+              <a:rPr lang="en-US" altLang="en-US" sz="3000" dirty="0">
+                <a:solidFill>
+                  <a:srgbClr val="7FDBCA"/>
+                </a:solidFill>
+                <a:latin typeface="Consolas" panose="020B0609020204030204" pitchFamily="49" charset="0"/>
+              </a:rPr>
+              <a:t> </a:t>
+            </a:r>
+            <a:r>
+              <a:rPr lang="en-US" altLang="en-US" sz="3000" dirty="0">
+                <a:solidFill>
+                  <a:srgbClr val="ADDB67"/>
+                </a:solidFill>
+                <a:latin typeface="Consolas" panose="020B0609020204030204" pitchFamily="49" charset="0"/>
+              </a:rPr>
+              <a:t>"</a:t>
+            </a:r>
+            <a:r>
+              <a:rPr lang="en-US" altLang="en-US" sz="3000" dirty="0" err="1">
+                <a:solidFill>
+                  <a:srgbClr val="ADDB67"/>
+                </a:solidFill>
+                <a:latin typeface="Consolas" panose="020B0609020204030204" pitchFamily="49" charset="0"/>
+              </a:rPr>
+              <a:t>Stralian</a:t>
+            </a:r>
+            <a:r>
+              <a:rPr lang="en-US" altLang="en-US" sz="3000" dirty="0">
+                <a:solidFill>
+                  <a:srgbClr val="ADDB67"/>
+                </a:solidFill>
+                <a:latin typeface="Consolas" panose="020B0609020204030204" pitchFamily="49" charset="0"/>
+              </a:rPr>
+              <a:t>"</a:t>
+            </a:r>
+            <a:r>
+              <a:rPr lang="en-US" altLang="en-US" sz="3000" dirty="0">
+                <a:solidFill>
+                  <a:schemeClr val="tx2">
+                    <a:lumMod val="75000"/>
+                  </a:schemeClr>
+                </a:solidFill>
+                <a:latin typeface="Consolas" panose="020B0609020204030204" pitchFamily="49" charset="0"/>
+              </a:rPr>
+              <a:t>,</a:t>
+            </a:r>
+            <a:r>
+              <a:rPr lang="en-US" altLang="en-US" sz="3000" dirty="0">
+                <a:solidFill>
+                  <a:srgbClr val="D6DEEB"/>
+                </a:solidFill>
+                <a:latin typeface="Consolas" panose="020B0609020204030204" pitchFamily="49" charset="0"/>
+              </a:rPr>
+              <a:t> </a:t>
+            </a:r>
+            <a:r>
+              <a:rPr lang="en-US" altLang="en-US" sz="3000" dirty="0">
+                <a:solidFill>
+                  <a:srgbClr val="F78C6C"/>
+                </a:solidFill>
+                <a:latin typeface="Consolas" panose="020B0609020204030204" pitchFamily="49" charset="0"/>
+              </a:rPr>
+              <a:t>21</a:t>
+            </a:r>
+            <a:r>
+              <a:rPr lang="en-US" altLang="en-US" sz="3000" dirty="0">
+                <a:solidFill>
+                  <a:schemeClr val="tx2">
+                    <a:lumMod val="75000"/>
+                  </a:schemeClr>
+                </a:solidFill>
+                <a:latin typeface="Consolas" panose="020B0609020204030204" pitchFamily="49" charset="0"/>
+              </a:rPr>
+              <a:t>,</a:t>
+            </a:r>
+            <a:r>
+              <a:rPr lang="en-US" altLang="en-US" sz="3000" dirty="0">
+                <a:solidFill>
+                  <a:srgbClr val="D6DEEB"/>
+                </a:solidFill>
+                <a:latin typeface="Consolas" panose="020B0609020204030204" pitchFamily="49" charset="0"/>
+              </a:rPr>
+              <a:t> </a:t>
+            </a:r>
+            <a:r>
+              <a:rPr lang="en-US" altLang="en-US" sz="3000" dirty="0">
+                <a:solidFill>
+                  <a:srgbClr val="ADDB67"/>
+                </a:solidFill>
+                <a:latin typeface="Consolas" panose="020B0609020204030204" pitchFamily="49" charset="0"/>
+              </a:rPr>
+              <a:t>"Haven" </a:t>
+            </a:r>
+            <a:r>
+              <a:rPr lang="en-US" altLang="en-US" sz="3000" dirty="0">
+                <a:solidFill>
+                  <a:srgbClr val="C792EA"/>
+                </a:solidFill>
+                <a:latin typeface="Consolas" panose="020B0609020204030204" pitchFamily="49" charset="0"/>
+              </a:rPr>
+              <a:t>)</a:t>
+            </a:r>
+            <a:endParaRPr kumimoji="0" lang="en-US" altLang="en-US" sz="3000" b="0" i="0" u="none" strike="noStrike" cap="none" normalizeH="0" baseline="0" dirty="0">
+              <a:ln>
+                <a:noFill/>
+              </a:ln>
+              <a:solidFill>
+                <a:srgbClr val="C792EA"/>
+              </a:solidFill>
+              <a:effectLst/>
+              <a:latin typeface="Consolas" panose="020B0609020204030204" pitchFamily="49" charset="0"/>
+            </a:endParaRPr>
+          </a:p>
+        </p:txBody>
+      </p:sp>
+      <p:sp>
+        <p:nvSpPr>
+          <p:cNvPr id="8" name="Rectangle 7">
+            <a:extLst>
+              <a:ext uri="{FF2B5EF4-FFF2-40B4-BE49-F238E27FC236}">
+                <a16:creationId xmlns:a16="http://schemas.microsoft.com/office/drawing/2014/main" id="{D8CB092F-526E-5E59-1F84-7B6A22530C3C}"/>
+              </a:ext>
+            </a:extLst>
+          </p:cNvPr>
+          <p:cNvSpPr>
+            <a:spLocks noChangeArrowheads="1"/>
+          </p:cNvSpPr>
+          <p:nvPr/>
+        </p:nvSpPr>
+        <p:spPr bwMode="auto">
+          <a:xfrm>
+            <a:off x="3091667" y="2700151"/>
+            <a:ext cx="7273493" cy="996033"/>
+          </a:xfrm>
+          <a:prstGeom prst="rect">
+            <a:avLst/>
+          </a:prstGeom>
+          <a:noFill/>
+          <a:ln>
+            <a:noFill/>
+          </a:ln>
+          <a:effectLst/>
+        </p:spPr>
+        <p:txBody>
+          <a:bodyPr vert="horz" wrap="none" lIns="144000" tIns="36000" rIns="144000" bIns="36000" numCol="1" anchor="b" anchorCtr="0" compatLnSpc="1">
+            <a:prstTxWarp prst="textNoShape">
+              <a:avLst/>
+            </a:prstTxWarp>
+            <a:spAutoFit/>
+          </a:bodyPr>
+          <a:lstStyle/>
+          <a:p>
+            <a:pPr eaLnBrk="0" fontAlgn="base" hangingPunct="0">
+              <a:spcBef>
+                <a:spcPct val="0"/>
+              </a:spcBef>
+              <a:spcAft>
+                <a:spcPct val="0"/>
+              </a:spcAft>
+            </a:pPr>
+            <a:r>
+              <a:rPr lang="en-US" altLang="en-US" sz="3000" dirty="0">
+                <a:solidFill>
+                  <a:srgbClr val="D6DEEB"/>
+                </a:solidFill>
+                <a:latin typeface="Consolas" panose="020B0609020204030204" pitchFamily="49" charset="0"/>
+              </a:rPr>
+              <a:t> info </a:t>
+            </a:r>
+            <a:r>
+              <a:rPr lang="en-US" altLang="en-US" sz="3000" dirty="0">
+                <a:solidFill>
+                  <a:srgbClr val="7FDBCA"/>
+                </a:solidFill>
+                <a:latin typeface="Consolas" panose="020B0609020204030204" pitchFamily="49" charset="0"/>
+              </a:rPr>
+              <a:t>=</a:t>
+            </a:r>
+            <a:r>
+              <a:rPr lang="en-US" altLang="en-US" sz="3000" dirty="0">
+                <a:solidFill>
+                  <a:srgbClr val="D6DEEB"/>
+                </a:solidFill>
+                <a:latin typeface="Consolas" panose="020B0609020204030204" pitchFamily="49" charset="0"/>
+              </a:rPr>
+              <a:t> [</a:t>
+            </a:r>
+            <a:r>
+              <a:rPr lang="en-US" altLang="en-US" sz="3000" dirty="0">
+                <a:solidFill>
+                  <a:srgbClr val="ADDB67"/>
+                </a:solidFill>
+                <a:latin typeface="Consolas" panose="020B0609020204030204" pitchFamily="49" charset="0"/>
+              </a:rPr>
+              <a:t>"</a:t>
+            </a:r>
+            <a:r>
+              <a:rPr lang="en-US" altLang="en-US" sz="3000" dirty="0" err="1">
+                <a:solidFill>
+                  <a:srgbClr val="ADDB67"/>
+                </a:solidFill>
+                <a:latin typeface="Consolas" panose="020B0609020204030204" pitchFamily="49" charset="0"/>
+              </a:rPr>
+              <a:t>Stralian</a:t>
+            </a:r>
+            <a:r>
+              <a:rPr lang="en-US" altLang="en-US" sz="3000" dirty="0">
+                <a:solidFill>
+                  <a:srgbClr val="ADDB67"/>
+                </a:solidFill>
+                <a:latin typeface="Consolas" panose="020B0609020204030204" pitchFamily="49" charset="0"/>
+              </a:rPr>
+              <a:t>"</a:t>
+            </a:r>
+            <a:r>
+              <a:rPr lang="en-US" altLang="en-US" sz="3000" dirty="0">
+                <a:solidFill>
+                  <a:schemeClr val="tx2">
+                    <a:lumMod val="75000"/>
+                  </a:schemeClr>
+                </a:solidFill>
+                <a:latin typeface="Consolas" panose="020B0609020204030204" pitchFamily="49" charset="0"/>
+              </a:rPr>
+              <a:t>,</a:t>
+            </a:r>
+            <a:r>
+              <a:rPr lang="en-US" altLang="en-US" sz="3000" dirty="0">
+                <a:solidFill>
+                  <a:srgbClr val="D6DEEB"/>
+                </a:solidFill>
+                <a:latin typeface="Consolas" panose="020B0609020204030204" pitchFamily="49" charset="0"/>
+              </a:rPr>
+              <a:t> </a:t>
+            </a:r>
+            <a:r>
+              <a:rPr lang="en-US" altLang="en-US" sz="3000" dirty="0">
+                <a:solidFill>
+                  <a:srgbClr val="F78C6C"/>
+                </a:solidFill>
+                <a:latin typeface="Consolas" panose="020B0609020204030204" pitchFamily="49" charset="0"/>
+              </a:rPr>
+              <a:t>21</a:t>
+            </a:r>
+            <a:r>
+              <a:rPr lang="en-US" altLang="en-US" sz="3000" dirty="0">
+                <a:solidFill>
+                  <a:schemeClr val="tx2">
+                    <a:lumMod val="75000"/>
+                  </a:schemeClr>
+                </a:solidFill>
+                <a:latin typeface="Consolas" panose="020B0609020204030204" pitchFamily="49" charset="0"/>
+              </a:rPr>
+              <a:t>,</a:t>
+            </a:r>
+            <a:r>
+              <a:rPr lang="en-US" altLang="en-US" sz="3000" dirty="0">
+                <a:solidFill>
+                  <a:srgbClr val="D6DEEB"/>
+                </a:solidFill>
+                <a:latin typeface="Consolas" panose="020B0609020204030204" pitchFamily="49" charset="0"/>
+              </a:rPr>
+              <a:t> </a:t>
+            </a:r>
+            <a:r>
+              <a:rPr lang="en-US" altLang="en-US" sz="3000" dirty="0">
+                <a:solidFill>
+                  <a:srgbClr val="ADDB67"/>
+                </a:solidFill>
+                <a:latin typeface="Consolas" panose="020B0609020204030204" pitchFamily="49" charset="0"/>
+              </a:rPr>
+              <a:t>"Haven"</a:t>
+            </a:r>
+            <a:r>
+              <a:rPr lang="en-US" altLang="en-US" sz="3000" dirty="0">
+                <a:solidFill>
+                  <a:srgbClr val="D6DEEB"/>
+                </a:solidFill>
+                <a:latin typeface="Consolas" panose="020B0609020204030204" pitchFamily="49" charset="0"/>
+              </a:rPr>
+              <a:t>]</a:t>
+            </a:r>
+          </a:p>
+          <a:p>
+            <a:pPr eaLnBrk="0" fontAlgn="base" hangingPunct="0">
+              <a:spcBef>
+                <a:spcPct val="0"/>
+              </a:spcBef>
+              <a:spcAft>
+                <a:spcPct val="0"/>
+              </a:spcAft>
+            </a:pPr>
+            <a:r>
+              <a:rPr kumimoji="0" lang="en-US" altLang="en-US" sz="3000" b="0" i="0" u="none" strike="noStrike" cap="none" normalizeH="0" baseline="0" dirty="0">
+                <a:ln>
+                  <a:noFill/>
+                </a:ln>
+                <a:solidFill>
+                  <a:srgbClr val="7FDBCA"/>
+                </a:solidFill>
+                <a:effectLst/>
+                <a:latin typeface="Consolas" panose="020B0609020204030204" pitchFamily="49" charset="0"/>
+              </a:rPr>
+              <a:t>*</a:t>
+            </a:r>
+            <a:r>
+              <a:rPr lang="en-US" altLang="en-US" sz="3000" dirty="0">
+                <a:solidFill>
+                  <a:srgbClr val="D6DEEB"/>
+                </a:solidFill>
+                <a:latin typeface="Consolas" panose="020B0609020204030204" pitchFamily="49" charset="0"/>
+              </a:rPr>
+              <a:t>info </a:t>
+            </a:r>
+            <a:r>
+              <a:rPr lang="en-US" altLang="en-US" sz="3000" dirty="0">
+                <a:solidFill>
+                  <a:srgbClr val="7FDBCA"/>
+                </a:solidFill>
+                <a:latin typeface="Consolas" panose="020B0609020204030204" pitchFamily="49" charset="0"/>
+              </a:rPr>
+              <a:t>=</a:t>
+            </a:r>
+            <a:r>
+              <a:rPr lang="en-US" altLang="en-US" sz="3000" dirty="0">
+                <a:solidFill>
+                  <a:srgbClr val="D6DEEB"/>
+                </a:solidFill>
+                <a:latin typeface="Consolas" panose="020B0609020204030204" pitchFamily="49" charset="0"/>
+              </a:rPr>
+              <a:t>  </a:t>
+            </a:r>
+            <a:r>
+              <a:rPr lang="en-US" altLang="en-US" sz="3000" dirty="0">
+                <a:solidFill>
+                  <a:srgbClr val="ADDB67"/>
+                </a:solidFill>
+                <a:latin typeface="Consolas" panose="020B0609020204030204" pitchFamily="49" charset="0"/>
+              </a:rPr>
+              <a:t>"</a:t>
+            </a:r>
+            <a:r>
+              <a:rPr lang="en-US" altLang="en-US" sz="3000" dirty="0" err="1">
+                <a:solidFill>
+                  <a:srgbClr val="ADDB67"/>
+                </a:solidFill>
+                <a:latin typeface="Consolas" panose="020B0609020204030204" pitchFamily="49" charset="0"/>
+              </a:rPr>
+              <a:t>Stralian</a:t>
+            </a:r>
+            <a:r>
+              <a:rPr lang="en-US" altLang="en-US" sz="3000" dirty="0">
+                <a:solidFill>
+                  <a:srgbClr val="ADDB67"/>
+                </a:solidFill>
+                <a:latin typeface="Consolas" panose="020B0609020204030204" pitchFamily="49" charset="0"/>
+              </a:rPr>
+              <a:t>"</a:t>
+            </a:r>
+            <a:r>
+              <a:rPr lang="en-US" altLang="en-US" sz="3000" dirty="0">
+                <a:solidFill>
+                  <a:schemeClr val="tx2">
+                    <a:lumMod val="75000"/>
+                  </a:schemeClr>
+                </a:solidFill>
+                <a:latin typeface="Consolas" panose="020B0609020204030204" pitchFamily="49" charset="0"/>
+              </a:rPr>
+              <a:t>,</a:t>
+            </a:r>
+            <a:r>
+              <a:rPr lang="en-US" altLang="en-US" sz="3000" dirty="0">
+                <a:solidFill>
+                  <a:srgbClr val="D6DEEB"/>
+                </a:solidFill>
+                <a:latin typeface="Consolas" panose="020B0609020204030204" pitchFamily="49" charset="0"/>
+              </a:rPr>
+              <a:t> </a:t>
+            </a:r>
+            <a:r>
+              <a:rPr lang="en-US" altLang="en-US" sz="3000" dirty="0">
+                <a:solidFill>
+                  <a:srgbClr val="F78C6C"/>
+                </a:solidFill>
+                <a:latin typeface="Consolas" panose="020B0609020204030204" pitchFamily="49" charset="0"/>
+              </a:rPr>
+              <a:t>21</a:t>
+            </a:r>
+            <a:r>
+              <a:rPr lang="en-US" altLang="en-US" sz="3000" dirty="0">
+                <a:solidFill>
+                  <a:schemeClr val="tx2">
+                    <a:lumMod val="75000"/>
+                  </a:schemeClr>
+                </a:solidFill>
+                <a:latin typeface="Consolas" panose="020B0609020204030204" pitchFamily="49" charset="0"/>
+              </a:rPr>
+              <a:t>,</a:t>
+            </a:r>
+            <a:r>
+              <a:rPr lang="en-US" altLang="en-US" sz="3000" dirty="0">
+                <a:solidFill>
+                  <a:srgbClr val="D6DEEB"/>
+                </a:solidFill>
+                <a:latin typeface="Consolas" panose="020B0609020204030204" pitchFamily="49" charset="0"/>
+              </a:rPr>
+              <a:t> </a:t>
+            </a:r>
+            <a:r>
+              <a:rPr lang="en-US" altLang="en-US" sz="3000" dirty="0">
+                <a:solidFill>
+                  <a:srgbClr val="ADDB67"/>
+                </a:solidFill>
+                <a:latin typeface="Consolas" panose="020B0609020204030204" pitchFamily="49" charset="0"/>
+              </a:rPr>
+              <a:t>"Haven"</a:t>
+            </a:r>
+            <a:endParaRPr lang="en-US" altLang="en-US" sz="3000" dirty="0">
+              <a:solidFill>
+                <a:srgbClr val="D6DEEB"/>
+              </a:solidFill>
+              <a:latin typeface="Consolas" panose="020B0609020204030204" pitchFamily="49" charset="0"/>
+            </a:endParaRPr>
+          </a:p>
+        </p:txBody>
+      </p:sp>
+      <p:cxnSp>
+        <p:nvCxnSpPr>
+          <p:cNvPr id="9" name="Straight Arrow Connector 8">
+            <a:extLst>
+              <a:ext uri="{FF2B5EF4-FFF2-40B4-BE49-F238E27FC236}">
+                <a16:creationId xmlns:a16="http://schemas.microsoft.com/office/drawing/2014/main" id="{2C0181C6-818B-53A6-8BC9-1B4BCE603203}"/>
+              </a:ext>
+            </a:extLst>
+          </p:cNvPr>
+          <p:cNvCxnSpPr>
+            <a:cxnSpLocks/>
+          </p:cNvCxnSpPr>
+          <p:nvPr/>
+        </p:nvCxnSpPr>
+        <p:spPr>
+          <a:xfrm>
+            <a:off x="6189743" y="3853791"/>
+            <a:ext cx="0" cy="334581"/>
+          </a:xfrm>
+          <a:prstGeom prst="straightConnector1">
+            <a:avLst/>
+          </a:prstGeom>
+          <a:noFill/>
+          <a:ln w="25400">
+            <a:solidFill>
+              <a:srgbClr val="FFC720"/>
+            </a:solidFill>
+            <a:tailEnd type="arrow"/>
+          </a:ln>
+        </p:spPr>
+        <p:style>
+          <a:lnRef idx="2">
+            <a:schemeClr val="accent1">
+              <a:shade val="15000"/>
+            </a:schemeClr>
+          </a:lnRef>
+          <a:fillRef idx="1">
+            <a:schemeClr val="accent1"/>
+          </a:fillRef>
+          <a:effectRef idx="0">
+            <a:schemeClr val="accent1"/>
+          </a:effectRef>
+          <a:fontRef idx="minor">
+            <a:schemeClr val="lt1"/>
+          </a:fontRef>
+        </p:style>
+      </p:cxnSp>
+      <p:cxnSp>
+        <p:nvCxnSpPr>
+          <p:cNvPr id="11" name="Straight Arrow Connector 10">
+            <a:extLst>
+              <a:ext uri="{FF2B5EF4-FFF2-40B4-BE49-F238E27FC236}">
+                <a16:creationId xmlns:a16="http://schemas.microsoft.com/office/drawing/2014/main" id="{1007EDAA-0709-48E4-2428-0F377C356BCD}"/>
+              </a:ext>
+            </a:extLst>
+          </p:cNvPr>
+          <p:cNvCxnSpPr>
+            <a:cxnSpLocks/>
+          </p:cNvCxnSpPr>
+          <p:nvPr/>
+        </p:nvCxnSpPr>
+        <p:spPr>
+          <a:xfrm>
+            <a:off x="7834612" y="3853791"/>
+            <a:ext cx="0" cy="334581"/>
+          </a:xfrm>
+          <a:prstGeom prst="straightConnector1">
+            <a:avLst/>
+          </a:prstGeom>
+          <a:noFill/>
+          <a:ln w="25400">
+            <a:solidFill>
+              <a:srgbClr val="FFC720"/>
+            </a:solidFill>
+            <a:tailEnd type="arrow"/>
+          </a:ln>
+        </p:spPr>
+        <p:style>
+          <a:lnRef idx="2">
+            <a:schemeClr val="accent1">
+              <a:shade val="15000"/>
+            </a:schemeClr>
+          </a:lnRef>
+          <a:fillRef idx="1">
+            <a:schemeClr val="accent1"/>
+          </a:fillRef>
+          <a:effectRef idx="0">
+            <a:schemeClr val="accent1"/>
+          </a:effectRef>
+          <a:fontRef idx="minor">
+            <a:schemeClr val="lt1"/>
+          </a:fontRef>
+        </p:style>
+      </p:cxnSp>
+      <p:cxnSp>
+        <p:nvCxnSpPr>
+          <p:cNvPr id="12" name="Straight Arrow Connector 11">
+            <a:extLst>
+              <a:ext uri="{FF2B5EF4-FFF2-40B4-BE49-F238E27FC236}">
+                <a16:creationId xmlns:a16="http://schemas.microsoft.com/office/drawing/2014/main" id="{8998DE67-F890-D8A8-DFB2-173A155B0226}"/>
+              </a:ext>
+            </a:extLst>
+          </p:cNvPr>
+          <p:cNvCxnSpPr>
+            <a:cxnSpLocks/>
+          </p:cNvCxnSpPr>
+          <p:nvPr/>
+        </p:nvCxnSpPr>
+        <p:spPr>
+          <a:xfrm>
+            <a:off x="9232488" y="3853791"/>
+            <a:ext cx="0" cy="334581"/>
+          </a:xfrm>
+          <a:prstGeom prst="straightConnector1">
+            <a:avLst/>
+          </a:prstGeom>
+          <a:noFill/>
+          <a:ln w="25400">
+            <a:solidFill>
+              <a:srgbClr val="FFC720"/>
+            </a:solidFill>
+            <a:tailEnd type="arrow"/>
+          </a:ln>
+        </p:spPr>
+        <p:style>
+          <a:lnRef idx="2">
+            <a:schemeClr val="accent1">
+              <a:shade val="15000"/>
+            </a:schemeClr>
+          </a:lnRef>
+          <a:fillRef idx="1">
+            <a:schemeClr val="accent1"/>
+          </a:fillRef>
+          <a:effectRef idx="0">
+            <a:schemeClr val="accent1"/>
+          </a:effectRef>
+          <a:fontRef idx="minor">
+            <a:schemeClr val="lt1"/>
+          </a:fontRef>
+        </p:style>
+      </p:cxnSp>
+      <p:sp>
+        <p:nvSpPr>
+          <p:cNvPr id="13" name="Rectangle 12">
+            <a:extLst>
+              <a:ext uri="{FF2B5EF4-FFF2-40B4-BE49-F238E27FC236}">
+                <a16:creationId xmlns:a16="http://schemas.microsoft.com/office/drawing/2014/main" id="{212D185C-FB87-5CEA-0316-20B2E8A28F13}"/>
+              </a:ext>
+            </a:extLst>
+          </p:cNvPr>
+          <p:cNvSpPr>
+            <a:spLocks noChangeArrowheads="1"/>
+          </p:cNvSpPr>
+          <p:nvPr/>
+        </p:nvSpPr>
+        <p:spPr bwMode="auto">
+          <a:xfrm>
+            <a:off x="5762208" y="4872782"/>
+            <a:ext cx="855070" cy="380480"/>
+          </a:xfrm>
+          <a:prstGeom prst="rect">
+            <a:avLst/>
+          </a:prstGeom>
+          <a:solidFill>
+            <a:srgbClr val="505861">
+              <a:alpha val="50196"/>
+            </a:srgbClr>
+          </a:solidFill>
+          <a:ln>
+            <a:noFill/>
+          </a:ln>
+          <a:effectLst/>
+        </p:spPr>
+        <p:txBody>
+          <a:bodyPr vert="horz" wrap="none" lIns="144000" tIns="36000" rIns="144000" bIns="36000" numCol="1" anchor="t" anchorCtr="0" compatLnSpc="1">
+            <a:prstTxWarp prst="textNoShape">
+              <a:avLst/>
+            </a:prstTxWarp>
+            <a:spAutoFit/>
+          </a:bodyPr>
+          <a:lstStyle/>
+          <a:p>
+            <a:pPr algn="ctr" eaLnBrk="0" fontAlgn="base" hangingPunct="0">
+              <a:spcBef>
+                <a:spcPct val="0"/>
+              </a:spcBef>
+              <a:spcAft>
+                <a:spcPct val="0"/>
+              </a:spcAft>
+            </a:pPr>
+            <a:r>
+              <a:rPr lang="en-US" altLang="en-US" sz="2000" dirty="0">
+                <a:solidFill>
+                  <a:schemeClr val="tx2">
+                    <a:lumMod val="75000"/>
+                  </a:schemeClr>
+                </a:solidFill>
+                <a:latin typeface="Consolas" panose="020B0609020204030204" pitchFamily="49" charset="0"/>
+              </a:rPr>
+              <a:t>NAME</a:t>
+            </a:r>
+            <a:endParaRPr kumimoji="0" lang="en-US" altLang="en-US" sz="2000" b="0" i="0" u="none" strike="noStrike" cap="none" normalizeH="0" baseline="0" dirty="0">
+              <a:ln>
+                <a:noFill/>
+              </a:ln>
+              <a:solidFill>
+                <a:schemeClr val="tx2">
+                  <a:lumMod val="75000"/>
+                </a:schemeClr>
+              </a:solidFill>
+              <a:effectLst/>
+              <a:latin typeface="Consolas" panose="020B0609020204030204" pitchFamily="49" charset="0"/>
+            </a:endParaRPr>
+          </a:p>
+        </p:txBody>
+      </p:sp>
+      <p:sp>
+        <p:nvSpPr>
+          <p:cNvPr id="14" name="Rectangle 13">
+            <a:extLst>
+              <a:ext uri="{FF2B5EF4-FFF2-40B4-BE49-F238E27FC236}">
+                <a16:creationId xmlns:a16="http://schemas.microsoft.com/office/drawing/2014/main" id="{83B19AF2-9A37-E76D-4CF3-AA1087603BB7}"/>
+              </a:ext>
+            </a:extLst>
+          </p:cNvPr>
+          <p:cNvSpPr>
+            <a:spLocks noChangeArrowheads="1"/>
+          </p:cNvSpPr>
+          <p:nvPr/>
+        </p:nvSpPr>
+        <p:spPr bwMode="auto">
+          <a:xfrm>
+            <a:off x="7530161" y="4872782"/>
+            <a:ext cx="714005" cy="380480"/>
+          </a:xfrm>
+          <a:prstGeom prst="rect">
+            <a:avLst/>
+          </a:prstGeom>
+          <a:solidFill>
+            <a:srgbClr val="505861">
+              <a:alpha val="50196"/>
+            </a:srgbClr>
+          </a:solidFill>
+          <a:ln>
+            <a:noFill/>
+          </a:ln>
+          <a:effectLst/>
+        </p:spPr>
+        <p:txBody>
+          <a:bodyPr vert="horz" wrap="none" lIns="144000" tIns="36000" rIns="144000" bIns="36000" numCol="1" anchor="t" anchorCtr="0" compatLnSpc="1">
+            <a:prstTxWarp prst="textNoShape">
+              <a:avLst/>
+            </a:prstTxWarp>
+            <a:spAutoFit/>
+          </a:bodyPr>
+          <a:lstStyle/>
+          <a:p>
+            <a:pPr algn="ctr" eaLnBrk="0" fontAlgn="base" hangingPunct="0">
+              <a:spcBef>
+                <a:spcPct val="0"/>
+              </a:spcBef>
+              <a:spcAft>
+                <a:spcPct val="0"/>
+              </a:spcAft>
+            </a:pPr>
+            <a:r>
+              <a:rPr lang="en-US" altLang="en-US" sz="2000" dirty="0">
+                <a:solidFill>
+                  <a:schemeClr val="tx2">
+                    <a:lumMod val="75000"/>
+                  </a:schemeClr>
+                </a:solidFill>
+                <a:latin typeface="Consolas" panose="020B0609020204030204" pitchFamily="49" charset="0"/>
+              </a:rPr>
+              <a:t>AGE</a:t>
+            </a:r>
+            <a:endParaRPr kumimoji="0" lang="en-US" altLang="en-US" sz="2000" b="0" i="0" u="none" strike="noStrike" cap="none" normalizeH="0" baseline="0" dirty="0">
+              <a:ln>
+                <a:noFill/>
+              </a:ln>
+              <a:solidFill>
+                <a:schemeClr val="tx2">
+                  <a:lumMod val="75000"/>
+                </a:schemeClr>
+              </a:solidFill>
+              <a:effectLst/>
+              <a:latin typeface="Consolas" panose="020B0609020204030204" pitchFamily="49" charset="0"/>
+            </a:endParaRPr>
+          </a:p>
+        </p:txBody>
+      </p:sp>
+      <p:sp>
+        <p:nvSpPr>
+          <p:cNvPr id="15" name="Rectangle 14">
+            <a:extLst>
+              <a:ext uri="{FF2B5EF4-FFF2-40B4-BE49-F238E27FC236}">
+                <a16:creationId xmlns:a16="http://schemas.microsoft.com/office/drawing/2014/main" id="{5D6F9749-F3AC-9D8D-E5D6-79C861DD6066}"/>
+              </a:ext>
+            </a:extLst>
+          </p:cNvPr>
+          <p:cNvSpPr>
+            <a:spLocks noChangeArrowheads="1"/>
+          </p:cNvSpPr>
+          <p:nvPr/>
+        </p:nvSpPr>
+        <p:spPr bwMode="auto">
+          <a:xfrm>
+            <a:off x="8734422" y="4872782"/>
+            <a:ext cx="996135" cy="380480"/>
+          </a:xfrm>
+          <a:prstGeom prst="rect">
+            <a:avLst/>
+          </a:prstGeom>
+          <a:solidFill>
+            <a:srgbClr val="505861">
+              <a:alpha val="50196"/>
+            </a:srgbClr>
+          </a:solidFill>
+          <a:ln>
+            <a:noFill/>
+          </a:ln>
+          <a:effectLst/>
+        </p:spPr>
+        <p:txBody>
+          <a:bodyPr vert="horz" wrap="none" lIns="144000" tIns="36000" rIns="144000" bIns="36000" numCol="1" anchor="t" anchorCtr="0" compatLnSpc="1">
+            <a:prstTxWarp prst="textNoShape">
+              <a:avLst/>
+            </a:prstTxWarp>
+            <a:spAutoFit/>
+          </a:bodyPr>
+          <a:lstStyle/>
+          <a:p>
+            <a:pPr algn="ctr" eaLnBrk="0" fontAlgn="base" hangingPunct="0">
+              <a:spcBef>
+                <a:spcPct val="0"/>
+              </a:spcBef>
+              <a:spcAft>
+                <a:spcPct val="0"/>
+              </a:spcAft>
+            </a:pPr>
+            <a:r>
+              <a:rPr lang="en-US" altLang="en-US" sz="2000" dirty="0">
+                <a:solidFill>
+                  <a:schemeClr val="tx2">
+                    <a:lumMod val="75000"/>
+                  </a:schemeClr>
+                </a:solidFill>
+                <a:latin typeface="Consolas" panose="020B0609020204030204" pitchFamily="49" charset="0"/>
+              </a:rPr>
+              <a:t>HOUSE</a:t>
+            </a:r>
+            <a:endParaRPr kumimoji="0" lang="en-US" altLang="en-US" sz="2000" b="0" i="0" u="none" strike="noStrike" cap="none" normalizeH="0" baseline="0" dirty="0">
+              <a:ln>
+                <a:noFill/>
+              </a:ln>
+              <a:solidFill>
+                <a:schemeClr val="tx2">
+                  <a:lumMod val="75000"/>
+                </a:schemeClr>
+              </a:solidFill>
+              <a:effectLst/>
+              <a:latin typeface="Consolas" panose="020B0609020204030204" pitchFamily="49" charset="0"/>
+            </a:endParaRPr>
+          </a:p>
+        </p:txBody>
+      </p:sp>
+    </p:spTree>
+    <p:extLst>
+      <p:ext uri="{BB962C8B-B14F-4D97-AF65-F5344CB8AC3E}">
+        <p14:creationId xmlns:p14="http://schemas.microsoft.com/office/powerpoint/2010/main" val="71631721"/>
       </p:ext>
     </p:extLst>
   </p:cSld>

--- a/assets/pycobytes.pptx
+++ b/assets/pycobytes.pptx
@@ -29,6 +29,7 @@
     <p:sldId id="278" r:id="rId23"/>
     <p:sldId id="277" r:id="rId24"/>
     <p:sldId id="279" r:id="rId25"/>
+    <p:sldId id="280" r:id="rId26"/>
   </p:sldIdLst>
   <p:sldSz cx="12192000" cy="6858000"/>
   <p:notesSz cx="6858000" cy="9144000"/>
@@ -11470,6 +11471,762 @@
 </p:sld>
 </file>
 
+<file path=ppt/slides/slide24.xml><?xml version="1.0" encoding="utf-8"?>
+<p:sld xmlns:a="http://schemas.openxmlformats.org/drawingml/2006/main" xmlns:r="http://schemas.openxmlformats.org/officeDocument/2006/relationships" xmlns:p="http://schemas.openxmlformats.org/presentationml/2006/main">
+  <p:cSld>
+    <p:spTree>
+      <p:nvGrpSpPr>
+        <p:cNvPr id="1" name="">
+          <a:extLst>
+            <a:ext uri="{FF2B5EF4-FFF2-40B4-BE49-F238E27FC236}">
+              <a16:creationId xmlns:a16="http://schemas.microsoft.com/office/drawing/2014/main" id="{F7FB0BF7-2430-D416-792D-48D58FEA7C54}"/>
+            </a:ext>
+          </a:extLst>
+        </p:cNvPr>
+        <p:cNvGrpSpPr/>
+        <p:nvPr/>
+      </p:nvGrpSpPr>
+      <p:grpSpPr>
+        <a:xfrm>
+          <a:off x="0" y="0"/>
+          <a:ext cx="0" cy="0"/>
+          <a:chOff x="0" y="0"/>
+          <a:chExt cx="0" cy="0"/>
+        </a:xfrm>
+      </p:grpSpPr>
+      <p:sp>
+        <p:nvSpPr>
+          <p:cNvPr id="2" name="Rectangle 1">
+            <a:extLst>
+              <a:ext uri="{FF2B5EF4-FFF2-40B4-BE49-F238E27FC236}">
+                <a16:creationId xmlns:a16="http://schemas.microsoft.com/office/drawing/2014/main" id="{15E9E4F3-41ED-6D57-7376-C34119769CFF}"/>
+              </a:ext>
+            </a:extLst>
+          </p:cNvPr>
+          <p:cNvSpPr/>
+          <p:nvPr/>
+        </p:nvSpPr>
+        <p:spPr>
+          <a:xfrm>
+            <a:off x="571500" y="1153887"/>
+            <a:ext cx="11049000" cy="4550228"/>
+          </a:xfrm>
+          <a:prstGeom prst="rect">
+            <a:avLst/>
+          </a:prstGeom>
+          <a:solidFill>
+            <a:srgbClr val="011627"/>
+          </a:solidFill>
+          <a:ln>
+            <a:noFill/>
+          </a:ln>
+        </p:spPr>
+        <p:style>
+          <a:lnRef idx="2">
+            <a:schemeClr val="accent1">
+              <a:shade val="50000"/>
+            </a:schemeClr>
+          </a:lnRef>
+          <a:fillRef idx="1">
+            <a:schemeClr val="accent1"/>
+          </a:fillRef>
+          <a:effectRef idx="0">
+            <a:schemeClr val="accent1"/>
+          </a:effectRef>
+          <a:fontRef idx="minor">
+            <a:schemeClr val="lt1"/>
+          </a:fontRef>
+        </p:style>
+        <p:txBody>
+          <a:bodyPr rtlCol="0" anchor="ctr"/>
+          <a:lstStyle/>
+          <a:p>
+            <a:pPr algn="ctr"/>
+            <a:endParaRPr lang="en-GB" dirty="0"/>
+          </a:p>
+        </p:txBody>
+      </p:sp>
+      <p:sp>
+        <p:nvSpPr>
+          <p:cNvPr id="3" name="Rectangle 2">
+            <a:extLst>
+              <a:ext uri="{FF2B5EF4-FFF2-40B4-BE49-F238E27FC236}">
+                <a16:creationId xmlns:a16="http://schemas.microsoft.com/office/drawing/2014/main" id="{6BD98F4B-D07C-27EE-0D2D-ADD3615A4B19}"/>
+              </a:ext>
+            </a:extLst>
+          </p:cNvPr>
+          <p:cNvSpPr>
+            <a:spLocks noChangeArrowheads="1"/>
+          </p:cNvSpPr>
+          <p:nvPr/>
+        </p:nvSpPr>
+        <p:spPr bwMode="auto">
+          <a:xfrm>
+            <a:off x="2797411" y="4345979"/>
+            <a:ext cx="8543072" cy="534368"/>
+          </a:xfrm>
+          <a:prstGeom prst="rect">
+            <a:avLst/>
+          </a:prstGeom>
+          <a:noFill/>
+          <a:ln>
+            <a:noFill/>
+          </a:ln>
+          <a:effectLst/>
+        </p:spPr>
+        <p:txBody>
+          <a:bodyPr vert="horz" wrap="none" lIns="144000" tIns="36000" rIns="144000" bIns="36000" numCol="1" anchor="t" anchorCtr="0" compatLnSpc="1">
+            <a:prstTxWarp prst="textNoShape">
+              <a:avLst/>
+            </a:prstTxWarp>
+            <a:spAutoFit/>
+          </a:bodyPr>
+          <a:lstStyle/>
+          <a:p>
+            <a:pPr eaLnBrk="0" fontAlgn="base" hangingPunct="0">
+              <a:spcBef>
+                <a:spcPct val="0"/>
+              </a:spcBef>
+              <a:spcAft>
+                <a:spcPct val="0"/>
+              </a:spcAft>
+            </a:pPr>
+            <a:r>
+              <a:rPr lang="en-US" altLang="en-US" sz="3000" dirty="0">
+                <a:solidFill>
+                  <a:srgbClr val="82AAFF"/>
+                </a:solidFill>
+                <a:latin typeface="Consolas" panose="020B0609020204030204" pitchFamily="49" charset="0"/>
+              </a:rPr>
+              <a:t>check</a:t>
+            </a:r>
+            <a:r>
+              <a:rPr lang="en-US" altLang="en-US" sz="3000" dirty="0">
+                <a:solidFill>
+                  <a:srgbClr val="C792EA"/>
+                </a:solidFill>
+                <a:latin typeface="Consolas" panose="020B0609020204030204" pitchFamily="49" charset="0"/>
+              </a:rPr>
+              <a:t>( </a:t>
+            </a:r>
+            <a:r>
+              <a:rPr lang="en-US" altLang="en-US" sz="3000" i="1" dirty="0">
+                <a:solidFill>
+                  <a:srgbClr val="D6DEEB"/>
+                </a:solidFill>
+                <a:latin typeface="Consolas" panose="020B0609020204030204" pitchFamily="49" charset="0"/>
+              </a:rPr>
+              <a:t>data </a:t>
+            </a:r>
+            <a:r>
+              <a:rPr lang="en-US" altLang="en-US" sz="3000" dirty="0">
+                <a:solidFill>
+                  <a:schemeClr val="tx2">
+                    <a:lumMod val="75000"/>
+                  </a:schemeClr>
+                </a:solidFill>
+                <a:latin typeface="Consolas" panose="020B0609020204030204" pitchFamily="49" charset="0"/>
+              </a:rPr>
+              <a:t>= </a:t>
+            </a:r>
+            <a:r>
+              <a:rPr lang="en-US" altLang="en-US" sz="3000" dirty="0">
+                <a:solidFill>
+                  <a:srgbClr val="F78C6C"/>
+                </a:solidFill>
+                <a:latin typeface="Consolas" panose="020B0609020204030204" pitchFamily="49" charset="0"/>
+              </a:rPr>
+              <a:t>False</a:t>
+            </a:r>
+            <a:r>
+              <a:rPr lang="en-US" altLang="en-US" sz="3000" dirty="0">
+                <a:solidFill>
+                  <a:schemeClr val="tx2">
+                    <a:lumMod val="75000"/>
+                  </a:schemeClr>
+                </a:solidFill>
+                <a:latin typeface="Consolas" panose="020B0609020204030204" pitchFamily="49" charset="0"/>
+              </a:rPr>
+              <a:t>,</a:t>
+            </a:r>
+            <a:r>
+              <a:rPr lang="en-US" altLang="en-US" sz="3000" dirty="0">
+                <a:solidFill>
+                  <a:srgbClr val="D6DEEB"/>
+                </a:solidFill>
+                <a:latin typeface="Consolas" panose="020B0609020204030204" pitchFamily="49" charset="0"/>
+              </a:rPr>
+              <a:t>  </a:t>
+            </a:r>
+            <a:r>
+              <a:rPr lang="en-US" altLang="en-US" sz="3000" i="1" dirty="0" err="1">
+                <a:solidFill>
+                  <a:srgbClr val="D6DEEB"/>
+                </a:solidFill>
+                <a:latin typeface="Consolas" panose="020B0609020204030204" pitchFamily="49" charset="0"/>
+              </a:rPr>
+              <a:t>sanitise</a:t>
+            </a:r>
+            <a:r>
+              <a:rPr lang="en-US" altLang="en-US" sz="3000" i="1" dirty="0">
+                <a:solidFill>
+                  <a:srgbClr val="D6DEEB"/>
+                </a:solidFill>
+                <a:latin typeface="Consolas" panose="020B0609020204030204" pitchFamily="49" charset="0"/>
+              </a:rPr>
+              <a:t> </a:t>
+            </a:r>
+            <a:r>
+              <a:rPr lang="en-US" altLang="en-US" sz="3000" dirty="0">
+                <a:solidFill>
+                  <a:schemeClr val="tx2">
+                    <a:lumMod val="75000"/>
+                  </a:schemeClr>
+                </a:solidFill>
+                <a:latin typeface="Consolas" panose="020B0609020204030204" pitchFamily="49" charset="0"/>
+              </a:rPr>
+              <a:t>= </a:t>
+            </a:r>
+            <a:r>
+              <a:rPr lang="en-US" altLang="en-US" sz="3000" dirty="0">
+                <a:solidFill>
+                  <a:srgbClr val="F78C6C"/>
+                </a:solidFill>
+                <a:latin typeface="Consolas" panose="020B0609020204030204" pitchFamily="49" charset="0"/>
+              </a:rPr>
+              <a:t>True</a:t>
+            </a:r>
+            <a:r>
+              <a:rPr lang="en-US" altLang="en-US" sz="3000" dirty="0">
+                <a:solidFill>
+                  <a:srgbClr val="ADDB67"/>
+                </a:solidFill>
+                <a:latin typeface="Consolas" panose="020B0609020204030204" pitchFamily="49" charset="0"/>
+              </a:rPr>
+              <a:t> </a:t>
+            </a:r>
+            <a:r>
+              <a:rPr lang="en-US" altLang="en-US" sz="3000" dirty="0">
+                <a:solidFill>
+                  <a:srgbClr val="C792EA"/>
+                </a:solidFill>
+                <a:latin typeface="Consolas" panose="020B0609020204030204" pitchFamily="49" charset="0"/>
+              </a:rPr>
+              <a:t>)</a:t>
+            </a:r>
+            <a:endParaRPr kumimoji="0" lang="en-US" altLang="en-US" sz="3000" b="0" i="0" u="none" strike="noStrike" cap="none" normalizeH="0" baseline="0" dirty="0">
+              <a:ln>
+                <a:noFill/>
+              </a:ln>
+              <a:solidFill>
+                <a:srgbClr val="C792EA"/>
+              </a:solidFill>
+              <a:effectLst/>
+              <a:latin typeface="Consolas" panose="020B0609020204030204" pitchFamily="49" charset="0"/>
+            </a:endParaRPr>
+          </a:p>
+        </p:txBody>
+      </p:sp>
+      <p:sp>
+        <p:nvSpPr>
+          <p:cNvPr id="8" name="Rectangle 7">
+            <a:extLst>
+              <a:ext uri="{FF2B5EF4-FFF2-40B4-BE49-F238E27FC236}">
+                <a16:creationId xmlns:a16="http://schemas.microsoft.com/office/drawing/2014/main" id="{B19B4CE1-8C52-4B9D-1123-1DC54EAAA67B}"/>
+              </a:ext>
+            </a:extLst>
+          </p:cNvPr>
+          <p:cNvSpPr>
+            <a:spLocks noChangeArrowheads="1"/>
+          </p:cNvSpPr>
+          <p:nvPr/>
+        </p:nvSpPr>
+        <p:spPr bwMode="auto">
+          <a:xfrm>
+            <a:off x="1541162" y="2700151"/>
+            <a:ext cx="9601054" cy="996033"/>
+          </a:xfrm>
+          <a:prstGeom prst="rect">
+            <a:avLst/>
+          </a:prstGeom>
+          <a:noFill/>
+          <a:ln>
+            <a:noFill/>
+          </a:ln>
+          <a:effectLst/>
+        </p:spPr>
+        <p:txBody>
+          <a:bodyPr vert="horz" wrap="none" lIns="144000" tIns="36000" rIns="144000" bIns="36000" numCol="1" anchor="b" anchorCtr="0" compatLnSpc="1">
+            <a:prstTxWarp prst="textNoShape">
+              <a:avLst/>
+            </a:prstTxWarp>
+            <a:spAutoFit/>
+          </a:bodyPr>
+          <a:lstStyle/>
+          <a:p>
+            <a:pPr eaLnBrk="0" fontAlgn="base" hangingPunct="0">
+              <a:spcBef>
+                <a:spcPct val="0"/>
+              </a:spcBef>
+              <a:spcAft>
+                <a:spcPct val="0"/>
+              </a:spcAft>
+            </a:pPr>
+            <a:r>
+              <a:rPr lang="en-US" altLang="en-US" sz="3000" dirty="0">
+                <a:solidFill>
+                  <a:srgbClr val="D6DEEB"/>
+                </a:solidFill>
+                <a:latin typeface="Consolas" panose="020B0609020204030204" pitchFamily="49" charset="0"/>
+              </a:rPr>
+              <a:t>  config </a:t>
+            </a:r>
+            <a:r>
+              <a:rPr lang="en-US" altLang="en-US" sz="3000" dirty="0">
+                <a:solidFill>
+                  <a:srgbClr val="7FDBCA"/>
+                </a:solidFill>
+                <a:latin typeface="Consolas" panose="020B0609020204030204" pitchFamily="49" charset="0"/>
+              </a:rPr>
+              <a:t>=</a:t>
+            </a:r>
+            <a:r>
+              <a:rPr lang="en-US" altLang="en-US" sz="3000" dirty="0">
+                <a:solidFill>
+                  <a:srgbClr val="D6DEEB"/>
+                </a:solidFill>
+                <a:latin typeface="Consolas" panose="020B0609020204030204" pitchFamily="49" charset="0"/>
+              </a:rPr>
+              <a:t> {</a:t>
+            </a:r>
+            <a:r>
+              <a:rPr lang="en-US" altLang="en-US" sz="3000" dirty="0">
+                <a:solidFill>
+                  <a:srgbClr val="ADDB67"/>
+                </a:solidFill>
+                <a:latin typeface="Consolas" panose="020B0609020204030204" pitchFamily="49" charset="0"/>
+              </a:rPr>
+              <a:t>"data"</a:t>
+            </a:r>
+            <a:r>
+              <a:rPr lang="en-US" altLang="en-US" sz="3000" dirty="0">
+                <a:solidFill>
+                  <a:schemeClr val="tx2">
+                    <a:lumMod val="75000"/>
+                  </a:schemeClr>
+                </a:solidFill>
+                <a:latin typeface="Consolas" panose="020B0609020204030204" pitchFamily="49" charset="0"/>
+              </a:rPr>
+              <a:t>:</a:t>
+            </a:r>
+            <a:r>
+              <a:rPr lang="en-US" altLang="en-US" sz="3000" dirty="0">
+                <a:solidFill>
+                  <a:srgbClr val="D6DEEB"/>
+                </a:solidFill>
+                <a:latin typeface="Consolas" panose="020B0609020204030204" pitchFamily="49" charset="0"/>
+              </a:rPr>
+              <a:t> </a:t>
+            </a:r>
+            <a:r>
+              <a:rPr lang="en-US" altLang="en-US" sz="3000" dirty="0">
+                <a:solidFill>
+                  <a:srgbClr val="F78C6C"/>
+                </a:solidFill>
+                <a:latin typeface="Consolas" panose="020B0609020204030204" pitchFamily="49" charset="0"/>
+              </a:rPr>
+              <a:t>False</a:t>
+            </a:r>
+            <a:r>
+              <a:rPr lang="en-US" altLang="en-US" sz="3000" dirty="0">
+                <a:solidFill>
+                  <a:schemeClr val="tx2">
+                    <a:lumMod val="75000"/>
+                  </a:schemeClr>
+                </a:solidFill>
+                <a:latin typeface="Consolas" panose="020B0609020204030204" pitchFamily="49" charset="0"/>
+              </a:rPr>
+              <a:t>,</a:t>
+            </a:r>
+            <a:r>
+              <a:rPr lang="en-US" altLang="en-US" sz="3000" dirty="0">
+                <a:solidFill>
+                  <a:srgbClr val="D6DEEB"/>
+                </a:solidFill>
+                <a:latin typeface="Consolas" panose="020B0609020204030204" pitchFamily="49" charset="0"/>
+              </a:rPr>
+              <a:t> </a:t>
+            </a:r>
+            <a:r>
+              <a:rPr lang="en-US" altLang="en-US" sz="3000" dirty="0">
+                <a:solidFill>
+                  <a:srgbClr val="ADDB67"/>
+                </a:solidFill>
+                <a:latin typeface="Consolas" panose="020B0609020204030204" pitchFamily="49" charset="0"/>
+              </a:rPr>
+              <a:t>"</a:t>
+            </a:r>
+            <a:r>
+              <a:rPr lang="en-US" altLang="en-US" sz="3000" dirty="0" err="1">
+                <a:solidFill>
+                  <a:srgbClr val="ADDB67"/>
+                </a:solidFill>
+                <a:latin typeface="Consolas" panose="020B0609020204030204" pitchFamily="49" charset="0"/>
+              </a:rPr>
+              <a:t>sanitise</a:t>
+            </a:r>
+            <a:r>
+              <a:rPr lang="en-US" altLang="en-US" sz="3000" dirty="0">
+                <a:solidFill>
+                  <a:srgbClr val="ADDB67"/>
+                </a:solidFill>
+                <a:latin typeface="Consolas" panose="020B0609020204030204" pitchFamily="49" charset="0"/>
+              </a:rPr>
+              <a:t>"</a:t>
+            </a:r>
+            <a:r>
+              <a:rPr lang="en-US" altLang="en-US" sz="3000" dirty="0">
+                <a:solidFill>
+                  <a:schemeClr val="tx2">
+                    <a:lumMod val="75000"/>
+                  </a:schemeClr>
+                </a:solidFill>
+                <a:latin typeface="Consolas" panose="020B0609020204030204" pitchFamily="49" charset="0"/>
+              </a:rPr>
+              <a:t>:</a:t>
+            </a:r>
+            <a:r>
+              <a:rPr lang="en-US" altLang="en-US" sz="3000" dirty="0">
+                <a:solidFill>
+                  <a:srgbClr val="D6DEEB"/>
+                </a:solidFill>
+                <a:latin typeface="Consolas" panose="020B0609020204030204" pitchFamily="49" charset="0"/>
+              </a:rPr>
+              <a:t> </a:t>
+            </a:r>
+            <a:r>
+              <a:rPr lang="en-US" altLang="en-US" sz="3000" dirty="0">
+                <a:solidFill>
+                  <a:srgbClr val="F78C6C"/>
+                </a:solidFill>
+                <a:latin typeface="Consolas" panose="020B0609020204030204" pitchFamily="49" charset="0"/>
+              </a:rPr>
+              <a:t>True</a:t>
+            </a:r>
+            <a:r>
+              <a:rPr lang="en-US" altLang="en-US" sz="3000" dirty="0">
+                <a:solidFill>
+                  <a:srgbClr val="D6DEEB"/>
+                </a:solidFill>
+                <a:latin typeface="Consolas" panose="020B0609020204030204" pitchFamily="49" charset="0"/>
+              </a:rPr>
+              <a:t>}</a:t>
+            </a:r>
+          </a:p>
+          <a:p>
+            <a:pPr eaLnBrk="0" fontAlgn="base" hangingPunct="0">
+              <a:spcBef>
+                <a:spcPct val="0"/>
+              </a:spcBef>
+              <a:spcAft>
+                <a:spcPct val="0"/>
+              </a:spcAft>
+            </a:pPr>
+            <a:r>
+              <a:rPr kumimoji="0" lang="en-US" altLang="en-US" sz="3000" b="0" i="0" u="none" strike="noStrike" cap="none" normalizeH="0" baseline="0" dirty="0">
+                <a:ln>
+                  <a:noFill/>
+                </a:ln>
+                <a:solidFill>
+                  <a:srgbClr val="7FDBCA"/>
+                </a:solidFill>
+                <a:effectLst/>
+                <a:latin typeface="Consolas" panose="020B0609020204030204" pitchFamily="49" charset="0"/>
+              </a:rPr>
+              <a:t>**</a:t>
+            </a:r>
+            <a:r>
+              <a:rPr lang="en-US" altLang="en-US" sz="3000" dirty="0">
+                <a:solidFill>
+                  <a:srgbClr val="D6DEEB"/>
+                </a:solidFill>
+                <a:latin typeface="Consolas" panose="020B0609020204030204" pitchFamily="49" charset="0"/>
+              </a:rPr>
+              <a:t>config </a:t>
+            </a:r>
+            <a:r>
+              <a:rPr lang="en-US" altLang="en-US" sz="3000" dirty="0">
+                <a:solidFill>
+                  <a:srgbClr val="7FDBCA"/>
+                </a:solidFill>
+                <a:latin typeface="Consolas" panose="020B0609020204030204" pitchFamily="49" charset="0"/>
+              </a:rPr>
+              <a:t>=</a:t>
+            </a:r>
+            <a:r>
+              <a:rPr lang="en-US" altLang="en-US" sz="3000" dirty="0">
+                <a:solidFill>
+                  <a:srgbClr val="D6DEEB"/>
+                </a:solidFill>
+                <a:latin typeface="Consolas" panose="020B0609020204030204" pitchFamily="49" charset="0"/>
+              </a:rPr>
+              <a:t>  </a:t>
+            </a:r>
+            <a:r>
+              <a:rPr lang="en-US" altLang="en-US" sz="3000" dirty="0">
+                <a:solidFill>
+                  <a:srgbClr val="ADDB67"/>
+                </a:solidFill>
+                <a:latin typeface="Consolas" panose="020B0609020204030204" pitchFamily="49" charset="0"/>
+              </a:rPr>
+              <a:t>"data"</a:t>
+            </a:r>
+            <a:r>
+              <a:rPr lang="en-US" altLang="en-US" sz="1500" dirty="0">
+                <a:solidFill>
+                  <a:schemeClr val="tx2">
+                    <a:lumMod val="75000"/>
+                  </a:schemeClr>
+                </a:solidFill>
+                <a:latin typeface="Consolas" panose="020B0609020204030204" pitchFamily="49" charset="0"/>
+              </a:rPr>
+              <a:t> </a:t>
+            </a:r>
+            <a:r>
+              <a:rPr lang="en-US" altLang="en-US" sz="3000" dirty="0">
+                <a:solidFill>
+                  <a:schemeClr val="tx2">
+                    <a:lumMod val="75000"/>
+                  </a:schemeClr>
+                </a:solidFill>
+                <a:latin typeface="Consolas" panose="020B0609020204030204" pitchFamily="49" charset="0"/>
+              </a:rPr>
+              <a:t>=</a:t>
+            </a:r>
+            <a:r>
+              <a:rPr lang="en-US" altLang="en-US" sz="1500" dirty="0">
+                <a:solidFill>
+                  <a:srgbClr val="D6DEEB"/>
+                </a:solidFill>
+                <a:latin typeface="Consolas" panose="020B0609020204030204" pitchFamily="49" charset="0"/>
+              </a:rPr>
+              <a:t> </a:t>
+            </a:r>
+            <a:r>
+              <a:rPr lang="en-US" altLang="en-US" sz="3000" dirty="0">
+                <a:solidFill>
+                  <a:srgbClr val="F78C6C"/>
+                </a:solidFill>
+                <a:latin typeface="Consolas" panose="020B0609020204030204" pitchFamily="49" charset="0"/>
+              </a:rPr>
+              <a:t>False</a:t>
+            </a:r>
+            <a:r>
+              <a:rPr lang="en-US" altLang="en-US" sz="3000" dirty="0">
+                <a:solidFill>
+                  <a:schemeClr val="tx2">
+                    <a:lumMod val="75000"/>
+                  </a:schemeClr>
+                </a:solidFill>
+                <a:latin typeface="Consolas" panose="020B0609020204030204" pitchFamily="49" charset="0"/>
+              </a:rPr>
+              <a:t>,</a:t>
+            </a:r>
+            <a:r>
+              <a:rPr lang="en-US" altLang="en-US" sz="3000" dirty="0">
+                <a:solidFill>
+                  <a:srgbClr val="D6DEEB"/>
+                </a:solidFill>
+                <a:latin typeface="Consolas" panose="020B0609020204030204" pitchFamily="49" charset="0"/>
+              </a:rPr>
+              <a:t> </a:t>
+            </a:r>
+            <a:r>
+              <a:rPr lang="en-US" altLang="en-US" sz="3000" dirty="0">
+                <a:solidFill>
+                  <a:srgbClr val="ADDB67"/>
+                </a:solidFill>
+                <a:latin typeface="Consolas" panose="020B0609020204030204" pitchFamily="49" charset="0"/>
+              </a:rPr>
+              <a:t>"</a:t>
+            </a:r>
+            <a:r>
+              <a:rPr lang="en-US" altLang="en-US" sz="3000" dirty="0" err="1">
+                <a:solidFill>
+                  <a:srgbClr val="ADDB67"/>
+                </a:solidFill>
+                <a:latin typeface="Consolas" panose="020B0609020204030204" pitchFamily="49" charset="0"/>
+              </a:rPr>
+              <a:t>sanitise</a:t>
+            </a:r>
+            <a:r>
+              <a:rPr lang="en-US" altLang="en-US" sz="3000" dirty="0">
+                <a:solidFill>
+                  <a:srgbClr val="ADDB67"/>
+                </a:solidFill>
+                <a:latin typeface="Consolas" panose="020B0609020204030204" pitchFamily="49" charset="0"/>
+              </a:rPr>
+              <a:t>"</a:t>
+            </a:r>
+            <a:r>
+              <a:rPr lang="en-US" altLang="en-US" sz="1500" dirty="0">
+                <a:solidFill>
+                  <a:schemeClr val="tx2">
+                    <a:lumMod val="75000"/>
+                  </a:schemeClr>
+                </a:solidFill>
+                <a:latin typeface="Consolas" panose="020B0609020204030204" pitchFamily="49" charset="0"/>
+              </a:rPr>
+              <a:t> </a:t>
+            </a:r>
+            <a:r>
+              <a:rPr lang="en-US" altLang="en-US" sz="3000" dirty="0">
+                <a:solidFill>
+                  <a:schemeClr val="tx2">
+                    <a:lumMod val="75000"/>
+                  </a:schemeClr>
+                </a:solidFill>
+                <a:latin typeface="Consolas" panose="020B0609020204030204" pitchFamily="49" charset="0"/>
+              </a:rPr>
+              <a:t>=</a:t>
+            </a:r>
+            <a:r>
+              <a:rPr lang="en-US" altLang="en-US" sz="1500" dirty="0">
+                <a:solidFill>
+                  <a:srgbClr val="D6DEEB"/>
+                </a:solidFill>
+                <a:latin typeface="Consolas" panose="020B0609020204030204" pitchFamily="49" charset="0"/>
+              </a:rPr>
+              <a:t> </a:t>
+            </a:r>
+            <a:r>
+              <a:rPr lang="en-US" altLang="en-US" sz="3000" dirty="0">
+                <a:solidFill>
+                  <a:srgbClr val="F78C6C"/>
+                </a:solidFill>
+                <a:latin typeface="Consolas" panose="020B0609020204030204" pitchFamily="49" charset="0"/>
+              </a:rPr>
+              <a:t>True</a:t>
+            </a:r>
+            <a:r>
+              <a:rPr lang="en-US" altLang="en-US" sz="3000" dirty="0">
+                <a:solidFill>
+                  <a:srgbClr val="D6DEEB"/>
+                </a:solidFill>
+                <a:latin typeface="Consolas" panose="020B0609020204030204" pitchFamily="49" charset="0"/>
+              </a:rPr>
+              <a:t> </a:t>
+            </a:r>
+          </a:p>
+        </p:txBody>
+      </p:sp>
+      <p:cxnSp>
+        <p:nvCxnSpPr>
+          <p:cNvPr id="9" name="Straight Arrow Connector 8">
+            <a:extLst>
+              <a:ext uri="{FF2B5EF4-FFF2-40B4-BE49-F238E27FC236}">
+                <a16:creationId xmlns:a16="http://schemas.microsoft.com/office/drawing/2014/main" id="{5F2D629E-7669-161E-52C1-EC2892858DCE}"/>
+              </a:ext>
+            </a:extLst>
+          </p:cNvPr>
+          <p:cNvCxnSpPr>
+            <a:cxnSpLocks/>
+          </p:cNvCxnSpPr>
+          <p:nvPr/>
+        </p:nvCxnSpPr>
+        <p:spPr>
+          <a:xfrm>
+            <a:off x="5645457" y="3853791"/>
+            <a:ext cx="0" cy="334581"/>
+          </a:xfrm>
+          <a:prstGeom prst="straightConnector1">
+            <a:avLst/>
+          </a:prstGeom>
+          <a:noFill/>
+          <a:ln w="25400">
+            <a:solidFill>
+              <a:srgbClr val="FFC720"/>
+            </a:solidFill>
+            <a:tailEnd type="arrow"/>
+          </a:ln>
+        </p:spPr>
+        <p:style>
+          <a:lnRef idx="2">
+            <a:schemeClr val="accent1">
+              <a:shade val="15000"/>
+            </a:schemeClr>
+          </a:lnRef>
+          <a:fillRef idx="1">
+            <a:schemeClr val="accent1"/>
+          </a:fillRef>
+          <a:effectRef idx="0">
+            <a:schemeClr val="accent1"/>
+          </a:effectRef>
+          <a:fontRef idx="minor">
+            <a:schemeClr val="lt1"/>
+          </a:fontRef>
+        </p:style>
+      </p:cxnSp>
+      <p:cxnSp>
+        <p:nvCxnSpPr>
+          <p:cNvPr id="12" name="Straight Arrow Connector 11">
+            <a:extLst>
+              <a:ext uri="{FF2B5EF4-FFF2-40B4-BE49-F238E27FC236}">
+                <a16:creationId xmlns:a16="http://schemas.microsoft.com/office/drawing/2014/main" id="{0F4E2726-CBA4-BB2A-937D-9B5FDC894389}"/>
+              </a:ext>
+            </a:extLst>
+          </p:cNvPr>
+          <p:cNvCxnSpPr>
+            <a:cxnSpLocks/>
+          </p:cNvCxnSpPr>
+          <p:nvPr/>
+        </p:nvCxnSpPr>
+        <p:spPr>
+          <a:xfrm>
+            <a:off x="9635259" y="3853791"/>
+            <a:ext cx="0" cy="334581"/>
+          </a:xfrm>
+          <a:prstGeom prst="straightConnector1">
+            <a:avLst/>
+          </a:prstGeom>
+          <a:noFill/>
+          <a:ln w="25400">
+            <a:solidFill>
+              <a:srgbClr val="FFC720"/>
+            </a:solidFill>
+            <a:tailEnd type="arrow"/>
+          </a:ln>
+        </p:spPr>
+        <p:style>
+          <a:lnRef idx="2">
+            <a:schemeClr val="accent1">
+              <a:shade val="15000"/>
+            </a:schemeClr>
+          </a:lnRef>
+          <a:fillRef idx="1">
+            <a:schemeClr val="accent1"/>
+          </a:fillRef>
+          <a:effectRef idx="0">
+            <a:schemeClr val="accent1"/>
+          </a:effectRef>
+          <a:fontRef idx="minor">
+            <a:schemeClr val="lt1"/>
+          </a:fontRef>
+        </p:style>
+      </p:cxnSp>
+    </p:spTree>
+    <p:extLst>
+      <p:ext uri="{BB962C8B-B14F-4D97-AF65-F5344CB8AC3E}">
+        <p14:creationId xmlns:p14="http://schemas.microsoft.com/office/powerpoint/2010/main" val="3417011680"/>
+      </p:ext>
+    </p:extLst>
+  </p:cSld>
+  <p:clrMapOvr>
+    <a:masterClrMapping/>
+  </p:clrMapOvr>
+</p:sld>
+</file>
+
 <file path=ppt/slides/slide3.xml><?xml version="1.0" encoding="utf-8"?>
 <p:sld xmlns:a="http://schemas.openxmlformats.org/drawingml/2006/main" xmlns:r="http://schemas.openxmlformats.org/officeDocument/2006/relationships" xmlns:p="http://schemas.openxmlformats.org/presentationml/2006/main">
   <p:cSld>

--- a/assets/pycobytes.pptx
+++ b/assets/pycobytes.pptx
@@ -30,6 +30,7 @@
     <p:sldId id="277" r:id="rId24"/>
     <p:sldId id="279" r:id="rId25"/>
     <p:sldId id="280" r:id="rId26"/>
+    <p:sldId id="281" r:id="rId27"/>
   </p:sldIdLst>
   <p:sldSz cx="12192000" cy="6858000"/>
   <p:notesSz cx="6858000" cy="9144000"/>
@@ -12227,6 +12228,835 @@
 </p:sld>
 </file>
 
+<file path=ppt/slides/slide25.xml><?xml version="1.0" encoding="utf-8"?>
+<p:sld xmlns:a="http://schemas.openxmlformats.org/drawingml/2006/main" xmlns:r="http://schemas.openxmlformats.org/officeDocument/2006/relationships" xmlns:p="http://schemas.openxmlformats.org/presentationml/2006/main">
+  <p:cSld>
+    <p:spTree>
+      <p:nvGrpSpPr>
+        <p:cNvPr id="1" name=""/>
+        <p:cNvGrpSpPr/>
+        <p:nvPr/>
+      </p:nvGrpSpPr>
+      <p:grpSpPr>
+        <a:xfrm>
+          <a:off x="0" y="0"/>
+          <a:ext cx="0" cy="0"/>
+          <a:chOff x="0" y="0"/>
+          <a:chExt cx="0" cy="0"/>
+        </a:xfrm>
+      </p:grpSpPr>
+      <p:sp>
+        <p:nvSpPr>
+          <p:cNvPr id="2" name="Rectangle 1">
+            <a:extLst>
+              <a:ext uri="{FF2B5EF4-FFF2-40B4-BE49-F238E27FC236}">
+                <a16:creationId xmlns:a16="http://schemas.microsoft.com/office/drawing/2014/main" id="{174FEF6C-67E6-C189-9DB6-6DDAE36BC162}"/>
+              </a:ext>
+            </a:extLst>
+          </p:cNvPr>
+          <p:cNvSpPr/>
+          <p:nvPr/>
+        </p:nvSpPr>
+        <p:spPr>
+          <a:xfrm>
+            <a:off x="571500" y="1153887"/>
+            <a:ext cx="11049000" cy="4550228"/>
+          </a:xfrm>
+          <a:prstGeom prst="rect">
+            <a:avLst/>
+          </a:prstGeom>
+          <a:solidFill>
+            <a:srgbClr val="011627"/>
+          </a:solidFill>
+          <a:ln>
+            <a:noFill/>
+          </a:ln>
+        </p:spPr>
+        <p:style>
+          <a:lnRef idx="2">
+            <a:schemeClr val="accent1">
+              <a:shade val="50000"/>
+            </a:schemeClr>
+          </a:lnRef>
+          <a:fillRef idx="1">
+            <a:schemeClr val="accent1"/>
+          </a:fillRef>
+          <a:effectRef idx="0">
+            <a:schemeClr val="accent1"/>
+          </a:effectRef>
+          <a:fontRef idx="minor">
+            <a:schemeClr val="lt1"/>
+          </a:fontRef>
+        </p:style>
+        <p:txBody>
+          <a:bodyPr rtlCol="0" anchor="ctr"/>
+          <a:lstStyle/>
+          <a:p>
+            <a:pPr algn="ctr"/>
+            <a:endParaRPr lang="en-GB" dirty="0"/>
+          </a:p>
+        </p:txBody>
+      </p:sp>
+      <p:sp>
+        <p:nvSpPr>
+          <p:cNvPr id="6" name="Rectangle 5">
+            <a:extLst>
+              <a:ext uri="{FF2B5EF4-FFF2-40B4-BE49-F238E27FC236}">
+                <a16:creationId xmlns:a16="http://schemas.microsoft.com/office/drawing/2014/main" id="{05F8E079-1BAB-A351-D2E3-30DE8E2F2D0D}"/>
+              </a:ext>
+            </a:extLst>
+          </p:cNvPr>
+          <p:cNvSpPr/>
+          <p:nvPr/>
+        </p:nvSpPr>
+        <p:spPr>
+          <a:xfrm>
+            <a:off x="6075553" y="2366327"/>
+            <a:ext cx="4611920" cy="406242"/>
+          </a:xfrm>
+          <a:prstGeom prst="rect">
+            <a:avLst/>
+          </a:prstGeom>
+          <a:solidFill>
+            <a:schemeClr val="bg1">
+              <a:alpha val="20000"/>
+            </a:schemeClr>
+          </a:solidFill>
+          <a:ln>
+            <a:noFill/>
+          </a:ln>
+        </p:spPr>
+        <p:style>
+          <a:lnRef idx="2">
+            <a:schemeClr val="accent1">
+              <a:shade val="15000"/>
+            </a:schemeClr>
+          </a:lnRef>
+          <a:fillRef idx="1">
+            <a:schemeClr val="accent1"/>
+          </a:fillRef>
+          <a:effectRef idx="0">
+            <a:schemeClr val="accent1"/>
+          </a:effectRef>
+          <a:fontRef idx="minor">
+            <a:schemeClr val="lt1"/>
+          </a:fontRef>
+        </p:style>
+        <p:txBody>
+          <a:bodyPr rtlCol="0" anchor="ctr"/>
+          <a:lstStyle/>
+          <a:p>
+            <a:pPr algn="ctr"/>
+            <a:endParaRPr lang="en-GB"/>
+          </a:p>
+        </p:txBody>
+      </p:sp>
+      <p:sp>
+        <p:nvSpPr>
+          <p:cNvPr id="3" name="TextBox 2">
+            <a:extLst>
+              <a:ext uri="{FF2B5EF4-FFF2-40B4-BE49-F238E27FC236}">
+                <a16:creationId xmlns:a16="http://schemas.microsoft.com/office/drawing/2014/main" id="{0641F660-26C6-42FA-E829-60B190BED9A4}"/>
+              </a:ext>
+            </a:extLst>
+          </p:cNvPr>
+          <p:cNvSpPr txBox="1"/>
+          <p:nvPr/>
+        </p:nvSpPr>
+        <p:spPr>
+          <a:xfrm>
+            <a:off x="6169902" y="1954739"/>
+            <a:ext cx="4339650" cy="2757165"/>
+          </a:xfrm>
+          <a:prstGeom prst="rect">
+            <a:avLst/>
+          </a:prstGeom>
+          <a:noFill/>
+        </p:spPr>
+        <p:txBody>
+          <a:bodyPr wrap="none" rtlCol="0">
+            <a:spAutoFit/>
+          </a:bodyPr>
+          <a:lstStyle/>
+          <a:p>
+            <a:pPr>
+              <a:lnSpc>
+                <a:spcPct val="125000"/>
+              </a:lnSpc>
+            </a:pPr>
+            <a:r>
+              <a:rPr lang="en-GB" sz="2000" dirty="0">
+                <a:solidFill>
+                  <a:srgbClr val="7FDBCA"/>
+                </a:solidFill>
+                <a:latin typeface="Fira Mono" panose="020B0509050000020004" pitchFamily="49" charset="0"/>
+                <a:ea typeface="Fira Mono" panose="020B0509050000020004" pitchFamily="49" charset="0"/>
+              </a:rPr>
+              <a:t>def</a:t>
+            </a:r>
+            <a:r>
+              <a:rPr lang="en-GB" sz="2000" dirty="0">
+                <a:solidFill>
+                  <a:schemeClr val="bg1"/>
+                </a:solidFill>
+                <a:latin typeface="Fira Mono" panose="020B0509050000020004" pitchFamily="49" charset="0"/>
+                <a:ea typeface="Fira Mono" panose="020B0509050000020004" pitchFamily="49" charset="0"/>
+              </a:rPr>
+              <a:t> </a:t>
+            </a:r>
+            <a:r>
+              <a:rPr lang="en-GB" sz="2000" dirty="0">
+                <a:solidFill>
+                  <a:srgbClr val="82AAFF"/>
+                </a:solidFill>
+                <a:latin typeface="Fira Mono" panose="020B0509050000020004" pitchFamily="49" charset="0"/>
+                <a:ea typeface="Fira Mono" panose="020B0509050000020004" pitchFamily="49" charset="0"/>
+              </a:rPr>
+              <a:t>decorate</a:t>
+            </a:r>
+            <a:r>
+              <a:rPr lang="en-GB" sz="2000" dirty="0">
+                <a:solidFill>
+                  <a:srgbClr val="C792EA"/>
+                </a:solidFill>
+                <a:latin typeface="Fira Mono" panose="020B0509050000020004" pitchFamily="49" charset="0"/>
+                <a:ea typeface="Fira Mono" panose="020B0509050000020004" pitchFamily="49" charset="0"/>
+              </a:rPr>
+              <a:t>(</a:t>
+            </a:r>
+            <a:r>
+              <a:rPr lang="en-GB" sz="2000" dirty="0" err="1">
+                <a:solidFill>
+                  <a:schemeClr val="bg1"/>
+                </a:solidFill>
+                <a:latin typeface="Fira Mono" panose="020B0509050000020004" pitchFamily="49" charset="0"/>
+                <a:ea typeface="Fira Mono" panose="020B0509050000020004" pitchFamily="49" charset="0"/>
+              </a:rPr>
+              <a:t>func</a:t>
+            </a:r>
+            <a:r>
+              <a:rPr lang="en-GB" sz="2000" dirty="0">
+                <a:solidFill>
+                  <a:srgbClr val="C792EA"/>
+                </a:solidFill>
+                <a:latin typeface="Fira Mono" panose="020B0509050000020004" pitchFamily="49" charset="0"/>
+                <a:ea typeface="Fira Mono" panose="020B0509050000020004" pitchFamily="49" charset="0"/>
+              </a:rPr>
+              <a:t>):</a:t>
+            </a:r>
+          </a:p>
+          <a:p>
+            <a:pPr>
+              <a:lnSpc>
+                <a:spcPct val="125000"/>
+              </a:lnSpc>
+            </a:pPr>
+            <a:r>
+              <a:rPr lang="en-GB" sz="2000" dirty="0">
+                <a:solidFill>
+                  <a:schemeClr val="bg1"/>
+                </a:solidFill>
+                <a:latin typeface="Fira Mono" panose="020B0509050000020004" pitchFamily="49" charset="0"/>
+                <a:ea typeface="Fira Mono" panose="020B0509050000020004" pitchFamily="49" charset="0"/>
+              </a:rPr>
+              <a:t>    </a:t>
+            </a:r>
+            <a:r>
+              <a:rPr lang="en-GB" sz="2000" dirty="0">
+                <a:solidFill>
+                  <a:srgbClr val="7FDBCA"/>
+                </a:solidFill>
+                <a:latin typeface="Fira Mono" panose="020B0509050000020004" pitchFamily="49" charset="0"/>
+                <a:ea typeface="Fira Mono" panose="020B0509050000020004" pitchFamily="49" charset="0"/>
+              </a:rPr>
+              <a:t>def</a:t>
+            </a:r>
+            <a:r>
+              <a:rPr lang="en-GB" sz="2000" dirty="0">
+                <a:solidFill>
+                  <a:schemeClr val="bg1"/>
+                </a:solidFill>
+                <a:latin typeface="Fira Mono" panose="020B0509050000020004" pitchFamily="49" charset="0"/>
+                <a:ea typeface="Fira Mono" panose="020B0509050000020004" pitchFamily="49" charset="0"/>
+              </a:rPr>
+              <a:t> </a:t>
+            </a:r>
+            <a:r>
+              <a:rPr lang="en-GB" sz="2000" dirty="0">
+                <a:solidFill>
+                  <a:srgbClr val="82AAFF"/>
+                </a:solidFill>
+                <a:latin typeface="Fira Mono" panose="020B0509050000020004" pitchFamily="49" charset="0"/>
+                <a:ea typeface="Fira Mono" panose="020B0509050000020004" pitchFamily="49" charset="0"/>
+              </a:rPr>
+              <a:t>inner</a:t>
+            </a:r>
+            <a:r>
+              <a:rPr lang="en-GB" sz="2000" dirty="0">
+                <a:solidFill>
+                  <a:srgbClr val="C792EA"/>
+                </a:solidFill>
+                <a:latin typeface="Fira Mono" panose="020B0509050000020004" pitchFamily="49" charset="0"/>
+                <a:ea typeface="Fira Mono" panose="020B0509050000020004" pitchFamily="49" charset="0"/>
+              </a:rPr>
+              <a:t>():</a:t>
+            </a:r>
+          </a:p>
+          <a:p>
+            <a:pPr>
+              <a:lnSpc>
+                <a:spcPct val="125000"/>
+              </a:lnSpc>
+            </a:pPr>
+            <a:r>
+              <a:rPr lang="en-GB" sz="2000" dirty="0">
+                <a:solidFill>
+                  <a:schemeClr val="bg1"/>
+                </a:solidFill>
+                <a:latin typeface="Fira Mono" panose="020B0509050000020004" pitchFamily="49" charset="0"/>
+                <a:ea typeface="Fira Mono" panose="020B0509050000020004" pitchFamily="49" charset="0"/>
+              </a:rPr>
+              <a:t>        </a:t>
+            </a:r>
+            <a:r>
+              <a:rPr lang="en-GB" sz="2000" dirty="0">
+                <a:solidFill>
+                  <a:schemeClr val="bg1">
+                    <a:alpha val="40000"/>
+                  </a:schemeClr>
+                </a:solidFill>
+                <a:latin typeface="Fira Mono" panose="020B0509050000020004" pitchFamily="49" charset="0"/>
+                <a:ea typeface="Fira Mono" panose="020B0509050000020004" pitchFamily="49" charset="0"/>
+              </a:rPr>
+              <a:t>print("decorating")</a:t>
+            </a:r>
+          </a:p>
+          <a:p>
+            <a:pPr>
+              <a:lnSpc>
+                <a:spcPct val="125000"/>
+              </a:lnSpc>
+            </a:pPr>
+            <a:r>
+              <a:rPr lang="en-GB" sz="2000" dirty="0">
+                <a:solidFill>
+                  <a:schemeClr val="bg1">
+                    <a:alpha val="40000"/>
+                  </a:schemeClr>
+                </a:solidFill>
+                <a:latin typeface="Fira Mono" panose="020B0509050000020004" pitchFamily="49" charset="0"/>
+                <a:ea typeface="Fira Mono" panose="020B0509050000020004" pitchFamily="49" charset="0"/>
+              </a:rPr>
+              <a:t>        </a:t>
+            </a:r>
+            <a:r>
+              <a:rPr lang="en-GB" sz="2000" dirty="0" err="1">
+                <a:solidFill>
+                  <a:schemeClr val="bg1">
+                    <a:alpha val="40000"/>
+                  </a:schemeClr>
+                </a:solidFill>
+                <a:latin typeface="Fira Mono" panose="020B0509050000020004" pitchFamily="49" charset="0"/>
+                <a:ea typeface="Fira Mono" panose="020B0509050000020004" pitchFamily="49" charset="0"/>
+              </a:rPr>
+              <a:t>func</a:t>
+            </a:r>
+            <a:r>
+              <a:rPr lang="en-GB" sz="2000" dirty="0">
+                <a:solidFill>
+                  <a:schemeClr val="bg1">
+                    <a:alpha val="40000"/>
+                  </a:schemeClr>
+                </a:solidFill>
+                <a:latin typeface="Fira Mono" panose="020B0509050000020004" pitchFamily="49" charset="0"/>
+                <a:ea typeface="Fira Mono" panose="020B0509050000020004" pitchFamily="49" charset="0"/>
+              </a:rPr>
+              <a:t>()</a:t>
+            </a:r>
+          </a:p>
+          <a:p>
+            <a:pPr>
+              <a:lnSpc>
+                <a:spcPct val="125000"/>
+              </a:lnSpc>
+            </a:pPr>
+            <a:r>
+              <a:rPr lang="en-GB" sz="2000" dirty="0">
+                <a:solidFill>
+                  <a:schemeClr val="bg1">
+                    <a:alpha val="40000"/>
+                  </a:schemeClr>
+                </a:solidFill>
+                <a:latin typeface="Fira Mono" panose="020B0509050000020004" pitchFamily="49" charset="0"/>
+                <a:ea typeface="Fira Mono" panose="020B0509050000020004" pitchFamily="49" charset="0"/>
+              </a:rPr>
+              <a:t>        print("decorated")</a:t>
+            </a:r>
+          </a:p>
+          <a:p>
+            <a:pPr>
+              <a:lnSpc>
+                <a:spcPct val="125000"/>
+              </a:lnSpc>
+            </a:pPr>
+            <a:br>
+              <a:rPr lang="en-GB" sz="2000" dirty="0">
+                <a:solidFill>
+                  <a:schemeClr val="bg1"/>
+                </a:solidFill>
+                <a:latin typeface="Fira Mono" panose="020B0509050000020004" pitchFamily="49" charset="0"/>
+                <a:ea typeface="Fira Mono" panose="020B0509050000020004" pitchFamily="49" charset="0"/>
+              </a:rPr>
+            </a:br>
+            <a:r>
+              <a:rPr lang="en-GB" sz="2000" dirty="0">
+                <a:solidFill>
+                  <a:schemeClr val="bg1"/>
+                </a:solidFill>
+                <a:latin typeface="Fira Mono" panose="020B0509050000020004" pitchFamily="49" charset="0"/>
+                <a:ea typeface="Fira Mono" panose="020B0509050000020004" pitchFamily="49" charset="0"/>
+              </a:rPr>
+              <a:t>    </a:t>
+            </a:r>
+            <a:r>
+              <a:rPr lang="en-GB" sz="2000" dirty="0">
+                <a:solidFill>
+                  <a:srgbClr val="7FDBCA"/>
+                </a:solidFill>
+                <a:latin typeface="Fira Mono" panose="020B0509050000020004" pitchFamily="49" charset="0"/>
+                <a:ea typeface="Fira Mono" panose="020B0509050000020004" pitchFamily="49" charset="0"/>
+              </a:rPr>
+              <a:t>return</a:t>
+            </a:r>
+            <a:r>
+              <a:rPr lang="en-GB" sz="2000" dirty="0">
+                <a:solidFill>
+                  <a:schemeClr val="bg1"/>
+                </a:solidFill>
+                <a:latin typeface="Fira Mono" panose="020B0509050000020004" pitchFamily="49" charset="0"/>
+                <a:ea typeface="Fira Mono" panose="020B0509050000020004" pitchFamily="49" charset="0"/>
+              </a:rPr>
+              <a:t> </a:t>
+            </a:r>
+            <a:r>
+              <a:rPr lang="en-GB" sz="2000" dirty="0">
+                <a:solidFill>
+                  <a:srgbClr val="82AAFF"/>
+                </a:solidFill>
+                <a:latin typeface="Fira Mono" panose="020B0509050000020004" pitchFamily="49" charset="0"/>
+                <a:ea typeface="Fira Mono" panose="020B0509050000020004" pitchFamily="49" charset="0"/>
+              </a:rPr>
+              <a:t>inner</a:t>
+            </a:r>
+          </a:p>
+        </p:txBody>
+      </p:sp>
+      <p:sp>
+        <p:nvSpPr>
+          <p:cNvPr id="4" name="TextBox 3">
+            <a:extLst>
+              <a:ext uri="{FF2B5EF4-FFF2-40B4-BE49-F238E27FC236}">
+                <a16:creationId xmlns:a16="http://schemas.microsoft.com/office/drawing/2014/main" id="{32AC4C13-6C51-82F5-B239-E9A4941327EA}"/>
+              </a:ext>
+            </a:extLst>
+          </p:cNvPr>
+          <p:cNvSpPr txBox="1"/>
+          <p:nvPr/>
+        </p:nvSpPr>
+        <p:spPr>
+          <a:xfrm>
+            <a:off x="1504527" y="1954739"/>
+            <a:ext cx="3724096" cy="1603003"/>
+          </a:xfrm>
+          <a:prstGeom prst="rect">
+            <a:avLst/>
+          </a:prstGeom>
+          <a:noFill/>
+        </p:spPr>
+        <p:txBody>
+          <a:bodyPr wrap="none" rtlCol="0">
+            <a:spAutoFit/>
+          </a:bodyPr>
+          <a:lstStyle/>
+          <a:p>
+            <a:pPr>
+              <a:lnSpc>
+                <a:spcPct val="125000"/>
+              </a:lnSpc>
+            </a:pPr>
+            <a:r>
+              <a:rPr lang="en-GB" sz="2000" dirty="0">
+                <a:solidFill>
+                  <a:srgbClr val="7FDBCA"/>
+                </a:solidFill>
+                <a:latin typeface="Fira Mono" panose="020B0509050000020004" pitchFamily="49" charset="0"/>
+                <a:ea typeface="Fira Mono" panose="020B0509050000020004" pitchFamily="49" charset="0"/>
+              </a:rPr>
+              <a:t>def</a:t>
+            </a:r>
+            <a:r>
+              <a:rPr lang="en-GB" sz="2000" dirty="0">
+                <a:solidFill>
+                  <a:schemeClr val="bg1"/>
+                </a:solidFill>
+                <a:latin typeface="Fira Mono" panose="020B0509050000020004" pitchFamily="49" charset="0"/>
+                <a:ea typeface="Fira Mono" panose="020B0509050000020004" pitchFamily="49" charset="0"/>
+              </a:rPr>
+              <a:t> </a:t>
+            </a:r>
+            <a:r>
+              <a:rPr lang="en-GB" sz="2000" dirty="0">
+                <a:solidFill>
+                  <a:srgbClr val="82AAFF"/>
+                </a:solidFill>
+                <a:latin typeface="Fira Mono" panose="020B0509050000020004" pitchFamily="49" charset="0"/>
+                <a:ea typeface="Fira Mono" panose="020B0509050000020004" pitchFamily="49" charset="0"/>
+              </a:rPr>
+              <a:t>decorate</a:t>
+            </a:r>
+            <a:r>
+              <a:rPr lang="en-GB" sz="2000" dirty="0">
+                <a:solidFill>
+                  <a:srgbClr val="C792EA"/>
+                </a:solidFill>
+                <a:latin typeface="Fira Mono" panose="020B0509050000020004" pitchFamily="49" charset="0"/>
+                <a:ea typeface="Fira Mono" panose="020B0509050000020004" pitchFamily="49" charset="0"/>
+              </a:rPr>
+              <a:t>(</a:t>
+            </a:r>
+            <a:r>
+              <a:rPr lang="en-GB" sz="2000" dirty="0" err="1">
+                <a:solidFill>
+                  <a:schemeClr val="bg1"/>
+                </a:solidFill>
+                <a:latin typeface="Fira Mono" panose="020B0509050000020004" pitchFamily="49" charset="0"/>
+                <a:ea typeface="Fira Mono" panose="020B0509050000020004" pitchFamily="49" charset="0"/>
+              </a:rPr>
+              <a:t>func</a:t>
+            </a:r>
+            <a:r>
+              <a:rPr lang="en-GB" sz="2000" dirty="0">
+                <a:solidFill>
+                  <a:srgbClr val="C792EA"/>
+                </a:solidFill>
+                <a:latin typeface="Fira Mono" panose="020B0509050000020004" pitchFamily="49" charset="0"/>
+                <a:ea typeface="Fira Mono" panose="020B0509050000020004" pitchFamily="49" charset="0"/>
+              </a:rPr>
+              <a:t>):</a:t>
+            </a:r>
+          </a:p>
+          <a:p>
+            <a:pPr>
+              <a:lnSpc>
+                <a:spcPct val="125000"/>
+              </a:lnSpc>
+            </a:pPr>
+            <a:r>
+              <a:rPr lang="en-GB" sz="2000" dirty="0">
+                <a:solidFill>
+                  <a:schemeClr val="bg1"/>
+                </a:solidFill>
+                <a:latin typeface="Fira Mono" panose="020B0509050000020004" pitchFamily="49" charset="0"/>
+                <a:ea typeface="Fira Mono" panose="020B0509050000020004" pitchFamily="49" charset="0"/>
+              </a:rPr>
+              <a:t>    </a:t>
+            </a:r>
+            <a:r>
+              <a:rPr lang="en-GB" sz="2000" dirty="0">
+                <a:solidFill>
+                  <a:schemeClr val="bg1">
+                    <a:alpha val="40000"/>
+                  </a:schemeClr>
+                </a:solidFill>
+                <a:latin typeface="Fira Mono" panose="020B0509050000020004" pitchFamily="49" charset="0"/>
+                <a:ea typeface="Fira Mono" panose="020B0509050000020004" pitchFamily="49" charset="0"/>
+              </a:rPr>
+              <a:t>print("decorating")</a:t>
+            </a:r>
+          </a:p>
+          <a:p>
+            <a:pPr>
+              <a:lnSpc>
+                <a:spcPct val="125000"/>
+              </a:lnSpc>
+            </a:pPr>
+            <a:r>
+              <a:rPr lang="en-GB" sz="2000" dirty="0">
+                <a:solidFill>
+                  <a:schemeClr val="bg1">
+                    <a:alpha val="40000"/>
+                  </a:schemeClr>
+                </a:solidFill>
+                <a:latin typeface="Fira Mono" panose="020B0509050000020004" pitchFamily="49" charset="0"/>
+                <a:ea typeface="Fira Mono" panose="020B0509050000020004" pitchFamily="49" charset="0"/>
+              </a:rPr>
+              <a:t>    </a:t>
+            </a:r>
+            <a:r>
+              <a:rPr lang="en-GB" sz="2000" dirty="0" err="1">
+                <a:solidFill>
+                  <a:schemeClr val="bg1">
+                    <a:alpha val="40000"/>
+                  </a:schemeClr>
+                </a:solidFill>
+                <a:latin typeface="Fira Mono" panose="020B0509050000020004" pitchFamily="49" charset="0"/>
+                <a:ea typeface="Fira Mono" panose="020B0509050000020004" pitchFamily="49" charset="0"/>
+              </a:rPr>
+              <a:t>func</a:t>
+            </a:r>
+            <a:r>
+              <a:rPr lang="en-GB" sz="2000" dirty="0">
+                <a:solidFill>
+                  <a:schemeClr val="bg1">
+                    <a:alpha val="40000"/>
+                  </a:schemeClr>
+                </a:solidFill>
+                <a:latin typeface="Fira Mono" panose="020B0509050000020004" pitchFamily="49" charset="0"/>
+                <a:ea typeface="Fira Mono" panose="020B0509050000020004" pitchFamily="49" charset="0"/>
+              </a:rPr>
+              <a:t>()</a:t>
+            </a:r>
+          </a:p>
+          <a:p>
+            <a:pPr>
+              <a:lnSpc>
+                <a:spcPct val="125000"/>
+              </a:lnSpc>
+            </a:pPr>
+            <a:r>
+              <a:rPr lang="en-GB" sz="2000" dirty="0">
+                <a:solidFill>
+                  <a:schemeClr val="bg1">
+                    <a:alpha val="40000"/>
+                  </a:schemeClr>
+                </a:solidFill>
+                <a:latin typeface="Fira Mono" panose="020B0509050000020004" pitchFamily="49" charset="0"/>
+                <a:ea typeface="Fira Mono" panose="020B0509050000020004" pitchFamily="49" charset="0"/>
+              </a:rPr>
+              <a:t>    print("decorated")</a:t>
+            </a:r>
+          </a:p>
+        </p:txBody>
+      </p:sp>
+      <p:sp>
+        <p:nvSpPr>
+          <p:cNvPr id="5" name="Rectangle 4">
+            <a:extLst>
+              <a:ext uri="{FF2B5EF4-FFF2-40B4-BE49-F238E27FC236}">
+                <a16:creationId xmlns:a16="http://schemas.microsoft.com/office/drawing/2014/main" id="{2AAC7998-DD5A-2985-17C4-F55B39DD2B88}"/>
+              </a:ext>
+            </a:extLst>
+          </p:cNvPr>
+          <p:cNvSpPr/>
+          <p:nvPr/>
+        </p:nvSpPr>
+        <p:spPr>
+          <a:xfrm>
+            <a:off x="6075553" y="4287656"/>
+            <a:ext cx="4611920" cy="406242"/>
+          </a:xfrm>
+          <a:prstGeom prst="rect">
+            <a:avLst/>
+          </a:prstGeom>
+          <a:solidFill>
+            <a:schemeClr val="bg1">
+              <a:alpha val="20000"/>
+            </a:schemeClr>
+          </a:solidFill>
+          <a:ln>
+            <a:noFill/>
+          </a:ln>
+        </p:spPr>
+        <p:style>
+          <a:lnRef idx="2">
+            <a:schemeClr val="accent1">
+              <a:shade val="15000"/>
+            </a:schemeClr>
+          </a:lnRef>
+          <a:fillRef idx="1">
+            <a:schemeClr val="accent1"/>
+          </a:fillRef>
+          <a:effectRef idx="0">
+            <a:schemeClr val="accent1"/>
+          </a:effectRef>
+          <a:fontRef idx="minor">
+            <a:schemeClr val="lt1"/>
+          </a:fontRef>
+        </p:style>
+        <p:txBody>
+          <a:bodyPr rtlCol="0" anchor="ctr"/>
+          <a:lstStyle/>
+          <a:p>
+            <a:pPr algn="ctr"/>
+            <a:endParaRPr lang="en-GB"/>
+          </a:p>
+        </p:txBody>
+      </p:sp>
+      <p:cxnSp>
+        <p:nvCxnSpPr>
+          <p:cNvPr id="7" name="Straight Arrow Connector 6">
+            <a:extLst>
+              <a:ext uri="{FF2B5EF4-FFF2-40B4-BE49-F238E27FC236}">
+                <a16:creationId xmlns:a16="http://schemas.microsoft.com/office/drawing/2014/main" id="{9CBEFACF-9E2C-410A-AA75-74203F626183}"/>
+              </a:ext>
+            </a:extLst>
+          </p:cNvPr>
+          <p:cNvCxnSpPr>
+            <a:cxnSpLocks/>
+          </p:cNvCxnSpPr>
+          <p:nvPr/>
+        </p:nvCxnSpPr>
+        <p:spPr>
+          <a:xfrm>
+            <a:off x="5046256" y="4515360"/>
+            <a:ext cx="786640" cy="0"/>
+          </a:xfrm>
+          <a:prstGeom prst="straightConnector1">
+            <a:avLst/>
+          </a:prstGeom>
+          <a:noFill/>
+          <a:ln w="25400">
+            <a:solidFill>
+              <a:srgbClr val="FFC720"/>
+            </a:solidFill>
+            <a:tailEnd type="arrow"/>
+          </a:ln>
+        </p:spPr>
+        <p:style>
+          <a:lnRef idx="2">
+            <a:schemeClr val="accent1">
+              <a:shade val="15000"/>
+            </a:schemeClr>
+          </a:lnRef>
+          <a:fillRef idx="1">
+            <a:schemeClr val="accent1"/>
+          </a:fillRef>
+          <a:effectRef idx="0">
+            <a:schemeClr val="accent1"/>
+          </a:effectRef>
+          <a:fontRef idx="minor">
+            <a:schemeClr val="lt1"/>
+          </a:fontRef>
+        </p:style>
+      </p:cxnSp>
+      <p:sp>
+        <p:nvSpPr>
+          <p:cNvPr id="8" name="Rectangle 7">
+            <a:extLst>
+              <a:ext uri="{FF2B5EF4-FFF2-40B4-BE49-F238E27FC236}">
+                <a16:creationId xmlns:a16="http://schemas.microsoft.com/office/drawing/2014/main" id="{EEB5FBF9-CFCC-7B37-8B73-E71505FC0A11}"/>
+              </a:ext>
+            </a:extLst>
+          </p:cNvPr>
+          <p:cNvSpPr>
+            <a:spLocks noChangeArrowheads="1"/>
+          </p:cNvSpPr>
+          <p:nvPr/>
+        </p:nvSpPr>
+        <p:spPr bwMode="auto">
+          <a:xfrm>
+            <a:off x="2495026" y="4127459"/>
+            <a:ext cx="2362826" cy="775803"/>
+          </a:xfrm>
+          <a:prstGeom prst="rect">
+            <a:avLst/>
+          </a:prstGeom>
+          <a:noFill/>
+          <a:ln>
+            <a:noFill/>
+          </a:ln>
+          <a:effectLst/>
+        </p:spPr>
+        <p:txBody>
+          <a:bodyPr vert="horz" wrap="none" lIns="0" tIns="79350" rIns="0" bIns="79350" numCol="1" anchor="ctr" anchorCtr="0" compatLnSpc="1">
+            <a:prstTxWarp prst="textNoShape">
+              <a:avLst/>
+            </a:prstTxWarp>
+            <a:spAutoFit/>
+          </a:bodyPr>
+          <a:lstStyle/>
+          <a:p>
+            <a:pPr marL="0" marR="0" lvl="0" indent="0" defTabSz="914400" rtl="0" eaLnBrk="0" fontAlgn="base" latinLnBrk="0" hangingPunct="0">
+              <a:lnSpc>
+                <a:spcPct val="100000"/>
+              </a:lnSpc>
+              <a:spcBef>
+                <a:spcPct val="0"/>
+              </a:spcBef>
+              <a:spcAft>
+                <a:spcPct val="0"/>
+              </a:spcAft>
+              <a:buClrTx/>
+              <a:buSzTx/>
+              <a:buFontTx/>
+              <a:buNone/>
+              <a:tabLst/>
+            </a:pPr>
+            <a:r>
+              <a:rPr lang="en-US" altLang="en-US" sz="2000" dirty="0">
+                <a:solidFill>
+                  <a:srgbClr val="D6DEEB"/>
+                </a:solidFill>
+                <a:latin typeface="Fira Sans" panose="020B0503050000020004" pitchFamily="34" charset="0"/>
+                <a:ea typeface="Fira Mono" panose="020B0509050000020004" pitchFamily="49" charset="0"/>
+              </a:rPr>
+              <a:t>returning a function</a:t>
+            </a:r>
+          </a:p>
+          <a:p>
+            <a:pPr marL="0" marR="0" lvl="0" indent="0" defTabSz="914400" rtl="0" eaLnBrk="0" fontAlgn="base" latinLnBrk="0" hangingPunct="0">
+              <a:lnSpc>
+                <a:spcPct val="100000"/>
+              </a:lnSpc>
+              <a:spcBef>
+                <a:spcPct val="0"/>
+              </a:spcBef>
+              <a:spcAft>
+                <a:spcPct val="0"/>
+              </a:spcAft>
+              <a:buClrTx/>
+              <a:buSzTx/>
+              <a:buFontTx/>
+              <a:buNone/>
+              <a:tabLst/>
+            </a:pPr>
+            <a:r>
+              <a:rPr lang="en-US" altLang="en-US" sz="2000" dirty="0">
+                <a:solidFill>
+                  <a:srgbClr val="D6DEEB"/>
+                </a:solidFill>
+                <a:latin typeface="Fira Sans" panose="020B0503050000020004" pitchFamily="34" charset="0"/>
+                <a:ea typeface="Fira Mono" panose="020B0509050000020004" pitchFamily="49" charset="0"/>
+              </a:rPr>
+              <a:t>instead of executing</a:t>
+            </a:r>
+            <a:endParaRPr kumimoji="0" lang="en-US" altLang="en-US" sz="2000" b="0" i="0" u="none" strike="noStrike" cap="none" normalizeH="0" baseline="0" dirty="0">
+              <a:ln>
+                <a:noFill/>
+              </a:ln>
+              <a:solidFill>
+                <a:srgbClr val="D6DEEB"/>
+              </a:solidFill>
+              <a:effectLst/>
+              <a:latin typeface="Fira Sans" panose="020B0503050000020004" pitchFamily="34" charset="0"/>
+              <a:ea typeface="Fira Mono" panose="020B0509050000020004" pitchFamily="49" charset="0"/>
+            </a:endParaRPr>
+          </a:p>
+        </p:txBody>
+      </p:sp>
+    </p:spTree>
+    <p:extLst>
+      <p:ext uri="{BB962C8B-B14F-4D97-AF65-F5344CB8AC3E}">
+        <p14:creationId xmlns:p14="http://schemas.microsoft.com/office/powerpoint/2010/main" val="3476947188"/>
+      </p:ext>
+    </p:extLst>
+  </p:cSld>
+  <p:clrMapOvr>
+    <a:masterClrMapping/>
+  </p:clrMapOvr>
+</p:sld>
+</file>
+
 <file path=ppt/slides/slide3.xml><?xml version="1.0" encoding="utf-8"?>
 <p:sld xmlns:a="http://schemas.openxmlformats.org/drawingml/2006/main" xmlns:r="http://schemas.openxmlformats.org/officeDocument/2006/relationships" xmlns:p="http://schemas.openxmlformats.org/presentationml/2006/main">
   <p:cSld>
